--- a/templates/decks/en/nl-job-market-2026/template.pptx
+++ b/templates/decks/en/nl-job-market-2026/template.pptx
@@ -4070,7 +4070,7 @@
             <a:avLst/>
           </a:prstGeom>
           <a:solidFill>
-            <a:srgbClr val="16223A"/>
+            <a:srgbClr val="F4EFE6"/>
           </a:solidFill>
           <a:ln>
             <a:noFill/>
@@ -4114,7 +4114,7 @@
             <a:avLst/>
           </a:prstGeom>
           <a:solidFill>
-            <a:srgbClr val="0F1A2E"/>
+            <a:srgbClr val="EAE1D2"/>
           </a:solidFill>
           <a:ln>
             <a:noFill/>
@@ -4224,7 +4224,7 @@
             <a:r>
               <a:rPr sz="1100" b="1" i="0" spc="150">
                 <a:solidFill>
-                  <a:srgbClr val="2E8A8C"/>
+                  <a:srgbClr val="0E5C63"/>
                 </a:solidFill>
                 <a:latin typeface="Courier New"/>
               </a:rPr>
@@ -4270,7 +4270,7 @@
             <a:r>
               <a:rPr sz="5200" b="1" i="0">
                 <a:solidFill>
-                  <a:srgbClr val="F1EBDD"/>
+                  <a:srgbClr val="20242A"/>
                 </a:solidFill>
                 <a:latin typeface="Georgia"/>
               </a:rPr>
@@ -4292,7 +4292,7 @@
             <a:r>
               <a:rPr sz="5200" b="1" i="0">
                 <a:solidFill>
-                  <a:srgbClr val="F1EBDD"/>
+                  <a:srgbClr val="20242A"/>
                 </a:solidFill>
                 <a:latin typeface="Georgia"/>
               </a:rPr>
@@ -4391,7 +4391,7 @@
             <a:r>
               <a:rPr sz="1650" b="0" i="0">
                 <a:solidFill>
-                  <a:srgbClr val="C9D2DE"/>
+                  <a:srgbClr val="4A4E56"/>
                 </a:solidFill>
                 <a:latin typeface="Helvetica Neue"/>
               </a:rPr>
@@ -4437,7 +4437,7 @@
             <a:r>
               <a:rPr sz="950" b="1" i="0" spc="150">
                 <a:solidFill>
-                  <a:srgbClr val="9BA6B4"/>
+                  <a:srgbClr val="8A8478"/>
                 </a:solidFill>
                 <a:latin typeface="Courier New"/>
               </a:rPr>
@@ -6475,10 +6475,12 @@
             </a:avLst>
           </a:prstGeom>
           <a:solidFill>
-            <a:srgbClr val="16223A"/>
+            <a:srgbClr val="ECE4D6"/>
           </a:solidFill>
-          <a:ln>
-            <a:noFill/>
+          <a:ln w="12700">
+            <a:solidFill>
+              <a:srgbClr val="DED7C8"/>
+            </a:solidFill>
           </a:ln>
           <a:effectLst/>
         </p:spPr>
@@ -6550,7 +6552,7 @@
             <a:r>
               <a:rPr sz="1300" b="0" i="0">
                 <a:solidFill>
-                  <a:srgbClr val="C9D2DE"/>
+                  <a:srgbClr val="4A4E56"/>
                 </a:solidFill>
                 <a:latin typeface="Helvetica Neue"/>
               </a:rPr>
@@ -6596,7 +6598,7 @@
             <a:r>
               <a:rPr sz="1050" b="0" i="0">
                 <a:solidFill>
-                  <a:srgbClr val="9BA6B4"/>
+                  <a:srgbClr val="8A8478"/>
                 </a:solidFill>
                 <a:latin typeface="Helvetica Neue"/>
               </a:rPr>
@@ -7057,7 +7059,7 @@
             <a:avLst/>
           </a:prstGeom>
           <a:solidFill>
-            <a:srgbClr val="16223A"/>
+            <a:srgbClr val="F4EFE6"/>
           </a:solidFill>
           <a:ln>
             <a:noFill/>
@@ -7123,7 +7125,7 @@
             <a:r>
               <a:rPr sz="1100" b="1" i="0" spc="150">
                 <a:solidFill>
-                  <a:srgbClr val="2E8A8C"/>
+                  <a:srgbClr val="0E5C63"/>
                 </a:solidFill>
                 <a:latin typeface="Courier New"/>
               </a:rPr>
@@ -7213,7 +7215,7 @@
             <a:r>
               <a:rPr sz="3000" b="1" i="0">
                 <a:solidFill>
-                  <a:srgbClr val="F1EBDD"/>
+                  <a:srgbClr val="20242A"/>
                 </a:solidFill>
                 <a:latin typeface="Georgia"/>
               </a:rPr>
@@ -7239,10 +7241,12 @@
             </a:avLst>
           </a:prstGeom>
           <a:solidFill>
-            <a:srgbClr val="0F1A2E"/>
+            <a:srgbClr val="ECE4D6"/>
           </a:solidFill>
-          <a:ln>
-            <a:noFill/>
+          <a:ln w="12700">
+            <a:solidFill>
+              <a:srgbClr val="DED7C8"/>
+            </a:solidFill>
           </a:ln>
           <a:effectLst/>
         </p:spPr>
@@ -7285,7 +7289,7 @@
             </a:avLst>
           </a:prstGeom>
           <a:solidFill>
-            <a:srgbClr val="24314C"/>
+            <a:srgbClr val="DDE8E9"/>
           </a:solidFill>
           <a:ln>
             <a:noFill/>
@@ -7421,7 +7425,7 @@
             <a:r>
               <a:rPr sz="1150" b="0" i="0">
                 <a:solidFill>
-                  <a:srgbClr val="C9D2DE"/>
+                  <a:srgbClr val="4A4E56"/>
                 </a:solidFill>
                 <a:latin typeface="Helvetica Neue"/>
               </a:rPr>
@@ -7447,10 +7451,12 @@
             </a:avLst>
           </a:prstGeom>
           <a:solidFill>
-            <a:srgbClr val="0F1A2E"/>
+            <a:srgbClr val="ECE4D6"/>
           </a:solidFill>
-          <a:ln>
-            <a:noFill/>
+          <a:ln w="12700">
+            <a:solidFill>
+              <a:srgbClr val="DED7C8"/>
+            </a:solidFill>
           </a:ln>
           <a:effectLst/>
         </p:spPr>
@@ -7493,7 +7499,7 @@
             </a:avLst>
           </a:prstGeom>
           <a:solidFill>
-            <a:srgbClr val="24314C"/>
+            <a:srgbClr val="E1EEEE"/>
           </a:solidFill>
           <a:ln>
             <a:noFill/>
@@ -7629,7 +7635,7 @@
             <a:r>
               <a:rPr sz="1150" b="0" i="0">
                 <a:solidFill>
-                  <a:srgbClr val="C9D2DE"/>
+                  <a:srgbClr val="4A4E56"/>
                 </a:solidFill>
                 <a:latin typeface="Helvetica Neue"/>
               </a:rPr>
@@ -7655,10 +7661,12 @@
             </a:avLst>
           </a:prstGeom>
           <a:solidFill>
-            <a:srgbClr val="0F1A2E"/>
+            <a:srgbClr val="ECE4D6"/>
           </a:solidFill>
-          <a:ln>
-            <a:noFill/>
+          <a:ln w="12700">
+            <a:solidFill>
+              <a:srgbClr val="DED7C8"/>
+            </a:solidFill>
           </a:ln>
           <a:effectLst/>
         </p:spPr>
@@ -7701,7 +7709,7 @@
             </a:avLst>
           </a:prstGeom>
           <a:solidFill>
-            <a:srgbClr val="24314C"/>
+            <a:srgbClr val="F9E7E1"/>
           </a:solidFill>
           <a:ln>
             <a:noFill/>
@@ -7837,7 +7845,7 @@
             <a:r>
               <a:rPr sz="1150" b="0" i="0">
                 <a:solidFill>
-                  <a:srgbClr val="C9D2DE"/>
+                  <a:srgbClr val="4A4E56"/>
                 </a:solidFill>
                 <a:latin typeface="Helvetica Neue"/>
               </a:rPr>
@@ -7883,7 +7891,7 @@
             <a:r>
               <a:rPr sz="800" b="1" i="0">
                 <a:solidFill>
-                  <a:srgbClr val="2E8A8C"/>
+                  <a:srgbClr val="D8542A"/>
                 </a:solidFill>
                 <a:latin typeface="Courier New"/>
               </a:rPr>
@@ -7892,7 +7900,7 @@
             <a:r>
               <a:rPr sz="850" b="0" i="0">
                 <a:solidFill>
-                  <a:srgbClr val="9BA6B4"/>
+                  <a:srgbClr val="8A8478"/>
                 </a:solidFill>
                 <a:latin typeface="Courier New"/>
               </a:rPr>
@@ -7938,7 +7946,7 @@
             <a:r>
               <a:rPr sz="800" b="0" i="0">
                 <a:solidFill>
-                  <a:srgbClr val="9BA6B4"/>
+                  <a:srgbClr val="8A8478"/>
                 </a:solidFill>
                 <a:latin typeface="Courier New"/>
               </a:rPr>
@@ -7984,7 +7992,7 @@
             <a:r>
               <a:rPr sz="900" b="1" i="0">
                 <a:solidFill>
-                  <a:srgbClr val="9BA6B4"/>
+                  <a:srgbClr val="8A8478"/>
                 </a:solidFill>
                 <a:latin typeface="Courier New"/>
               </a:rPr>
@@ -8026,7 +8034,7 @@
             <a:avLst/>
           </a:prstGeom>
           <a:solidFill>
-            <a:srgbClr val="16223A"/>
+            <a:srgbClr val="F4EFE6"/>
           </a:solidFill>
           <a:ln>
             <a:noFill/>
@@ -8092,7 +8100,7 @@
             <a:r>
               <a:rPr sz="1100" b="1" i="0" spc="150">
                 <a:solidFill>
-                  <a:srgbClr val="2E8A8C"/>
+                  <a:srgbClr val="0E5C63"/>
                 </a:solidFill>
                 <a:latin typeface="Courier New"/>
               </a:rPr>
@@ -8182,7 +8190,7 @@
             <a:r>
               <a:rPr sz="2900" b="1" i="0">
                 <a:solidFill>
-                  <a:srgbClr val="F1EBDD"/>
+                  <a:srgbClr val="20242A"/>
                 </a:solidFill>
                 <a:latin typeface="Georgia"/>
               </a:rPr>
@@ -8274,7 +8282,7 @@
             <a:r>
               <a:rPr sz="1400" b="1" i="0">
                 <a:solidFill>
-                  <a:srgbClr val="F1EBDD"/>
+                  <a:srgbClr val="20242A"/>
                 </a:solidFill>
                 <a:latin typeface="Georgia"/>
               </a:rPr>
@@ -8320,7 +8328,7 @@
             <a:r>
               <a:rPr sz="1150" b="0" i="0">
                 <a:solidFill>
-                  <a:srgbClr val="C9D2DE"/>
+                  <a:srgbClr val="4A4E56"/>
                 </a:solidFill>
                 <a:latin typeface="Helvetica Neue"/>
               </a:rPr>
@@ -8344,7 +8352,7 @@
             <a:avLst/>
           </a:prstGeom>
           <a:solidFill>
-            <a:srgbClr val="2A3852"/>
+            <a:srgbClr val="DED7C8"/>
           </a:solidFill>
           <a:ln>
             <a:noFill/>
@@ -8456,7 +8464,7 @@
             <a:r>
               <a:rPr sz="1400" b="1" i="0">
                 <a:solidFill>
-                  <a:srgbClr val="F1EBDD"/>
+                  <a:srgbClr val="20242A"/>
                 </a:solidFill>
                 <a:latin typeface="Georgia"/>
               </a:rPr>
@@ -8502,7 +8510,7 @@
             <a:r>
               <a:rPr sz="1150" b="0" i="0">
                 <a:solidFill>
-                  <a:srgbClr val="C9D2DE"/>
+                  <a:srgbClr val="4A4E56"/>
                 </a:solidFill>
                 <a:latin typeface="Helvetica Neue"/>
               </a:rPr>
@@ -8526,7 +8534,7 @@
             <a:avLst/>
           </a:prstGeom>
           <a:solidFill>
-            <a:srgbClr val="2A3852"/>
+            <a:srgbClr val="DED7C8"/>
           </a:solidFill>
           <a:ln>
             <a:noFill/>
@@ -8638,7 +8646,7 @@
             <a:r>
               <a:rPr sz="1400" b="1" i="0">
                 <a:solidFill>
-                  <a:srgbClr val="F1EBDD"/>
+                  <a:srgbClr val="20242A"/>
                 </a:solidFill>
                 <a:latin typeface="Georgia"/>
               </a:rPr>
@@ -8684,7 +8692,7 @@
             <a:r>
               <a:rPr sz="1150" b="0" i="0">
                 <a:solidFill>
-                  <a:srgbClr val="C9D2DE"/>
+                  <a:srgbClr val="4A4E56"/>
                 </a:solidFill>
                 <a:latin typeface="Helvetica Neue"/>
               </a:rPr>
@@ -8708,7 +8716,7 @@
             <a:avLst/>
           </a:prstGeom>
           <a:solidFill>
-            <a:srgbClr val="2A3852"/>
+            <a:srgbClr val="DED7C8"/>
           </a:solidFill>
           <a:ln>
             <a:noFill/>
@@ -8820,7 +8828,7 @@
             <a:r>
               <a:rPr sz="1400" b="1" i="0">
                 <a:solidFill>
-                  <a:srgbClr val="F1EBDD"/>
+                  <a:srgbClr val="20242A"/>
                 </a:solidFill>
                 <a:latin typeface="Georgia"/>
               </a:rPr>
@@ -8866,7 +8874,7 @@
             <a:r>
               <a:rPr sz="1150" b="0" i="0">
                 <a:solidFill>
-                  <a:srgbClr val="C9D2DE"/>
+                  <a:srgbClr val="4A4E56"/>
                 </a:solidFill>
                 <a:latin typeface="Helvetica Neue"/>
               </a:rPr>
@@ -8890,7 +8898,7 @@
             <a:avLst/>
           </a:prstGeom>
           <a:solidFill>
-            <a:srgbClr val="2A3852"/>
+            <a:srgbClr val="DED7C8"/>
           </a:solidFill>
           <a:ln>
             <a:noFill/>
@@ -9002,7 +9010,7 @@
             <a:r>
               <a:rPr sz="1400" b="1" i="0">
                 <a:solidFill>
-                  <a:srgbClr val="F1EBDD"/>
+                  <a:srgbClr val="20242A"/>
                 </a:solidFill>
                 <a:latin typeface="Georgia"/>
               </a:rPr>
@@ -9048,7 +9056,7 @@
             <a:r>
               <a:rPr sz="1150" b="0" i="0">
                 <a:solidFill>
-                  <a:srgbClr val="C9D2DE"/>
+                  <a:srgbClr val="4A4E56"/>
                 </a:solidFill>
                 <a:latin typeface="Helvetica Neue"/>
               </a:rPr>
@@ -9094,7 +9102,7 @@
             <a:r>
               <a:rPr sz="800" b="0" i="0">
                 <a:solidFill>
-                  <a:srgbClr val="9BA6B4"/>
+                  <a:srgbClr val="8A8478"/>
                 </a:solidFill>
                 <a:latin typeface="Courier New"/>
               </a:rPr>
@@ -9140,7 +9148,7 @@
             <a:r>
               <a:rPr sz="900" b="1" i="0">
                 <a:solidFill>
-                  <a:srgbClr val="9BA6B4"/>
+                  <a:srgbClr val="8A8478"/>
                 </a:solidFill>
                 <a:latin typeface="Courier New"/>
               </a:rPr>
@@ -12436,7 +12444,7 @@
             </a:avLst>
           </a:prstGeom>
           <a:solidFill>
-            <a:srgbClr val="16223A"/>
+            <a:srgbClr val="FAEAE5"/>
           </a:solidFill>
           <a:ln>
             <a:noFill/>
@@ -12555,7 +12563,7 @@
             <a:r>
               <a:rPr sz="1350" b="0" i="0">
                 <a:solidFill>
-                  <a:srgbClr val="FFFFFF"/>
+                  <a:srgbClr val="20242A"/>
                 </a:solidFill>
                 <a:latin typeface="Helvetica Neue"/>
               </a:rPr>
@@ -13327,10 +13335,12 @@
             </a:avLst>
           </a:prstGeom>
           <a:solidFill>
-            <a:srgbClr val="16223A"/>
+            <a:srgbClr val="ECE4D6"/>
           </a:solidFill>
-          <a:ln>
-            <a:noFill/>
+          <a:ln w="12700">
+            <a:solidFill>
+              <a:srgbClr val="DED7C8"/>
+            </a:solidFill>
           </a:ln>
           <a:effectLst/>
         </p:spPr>
@@ -13393,7 +13403,7 @@
             <a:r>
               <a:rPr sz="1050" b="1" i="0">
                 <a:solidFill>
-                  <a:srgbClr val="2E8A8C"/>
+                  <a:srgbClr val="0E5C63"/>
                 </a:solidFill>
                 <a:latin typeface="Courier New"/>
               </a:rPr>
@@ -13439,7 +13449,7 @@
             <a:r>
               <a:rPr sz="2000" b="1" i="0">
                 <a:solidFill>
-                  <a:srgbClr val="F1EBDD"/>
+                  <a:srgbClr val="20242A"/>
                 </a:solidFill>
                 <a:latin typeface="Georgia"/>
               </a:rPr>
@@ -13531,7 +13541,7 @@
             <a:r>
               <a:rPr sz="1100" b="0" i="0">
                 <a:solidFill>
-                  <a:srgbClr val="C9D2DE"/>
+                  <a:srgbClr val="4A4E56"/>
                 </a:solidFill>
                 <a:latin typeface="Helvetica Neue"/>
               </a:rPr>

--- a/templates/decks/en/nl-job-market-2026/template.pptx
+++ b/templates/decks/en/nl-job-market-2026/template.pptx
@@ -4602,17 +4602,256 @@
       </p:sp>
       <p:sp>
         <p:nvSpPr>
-          <p:cNvPr id="5" name="Rectangle 4"/>
+          <p:cNvPr id="5" name="TextBox 4"/>
+          <p:cNvSpPr txBox="1"/>
+          <p:nvPr/>
+        </p:nvSpPr>
+        <p:spPr>
+          <a:xfrm>
+            <a:off x="365760" y="1508760"/>
+            <a:ext cx="4548146" cy="274320"/>
+          </a:xfrm>
+          <a:prstGeom prst="rect">
+            <a:avLst/>
+          </a:prstGeom>
+          <a:noFill/>
+          <a:ln/>
+        </p:spPr>
+        <p:txBody>
+          <a:bodyPr wrap="square" anchor="t" lIns="25400" rIns="25400" tIns="25400" bIns="25400">
+            <a:spAutoFit/>
+          </a:bodyPr>
+          <a:lstStyle/>
+          <a:p>
+            <a:pPr algn="l">
+              <a:lnSpc>
+                <a:spcPct val="100000"/>
+              </a:lnSpc>
+              <a:spcBef>
+                <a:spcPts val="0"/>
+              </a:spcBef>
+              <a:spcAft>
+                <a:spcPts val="0"/>
+              </a:spcAft>
+            </a:pPr>
+            <a:r>
+              <a:rPr sz="950" b="1" i="0">
+                <a:solidFill>
+                  <a:srgbClr val="8A8478"/>
+                </a:solidFill>
+                <a:latin typeface="Courier New"/>
+              </a:rPr>
+              <a:t>THE 30% EXPAT RULING, PHASED DOWN</a:t>
+            </a:r>
+          </a:p>
+        </p:txBody>
+      </p:sp>
+      <p:sp>
+        <p:nvSpPr>
+          <p:cNvPr id="6" name="Rectangle 5"/>
           <p:cNvSpPr/>
           <p:nvPr/>
         </p:nvSpPr>
         <p:spPr>
           <a:xfrm>
-            <a:off x="566928" y="1191006"/>
-            <a:ext cx="1097280" cy="45720"/>
-          </a:xfrm>
-          <a:prstGeom prst="rect">
-            <a:avLst/>
+            <a:off x="464515" y="2011680"/>
+            <a:ext cx="21945" cy="1280160"/>
+          </a:xfrm>
+          <a:prstGeom prst="rect">
+            <a:avLst/>
+          </a:prstGeom>
+          <a:solidFill>
+            <a:srgbClr val="9AA0AE"/>
+          </a:solidFill>
+          <a:ln>
+            <a:noFill/>
+          </a:ln>
+          <a:effectLst/>
+        </p:spPr>
+        <p:style>
+          <a:lnRef idx="1">
+            <a:schemeClr val="accent1"/>
+          </a:lnRef>
+          <a:fillRef idx="3">
+            <a:schemeClr val="accent1"/>
+          </a:fillRef>
+          <a:effectRef idx="2">
+            <a:schemeClr val="accent1"/>
+          </a:effectRef>
+          <a:fontRef idx="minor">
+            <a:schemeClr val="lt1"/>
+          </a:fontRef>
+        </p:style>
+        <p:txBody>
+          <a:bodyPr rtlCol="0" anchor="ctr"/>
+          <a:lstStyle/>
+          <a:p>
+            <a:pPr algn="ctr"/>
+          </a:p>
+        </p:txBody>
+      </p:sp>
+      <p:sp>
+        <p:nvSpPr>
+          <p:cNvPr id="7" name="Rounded Rectangle 6"/>
+          <p:cNvSpPr/>
+          <p:nvPr/>
+        </p:nvSpPr>
+        <p:spPr>
+          <a:xfrm>
+            <a:off x="393192" y="2020824"/>
+            <a:ext cx="164592" cy="164592"/>
+          </a:xfrm>
+          <a:prstGeom prst="roundRect">
+            <a:avLst>
+              <a:gd name="adj" fmla="val 50000"/>
+            </a:avLst>
+          </a:prstGeom>
+          <a:solidFill>
+            <a:srgbClr val="9AA0AE"/>
+          </a:solidFill>
+          <a:ln>
+            <a:noFill/>
+          </a:ln>
+          <a:effectLst/>
+        </p:spPr>
+        <p:style>
+          <a:lnRef idx="1">
+            <a:schemeClr val="accent1"/>
+          </a:lnRef>
+          <a:fillRef idx="3">
+            <a:schemeClr val="accent1"/>
+          </a:fillRef>
+          <a:effectRef idx="2">
+            <a:schemeClr val="accent1"/>
+          </a:effectRef>
+          <a:fontRef idx="minor">
+            <a:schemeClr val="lt1"/>
+          </a:fontRef>
+        </p:style>
+        <p:txBody>
+          <a:bodyPr rtlCol="0" anchor="ctr"/>
+          <a:lstStyle/>
+          <a:p>
+            <a:pPr algn="ctr"/>
+          </a:p>
+        </p:txBody>
+      </p:sp>
+      <p:sp>
+        <p:nvSpPr>
+          <p:cNvPr id="8" name="TextBox 7"/>
+          <p:cNvSpPr txBox="1"/>
+          <p:nvPr/>
+        </p:nvSpPr>
+        <p:spPr>
+          <a:xfrm>
+            <a:off x="795528" y="1956816"/>
+            <a:ext cx="4090946" cy="274320"/>
+          </a:xfrm>
+          <a:prstGeom prst="rect">
+            <a:avLst/>
+          </a:prstGeom>
+          <a:noFill/>
+          <a:ln/>
+        </p:spPr>
+        <p:txBody>
+          <a:bodyPr wrap="square" anchor="t" lIns="25400" rIns="25400" tIns="25400" bIns="25400">
+            <a:spAutoFit/>
+          </a:bodyPr>
+          <a:lstStyle/>
+          <a:p>
+            <a:pPr algn="l">
+              <a:lnSpc>
+                <a:spcPct val="100000"/>
+              </a:lnSpc>
+              <a:spcBef>
+                <a:spcPts val="0"/>
+              </a:spcBef>
+              <a:spcAft>
+                <a:spcPts val="0"/>
+              </a:spcAft>
+            </a:pPr>
+            <a:r>
+              <a:rPr sz="1300" b="1" i="0">
+                <a:solidFill>
+                  <a:srgbClr val="8A8478"/>
+                </a:solidFill>
+                <a:latin typeface="Helvetica Neue"/>
+              </a:rPr>
+              <a:t>2024–26  </a:t>
+            </a:r>
+            <a:r>
+              <a:rPr sz="1300" b="1" i="0">
+                <a:solidFill>
+                  <a:srgbClr val="20242A"/>
+                </a:solidFill>
+                <a:latin typeface="Helvetica Neue"/>
+              </a:rPr>
+              <a:t>30% tax-free</a:t>
+            </a:r>
+          </a:p>
+        </p:txBody>
+      </p:sp>
+      <p:sp>
+        <p:nvSpPr>
+          <p:cNvPr id="9" name="TextBox 8"/>
+          <p:cNvSpPr txBox="1"/>
+          <p:nvPr/>
+        </p:nvSpPr>
+        <p:spPr>
+          <a:xfrm>
+            <a:off x="795528" y="2249424"/>
+            <a:ext cx="4090946" cy="365760"/>
+          </a:xfrm>
+          <a:prstGeom prst="rect">
+            <a:avLst/>
+          </a:prstGeom>
+          <a:noFill/>
+          <a:ln/>
+        </p:spPr>
+        <p:txBody>
+          <a:bodyPr wrap="square" anchor="t" lIns="25400" rIns="25400" tIns="25400" bIns="25400">
+            <a:spAutoFit/>
+          </a:bodyPr>
+          <a:lstStyle/>
+          <a:p>
+            <a:pPr algn="l">
+              <a:lnSpc>
+                <a:spcPct val="100000"/>
+              </a:lnSpc>
+              <a:spcBef>
+                <a:spcPts val="0"/>
+              </a:spcBef>
+              <a:spcAft>
+                <a:spcPts val="0"/>
+              </a:spcAft>
+            </a:pPr>
+            <a:r>
+              <a:rPr sz="1050" b="0" i="0">
+                <a:solidFill>
+                  <a:srgbClr val="8A8478"/>
+                </a:solidFill>
+                <a:latin typeface="Helvetica Neue"/>
+              </a:rPr>
+              <a:t>income norm €46,107</a:t>
+            </a:r>
+          </a:p>
+        </p:txBody>
+      </p:sp>
+      <p:sp>
+        <p:nvSpPr>
+          <p:cNvPr id="10" name="Rounded Rectangle 9"/>
+          <p:cNvSpPr/>
+          <p:nvPr/>
+        </p:nvSpPr>
+        <p:spPr>
+          <a:xfrm>
+            <a:off x="393192" y="2447544"/>
+            <a:ext cx="164592" cy="164592"/>
+          </a:xfrm>
+          <a:prstGeom prst="roundRect">
+            <a:avLst>
+              <a:gd name="adj" fmla="val 50000"/>
+            </a:avLst>
           </a:prstGeom>
           <a:solidFill>
             <a:srgbClr val="D8542A"/>
@@ -4646,14 +4885,14 @@
       </p:sp>
       <p:sp>
         <p:nvSpPr>
-          <p:cNvPr id="6" name="TextBox 5"/>
-          <p:cNvSpPr txBox="1"/>
-          <p:nvPr/>
-        </p:nvSpPr>
-        <p:spPr>
-          <a:xfrm>
-            <a:off x="365760" y="1508760"/>
-            <a:ext cx="4548146" cy="274320"/>
+          <p:cNvPr id="11" name="TextBox 10"/>
+          <p:cNvSpPr txBox="1"/>
+          <p:nvPr/>
+        </p:nvSpPr>
+        <p:spPr>
+          <a:xfrm>
+            <a:off x="795528" y="2383536"/>
+            <a:ext cx="4090946" cy="274320"/>
           </a:xfrm>
           <a:prstGeom prst="rect">
             <a:avLst/>
@@ -4679,30 +4918,87 @@
               </a:spcAft>
             </a:pPr>
             <a:r>
-              <a:rPr sz="950" b="1" i="0">
+              <a:rPr sz="1300" b="1" i="0">
+                <a:solidFill>
+                  <a:srgbClr val="D8542A"/>
+                </a:solidFill>
+                <a:latin typeface="Helvetica Neue"/>
+              </a:rPr>
+              <a:t>1 Jan 2027  </a:t>
+            </a:r>
+            <a:r>
+              <a:rPr sz="1300" b="1" i="0">
+                <a:solidFill>
+                  <a:srgbClr val="20242A"/>
+                </a:solidFill>
+                <a:latin typeface="Helvetica Neue"/>
+              </a:rPr>
+              <a:t>→ 27% tax-free</a:t>
+            </a:r>
+          </a:p>
+        </p:txBody>
+      </p:sp>
+      <p:sp>
+        <p:nvSpPr>
+          <p:cNvPr id="12" name="TextBox 11"/>
+          <p:cNvSpPr txBox="1"/>
+          <p:nvPr/>
+        </p:nvSpPr>
+        <p:spPr>
+          <a:xfrm>
+            <a:off x="795528" y="2676144"/>
+            <a:ext cx="4090946" cy="365760"/>
+          </a:xfrm>
+          <a:prstGeom prst="rect">
+            <a:avLst/>
+          </a:prstGeom>
+          <a:noFill/>
+          <a:ln/>
+        </p:spPr>
+        <p:txBody>
+          <a:bodyPr wrap="square" anchor="t" lIns="25400" rIns="25400" tIns="25400" bIns="25400">
+            <a:spAutoFit/>
+          </a:bodyPr>
+          <a:lstStyle/>
+          <a:p>
+            <a:pPr algn="l">
+              <a:lnSpc>
+                <a:spcPct val="100000"/>
+              </a:lnSpc>
+              <a:spcBef>
+                <a:spcPts val="0"/>
+              </a:spcBef>
+              <a:spcAft>
+                <a:spcPts val="0"/>
+              </a:spcAft>
+            </a:pPr>
+            <a:r>
+              <a:rPr sz="1050" b="0" i="0">
                 <a:solidFill>
                   <a:srgbClr val="8A8478"/>
                 </a:solidFill>
-                <a:latin typeface="Courier New"/>
-              </a:rPr>
-              <a:t>THE 30% EXPAT RULING, PHASED DOWN</a:t>
-            </a:r>
-          </a:p>
-        </p:txBody>
-      </p:sp>
-      <p:sp>
-        <p:nvSpPr>
-          <p:cNvPr id="7" name="Rectangle 6"/>
+                <a:latin typeface="Helvetica Neue"/>
+              </a:rPr>
+              <a:t>norm rises to €50,436</a:t>
+            </a:r>
+          </a:p>
+        </p:txBody>
+      </p:sp>
+      <p:sp>
+        <p:nvSpPr>
+          <p:cNvPr id="13" name="Rounded Rectangle 12"/>
           <p:cNvSpPr/>
           <p:nvPr/>
         </p:nvSpPr>
         <p:spPr>
           <a:xfrm>
-            <a:off x="464515" y="2011680"/>
-            <a:ext cx="21945" cy="1280160"/>
-          </a:xfrm>
-          <a:prstGeom prst="rect">
-            <a:avLst/>
+            <a:off x="393192" y="2874264"/>
+            <a:ext cx="164592" cy="164592"/>
+          </a:xfrm>
+          <a:prstGeom prst="roundRect">
+            <a:avLst>
+              <a:gd name="adj" fmla="val 50000"/>
+            </a:avLst>
           </a:prstGeom>
           <a:solidFill>
             <a:srgbClr val="9AA0AE"/>
@@ -4736,347 +5032,7 @@
       </p:sp>
       <p:sp>
         <p:nvSpPr>
-          <p:cNvPr id="8" name="Rounded Rectangle 7"/>
-          <p:cNvSpPr/>
-          <p:nvPr/>
-        </p:nvSpPr>
-        <p:spPr>
-          <a:xfrm>
-            <a:off x="393192" y="2020824"/>
-            <a:ext cx="164592" cy="164592"/>
-          </a:xfrm>
-          <a:prstGeom prst="roundRect">
-            <a:avLst>
-              <a:gd name="adj" fmla="val 50000"/>
-            </a:avLst>
-          </a:prstGeom>
-          <a:solidFill>
-            <a:srgbClr val="9AA0AE"/>
-          </a:solidFill>
-          <a:ln>
-            <a:noFill/>
-          </a:ln>
-          <a:effectLst/>
-        </p:spPr>
-        <p:style>
-          <a:lnRef idx="1">
-            <a:schemeClr val="accent1"/>
-          </a:lnRef>
-          <a:fillRef idx="3">
-            <a:schemeClr val="accent1"/>
-          </a:fillRef>
-          <a:effectRef idx="2">
-            <a:schemeClr val="accent1"/>
-          </a:effectRef>
-          <a:fontRef idx="minor">
-            <a:schemeClr val="lt1"/>
-          </a:fontRef>
-        </p:style>
-        <p:txBody>
-          <a:bodyPr rtlCol="0" anchor="ctr"/>
-          <a:lstStyle/>
-          <a:p>
-            <a:pPr algn="ctr"/>
-          </a:p>
-        </p:txBody>
-      </p:sp>
-      <p:sp>
-        <p:nvSpPr>
-          <p:cNvPr id="9" name="TextBox 8"/>
-          <p:cNvSpPr txBox="1"/>
-          <p:nvPr/>
-        </p:nvSpPr>
-        <p:spPr>
-          <a:xfrm>
-            <a:off x="795528" y="1956816"/>
-            <a:ext cx="4090946" cy="274320"/>
-          </a:xfrm>
-          <a:prstGeom prst="rect">
-            <a:avLst/>
-          </a:prstGeom>
-          <a:noFill/>
-          <a:ln/>
-        </p:spPr>
-        <p:txBody>
-          <a:bodyPr wrap="square" anchor="t" lIns="25400" rIns="25400" tIns="25400" bIns="25400">
-            <a:spAutoFit/>
-          </a:bodyPr>
-          <a:lstStyle/>
-          <a:p>
-            <a:pPr algn="l">
-              <a:lnSpc>
-                <a:spcPct val="100000"/>
-              </a:lnSpc>
-              <a:spcBef>
-                <a:spcPts val="0"/>
-              </a:spcBef>
-              <a:spcAft>
-                <a:spcPts val="0"/>
-              </a:spcAft>
-            </a:pPr>
-            <a:r>
-              <a:rPr sz="1300" b="1" i="0">
-                <a:solidFill>
-                  <a:srgbClr val="8A8478"/>
-                </a:solidFill>
-                <a:latin typeface="Helvetica Neue"/>
-              </a:rPr>
-              <a:t>2024–26  </a:t>
-            </a:r>
-            <a:r>
-              <a:rPr sz="1300" b="1" i="0">
-                <a:solidFill>
-                  <a:srgbClr val="20242A"/>
-                </a:solidFill>
-                <a:latin typeface="Helvetica Neue"/>
-              </a:rPr>
-              <a:t>30% tax-free</a:t>
-            </a:r>
-          </a:p>
-        </p:txBody>
-      </p:sp>
-      <p:sp>
-        <p:nvSpPr>
-          <p:cNvPr id="10" name="TextBox 9"/>
-          <p:cNvSpPr txBox="1"/>
-          <p:nvPr/>
-        </p:nvSpPr>
-        <p:spPr>
-          <a:xfrm>
-            <a:off x="795528" y="2249424"/>
-            <a:ext cx="4090946" cy="365760"/>
-          </a:xfrm>
-          <a:prstGeom prst="rect">
-            <a:avLst/>
-          </a:prstGeom>
-          <a:noFill/>
-          <a:ln/>
-        </p:spPr>
-        <p:txBody>
-          <a:bodyPr wrap="square" anchor="t" lIns="25400" rIns="25400" tIns="25400" bIns="25400">
-            <a:spAutoFit/>
-          </a:bodyPr>
-          <a:lstStyle/>
-          <a:p>
-            <a:pPr algn="l">
-              <a:lnSpc>
-                <a:spcPct val="100000"/>
-              </a:lnSpc>
-              <a:spcBef>
-                <a:spcPts val="0"/>
-              </a:spcBef>
-              <a:spcAft>
-                <a:spcPts val="0"/>
-              </a:spcAft>
-            </a:pPr>
-            <a:r>
-              <a:rPr sz="1050" b="0" i="0">
-                <a:solidFill>
-                  <a:srgbClr val="8A8478"/>
-                </a:solidFill>
-                <a:latin typeface="Helvetica Neue"/>
-              </a:rPr>
-              <a:t>income norm €46,107</a:t>
-            </a:r>
-          </a:p>
-        </p:txBody>
-      </p:sp>
-      <p:sp>
-        <p:nvSpPr>
-          <p:cNvPr id="11" name="Rounded Rectangle 10"/>
-          <p:cNvSpPr/>
-          <p:nvPr/>
-        </p:nvSpPr>
-        <p:spPr>
-          <a:xfrm>
-            <a:off x="393192" y="2447544"/>
-            <a:ext cx="164592" cy="164592"/>
-          </a:xfrm>
-          <a:prstGeom prst="roundRect">
-            <a:avLst>
-              <a:gd name="adj" fmla="val 50000"/>
-            </a:avLst>
-          </a:prstGeom>
-          <a:solidFill>
-            <a:srgbClr val="D8542A"/>
-          </a:solidFill>
-          <a:ln>
-            <a:noFill/>
-          </a:ln>
-          <a:effectLst/>
-        </p:spPr>
-        <p:style>
-          <a:lnRef idx="1">
-            <a:schemeClr val="accent1"/>
-          </a:lnRef>
-          <a:fillRef idx="3">
-            <a:schemeClr val="accent1"/>
-          </a:fillRef>
-          <a:effectRef idx="2">
-            <a:schemeClr val="accent1"/>
-          </a:effectRef>
-          <a:fontRef idx="minor">
-            <a:schemeClr val="lt1"/>
-          </a:fontRef>
-        </p:style>
-        <p:txBody>
-          <a:bodyPr rtlCol="0" anchor="ctr"/>
-          <a:lstStyle/>
-          <a:p>
-            <a:pPr algn="ctr"/>
-          </a:p>
-        </p:txBody>
-      </p:sp>
-      <p:sp>
-        <p:nvSpPr>
-          <p:cNvPr id="12" name="TextBox 11"/>
-          <p:cNvSpPr txBox="1"/>
-          <p:nvPr/>
-        </p:nvSpPr>
-        <p:spPr>
-          <a:xfrm>
-            <a:off x="795528" y="2383536"/>
-            <a:ext cx="4090946" cy="274320"/>
-          </a:xfrm>
-          <a:prstGeom prst="rect">
-            <a:avLst/>
-          </a:prstGeom>
-          <a:noFill/>
-          <a:ln/>
-        </p:spPr>
-        <p:txBody>
-          <a:bodyPr wrap="square" anchor="t" lIns="25400" rIns="25400" tIns="25400" bIns="25400">
-            <a:spAutoFit/>
-          </a:bodyPr>
-          <a:lstStyle/>
-          <a:p>
-            <a:pPr algn="l">
-              <a:lnSpc>
-                <a:spcPct val="100000"/>
-              </a:lnSpc>
-              <a:spcBef>
-                <a:spcPts val="0"/>
-              </a:spcBef>
-              <a:spcAft>
-                <a:spcPts val="0"/>
-              </a:spcAft>
-            </a:pPr>
-            <a:r>
-              <a:rPr sz="1300" b="1" i="0">
-                <a:solidFill>
-                  <a:srgbClr val="D8542A"/>
-                </a:solidFill>
-                <a:latin typeface="Helvetica Neue"/>
-              </a:rPr>
-              <a:t>1 Jan 2027  </a:t>
-            </a:r>
-            <a:r>
-              <a:rPr sz="1300" b="1" i="0">
-                <a:solidFill>
-                  <a:srgbClr val="20242A"/>
-                </a:solidFill>
-                <a:latin typeface="Helvetica Neue"/>
-              </a:rPr>
-              <a:t>→ 27% tax-free</a:t>
-            </a:r>
-          </a:p>
-        </p:txBody>
-      </p:sp>
-      <p:sp>
-        <p:nvSpPr>
-          <p:cNvPr id="13" name="TextBox 12"/>
-          <p:cNvSpPr txBox="1"/>
-          <p:nvPr/>
-        </p:nvSpPr>
-        <p:spPr>
-          <a:xfrm>
-            <a:off x="795528" y="2676144"/>
-            <a:ext cx="4090946" cy="365760"/>
-          </a:xfrm>
-          <a:prstGeom prst="rect">
-            <a:avLst/>
-          </a:prstGeom>
-          <a:noFill/>
-          <a:ln/>
-        </p:spPr>
-        <p:txBody>
-          <a:bodyPr wrap="square" anchor="t" lIns="25400" rIns="25400" tIns="25400" bIns="25400">
-            <a:spAutoFit/>
-          </a:bodyPr>
-          <a:lstStyle/>
-          <a:p>
-            <a:pPr algn="l">
-              <a:lnSpc>
-                <a:spcPct val="100000"/>
-              </a:lnSpc>
-              <a:spcBef>
-                <a:spcPts val="0"/>
-              </a:spcBef>
-              <a:spcAft>
-                <a:spcPts val="0"/>
-              </a:spcAft>
-            </a:pPr>
-            <a:r>
-              <a:rPr sz="1050" b="0" i="0">
-                <a:solidFill>
-                  <a:srgbClr val="8A8478"/>
-                </a:solidFill>
-                <a:latin typeface="Helvetica Neue"/>
-              </a:rPr>
-              <a:t>norm rises to €50,436</a:t>
-            </a:r>
-          </a:p>
-        </p:txBody>
-      </p:sp>
-      <p:sp>
-        <p:nvSpPr>
-          <p:cNvPr id="14" name="Rounded Rectangle 13"/>
-          <p:cNvSpPr/>
-          <p:nvPr/>
-        </p:nvSpPr>
-        <p:spPr>
-          <a:xfrm>
-            <a:off x="393192" y="2874264"/>
-            <a:ext cx="164592" cy="164592"/>
-          </a:xfrm>
-          <a:prstGeom prst="roundRect">
-            <a:avLst>
-              <a:gd name="adj" fmla="val 50000"/>
-            </a:avLst>
-          </a:prstGeom>
-          <a:solidFill>
-            <a:srgbClr val="9AA0AE"/>
-          </a:solidFill>
-          <a:ln>
-            <a:noFill/>
-          </a:ln>
-          <a:effectLst/>
-        </p:spPr>
-        <p:style>
-          <a:lnRef idx="1">
-            <a:schemeClr val="accent1"/>
-          </a:lnRef>
-          <a:fillRef idx="3">
-            <a:schemeClr val="accent1"/>
-          </a:fillRef>
-          <a:effectRef idx="2">
-            <a:schemeClr val="accent1"/>
-          </a:effectRef>
-          <a:fontRef idx="minor">
-            <a:schemeClr val="lt1"/>
-          </a:fontRef>
-        </p:style>
-        <p:txBody>
-          <a:bodyPr rtlCol="0" anchor="ctr"/>
-          <a:lstStyle/>
-          <a:p>
-            <a:pPr algn="ctr"/>
-          </a:p>
-        </p:txBody>
-      </p:sp>
-      <p:sp>
-        <p:nvSpPr>
-          <p:cNvPr id="15" name="TextBox 14"/>
+          <p:cNvPr id="14" name="TextBox 13"/>
           <p:cNvSpPr txBox="1"/>
           <p:nvPr/>
         </p:nvSpPr>
@@ -5131,7 +5087,7 @@
       </p:sp>
       <p:sp>
         <p:nvSpPr>
-          <p:cNvPr id="16" name="TextBox 15"/>
+          <p:cNvPr id="15" name="TextBox 14"/>
           <p:cNvSpPr txBox="1"/>
           <p:nvPr/>
         </p:nvSpPr>
@@ -5177,7 +5133,7 @@
       </p:sp>
       <p:sp>
         <p:nvSpPr>
-          <p:cNvPr id="17" name="TextBox 16"/>
+          <p:cNvPr id="16" name="TextBox 15"/>
           <p:cNvSpPr txBox="1"/>
           <p:nvPr/>
         </p:nvSpPr>
@@ -5223,7 +5179,7 @@
       </p:sp>
       <p:graphicFrame>
         <p:nvGraphicFramePr>
-          <p:cNvPr id="18" name="Chart 17"/>
+          <p:cNvPr id="17" name="Chart 16"/>
           <p:cNvGraphicFramePr>
             <a:graphicFrameLocks noGrp="1"/>
           </p:cNvGraphicFramePr>
@@ -5241,7 +5197,7 @@
       </p:graphicFrame>
       <p:sp>
         <p:nvSpPr>
-          <p:cNvPr id="19" name="TextBox 18"/>
+          <p:cNvPr id="18" name="TextBox 17"/>
           <p:cNvSpPr txBox="1"/>
           <p:nvPr/>
         </p:nvSpPr>
@@ -5287,7 +5243,7 @@
       </p:sp>
       <p:sp>
         <p:nvSpPr>
-          <p:cNvPr id="20" name="TextBox 19"/>
+          <p:cNvPr id="19" name="TextBox 18"/>
           <p:cNvSpPr txBox="1"/>
           <p:nvPr/>
         </p:nvSpPr>
@@ -5333,7 +5289,7 @@
       </p:sp>
       <p:sp>
         <p:nvSpPr>
-          <p:cNvPr id="21" name="TextBox 20"/>
+          <p:cNvPr id="20" name="TextBox 19"/>
           <p:cNvSpPr txBox="1"/>
           <p:nvPr/>
         </p:nvSpPr>
@@ -5388,7 +5344,7 @@
       </p:sp>
       <p:sp>
         <p:nvSpPr>
-          <p:cNvPr id="22" name="TextBox 21"/>
+          <p:cNvPr id="21" name="TextBox 20"/>
           <p:cNvSpPr txBox="1"/>
           <p:nvPr/>
         </p:nvSpPr>
@@ -5434,7 +5390,7 @@
       </p:sp>
       <p:sp>
         <p:nvSpPr>
-          <p:cNvPr id="23" name="TextBox 22"/>
+          <p:cNvPr id="22" name="TextBox 21"/>
           <p:cNvSpPr txBox="1"/>
           <p:nvPr/>
         </p:nvSpPr>
@@ -5634,17 +5590,525 @@
       </p:sp>
       <p:sp>
         <p:nvSpPr>
-          <p:cNvPr id="5" name="Rectangle 4"/>
+          <p:cNvPr id="5" name="TextBox 4"/>
+          <p:cNvSpPr txBox="1"/>
+          <p:nvPr/>
+        </p:nvSpPr>
+        <p:spPr>
+          <a:xfrm>
+            <a:off x="365760" y="1508760"/>
+            <a:ext cx="4251097" cy="274320"/>
+          </a:xfrm>
+          <a:prstGeom prst="rect">
+            <a:avLst/>
+          </a:prstGeom>
+          <a:noFill/>
+          <a:ln/>
+        </p:spPr>
+        <p:txBody>
+          <a:bodyPr wrap="square" anchor="t" lIns="25400" rIns="25400" tIns="25400" bIns="25400">
+            <a:spAutoFit/>
+          </a:bodyPr>
+          <a:lstStyle/>
+          <a:p>
+            <a:pPr algn="l">
+              <a:lnSpc>
+                <a:spcPct val="100000"/>
+              </a:lnSpc>
+              <a:spcBef>
+                <a:spcPts val="0"/>
+              </a:spcBef>
+              <a:spcAft>
+                <a:spcPts val="0"/>
+              </a:spcAft>
+            </a:pPr>
+            <a:r>
+              <a:rPr sz="950" b="1" i="0">
+                <a:solidFill>
+                  <a:srgbClr val="8A8478"/>
+                </a:solidFill>
+                <a:latin typeface="Courier New"/>
+              </a:rPr>
+              <a:t>VACANCIES PER 100 UNEMPLOYED</a:t>
+            </a:r>
+          </a:p>
+        </p:txBody>
+      </p:sp>
+      <p:sp>
+        <p:nvSpPr>
+          <p:cNvPr id="6" name="TextBox 5"/>
+          <p:cNvSpPr txBox="1"/>
+          <p:nvPr/>
+        </p:nvSpPr>
+        <p:spPr>
+          <a:xfrm>
+            <a:off x="365760" y="1965960"/>
+            <a:ext cx="3108097" cy="256032"/>
+          </a:xfrm>
+          <a:prstGeom prst="rect">
+            <a:avLst/>
+          </a:prstGeom>
+          <a:noFill/>
+          <a:ln/>
+        </p:spPr>
+        <p:txBody>
+          <a:bodyPr wrap="square" anchor="b" lIns="25400" rIns="25400" tIns="25400" bIns="25400">
+            <a:spAutoFit/>
+          </a:bodyPr>
+          <a:lstStyle/>
+          <a:p>
+            <a:pPr algn="l">
+              <a:lnSpc>
+                <a:spcPct val="100000"/>
+              </a:lnSpc>
+              <a:spcBef>
+                <a:spcPts val="0"/>
+              </a:spcBef>
+              <a:spcAft>
+                <a:spcPts val="0"/>
+              </a:spcAft>
+            </a:pPr>
+            <a:r>
+              <a:rPr sz="1250" b="0" i="0">
+                <a:solidFill>
+                  <a:srgbClr val="8A8478"/>
+                </a:solidFill>
+                <a:latin typeface="Helvetica Neue"/>
+              </a:rPr>
+              <a:t>Utrecht</a:t>
+            </a:r>
+          </a:p>
+        </p:txBody>
+      </p:sp>
+      <p:sp>
+        <p:nvSpPr>
+          <p:cNvPr id="7" name="Rounded Rectangle 6"/>
           <p:cNvSpPr/>
           <p:nvPr/>
         </p:nvSpPr>
         <p:spPr>
           <a:xfrm>
-            <a:off x="566928" y="1191006"/>
-            <a:ext cx="1097280" cy="45720"/>
-          </a:xfrm>
-          <a:prstGeom prst="rect">
-            <a:avLst/>
+            <a:off x="365760" y="2221991"/>
+            <a:ext cx="3108097" cy="182880"/>
+          </a:xfrm>
+          <a:prstGeom prst="roundRect">
+            <a:avLst>
+              <a:gd name="adj" fmla="val 50000"/>
+            </a:avLst>
+          </a:prstGeom>
+          <a:solidFill>
+            <a:srgbClr val="E7DFD1"/>
+          </a:solidFill>
+          <a:ln>
+            <a:noFill/>
+          </a:ln>
+          <a:effectLst/>
+        </p:spPr>
+        <p:style>
+          <a:lnRef idx="1">
+            <a:schemeClr val="accent1"/>
+          </a:lnRef>
+          <a:fillRef idx="3">
+            <a:schemeClr val="accent1"/>
+          </a:fillRef>
+          <a:effectRef idx="2">
+            <a:schemeClr val="accent1"/>
+          </a:effectRef>
+          <a:fontRef idx="minor">
+            <a:schemeClr val="lt1"/>
+          </a:fontRef>
+        </p:style>
+        <p:txBody>
+          <a:bodyPr rtlCol="0" anchor="ctr"/>
+          <a:lstStyle/>
+          <a:p>
+            <a:pPr algn="ctr"/>
+          </a:p>
+        </p:txBody>
+      </p:sp>
+      <p:sp>
+        <p:nvSpPr>
+          <p:cNvPr id="8" name="Rounded Rectangle 7"/>
+          <p:cNvSpPr/>
+          <p:nvPr/>
+        </p:nvSpPr>
+        <p:spPr>
+          <a:xfrm>
+            <a:off x="365760" y="2221991"/>
+            <a:ext cx="2615088" cy="182880"/>
+          </a:xfrm>
+          <a:prstGeom prst="roundRect">
+            <a:avLst>
+              <a:gd name="adj" fmla="val 50000"/>
+            </a:avLst>
+          </a:prstGeom>
+          <a:solidFill>
+            <a:srgbClr val="D8542A"/>
+          </a:solidFill>
+          <a:ln>
+            <a:noFill/>
+          </a:ln>
+          <a:effectLst/>
+        </p:spPr>
+        <p:style>
+          <a:lnRef idx="1">
+            <a:schemeClr val="accent1"/>
+          </a:lnRef>
+          <a:fillRef idx="3">
+            <a:schemeClr val="accent1"/>
+          </a:fillRef>
+          <a:effectRef idx="2">
+            <a:schemeClr val="accent1"/>
+          </a:effectRef>
+          <a:fontRef idx="minor">
+            <a:schemeClr val="lt1"/>
+          </a:fontRef>
+        </p:style>
+        <p:txBody>
+          <a:bodyPr rtlCol="0" anchor="ctr"/>
+          <a:lstStyle/>
+          <a:p>
+            <a:pPr algn="ctr"/>
+          </a:p>
+        </p:txBody>
+      </p:sp>
+      <p:sp>
+        <p:nvSpPr>
+          <p:cNvPr id="9" name="TextBox 8"/>
+          <p:cNvSpPr txBox="1"/>
+          <p:nvPr/>
+        </p:nvSpPr>
+        <p:spPr>
+          <a:xfrm>
+            <a:off x="3656737" y="2221991"/>
+            <a:ext cx="777240" cy="182880"/>
+          </a:xfrm>
+          <a:prstGeom prst="rect">
+            <a:avLst/>
+          </a:prstGeom>
+          <a:noFill/>
+          <a:ln/>
+        </p:spPr>
+        <p:txBody>
+          <a:bodyPr wrap="square" anchor="ctr" lIns="25400" rIns="25400" tIns="25400" bIns="25400">
+            <a:spAutoFit/>
+          </a:bodyPr>
+          <a:lstStyle/>
+          <a:p>
+            <a:pPr algn="l">
+              <a:lnSpc>
+                <a:spcPct val="100000"/>
+              </a:lnSpc>
+              <a:spcBef>
+                <a:spcPts val="0"/>
+              </a:spcBef>
+              <a:spcAft>
+                <a:spcPts val="0"/>
+              </a:spcAft>
+            </a:pPr>
+            <a:r>
+              <a:rPr sz="1450" b="1" i="0">
+                <a:solidFill>
+                  <a:srgbClr val="20242A"/>
+                </a:solidFill>
+                <a:latin typeface="Helvetica Neue"/>
+              </a:rPr>
+              <a:t>122</a:t>
+            </a:r>
+          </a:p>
+        </p:txBody>
+      </p:sp>
+      <p:sp>
+        <p:nvSpPr>
+          <p:cNvPr id="10" name="TextBox 9"/>
+          <p:cNvSpPr txBox="1"/>
+          <p:nvPr/>
+        </p:nvSpPr>
+        <p:spPr>
+          <a:xfrm>
+            <a:off x="365760" y="2514600"/>
+            <a:ext cx="3108097" cy="256032"/>
+          </a:xfrm>
+          <a:prstGeom prst="rect">
+            <a:avLst/>
+          </a:prstGeom>
+          <a:noFill/>
+          <a:ln/>
+        </p:spPr>
+        <p:txBody>
+          <a:bodyPr wrap="square" anchor="b" lIns="25400" rIns="25400" tIns="25400" bIns="25400">
+            <a:spAutoFit/>
+          </a:bodyPr>
+          <a:lstStyle/>
+          <a:p>
+            <a:pPr algn="l">
+              <a:lnSpc>
+                <a:spcPct val="100000"/>
+              </a:lnSpc>
+              <a:spcBef>
+                <a:spcPts val="0"/>
+              </a:spcBef>
+              <a:spcAft>
+                <a:spcPts val="0"/>
+              </a:spcAft>
+            </a:pPr>
+            <a:r>
+              <a:rPr sz="1250" b="0" i="0">
+                <a:solidFill>
+                  <a:srgbClr val="8A8478"/>
+                </a:solidFill>
+                <a:latin typeface="Helvetica Neue"/>
+              </a:rPr>
+              <a:t>Zeeland</a:t>
+            </a:r>
+          </a:p>
+        </p:txBody>
+      </p:sp>
+      <p:sp>
+        <p:nvSpPr>
+          <p:cNvPr id="11" name="Rounded Rectangle 10"/>
+          <p:cNvSpPr/>
+          <p:nvPr/>
+        </p:nvSpPr>
+        <p:spPr>
+          <a:xfrm>
+            <a:off x="365760" y="2770632"/>
+            <a:ext cx="3108097" cy="182880"/>
+          </a:xfrm>
+          <a:prstGeom prst="roundRect">
+            <a:avLst>
+              <a:gd name="adj" fmla="val 50000"/>
+            </a:avLst>
+          </a:prstGeom>
+          <a:solidFill>
+            <a:srgbClr val="E7DFD1"/>
+          </a:solidFill>
+          <a:ln>
+            <a:noFill/>
+          </a:ln>
+          <a:effectLst/>
+        </p:spPr>
+        <p:style>
+          <a:lnRef idx="1">
+            <a:schemeClr val="accent1"/>
+          </a:lnRef>
+          <a:fillRef idx="3">
+            <a:schemeClr val="accent1"/>
+          </a:fillRef>
+          <a:effectRef idx="2">
+            <a:schemeClr val="accent1"/>
+          </a:effectRef>
+          <a:fontRef idx="minor">
+            <a:schemeClr val="lt1"/>
+          </a:fontRef>
+        </p:style>
+        <p:txBody>
+          <a:bodyPr rtlCol="0" anchor="ctr"/>
+          <a:lstStyle/>
+          <a:p>
+            <a:pPr algn="ctr"/>
+          </a:p>
+        </p:txBody>
+      </p:sp>
+      <p:sp>
+        <p:nvSpPr>
+          <p:cNvPr id="12" name="Rounded Rectangle 11"/>
+          <p:cNvSpPr/>
+          <p:nvPr/>
+        </p:nvSpPr>
+        <p:spPr>
+          <a:xfrm>
+            <a:off x="365760" y="2770632"/>
+            <a:ext cx="2615088" cy="182880"/>
+          </a:xfrm>
+          <a:prstGeom prst="roundRect">
+            <a:avLst>
+              <a:gd name="adj" fmla="val 50000"/>
+            </a:avLst>
+          </a:prstGeom>
+          <a:solidFill>
+            <a:srgbClr val="D8542A"/>
+          </a:solidFill>
+          <a:ln>
+            <a:noFill/>
+          </a:ln>
+          <a:effectLst/>
+        </p:spPr>
+        <p:style>
+          <a:lnRef idx="1">
+            <a:schemeClr val="accent1"/>
+          </a:lnRef>
+          <a:fillRef idx="3">
+            <a:schemeClr val="accent1"/>
+          </a:fillRef>
+          <a:effectRef idx="2">
+            <a:schemeClr val="accent1"/>
+          </a:effectRef>
+          <a:fontRef idx="minor">
+            <a:schemeClr val="lt1"/>
+          </a:fontRef>
+        </p:style>
+        <p:txBody>
+          <a:bodyPr rtlCol="0" anchor="ctr"/>
+          <a:lstStyle/>
+          <a:p>
+            <a:pPr algn="ctr"/>
+          </a:p>
+        </p:txBody>
+      </p:sp>
+      <p:sp>
+        <p:nvSpPr>
+          <p:cNvPr id="13" name="TextBox 12"/>
+          <p:cNvSpPr txBox="1"/>
+          <p:nvPr/>
+        </p:nvSpPr>
+        <p:spPr>
+          <a:xfrm>
+            <a:off x="3656737" y="2770632"/>
+            <a:ext cx="777240" cy="182880"/>
+          </a:xfrm>
+          <a:prstGeom prst="rect">
+            <a:avLst/>
+          </a:prstGeom>
+          <a:noFill/>
+          <a:ln/>
+        </p:spPr>
+        <p:txBody>
+          <a:bodyPr wrap="square" anchor="ctr" lIns="25400" rIns="25400" tIns="25400" bIns="25400">
+            <a:spAutoFit/>
+          </a:bodyPr>
+          <a:lstStyle/>
+          <a:p>
+            <a:pPr algn="l">
+              <a:lnSpc>
+                <a:spcPct val="100000"/>
+              </a:lnSpc>
+              <a:spcBef>
+                <a:spcPts val="0"/>
+              </a:spcBef>
+              <a:spcAft>
+                <a:spcPts val="0"/>
+              </a:spcAft>
+            </a:pPr>
+            <a:r>
+              <a:rPr sz="1450" b="1" i="0">
+                <a:solidFill>
+                  <a:srgbClr val="20242A"/>
+                </a:solidFill>
+                <a:latin typeface="Helvetica Neue"/>
+              </a:rPr>
+              <a:t>122</a:t>
+            </a:r>
+          </a:p>
+        </p:txBody>
+      </p:sp>
+      <p:sp>
+        <p:nvSpPr>
+          <p:cNvPr id="14" name="TextBox 13"/>
+          <p:cNvSpPr txBox="1"/>
+          <p:nvPr/>
+        </p:nvSpPr>
+        <p:spPr>
+          <a:xfrm>
+            <a:off x="365760" y="3063240"/>
+            <a:ext cx="3108097" cy="256032"/>
+          </a:xfrm>
+          <a:prstGeom prst="rect">
+            <a:avLst/>
+          </a:prstGeom>
+          <a:noFill/>
+          <a:ln/>
+        </p:spPr>
+        <p:txBody>
+          <a:bodyPr wrap="square" anchor="b" lIns="25400" rIns="25400" tIns="25400" bIns="25400">
+            <a:spAutoFit/>
+          </a:bodyPr>
+          <a:lstStyle/>
+          <a:p>
+            <a:pPr algn="l">
+              <a:lnSpc>
+                <a:spcPct val="100000"/>
+              </a:lnSpc>
+              <a:spcBef>
+                <a:spcPts val="0"/>
+              </a:spcBef>
+              <a:spcAft>
+                <a:spcPts val="0"/>
+              </a:spcAft>
+            </a:pPr>
+            <a:r>
+              <a:rPr sz="1250" b="0" i="0">
+                <a:solidFill>
+                  <a:srgbClr val="8A8478"/>
+                </a:solidFill>
+                <a:latin typeface="Helvetica Neue"/>
+              </a:rPr>
+              <a:t>Netherlands (avg)</a:t>
+            </a:r>
+          </a:p>
+        </p:txBody>
+      </p:sp>
+      <p:sp>
+        <p:nvSpPr>
+          <p:cNvPr id="15" name="Rounded Rectangle 14"/>
+          <p:cNvSpPr/>
+          <p:nvPr/>
+        </p:nvSpPr>
+        <p:spPr>
+          <a:xfrm>
+            <a:off x="365760" y="3319272"/>
+            <a:ext cx="3108097" cy="182880"/>
+          </a:xfrm>
+          <a:prstGeom prst="roundRect">
+            <a:avLst>
+              <a:gd name="adj" fmla="val 50000"/>
+            </a:avLst>
+          </a:prstGeom>
+          <a:solidFill>
+            <a:srgbClr val="E7DFD1"/>
+          </a:solidFill>
+          <a:ln>
+            <a:noFill/>
+          </a:ln>
+          <a:effectLst/>
+        </p:spPr>
+        <p:style>
+          <a:lnRef idx="1">
+            <a:schemeClr val="accent1"/>
+          </a:lnRef>
+          <a:fillRef idx="3">
+            <a:schemeClr val="accent1"/>
+          </a:fillRef>
+          <a:effectRef idx="2">
+            <a:schemeClr val="accent1"/>
+          </a:effectRef>
+          <a:fontRef idx="minor">
+            <a:schemeClr val="lt1"/>
+          </a:fontRef>
+        </p:style>
+        <p:txBody>
+          <a:bodyPr rtlCol="0" anchor="ctr"/>
+          <a:lstStyle/>
+          <a:p>
+            <a:pPr algn="ctr"/>
+          </a:p>
+        </p:txBody>
+      </p:sp>
+      <p:sp>
+        <p:nvSpPr>
+          <p:cNvPr id="16" name="Rounded Rectangle 15"/>
+          <p:cNvSpPr/>
+          <p:nvPr/>
+        </p:nvSpPr>
+        <p:spPr>
+          <a:xfrm>
+            <a:off x="365760" y="3319272"/>
+            <a:ext cx="1950599" cy="182880"/>
+          </a:xfrm>
+          <a:prstGeom prst="roundRect">
+            <a:avLst>
+              <a:gd name="adj" fmla="val 50000"/>
+            </a:avLst>
           </a:prstGeom>
           <a:solidFill>
             <a:srgbClr val="0E5C63"/>
@@ -5678,23 +6142,23 @@
       </p:sp>
       <p:sp>
         <p:nvSpPr>
-          <p:cNvPr id="6" name="TextBox 5"/>
-          <p:cNvSpPr txBox="1"/>
-          <p:nvPr/>
-        </p:nvSpPr>
-        <p:spPr>
-          <a:xfrm>
-            <a:off x="365760" y="1508760"/>
-            <a:ext cx="4251097" cy="274320"/>
-          </a:xfrm>
-          <a:prstGeom prst="rect">
-            <a:avLst/>
-          </a:prstGeom>
-          <a:noFill/>
-          <a:ln/>
-        </p:spPr>
-        <p:txBody>
-          <a:bodyPr wrap="square" anchor="t" lIns="25400" rIns="25400" tIns="25400" bIns="25400">
+          <p:cNvPr id="17" name="TextBox 16"/>
+          <p:cNvSpPr txBox="1"/>
+          <p:nvPr/>
+        </p:nvSpPr>
+        <p:spPr>
+          <a:xfrm>
+            <a:off x="3656737" y="3319272"/>
+            <a:ext cx="777240" cy="182880"/>
+          </a:xfrm>
+          <a:prstGeom prst="rect">
+            <a:avLst/>
+          </a:prstGeom>
+          <a:noFill/>
+          <a:ln/>
+        </p:spPr>
+        <p:txBody>
+          <a:bodyPr wrap="square" anchor="ctr" lIns="25400" rIns="25400" tIns="25400" bIns="25400">
             <a:spAutoFit/>
           </a:bodyPr>
           <a:lstStyle/>
@@ -5711,72 +6175,72 @@
               </a:spcAft>
             </a:pPr>
             <a:r>
-              <a:rPr sz="950" b="1" i="0">
+              <a:rPr sz="1450" b="1" i="0">
+                <a:solidFill>
+                  <a:srgbClr val="20242A"/>
+                </a:solidFill>
+                <a:latin typeface="Helvetica Neue"/>
+              </a:rPr>
+              <a:t>91</a:t>
+            </a:r>
+          </a:p>
+        </p:txBody>
+      </p:sp>
+      <p:sp>
+        <p:nvSpPr>
+          <p:cNvPr id="18" name="TextBox 17"/>
+          <p:cNvSpPr txBox="1"/>
+          <p:nvPr/>
+        </p:nvSpPr>
+        <p:spPr>
+          <a:xfrm>
+            <a:off x="365760" y="3611880"/>
+            <a:ext cx="3108097" cy="256032"/>
+          </a:xfrm>
+          <a:prstGeom prst="rect">
+            <a:avLst/>
+          </a:prstGeom>
+          <a:noFill/>
+          <a:ln/>
+        </p:spPr>
+        <p:txBody>
+          <a:bodyPr wrap="square" anchor="b" lIns="25400" rIns="25400" tIns="25400" bIns="25400">
+            <a:spAutoFit/>
+          </a:bodyPr>
+          <a:lstStyle/>
+          <a:p>
+            <a:pPr algn="l">
+              <a:lnSpc>
+                <a:spcPct val="100000"/>
+              </a:lnSpc>
+              <a:spcBef>
+                <a:spcPts val="0"/>
+              </a:spcBef>
+              <a:spcAft>
+                <a:spcPts val="0"/>
+              </a:spcAft>
+            </a:pPr>
+            <a:r>
+              <a:rPr sz="1250" b="0" i="0">
                 <a:solidFill>
                   <a:srgbClr val="8A8478"/>
                 </a:solidFill>
-                <a:latin typeface="Courier New"/>
-              </a:rPr>
-              <a:t>VACANCIES PER 100 UNEMPLOYED</a:t>
-            </a:r>
-          </a:p>
-        </p:txBody>
-      </p:sp>
-      <p:sp>
-        <p:nvSpPr>
-          <p:cNvPr id="7" name="TextBox 6"/>
-          <p:cNvSpPr txBox="1"/>
-          <p:nvPr/>
-        </p:nvSpPr>
-        <p:spPr>
-          <a:xfrm>
-            <a:off x="365760" y="1965960"/>
-            <a:ext cx="3108097" cy="256032"/>
-          </a:xfrm>
-          <a:prstGeom prst="rect">
-            <a:avLst/>
-          </a:prstGeom>
-          <a:noFill/>
-          <a:ln/>
-        </p:spPr>
-        <p:txBody>
-          <a:bodyPr wrap="square" anchor="b" lIns="25400" rIns="25400" tIns="25400" bIns="25400">
-            <a:spAutoFit/>
-          </a:bodyPr>
-          <a:lstStyle/>
-          <a:p>
-            <a:pPr algn="l">
-              <a:lnSpc>
-                <a:spcPct val="100000"/>
-              </a:lnSpc>
-              <a:spcBef>
-                <a:spcPts val="0"/>
-              </a:spcBef>
-              <a:spcAft>
-                <a:spcPts val="0"/>
-              </a:spcAft>
-            </a:pPr>
-            <a:r>
-              <a:rPr sz="1250" b="0" i="0">
-                <a:solidFill>
-                  <a:srgbClr val="8A8478"/>
-                </a:solidFill>
                 <a:latin typeface="Helvetica Neue"/>
               </a:rPr>
-              <a:t>Utrecht</a:t>
-            </a:r>
-          </a:p>
-        </p:txBody>
-      </p:sp>
-      <p:sp>
-        <p:nvSpPr>
-          <p:cNvPr id="8" name="Rounded Rectangle 7"/>
+              <a:t>Groningen (recovering)</a:t>
+            </a:r>
+          </a:p>
+        </p:txBody>
+      </p:sp>
+      <p:sp>
+        <p:nvSpPr>
+          <p:cNvPr id="19" name="Rounded Rectangle 18"/>
           <p:cNvSpPr/>
           <p:nvPr/>
         </p:nvSpPr>
         <p:spPr>
           <a:xfrm>
-            <a:off x="365760" y="2221991"/>
+            <a:off x="365760" y="3867912"/>
             <a:ext cx="3108097" cy="182880"/>
           </a:xfrm>
           <a:prstGeom prst="roundRect">
@@ -5816,559 +6280,7 @@
       </p:sp>
       <p:sp>
         <p:nvSpPr>
-          <p:cNvPr id="9" name="Rounded Rectangle 8"/>
-          <p:cNvSpPr/>
-          <p:nvPr/>
-        </p:nvSpPr>
-        <p:spPr>
-          <a:xfrm>
-            <a:off x="365760" y="2221991"/>
-            <a:ext cx="2615088" cy="182880"/>
-          </a:xfrm>
-          <a:prstGeom prst="roundRect">
-            <a:avLst>
-              <a:gd name="adj" fmla="val 50000"/>
-            </a:avLst>
-          </a:prstGeom>
-          <a:solidFill>
-            <a:srgbClr val="D8542A"/>
-          </a:solidFill>
-          <a:ln>
-            <a:noFill/>
-          </a:ln>
-          <a:effectLst/>
-        </p:spPr>
-        <p:style>
-          <a:lnRef idx="1">
-            <a:schemeClr val="accent1"/>
-          </a:lnRef>
-          <a:fillRef idx="3">
-            <a:schemeClr val="accent1"/>
-          </a:fillRef>
-          <a:effectRef idx="2">
-            <a:schemeClr val="accent1"/>
-          </a:effectRef>
-          <a:fontRef idx="minor">
-            <a:schemeClr val="lt1"/>
-          </a:fontRef>
-        </p:style>
-        <p:txBody>
-          <a:bodyPr rtlCol="0" anchor="ctr"/>
-          <a:lstStyle/>
-          <a:p>
-            <a:pPr algn="ctr"/>
-          </a:p>
-        </p:txBody>
-      </p:sp>
-      <p:sp>
-        <p:nvSpPr>
-          <p:cNvPr id="10" name="TextBox 9"/>
-          <p:cNvSpPr txBox="1"/>
-          <p:nvPr/>
-        </p:nvSpPr>
-        <p:spPr>
-          <a:xfrm>
-            <a:off x="3656737" y="2221991"/>
-            <a:ext cx="777240" cy="182880"/>
-          </a:xfrm>
-          <a:prstGeom prst="rect">
-            <a:avLst/>
-          </a:prstGeom>
-          <a:noFill/>
-          <a:ln/>
-        </p:spPr>
-        <p:txBody>
-          <a:bodyPr wrap="square" anchor="ctr" lIns="25400" rIns="25400" tIns="25400" bIns="25400">
-            <a:spAutoFit/>
-          </a:bodyPr>
-          <a:lstStyle/>
-          <a:p>
-            <a:pPr algn="l">
-              <a:lnSpc>
-                <a:spcPct val="100000"/>
-              </a:lnSpc>
-              <a:spcBef>
-                <a:spcPts val="0"/>
-              </a:spcBef>
-              <a:spcAft>
-                <a:spcPts val="0"/>
-              </a:spcAft>
-            </a:pPr>
-            <a:r>
-              <a:rPr sz="1450" b="1" i="0">
-                <a:solidFill>
-                  <a:srgbClr val="20242A"/>
-                </a:solidFill>
-                <a:latin typeface="Helvetica Neue"/>
-              </a:rPr>
-              <a:t>122</a:t>
-            </a:r>
-          </a:p>
-        </p:txBody>
-      </p:sp>
-      <p:sp>
-        <p:nvSpPr>
-          <p:cNvPr id="11" name="TextBox 10"/>
-          <p:cNvSpPr txBox="1"/>
-          <p:nvPr/>
-        </p:nvSpPr>
-        <p:spPr>
-          <a:xfrm>
-            <a:off x="365760" y="2514600"/>
-            <a:ext cx="3108097" cy="256032"/>
-          </a:xfrm>
-          <a:prstGeom prst="rect">
-            <a:avLst/>
-          </a:prstGeom>
-          <a:noFill/>
-          <a:ln/>
-        </p:spPr>
-        <p:txBody>
-          <a:bodyPr wrap="square" anchor="b" lIns="25400" rIns="25400" tIns="25400" bIns="25400">
-            <a:spAutoFit/>
-          </a:bodyPr>
-          <a:lstStyle/>
-          <a:p>
-            <a:pPr algn="l">
-              <a:lnSpc>
-                <a:spcPct val="100000"/>
-              </a:lnSpc>
-              <a:spcBef>
-                <a:spcPts val="0"/>
-              </a:spcBef>
-              <a:spcAft>
-                <a:spcPts val="0"/>
-              </a:spcAft>
-            </a:pPr>
-            <a:r>
-              <a:rPr sz="1250" b="0" i="0">
-                <a:solidFill>
-                  <a:srgbClr val="8A8478"/>
-                </a:solidFill>
-                <a:latin typeface="Helvetica Neue"/>
-              </a:rPr>
-              <a:t>Zeeland</a:t>
-            </a:r>
-          </a:p>
-        </p:txBody>
-      </p:sp>
-      <p:sp>
-        <p:nvSpPr>
-          <p:cNvPr id="12" name="Rounded Rectangle 11"/>
-          <p:cNvSpPr/>
-          <p:nvPr/>
-        </p:nvSpPr>
-        <p:spPr>
-          <a:xfrm>
-            <a:off x="365760" y="2770632"/>
-            <a:ext cx="3108097" cy="182880"/>
-          </a:xfrm>
-          <a:prstGeom prst="roundRect">
-            <a:avLst>
-              <a:gd name="adj" fmla="val 50000"/>
-            </a:avLst>
-          </a:prstGeom>
-          <a:solidFill>
-            <a:srgbClr val="E7DFD1"/>
-          </a:solidFill>
-          <a:ln>
-            <a:noFill/>
-          </a:ln>
-          <a:effectLst/>
-        </p:spPr>
-        <p:style>
-          <a:lnRef idx="1">
-            <a:schemeClr val="accent1"/>
-          </a:lnRef>
-          <a:fillRef idx="3">
-            <a:schemeClr val="accent1"/>
-          </a:fillRef>
-          <a:effectRef idx="2">
-            <a:schemeClr val="accent1"/>
-          </a:effectRef>
-          <a:fontRef idx="minor">
-            <a:schemeClr val="lt1"/>
-          </a:fontRef>
-        </p:style>
-        <p:txBody>
-          <a:bodyPr rtlCol="0" anchor="ctr"/>
-          <a:lstStyle/>
-          <a:p>
-            <a:pPr algn="ctr"/>
-          </a:p>
-        </p:txBody>
-      </p:sp>
-      <p:sp>
-        <p:nvSpPr>
-          <p:cNvPr id="13" name="Rounded Rectangle 12"/>
-          <p:cNvSpPr/>
-          <p:nvPr/>
-        </p:nvSpPr>
-        <p:spPr>
-          <a:xfrm>
-            <a:off x="365760" y="2770632"/>
-            <a:ext cx="2615088" cy="182880"/>
-          </a:xfrm>
-          <a:prstGeom prst="roundRect">
-            <a:avLst>
-              <a:gd name="adj" fmla="val 50000"/>
-            </a:avLst>
-          </a:prstGeom>
-          <a:solidFill>
-            <a:srgbClr val="D8542A"/>
-          </a:solidFill>
-          <a:ln>
-            <a:noFill/>
-          </a:ln>
-          <a:effectLst/>
-        </p:spPr>
-        <p:style>
-          <a:lnRef idx="1">
-            <a:schemeClr val="accent1"/>
-          </a:lnRef>
-          <a:fillRef idx="3">
-            <a:schemeClr val="accent1"/>
-          </a:fillRef>
-          <a:effectRef idx="2">
-            <a:schemeClr val="accent1"/>
-          </a:effectRef>
-          <a:fontRef idx="minor">
-            <a:schemeClr val="lt1"/>
-          </a:fontRef>
-        </p:style>
-        <p:txBody>
-          <a:bodyPr rtlCol="0" anchor="ctr"/>
-          <a:lstStyle/>
-          <a:p>
-            <a:pPr algn="ctr"/>
-          </a:p>
-        </p:txBody>
-      </p:sp>
-      <p:sp>
-        <p:nvSpPr>
-          <p:cNvPr id="14" name="TextBox 13"/>
-          <p:cNvSpPr txBox="1"/>
-          <p:nvPr/>
-        </p:nvSpPr>
-        <p:spPr>
-          <a:xfrm>
-            <a:off x="3656737" y="2770632"/>
-            <a:ext cx="777240" cy="182880"/>
-          </a:xfrm>
-          <a:prstGeom prst="rect">
-            <a:avLst/>
-          </a:prstGeom>
-          <a:noFill/>
-          <a:ln/>
-        </p:spPr>
-        <p:txBody>
-          <a:bodyPr wrap="square" anchor="ctr" lIns="25400" rIns="25400" tIns="25400" bIns="25400">
-            <a:spAutoFit/>
-          </a:bodyPr>
-          <a:lstStyle/>
-          <a:p>
-            <a:pPr algn="l">
-              <a:lnSpc>
-                <a:spcPct val="100000"/>
-              </a:lnSpc>
-              <a:spcBef>
-                <a:spcPts val="0"/>
-              </a:spcBef>
-              <a:spcAft>
-                <a:spcPts val="0"/>
-              </a:spcAft>
-            </a:pPr>
-            <a:r>
-              <a:rPr sz="1450" b="1" i="0">
-                <a:solidFill>
-                  <a:srgbClr val="20242A"/>
-                </a:solidFill>
-                <a:latin typeface="Helvetica Neue"/>
-              </a:rPr>
-              <a:t>122</a:t>
-            </a:r>
-          </a:p>
-        </p:txBody>
-      </p:sp>
-      <p:sp>
-        <p:nvSpPr>
-          <p:cNvPr id="15" name="TextBox 14"/>
-          <p:cNvSpPr txBox="1"/>
-          <p:nvPr/>
-        </p:nvSpPr>
-        <p:spPr>
-          <a:xfrm>
-            <a:off x="365760" y="3063240"/>
-            <a:ext cx="3108097" cy="256032"/>
-          </a:xfrm>
-          <a:prstGeom prst="rect">
-            <a:avLst/>
-          </a:prstGeom>
-          <a:noFill/>
-          <a:ln/>
-        </p:spPr>
-        <p:txBody>
-          <a:bodyPr wrap="square" anchor="b" lIns="25400" rIns="25400" tIns="25400" bIns="25400">
-            <a:spAutoFit/>
-          </a:bodyPr>
-          <a:lstStyle/>
-          <a:p>
-            <a:pPr algn="l">
-              <a:lnSpc>
-                <a:spcPct val="100000"/>
-              </a:lnSpc>
-              <a:spcBef>
-                <a:spcPts val="0"/>
-              </a:spcBef>
-              <a:spcAft>
-                <a:spcPts val="0"/>
-              </a:spcAft>
-            </a:pPr>
-            <a:r>
-              <a:rPr sz="1250" b="0" i="0">
-                <a:solidFill>
-                  <a:srgbClr val="8A8478"/>
-                </a:solidFill>
-                <a:latin typeface="Helvetica Neue"/>
-              </a:rPr>
-              <a:t>Netherlands (avg)</a:t>
-            </a:r>
-          </a:p>
-        </p:txBody>
-      </p:sp>
-      <p:sp>
-        <p:nvSpPr>
-          <p:cNvPr id="16" name="Rounded Rectangle 15"/>
-          <p:cNvSpPr/>
-          <p:nvPr/>
-        </p:nvSpPr>
-        <p:spPr>
-          <a:xfrm>
-            <a:off x="365760" y="3319272"/>
-            <a:ext cx="3108097" cy="182880"/>
-          </a:xfrm>
-          <a:prstGeom prst="roundRect">
-            <a:avLst>
-              <a:gd name="adj" fmla="val 50000"/>
-            </a:avLst>
-          </a:prstGeom>
-          <a:solidFill>
-            <a:srgbClr val="E7DFD1"/>
-          </a:solidFill>
-          <a:ln>
-            <a:noFill/>
-          </a:ln>
-          <a:effectLst/>
-        </p:spPr>
-        <p:style>
-          <a:lnRef idx="1">
-            <a:schemeClr val="accent1"/>
-          </a:lnRef>
-          <a:fillRef idx="3">
-            <a:schemeClr val="accent1"/>
-          </a:fillRef>
-          <a:effectRef idx="2">
-            <a:schemeClr val="accent1"/>
-          </a:effectRef>
-          <a:fontRef idx="minor">
-            <a:schemeClr val="lt1"/>
-          </a:fontRef>
-        </p:style>
-        <p:txBody>
-          <a:bodyPr rtlCol="0" anchor="ctr"/>
-          <a:lstStyle/>
-          <a:p>
-            <a:pPr algn="ctr"/>
-          </a:p>
-        </p:txBody>
-      </p:sp>
-      <p:sp>
-        <p:nvSpPr>
-          <p:cNvPr id="17" name="Rounded Rectangle 16"/>
-          <p:cNvSpPr/>
-          <p:nvPr/>
-        </p:nvSpPr>
-        <p:spPr>
-          <a:xfrm>
-            <a:off x="365760" y="3319272"/>
-            <a:ext cx="1950599" cy="182880"/>
-          </a:xfrm>
-          <a:prstGeom prst="roundRect">
-            <a:avLst>
-              <a:gd name="adj" fmla="val 50000"/>
-            </a:avLst>
-          </a:prstGeom>
-          <a:solidFill>
-            <a:srgbClr val="0E5C63"/>
-          </a:solidFill>
-          <a:ln>
-            <a:noFill/>
-          </a:ln>
-          <a:effectLst/>
-        </p:spPr>
-        <p:style>
-          <a:lnRef idx="1">
-            <a:schemeClr val="accent1"/>
-          </a:lnRef>
-          <a:fillRef idx="3">
-            <a:schemeClr val="accent1"/>
-          </a:fillRef>
-          <a:effectRef idx="2">
-            <a:schemeClr val="accent1"/>
-          </a:effectRef>
-          <a:fontRef idx="minor">
-            <a:schemeClr val="lt1"/>
-          </a:fontRef>
-        </p:style>
-        <p:txBody>
-          <a:bodyPr rtlCol="0" anchor="ctr"/>
-          <a:lstStyle/>
-          <a:p>
-            <a:pPr algn="ctr"/>
-          </a:p>
-        </p:txBody>
-      </p:sp>
-      <p:sp>
-        <p:nvSpPr>
-          <p:cNvPr id="18" name="TextBox 17"/>
-          <p:cNvSpPr txBox="1"/>
-          <p:nvPr/>
-        </p:nvSpPr>
-        <p:spPr>
-          <a:xfrm>
-            <a:off x="3656737" y="3319272"/>
-            <a:ext cx="777240" cy="182880"/>
-          </a:xfrm>
-          <a:prstGeom prst="rect">
-            <a:avLst/>
-          </a:prstGeom>
-          <a:noFill/>
-          <a:ln/>
-        </p:spPr>
-        <p:txBody>
-          <a:bodyPr wrap="square" anchor="ctr" lIns="25400" rIns="25400" tIns="25400" bIns="25400">
-            <a:spAutoFit/>
-          </a:bodyPr>
-          <a:lstStyle/>
-          <a:p>
-            <a:pPr algn="l">
-              <a:lnSpc>
-                <a:spcPct val="100000"/>
-              </a:lnSpc>
-              <a:spcBef>
-                <a:spcPts val="0"/>
-              </a:spcBef>
-              <a:spcAft>
-                <a:spcPts val="0"/>
-              </a:spcAft>
-            </a:pPr>
-            <a:r>
-              <a:rPr sz="1450" b="1" i="0">
-                <a:solidFill>
-                  <a:srgbClr val="20242A"/>
-                </a:solidFill>
-                <a:latin typeface="Helvetica Neue"/>
-              </a:rPr>
-              <a:t>91</a:t>
-            </a:r>
-          </a:p>
-        </p:txBody>
-      </p:sp>
-      <p:sp>
-        <p:nvSpPr>
-          <p:cNvPr id="19" name="TextBox 18"/>
-          <p:cNvSpPr txBox="1"/>
-          <p:nvPr/>
-        </p:nvSpPr>
-        <p:spPr>
-          <a:xfrm>
-            <a:off x="365760" y="3611880"/>
-            <a:ext cx="3108097" cy="256032"/>
-          </a:xfrm>
-          <a:prstGeom prst="rect">
-            <a:avLst/>
-          </a:prstGeom>
-          <a:noFill/>
-          <a:ln/>
-        </p:spPr>
-        <p:txBody>
-          <a:bodyPr wrap="square" anchor="b" lIns="25400" rIns="25400" tIns="25400" bIns="25400">
-            <a:spAutoFit/>
-          </a:bodyPr>
-          <a:lstStyle/>
-          <a:p>
-            <a:pPr algn="l">
-              <a:lnSpc>
-                <a:spcPct val="100000"/>
-              </a:lnSpc>
-              <a:spcBef>
-                <a:spcPts val="0"/>
-              </a:spcBef>
-              <a:spcAft>
-                <a:spcPts val="0"/>
-              </a:spcAft>
-            </a:pPr>
-            <a:r>
-              <a:rPr sz="1250" b="0" i="0">
-                <a:solidFill>
-                  <a:srgbClr val="8A8478"/>
-                </a:solidFill>
-                <a:latin typeface="Helvetica Neue"/>
-              </a:rPr>
-              <a:t>Groningen (recovering)</a:t>
-            </a:r>
-          </a:p>
-        </p:txBody>
-      </p:sp>
-      <p:sp>
-        <p:nvSpPr>
           <p:cNvPr id="20" name="Rounded Rectangle 19"/>
-          <p:cNvSpPr/>
-          <p:nvPr/>
-        </p:nvSpPr>
-        <p:spPr>
-          <a:xfrm>
-            <a:off x="365760" y="3867912"/>
-            <a:ext cx="3108097" cy="182880"/>
-          </a:xfrm>
-          <a:prstGeom prst="roundRect">
-            <a:avLst>
-              <a:gd name="adj" fmla="val 50000"/>
-            </a:avLst>
-          </a:prstGeom>
-          <a:solidFill>
-            <a:srgbClr val="E7DFD1"/>
-          </a:solidFill>
-          <a:ln>
-            <a:noFill/>
-          </a:ln>
-          <a:effectLst/>
-        </p:spPr>
-        <p:style>
-          <a:lnRef idx="1">
-            <a:schemeClr val="accent1"/>
-          </a:lnRef>
-          <a:fillRef idx="3">
-            <a:schemeClr val="accent1"/>
-          </a:fillRef>
-          <a:effectRef idx="2">
-            <a:schemeClr val="accent1"/>
-          </a:effectRef>
-          <a:fontRef idx="minor">
-            <a:schemeClr val="lt1"/>
-          </a:fontRef>
-        </p:style>
-        <p:txBody>
-          <a:bodyPr rtlCol="0" anchor="ctr"/>
-          <a:lstStyle/>
-          <a:p>
-            <a:pPr algn="ctr"/>
-          </a:p>
-        </p:txBody>
-      </p:sp>
-      <p:sp>
-        <p:nvSpPr>
-          <p:cNvPr id="21" name="Rounded Rectangle 20"/>
           <p:cNvSpPr/>
           <p:nvPr/>
         </p:nvSpPr>
@@ -6414,7 +6326,7 @@
       </p:sp>
       <p:sp>
         <p:nvSpPr>
-          <p:cNvPr id="22" name="TextBox 21"/>
+          <p:cNvPr id="21" name="TextBox 20"/>
           <p:cNvSpPr txBox="1"/>
           <p:nvPr/>
         </p:nvSpPr>
@@ -6460,7 +6372,7 @@
       </p:sp>
       <p:sp>
         <p:nvSpPr>
-          <p:cNvPr id="23" name="Rounded Rectangle 22"/>
+          <p:cNvPr id="22" name="Rounded Rectangle 21"/>
           <p:cNvSpPr/>
           <p:nvPr/>
         </p:nvSpPr>
@@ -6508,7 +6420,7 @@
       </p:sp>
       <p:sp>
         <p:nvSpPr>
-          <p:cNvPr id="24" name="TextBox 23"/>
+          <p:cNvPr id="23" name="TextBox 22"/>
           <p:cNvSpPr txBox="1"/>
           <p:nvPr/>
         </p:nvSpPr>
@@ -6563,7 +6475,7 @@
       </p:sp>
       <p:sp>
         <p:nvSpPr>
-          <p:cNvPr id="25" name="TextBox 24"/>
+          <p:cNvPr id="24" name="TextBox 23"/>
           <p:cNvSpPr txBox="1"/>
           <p:nvPr/>
         </p:nvSpPr>
@@ -6609,7 +6521,7 @@
       </p:sp>
       <p:sp>
         <p:nvSpPr>
-          <p:cNvPr id="26" name="Rectangle 25"/>
+          <p:cNvPr id="25" name="Rectangle 24"/>
           <p:cNvSpPr/>
           <p:nvPr/>
         </p:nvSpPr>
@@ -6653,7 +6565,7 @@
       </p:sp>
       <p:sp>
         <p:nvSpPr>
-          <p:cNvPr id="27" name="TextBox 26"/>
+          <p:cNvPr id="26" name="TextBox 25"/>
           <p:cNvSpPr txBox="1"/>
           <p:nvPr/>
         </p:nvSpPr>
@@ -6699,7 +6611,7 @@
       </p:sp>
       <p:sp>
         <p:nvSpPr>
-          <p:cNvPr id="28" name="TextBox 27"/>
+          <p:cNvPr id="27" name="TextBox 26"/>
           <p:cNvSpPr txBox="1"/>
           <p:nvPr/>
         </p:nvSpPr>
@@ -6745,7 +6657,7 @@
       </p:sp>
       <p:sp>
         <p:nvSpPr>
-          <p:cNvPr id="29" name="Rectangle 28"/>
+          <p:cNvPr id="28" name="Rectangle 27"/>
           <p:cNvSpPr/>
           <p:nvPr/>
         </p:nvSpPr>
@@ -6789,7 +6701,7 @@
       </p:sp>
       <p:sp>
         <p:nvSpPr>
-          <p:cNvPr id="30" name="TextBox 29"/>
+          <p:cNvPr id="29" name="TextBox 28"/>
           <p:cNvSpPr txBox="1"/>
           <p:nvPr/>
         </p:nvSpPr>
@@ -6835,7 +6747,7 @@
       </p:sp>
       <p:sp>
         <p:nvSpPr>
-          <p:cNvPr id="31" name="TextBox 30"/>
+          <p:cNvPr id="30" name="TextBox 29"/>
           <p:cNvSpPr txBox="1"/>
           <p:nvPr/>
         </p:nvSpPr>
@@ -6881,7 +6793,7 @@
       </p:sp>
       <p:sp>
         <p:nvSpPr>
-          <p:cNvPr id="32" name="TextBox 31"/>
+          <p:cNvPr id="31" name="TextBox 30"/>
           <p:cNvSpPr txBox="1"/>
           <p:nvPr/>
         </p:nvSpPr>
@@ -6936,7 +6848,7 @@
       </p:sp>
       <p:sp>
         <p:nvSpPr>
-          <p:cNvPr id="33" name="TextBox 32"/>
+          <p:cNvPr id="32" name="TextBox 31"/>
           <p:cNvSpPr txBox="1"/>
           <p:nvPr/>
         </p:nvSpPr>
@@ -6982,7 +6894,7 @@
       </p:sp>
       <p:sp>
         <p:nvSpPr>
-          <p:cNvPr id="34" name="TextBox 33"/>
+          <p:cNvPr id="33" name="TextBox 32"/>
           <p:cNvSpPr txBox="1"/>
           <p:nvPr/>
         </p:nvSpPr>
@@ -10151,51 +10063,7 @@
       </p:sp>
       <p:sp>
         <p:nvSpPr>
-          <p:cNvPr id="5" name="Rectangle 4"/>
-          <p:cNvSpPr/>
-          <p:nvPr/>
-        </p:nvSpPr>
-        <p:spPr>
-          <a:xfrm>
-            <a:off x="566928" y="1191006"/>
-            <a:ext cx="1097280" cy="45720"/>
-          </a:xfrm>
-          <a:prstGeom prst="rect">
-            <a:avLst/>
-          </a:prstGeom>
-          <a:solidFill>
-            <a:srgbClr val="D8542A"/>
-          </a:solidFill>
-          <a:ln>
-            <a:noFill/>
-          </a:ln>
-          <a:effectLst/>
-        </p:spPr>
-        <p:style>
-          <a:lnRef idx="1">
-            <a:schemeClr val="accent1"/>
-          </a:lnRef>
-          <a:fillRef idx="3">
-            <a:schemeClr val="accent1"/>
-          </a:fillRef>
-          <a:effectRef idx="2">
-            <a:schemeClr val="accent1"/>
-          </a:effectRef>
-          <a:fontRef idx="minor">
-            <a:schemeClr val="lt1"/>
-          </a:fontRef>
-        </p:style>
-        <p:txBody>
-          <a:bodyPr rtlCol="0" anchor="ctr"/>
-          <a:lstStyle/>
-          <a:p>
-            <a:pPr algn="ctr"/>
-          </a:p>
-        </p:txBody>
-      </p:sp>
-      <p:sp>
-        <p:nvSpPr>
-          <p:cNvPr id="6" name="TextBox 5"/>
+          <p:cNvPr id="5" name="TextBox 4"/>
           <p:cNvSpPr txBox="1"/>
           <p:nvPr/>
         </p:nvSpPr>
@@ -10241,7 +10109,7 @@
       </p:sp>
       <p:sp>
         <p:nvSpPr>
-          <p:cNvPr id="7" name="Rounded Rectangle 6"/>
+          <p:cNvPr id="6" name="Rounded Rectangle 5"/>
           <p:cNvSpPr/>
           <p:nvPr/>
         </p:nvSpPr>
@@ -10289,7 +10157,7 @@
       </p:sp>
       <p:sp>
         <p:nvSpPr>
-          <p:cNvPr id="8" name="Round Same Side Corner Rectangle 7"/>
+          <p:cNvPr id="7" name="Round Same Side Corner Rectangle 6"/>
           <p:cNvSpPr/>
           <p:nvPr/>
         </p:nvSpPr>
@@ -10336,7 +10204,7 @@
       </p:sp>
       <p:sp>
         <p:nvSpPr>
-          <p:cNvPr id="9" name="TextBox 8"/>
+          <p:cNvPr id="8" name="TextBox 7"/>
           <p:cNvSpPr txBox="1"/>
           <p:nvPr/>
         </p:nvSpPr>
@@ -10382,7 +10250,7 @@
       </p:sp>
       <p:sp>
         <p:nvSpPr>
-          <p:cNvPr id="10" name="TextBox 9"/>
+          <p:cNvPr id="9" name="TextBox 8"/>
           <p:cNvSpPr txBox="1"/>
           <p:nvPr/>
         </p:nvSpPr>
@@ -10428,7 +10296,7 @@
       </p:sp>
       <p:sp>
         <p:nvSpPr>
-          <p:cNvPr id="11" name="TextBox 10"/>
+          <p:cNvPr id="10" name="TextBox 9"/>
           <p:cNvSpPr txBox="1"/>
           <p:nvPr/>
         </p:nvSpPr>
@@ -10474,7 +10342,7 @@
       </p:sp>
       <p:sp>
         <p:nvSpPr>
-          <p:cNvPr id="12" name="Rounded Rectangle 11"/>
+          <p:cNvPr id="11" name="Rounded Rectangle 10"/>
           <p:cNvSpPr/>
           <p:nvPr/>
         </p:nvSpPr>
@@ -10522,7 +10390,7 @@
       </p:sp>
       <p:sp>
         <p:nvSpPr>
-          <p:cNvPr id="13" name="Round Same Side Corner Rectangle 12"/>
+          <p:cNvPr id="12" name="Round Same Side Corner Rectangle 11"/>
           <p:cNvSpPr/>
           <p:nvPr/>
         </p:nvSpPr>
@@ -10569,7 +10437,7 @@
       </p:sp>
       <p:sp>
         <p:nvSpPr>
-          <p:cNvPr id="14" name="TextBox 13"/>
+          <p:cNvPr id="13" name="TextBox 12"/>
           <p:cNvSpPr txBox="1"/>
           <p:nvPr/>
         </p:nvSpPr>
@@ -10615,7 +10483,7 @@
       </p:sp>
       <p:sp>
         <p:nvSpPr>
-          <p:cNvPr id="15" name="TextBox 14"/>
+          <p:cNvPr id="14" name="TextBox 13"/>
           <p:cNvSpPr txBox="1"/>
           <p:nvPr/>
         </p:nvSpPr>
@@ -10661,7 +10529,7 @@
       </p:sp>
       <p:sp>
         <p:nvSpPr>
-          <p:cNvPr id="16" name="TextBox 15"/>
+          <p:cNvPr id="15" name="TextBox 14"/>
           <p:cNvSpPr txBox="1"/>
           <p:nvPr/>
         </p:nvSpPr>
@@ -10707,7 +10575,7 @@
       </p:sp>
       <p:sp>
         <p:nvSpPr>
-          <p:cNvPr id="17" name="Rounded Rectangle 16"/>
+          <p:cNvPr id="16" name="Rounded Rectangle 15"/>
           <p:cNvSpPr/>
           <p:nvPr/>
         </p:nvSpPr>
@@ -10755,7 +10623,7 @@
       </p:sp>
       <p:sp>
         <p:nvSpPr>
-          <p:cNvPr id="18" name="Round Same Side Corner Rectangle 17"/>
+          <p:cNvPr id="17" name="Round Same Side Corner Rectangle 16"/>
           <p:cNvSpPr/>
           <p:nvPr/>
         </p:nvSpPr>
@@ -10802,7 +10670,7 @@
       </p:sp>
       <p:sp>
         <p:nvSpPr>
-          <p:cNvPr id="19" name="TextBox 18"/>
+          <p:cNvPr id="18" name="TextBox 17"/>
           <p:cNvSpPr txBox="1"/>
           <p:nvPr/>
         </p:nvSpPr>
@@ -10848,7 +10716,7 @@
       </p:sp>
       <p:sp>
         <p:nvSpPr>
-          <p:cNvPr id="20" name="TextBox 19"/>
+          <p:cNvPr id="19" name="TextBox 18"/>
           <p:cNvSpPr txBox="1"/>
           <p:nvPr/>
         </p:nvSpPr>
@@ -10894,7 +10762,7 @@
       </p:sp>
       <p:sp>
         <p:nvSpPr>
-          <p:cNvPr id="21" name="TextBox 20"/>
+          <p:cNvPr id="20" name="TextBox 19"/>
           <p:cNvSpPr txBox="1"/>
           <p:nvPr/>
         </p:nvSpPr>
@@ -10940,7 +10808,7 @@
       </p:sp>
       <p:sp>
         <p:nvSpPr>
-          <p:cNvPr id="22" name="Rounded Rectangle 21"/>
+          <p:cNvPr id="21" name="Rounded Rectangle 20"/>
           <p:cNvSpPr/>
           <p:nvPr/>
         </p:nvSpPr>
@@ -10988,7 +10856,7 @@
       </p:sp>
       <p:sp>
         <p:nvSpPr>
-          <p:cNvPr id="23" name="Round Same Side Corner Rectangle 22"/>
+          <p:cNvPr id="22" name="Round Same Side Corner Rectangle 21"/>
           <p:cNvSpPr/>
           <p:nvPr/>
         </p:nvSpPr>
@@ -11035,7 +10903,7 @@
       </p:sp>
       <p:sp>
         <p:nvSpPr>
-          <p:cNvPr id="24" name="TextBox 23"/>
+          <p:cNvPr id="23" name="TextBox 22"/>
           <p:cNvSpPr txBox="1"/>
           <p:nvPr/>
         </p:nvSpPr>
@@ -11081,7 +10949,7 @@
       </p:sp>
       <p:sp>
         <p:nvSpPr>
-          <p:cNvPr id="25" name="TextBox 24"/>
+          <p:cNvPr id="24" name="TextBox 23"/>
           <p:cNvSpPr txBox="1"/>
           <p:nvPr/>
         </p:nvSpPr>
@@ -11127,7 +10995,7 @@
       </p:sp>
       <p:sp>
         <p:nvSpPr>
-          <p:cNvPr id="26" name="TextBox 25"/>
+          <p:cNvPr id="25" name="TextBox 24"/>
           <p:cNvSpPr txBox="1"/>
           <p:nvPr/>
         </p:nvSpPr>
@@ -11173,7 +11041,7 @@
       </p:sp>
       <p:sp>
         <p:nvSpPr>
-          <p:cNvPr id="27" name="TextBox 26"/>
+          <p:cNvPr id="26" name="TextBox 25"/>
           <p:cNvSpPr txBox="1"/>
           <p:nvPr/>
         </p:nvSpPr>
@@ -11228,7 +11096,7 @@
       </p:sp>
       <p:sp>
         <p:nvSpPr>
-          <p:cNvPr id="28" name="TextBox 27"/>
+          <p:cNvPr id="27" name="TextBox 26"/>
           <p:cNvSpPr txBox="1"/>
           <p:nvPr/>
         </p:nvSpPr>
@@ -11274,7 +11142,7 @@
       </p:sp>
       <p:sp>
         <p:nvSpPr>
-          <p:cNvPr id="29" name="TextBox 28"/>
+          <p:cNvPr id="28" name="TextBox 27"/>
           <p:cNvSpPr txBox="1"/>
           <p:nvPr/>
         </p:nvSpPr>
@@ -11474,51 +11342,7 @@
       </p:sp>
       <p:sp>
         <p:nvSpPr>
-          <p:cNvPr id="5" name="Rectangle 4"/>
-          <p:cNvSpPr/>
-          <p:nvPr/>
-        </p:nvSpPr>
-        <p:spPr>
-          <a:xfrm>
-            <a:off x="566928" y="1191006"/>
-            <a:ext cx="1097280" cy="45720"/>
-          </a:xfrm>
-          <a:prstGeom prst="rect">
-            <a:avLst/>
-          </a:prstGeom>
-          <a:solidFill>
-            <a:srgbClr val="D8542A"/>
-          </a:solidFill>
-          <a:ln>
-            <a:noFill/>
-          </a:ln>
-          <a:effectLst/>
-        </p:spPr>
-        <p:style>
-          <a:lnRef idx="1">
-            <a:schemeClr val="accent1"/>
-          </a:lnRef>
-          <a:fillRef idx="3">
-            <a:schemeClr val="accent1"/>
-          </a:fillRef>
-          <a:effectRef idx="2">
-            <a:schemeClr val="accent1"/>
-          </a:effectRef>
-          <a:fontRef idx="minor">
-            <a:schemeClr val="lt1"/>
-          </a:fontRef>
-        </p:style>
-        <p:txBody>
-          <a:bodyPr rtlCol="0" anchor="ctr"/>
-          <a:lstStyle/>
-          <a:p>
-            <a:pPr algn="ctr"/>
-          </a:p>
-        </p:txBody>
-      </p:sp>
-      <p:sp>
-        <p:nvSpPr>
-          <p:cNvPr id="6" name="TextBox 5"/>
+          <p:cNvPr id="5" name="TextBox 4"/>
           <p:cNvSpPr txBox="1"/>
           <p:nvPr/>
         </p:nvSpPr>
@@ -11564,7 +11388,7 @@
       </p:sp>
       <p:graphicFrame>
         <p:nvGraphicFramePr>
-          <p:cNvPr id="7" name="Chart 6"/>
+          <p:cNvPr id="6" name="Chart 5"/>
           <p:cNvGraphicFramePr>
             <a:graphicFrameLocks noGrp="1"/>
           </p:cNvGraphicFramePr>
@@ -11582,7 +11406,7 @@
       </p:graphicFrame>
       <p:sp>
         <p:nvSpPr>
-          <p:cNvPr id="8" name="TextBox 7"/>
+          <p:cNvPr id="7" name="TextBox 6"/>
           <p:cNvSpPr txBox="1"/>
           <p:nvPr/>
         </p:nvSpPr>
@@ -11628,7 +11452,7 @@
       </p:sp>
       <p:sp>
         <p:nvSpPr>
-          <p:cNvPr id="9" name="TextBox 8"/>
+          <p:cNvPr id="8" name="TextBox 7"/>
           <p:cNvSpPr txBox="1"/>
           <p:nvPr/>
         </p:nvSpPr>
@@ -11674,7 +11498,7 @@
       </p:sp>
       <p:sp>
         <p:nvSpPr>
-          <p:cNvPr id="10" name="TextBox 9"/>
+          <p:cNvPr id="9" name="TextBox 8"/>
           <p:cNvSpPr txBox="1"/>
           <p:nvPr/>
         </p:nvSpPr>
@@ -11720,7 +11544,7 @@
       </p:sp>
       <p:sp>
         <p:nvSpPr>
-          <p:cNvPr id="11" name="Rectangle 10"/>
+          <p:cNvPr id="10" name="Rectangle 9"/>
           <p:cNvSpPr/>
           <p:nvPr/>
         </p:nvSpPr>
@@ -11764,7 +11588,7 @@
       </p:sp>
       <p:sp>
         <p:nvSpPr>
-          <p:cNvPr id="12" name="TextBox 11"/>
+          <p:cNvPr id="11" name="TextBox 10"/>
           <p:cNvSpPr txBox="1"/>
           <p:nvPr/>
         </p:nvSpPr>
@@ -11819,7 +11643,7 @@
       </p:sp>
       <p:sp>
         <p:nvSpPr>
-          <p:cNvPr id="13" name="TextBox 12"/>
+          <p:cNvPr id="12" name="TextBox 11"/>
           <p:cNvSpPr txBox="1"/>
           <p:nvPr/>
         </p:nvSpPr>
@@ -11865,7 +11689,7 @@
       </p:sp>
       <p:sp>
         <p:nvSpPr>
-          <p:cNvPr id="14" name="TextBox 13"/>
+          <p:cNvPr id="13" name="TextBox 12"/>
           <p:cNvSpPr txBox="1"/>
           <p:nvPr/>
         </p:nvSpPr>
@@ -11920,7 +11744,7 @@
       </p:sp>
       <p:sp>
         <p:nvSpPr>
-          <p:cNvPr id="15" name="TextBox 14"/>
+          <p:cNvPr id="14" name="TextBox 13"/>
           <p:cNvSpPr txBox="1"/>
           <p:nvPr/>
         </p:nvSpPr>
@@ -11966,7 +11790,7 @@
       </p:sp>
       <p:sp>
         <p:nvSpPr>
-          <p:cNvPr id="16" name="TextBox 15"/>
+          <p:cNvPr id="15" name="TextBox 14"/>
           <p:cNvSpPr txBox="1"/>
           <p:nvPr/>
         </p:nvSpPr>
@@ -12166,51 +11990,7 @@
       </p:sp>
       <p:sp>
         <p:nvSpPr>
-          <p:cNvPr id="5" name="Rectangle 4"/>
-          <p:cNvSpPr/>
-          <p:nvPr/>
-        </p:nvSpPr>
-        <p:spPr>
-          <a:xfrm>
-            <a:off x="566928" y="1191006"/>
-            <a:ext cx="1097280" cy="45720"/>
-          </a:xfrm>
-          <a:prstGeom prst="rect">
-            <a:avLst/>
-          </a:prstGeom>
-          <a:solidFill>
-            <a:srgbClr val="D8542A"/>
-          </a:solidFill>
-          <a:ln>
-            <a:noFill/>
-          </a:ln>
-          <a:effectLst/>
-        </p:spPr>
-        <p:style>
-          <a:lnRef idx="1">
-            <a:schemeClr val="accent1"/>
-          </a:lnRef>
-          <a:fillRef idx="3">
-            <a:schemeClr val="accent1"/>
-          </a:fillRef>
-          <a:effectRef idx="2">
-            <a:schemeClr val="accent1"/>
-          </a:effectRef>
-          <a:fontRef idx="minor">
-            <a:schemeClr val="lt1"/>
-          </a:fontRef>
-        </p:style>
-        <p:txBody>
-          <a:bodyPr rtlCol="0" anchor="ctr"/>
-          <a:lstStyle/>
-          <a:p>
-            <a:pPr algn="ctr"/>
-          </a:p>
-        </p:txBody>
-      </p:sp>
-      <p:sp>
-        <p:nvSpPr>
-          <p:cNvPr id="6" name="TextBox 5"/>
+          <p:cNvPr id="5" name="TextBox 4"/>
           <p:cNvSpPr txBox="1"/>
           <p:nvPr/>
         </p:nvSpPr>
@@ -12256,7 +12036,7 @@
       </p:sp>
       <p:graphicFrame>
         <p:nvGraphicFramePr>
-          <p:cNvPr id="7" name="Chart 6"/>
+          <p:cNvPr id="6" name="Chart 5"/>
           <p:cNvGraphicFramePr>
             <a:graphicFrameLocks noGrp="1"/>
           </p:cNvGraphicFramePr>
@@ -12274,7 +12054,7 @@
       </p:graphicFrame>
       <p:sp>
         <p:nvSpPr>
-          <p:cNvPr id="8" name="TextBox 7"/>
+          <p:cNvPr id="7" name="TextBox 6"/>
           <p:cNvSpPr txBox="1"/>
           <p:nvPr/>
         </p:nvSpPr>
@@ -12320,7 +12100,7 @@
       </p:sp>
       <p:sp>
         <p:nvSpPr>
-          <p:cNvPr id="9" name="TextBox 8"/>
+          <p:cNvPr id="8" name="TextBox 7"/>
           <p:cNvSpPr txBox="1"/>
           <p:nvPr/>
         </p:nvSpPr>
@@ -12365,7 +12145,7 @@
       </p:sp>
       <p:sp>
         <p:nvSpPr>
-          <p:cNvPr id="10" name="TextBox 9"/>
+          <p:cNvPr id="9" name="TextBox 8"/>
           <p:cNvSpPr txBox="1"/>
           <p:nvPr/>
         </p:nvSpPr>
@@ -12429,7 +12209,7 @@
       </p:sp>
       <p:sp>
         <p:nvSpPr>
-          <p:cNvPr id="11" name="Rounded Rectangle 10"/>
+          <p:cNvPr id="10" name="Rounded Rectangle 9"/>
           <p:cNvSpPr/>
           <p:nvPr/>
         </p:nvSpPr>
@@ -12475,7 +12255,7 @@
       </p:sp>
       <p:sp>
         <p:nvSpPr>
-          <p:cNvPr id="12" name="Rectangle 11"/>
+          <p:cNvPr id="11" name="Rectangle 10"/>
           <p:cNvSpPr/>
           <p:nvPr/>
         </p:nvSpPr>
@@ -12519,7 +12299,7 @@
       </p:sp>
       <p:sp>
         <p:nvSpPr>
-          <p:cNvPr id="13" name="TextBox 12"/>
+          <p:cNvPr id="12" name="TextBox 11"/>
           <p:cNvSpPr txBox="1"/>
           <p:nvPr/>
         </p:nvSpPr>
@@ -12574,7 +12354,7 @@
       </p:sp>
       <p:sp>
         <p:nvSpPr>
-          <p:cNvPr id="14" name="TextBox 13"/>
+          <p:cNvPr id="13" name="TextBox 12"/>
           <p:cNvSpPr txBox="1"/>
           <p:nvPr/>
         </p:nvSpPr>
@@ -12629,7 +12409,7 @@
       </p:sp>
       <p:sp>
         <p:nvSpPr>
-          <p:cNvPr id="15" name="TextBox 14"/>
+          <p:cNvPr id="14" name="TextBox 13"/>
           <p:cNvSpPr txBox="1"/>
           <p:nvPr/>
         </p:nvSpPr>
@@ -12675,7 +12455,7 @@
       </p:sp>
       <p:sp>
         <p:nvSpPr>
-          <p:cNvPr id="16" name="TextBox 15"/>
+          <p:cNvPr id="15" name="TextBox 14"/>
           <p:cNvSpPr txBox="1"/>
           <p:nvPr/>
         </p:nvSpPr>
@@ -12875,51 +12655,7 @@
       </p:sp>
       <p:sp>
         <p:nvSpPr>
-          <p:cNvPr id="5" name="Rectangle 4"/>
-          <p:cNvSpPr/>
-          <p:nvPr/>
-        </p:nvSpPr>
-        <p:spPr>
-          <a:xfrm>
-            <a:off x="566928" y="1191006"/>
-            <a:ext cx="1097280" cy="45720"/>
-          </a:xfrm>
-          <a:prstGeom prst="rect">
-            <a:avLst/>
-          </a:prstGeom>
-          <a:solidFill>
-            <a:srgbClr val="0E5C63"/>
-          </a:solidFill>
-          <a:ln>
-            <a:noFill/>
-          </a:ln>
-          <a:effectLst/>
-        </p:spPr>
-        <p:style>
-          <a:lnRef idx="1">
-            <a:schemeClr val="accent1"/>
-          </a:lnRef>
-          <a:fillRef idx="3">
-            <a:schemeClr val="accent1"/>
-          </a:fillRef>
-          <a:effectRef idx="2">
-            <a:schemeClr val="accent1"/>
-          </a:effectRef>
-          <a:fontRef idx="minor">
-            <a:schemeClr val="lt1"/>
-          </a:fontRef>
-        </p:style>
-        <p:txBody>
-          <a:bodyPr rtlCol="0" anchor="ctr"/>
-          <a:lstStyle/>
-          <a:p>
-            <a:pPr algn="ctr"/>
-          </a:p>
-        </p:txBody>
-      </p:sp>
-      <p:sp>
-        <p:nvSpPr>
-          <p:cNvPr id="6" name="Rounded Rectangle 5"/>
+          <p:cNvPr id="5" name="Rounded Rectangle 4"/>
           <p:cNvSpPr/>
           <p:nvPr/>
         </p:nvSpPr>
@@ -12967,7 +12703,7 @@
       </p:sp>
       <p:sp>
         <p:nvSpPr>
-          <p:cNvPr id="7" name="TextBox 6"/>
+          <p:cNvPr id="6" name="TextBox 5"/>
           <p:cNvSpPr txBox="1"/>
           <p:nvPr/>
         </p:nvSpPr>
@@ -13013,7 +12749,7 @@
       </p:sp>
       <p:sp>
         <p:nvSpPr>
-          <p:cNvPr id="8" name="TextBox 7"/>
+          <p:cNvPr id="7" name="TextBox 6"/>
           <p:cNvSpPr txBox="1"/>
           <p:nvPr/>
         </p:nvSpPr>
@@ -13081,7 +12817,7 @@
       </p:sp>
       <p:sp>
         <p:nvSpPr>
-          <p:cNvPr id="9" name="TextBox 8"/>
+          <p:cNvPr id="8" name="TextBox 7"/>
           <p:cNvSpPr txBox="1"/>
           <p:nvPr/>
         </p:nvSpPr>
@@ -13127,7 +12863,7 @@
       </p:sp>
       <p:sp>
         <p:nvSpPr>
-          <p:cNvPr id="10" name="Rounded Rectangle 9"/>
+          <p:cNvPr id="9" name="Rounded Rectangle 8"/>
           <p:cNvSpPr/>
           <p:nvPr/>
         </p:nvSpPr>
@@ -13173,7 +12909,7 @@
       </p:sp>
       <p:sp>
         <p:nvSpPr>
-          <p:cNvPr id="11" name="Rounded Rectangle 10"/>
+          <p:cNvPr id="10" name="Rounded Rectangle 9"/>
           <p:cNvSpPr/>
           <p:nvPr/>
         </p:nvSpPr>
@@ -13219,7 +12955,7 @@
       </p:sp>
       <p:sp>
         <p:nvSpPr>
-          <p:cNvPr id="12" name="TextBox 11"/>
+          <p:cNvPr id="11" name="TextBox 10"/>
           <p:cNvSpPr txBox="1"/>
           <p:nvPr/>
         </p:nvSpPr>
@@ -13265,7 +13001,7 @@
       </p:sp>
       <p:sp>
         <p:nvSpPr>
-          <p:cNvPr id="13" name="TextBox 12"/>
+          <p:cNvPr id="12" name="TextBox 11"/>
           <p:cNvSpPr txBox="1"/>
           <p:nvPr/>
         </p:nvSpPr>
@@ -13320,7 +13056,7 @@
       </p:sp>
       <p:sp>
         <p:nvSpPr>
-          <p:cNvPr id="14" name="Rounded Rectangle 13"/>
+          <p:cNvPr id="13" name="Rounded Rectangle 12"/>
           <p:cNvSpPr/>
           <p:nvPr/>
         </p:nvSpPr>
@@ -13368,7 +13104,7 @@
       </p:sp>
       <p:sp>
         <p:nvSpPr>
-          <p:cNvPr id="15" name="TextBox 14"/>
+          <p:cNvPr id="14" name="TextBox 13"/>
           <p:cNvSpPr txBox="1"/>
           <p:nvPr/>
         </p:nvSpPr>
@@ -13414,7 +13150,7 @@
       </p:sp>
       <p:sp>
         <p:nvSpPr>
-          <p:cNvPr id="16" name="TextBox 15"/>
+          <p:cNvPr id="15" name="TextBox 14"/>
           <p:cNvSpPr txBox="1"/>
           <p:nvPr/>
         </p:nvSpPr>
@@ -13460,7 +13196,7 @@
       </p:sp>
       <p:sp>
         <p:nvSpPr>
-          <p:cNvPr id="17" name="TextBox 16"/>
+          <p:cNvPr id="16" name="TextBox 15"/>
           <p:cNvSpPr txBox="1"/>
           <p:nvPr/>
         </p:nvSpPr>
@@ -13506,7 +13242,7 @@
       </p:sp>
       <p:sp>
         <p:nvSpPr>
-          <p:cNvPr id="18" name="TextBox 17"/>
+          <p:cNvPr id="17" name="TextBox 16"/>
           <p:cNvSpPr txBox="1"/>
           <p:nvPr/>
         </p:nvSpPr>
@@ -13552,7 +13288,7 @@
       </p:sp>
       <p:sp>
         <p:nvSpPr>
-          <p:cNvPr id="19" name="TextBox 18"/>
+          <p:cNvPr id="18" name="TextBox 17"/>
           <p:cNvSpPr txBox="1"/>
           <p:nvPr/>
         </p:nvSpPr>
@@ -13607,7 +13343,7 @@
       </p:sp>
       <p:sp>
         <p:nvSpPr>
-          <p:cNvPr id="20" name="TextBox 19"/>
+          <p:cNvPr id="19" name="TextBox 18"/>
           <p:cNvSpPr txBox="1"/>
           <p:nvPr/>
         </p:nvSpPr>
@@ -13653,7 +13389,7 @@
       </p:sp>
       <p:sp>
         <p:nvSpPr>
-          <p:cNvPr id="21" name="TextBox 20"/>
+          <p:cNvPr id="20" name="TextBox 19"/>
           <p:cNvSpPr txBox="1"/>
           <p:nvPr/>
         </p:nvSpPr>
@@ -13853,51 +13589,7 @@
       </p:sp>
       <p:sp>
         <p:nvSpPr>
-          <p:cNvPr id="5" name="Rectangle 4"/>
-          <p:cNvSpPr/>
-          <p:nvPr/>
-        </p:nvSpPr>
-        <p:spPr>
-          <a:xfrm>
-            <a:off x="566928" y="1191006"/>
-            <a:ext cx="1097280" cy="45720"/>
-          </a:xfrm>
-          <a:prstGeom prst="rect">
-            <a:avLst/>
-          </a:prstGeom>
-          <a:solidFill>
-            <a:srgbClr val="D8542A"/>
-          </a:solidFill>
-          <a:ln>
-            <a:noFill/>
-          </a:ln>
-          <a:effectLst/>
-        </p:spPr>
-        <p:style>
-          <a:lnRef idx="1">
-            <a:schemeClr val="accent1"/>
-          </a:lnRef>
-          <a:fillRef idx="3">
-            <a:schemeClr val="accent1"/>
-          </a:fillRef>
-          <a:effectRef idx="2">
-            <a:schemeClr val="accent1"/>
-          </a:effectRef>
-          <a:fontRef idx="minor">
-            <a:schemeClr val="lt1"/>
-          </a:fontRef>
-        </p:style>
-        <p:txBody>
-          <a:bodyPr rtlCol="0" anchor="ctr"/>
-          <a:lstStyle/>
-          <a:p>
-            <a:pPr algn="ctr"/>
-          </a:p>
-        </p:txBody>
-      </p:sp>
-      <p:sp>
-        <p:nvSpPr>
-          <p:cNvPr id="6" name="TextBox 5"/>
+          <p:cNvPr id="5" name="TextBox 4"/>
           <p:cNvSpPr txBox="1"/>
           <p:nvPr/>
         </p:nvSpPr>
@@ -13943,7 +13635,7 @@
       </p:sp>
       <p:sp>
         <p:nvSpPr>
-          <p:cNvPr id="7" name="Rounded Rectangle 6"/>
+          <p:cNvPr id="6" name="Rounded Rectangle 5"/>
           <p:cNvSpPr/>
           <p:nvPr/>
         </p:nvSpPr>
@@ -13991,7 +13683,7 @@
       </p:sp>
       <p:sp>
         <p:nvSpPr>
-          <p:cNvPr id="8" name="Rectangle 7"/>
+          <p:cNvPr id="7" name="Rectangle 6"/>
           <p:cNvSpPr/>
           <p:nvPr/>
         </p:nvSpPr>
@@ -14035,7 +13727,7 @@
       </p:sp>
       <p:sp>
         <p:nvSpPr>
-          <p:cNvPr id="9" name="Oval 8"/>
+          <p:cNvPr id="8" name="Oval 7"/>
           <p:cNvSpPr/>
           <p:nvPr/>
         </p:nvSpPr>
@@ -14079,7 +13771,7 @@
       </p:sp>
       <p:pic>
         <p:nvPicPr>
-          <p:cNvPr id="10" name="Picture 9" descr="heartbeat_D8542A.png"/>
+          <p:cNvPr id="9" name="Picture 8" descr="heartbeat_D8542A.png"/>
           <p:cNvPicPr>
             <a:picLocks noChangeAspect="1"/>
           </p:cNvPicPr>
@@ -14103,7 +13795,7 @@
       </p:pic>
       <p:sp>
         <p:nvSpPr>
-          <p:cNvPr id="11" name="TextBox 10"/>
+          <p:cNvPr id="10" name="TextBox 9"/>
           <p:cNvSpPr txBox="1"/>
           <p:nvPr/>
         </p:nvSpPr>
@@ -14149,7 +13841,7 @@
       </p:sp>
       <p:sp>
         <p:nvSpPr>
-          <p:cNvPr id="12" name="TextBox 11"/>
+          <p:cNvPr id="11" name="TextBox 10"/>
           <p:cNvSpPr txBox="1"/>
           <p:nvPr/>
         </p:nvSpPr>
@@ -14195,7 +13887,7 @@
       </p:sp>
       <p:sp>
         <p:nvSpPr>
-          <p:cNvPr id="13" name="Rounded Rectangle 12"/>
+          <p:cNvPr id="12" name="Rounded Rectangle 11"/>
           <p:cNvSpPr/>
           <p:nvPr/>
         </p:nvSpPr>
@@ -14243,7 +13935,7 @@
       </p:sp>
       <p:sp>
         <p:nvSpPr>
-          <p:cNvPr id="14" name="Rectangle 13"/>
+          <p:cNvPr id="13" name="Rectangle 12"/>
           <p:cNvSpPr/>
           <p:nvPr/>
         </p:nvSpPr>
@@ -14287,7 +13979,7 @@
       </p:sp>
       <p:sp>
         <p:nvSpPr>
-          <p:cNvPr id="15" name="Oval 14"/>
+          <p:cNvPr id="14" name="Oval 13"/>
           <p:cNvSpPr/>
           <p:nvPr/>
         </p:nvSpPr>
@@ -14331,7 +14023,7 @@
       </p:sp>
       <p:pic>
         <p:nvPicPr>
-          <p:cNvPr id="16" name="Picture 15" descr="cpu_0E5C63.png"/>
+          <p:cNvPr id="15" name="Picture 14" descr="cpu_0E5C63.png"/>
           <p:cNvPicPr>
             <a:picLocks noChangeAspect="1"/>
           </p:cNvPicPr>
@@ -14355,7 +14047,7 @@
       </p:pic>
       <p:sp>
         <p:nvSpPr>
-          <p:cNvPr id="17" name="TextBox 16"/>
+          <p:cNvPr id="16" name="TextBox 15"/>
           <p:cNvSpPr txBox="1"/>
           <p:nvPr/>
         </p:nvSpPr>
@@ -14401,7 +14093,7 @@
       </p:sp>
       <p:sp>
         <p:nvSpPr>
-          <p:cNvPr id="18" name="TextBox 17"/>
+          <p:cNvPr id="17" name="TextBox 16"/>
           <p:cNvSpPr txBox="1"/>
           <p:nvPr/>
         </p:nvSpPr>
@@ -14447,7 +14139,7 @@
       </p:sp>
       <p:sp>
         <p:nvSpPr>
-          <p:cNvPr id="19" name="Rounded Rectangle 18"/>
+          <p:cNvPr id="18" name="Rounded Rectangle 17"/>
           <p:cNvSpPr/>
           <p:nvPr/>
         </p:nvSpPr>
@@ -14495,7 +14187,7 @@
       </p:sp>
       <p:sp>
         <p:nvSpPr>
-          <p:cNvPr id="20" name="Rectangle 19"/>
+          <p:cNvPr id="19" name="Rectangle 18"/>
           <p:cNvSpPr/>
           <p:nvPr/>
         </p:nvSpPr>
@@ -14539,7 +14231,7 @@
       </p:sp>
       <p:sp>
         <p:nvSpPr>
-          <p:cNvPr id="21" name="Oval 20"/>
+          <p:cNvPr id="20" name="Oval 19"/>
           <p:cNvSpPr/>
           <p:nvPr/>
         </p:nvSpPr>
@@ -14583,7 +14275,7 @@
       </p:sp>
       <p:pic>
         <p:nvPicPr>
-          <p:cNvPr id="22" name="Picture 21" descr="tools_C08A2E.png"/>
+          <p:cNvPr id="21" name="Picture 20" descr="tools_C08A2E.png"/>
           <p:cNvPicPr>
             <a:picLocks noChangeAspect="1"/>
           </p:cNvPicPr>
@@ -14607,7 +14299,7 @@
       </p:pic>
       <p:sp>
         <p:nvSpPr>
-          <p:cNvPr id="23" name="TextBox 22"/>
+          <p:cNvPr id="22" name="TextBox 21"/>
           <p:cNvSpPr txBox="1"/>
           <p:nvPr/>
         </p:nvSpPr>
@@ -14653,7 +14345,7 @@
       </p:sp>
       <p:sp>
         <p:nvSpPr>
-          <p:cNvPr id="24" name="TextBox 23"/>
+          <p:cNvPr id="23" name="TextBox 22"/>
           <p:cNvSpPr txBox="1"/>
           <p:nvPr/>
         </p:nvSpPr>
@@ -14699,7 +14391,7 @@
       </p:sp>
       <p:sp>
         <p:nvSpPr>
-          <p:cNvPr id="25" name="Rounded Rectangle 24"/>
+          <p:cNvPr id="24" name="Rounded Rectangle 23"/>
           <p:cNvSpPr/>
           <p:nvPr/>
         </p:nvSpPr>
@@ -14747,7 +14439,7 @@
       </p:sp>
       <p:sp>
         <p:nvSpPr>
-          <p:cNvPr id="26" name="Rectangle 25"/>
+          <p:cNvPr id="25" name="Rectangle 24"/>
           <p:cNvSpPr/>
           <p:nvPr/>
         </p:nvSpPr>
@@ -14791,7 +14483,7 @@
       </p:sp>
       <p:sp>
         <p:nvSpPr>
-          <p:cNvPr id="27" name="Oval 26"/>
+          <p:cNvPr id="26" name="Oval 25"/>
           <p:cNvSpPr/>
           <p:nvPr/>
         </p:nvSpPr>
@@ -14835,7 +14527,7 @@
       </p:sp>
       <p:pic>
         <p:nvPicPr>
-          <p:cNvPr id="28" name="Picture 27" descr="school_3E6B57.png"/>
+          <p:cNvPr id="27" name="Picture 26" descr="school_3E6B57.png"/>
           <p:cNvPicPr>
             <a:picLocks noChangeAspect="1"/>
           </p:cNvPicPr>
@@ -14859,7 +14551,7 @@
       </p:pic>
       <p:sp>
         <p:nvSpPr>
-          <p:cNvPr id="29" name="TextBox 28"/>
+          <p:cNvPr id="28" name="TextBox 27"/>
           <p:cNvSpPr txBox="1"/>
           <p:nvPr/>
         </p:nvSpPr>
@@ -14905,7 +14597,7 @@
       </p:sp>
       <p:sp>
         <p:nvSpPr>
-          <p:cNvPr id="30" name="TextBox 29"/>
+          <p:cNvPr id="29" name="TextBox 28"/>
           <p:cNvSpPr txBox="1"/>
           <p:nvPr/>
         </p:nvSpPr>
@@ -14951,7 +14643,7 @@
       </p:sp>
       <p:sp>
         <p:nvSpPr>
-          <p:cNvPr id="31" name="Rounded Rectangle 30"/>
+          <p:cNvPr id="30" name="Rounded Rectangle 29"/>
           <p:cNvSpPr/>
           <p:nvPr/>
         </p:nvSpPr>
@@ -14999,7 +14691,7 @@
       </p:sp>
       <p:sp>
         <p:nvSpPr>
-          <p:cNvPr id="32" name="Rectangle 31"/>
+          <p:cNvPr id="31" name="Rectangle 30"/>
           <p:cNvSpPr/>
           <p:nvPr/>
         </p:nvSpPr>
@@ -15043,7 +14735,7 @@
       </p:sp>
       <p:sp>
         <p:nvSpPr>
-          <p:cNvPr id="33" name="Oval 32"/>
+          <p:cNvPr id="32" name="Oval 31"/>
           <p:cNvSpPr/>
           <p:nvPr/>
         </p:nvSpPr>
@@ -15087,7 +14779,7 @@
       </p:sp>
       <p:pic>
         <p:nvPicPr>
-          <p:cNvPr id="34" name="Picture 33" descr="truck-delivery_9C4722.png"/>
+          <p:cNvPr id="33" name="Picture 32" descr="truck-delivery_9C4722.png"/>
           <p:cNvPicPr>
             <a:picLocks noChangeAspect="1"/>
           </p:cNvPicPr>
@@ -15111,7 +14803,7 @@
       </p:pic>
       <p:sp>
         <p:nvSpPr>
-          <p:cNvPr id="35" name="TextBox 34"/>
+          <p:cNvPr id="34" name="TextBox 33"/>
           <p:cNvSpPr txBox="1"/>
           <p:nvPr/>
         </p:nvSpPr>
@@ -15157,7 +14849,7 @@
       </p:sp>
       <p:sp>
         <p:nvSpPr>
-          <p:cNvPr id="36" name="TextBox 35"/>
+          <p:cNvPr id="35" name="TextBox 34"/>
           <p:cNvSpPr txBox="1"/>
           <p:nvPr/>
         </p:nvSpPr>
@@ -15203,7 +14895,7 @@
       </p:sp>
       <p:sp>
         <p:nvSpPr>
-          <p:cNvPr id="37" name="TextBox 36"/>
+          <p:cNvPr id="36" name="TextBox 35"/>
           <p:cNvSpPr txBox="1"/>
           <p:nvPr/>
         </p:nvSpPr>
@@ -15258,7 +14950,7 @@
       </p:sp>
       <p:sp>
         <p:nvSpPr>
-          <p:cNvPr id="38" name="TextBox 37"/>
+          <p:cNvPr id="37" name="TextBox 36"/>
           <p:cNvSpPr txBox="1"/>
           <p:nvPr/>
         </p:nvSpPr>
@@ -15304,7 +14996,7 @@
       </p:sp>
       <p:sp>
         <p:nvSpPr>
-          <p:cNvPr id="39" name="TextBox 38"/>
+          <p:cNvPr id="38" name="TextBox 37"/>
           <p:cNvSpPr txBox="1"/>
           <p:nvPr/>
         </p:nvSpPr>
@@ -15504,51 +15196,7 @@
       </p:sp>
       <p:sp>
         <p:nvSpPr>
-          <p:cNvPr id="5" name="Rectangle 4"/>
-          <p:cNvSpPr/>
-          <p:nvPr/>
-        </p:nvSpPr>
-        <p:spPr>
-          <a:xfrm>
-            <a:off x="566928" y="1191006"/>
-            <a:ext cx="1097280" cy="45720"/>
-          </a:xfrm>
-          <a:prstGeom prst="rect">
-            <a:avLst/>
-          </a:prstGeom>
-          <a:solidFill>
-            <a:srgbClr val="0E5C63"/>
-          </a:solidFill>
-          <a:ln>
-            <a:noFill/>
-          </a:ln>
-          <a:effectLst/>
-        </p:spPr>
-        <p:style>
-          <a:lnRef idx="1">
-            <a:schemeClr val="accent1"/>
-          </a:lnRef>
-          <a:fillRef idx="3">
-            <a:schemeClr val="accent1"/>
-          </a:fillRef>
-          <a:effectRef idx="2">
-            <a:schemeClr val="accent1"/>
-          </a:effectRef>
-          <a:fontRef idx="minor">
-            <a:schemeClr val="lt1"/>
-          </a:fontRef>
-        </p:style>
-        <p:txBody>
-          <a:bodyPr rtlCol="0" anchor="ctr"/>
-          <a:lstStyle/>
-          <a:p>
-            <a:pPr algn="ctr"/>
-          </a:p>
-        </p:txBody>
-      </p:sp>
-      <p:sp>
-        <p:nvSpPr>
-          <p:cNvPr id="6" name="TextBox 5"/>
+          <p:cNvPr id="5" name="TextBox 4"/>
           <p:cNvSpPr txBox="1"/>
           <p:nvPr/>
         </p:nvSpPr>
@@ -15594,7 +15242,7 @@
       </p:sp>
       <p:graphicFrame>
         <p:nvGraphicFramePr>
-          <p:cNvPr id="7" name="Chart 6"/>
+          <p:cNvPr id="6" name="Chart 5"/>
           <p:cNvGraphicFramePr>
             <a:graphicFrameLocks noGrp="1"/>
           </p:cNvGraphicFramePr>
@@ -15612,7 +15260,7 @@
       </p:graphicFrame>
       <p:sp>
         <p:nvSpPr>
-          <p:cNvPr id="8" name="TextBox 7"/>
+          <p:cNvPr id="7" name="TextBox 6"/>
           <p:cNvSpPr txBox="1"/>
           <p:nvPr/>
         </p:nvSpPr>
@@ -15658,7 +15306,7 @@
       </p:sp>
       <p:sp>
         <p:nvSpPr>
-          <p:cNvPr id="9" name="TextBox 8"/>
+          <p:cNvPr id="8" name="TextBox 7"/>
           <p:cNvSpPr txBox="1"/>
           <p:nvPr/>
         </p:nvSpPr>
@@ -15704,7 +15352,7 @@
       </p:sp>
       <p:sp>
         <p:nvSpPr>
-          <p:cNvPr id="10" name="TextBox 9"/>
+          <p:cNvPr id="9" name="TextBox 8"/>
           <p:cNvSpPr txBox="1"/>
           <p:nvPr/>
         </p:nvSpPr>
@@ -15750,7 +15398,7 @@
       </p:sp>
       <p:sp>
         <p:nvSpPr>
-          <p:cNvPr id="11" name="Rectangle 10"/>
+          <p:cNvPr id="10" name="Rectangle 9"/>
           <p:cNvSpPr/>
           <p:nvPr/>
         </p:nvSpPr>
@@ -15794,7 +15442,7 @@
       </p:sp>
       <p:sp>
         <p:nvSpPr>
-          <p:cNvPr id="12" name="TextBox 11"/>
+          <p:cNvPr id="11" name="TextBox 10"/>
           <p:cNvSpPr txBox="1"/>
           <p:nvPr/>
         </p:nvSpPr>
@@ -15849,7 +15497,7 @@
       </p:sp>
       <p:sp>
         <p:nvSpPr>
-          <p:cNvPr id="13" name="TextBox 12"/>
+          <p:cNvPr id="12" name="TextBox 11"/>
           <p:cNvSpPr txBox="1"/>
           <p:nvPr/>
         </p:nvSpPr>
@@ -15895,7 +15543,7 @@
       </p:sp>
       <p:sp>
         <p:nvSpPr>
-          <p:cNvPr id="14" name="TextBox 13"/>
+          <p:cNvPr id="13" name="TextBox 12"/>
           <p:cNvSpPr txBox="1"/>
           <p:nvPr/>
         </p:nvSpPr>
@@ -15950,7 +15598,7 @@
       </p:sp>
       <p:sp>
         <p:nvSpPr>
-          <p:cNvPr id="15" name="TextBox 14"/>
+          <p:cNvPr id="14" name="TextBox 13"/>
           <p:cNvSpPr txBox="1"/>
           <p:nvPr/>
         </p:nvSpPr>
@@ -15996,7 +15644,7 @@
       </p:sp>
       <p:sp>
         <p:nvSpPr>
-          <p:cNvPr id="16" name="TextBox 15"/>
+          <p:cNvPr id="15" name="TextBox 14"/>
           <p:cNvSpPr txBox="1"/>
           <p:nvPr/>
         </p:nvSpPr>
@@ -16196,17 +15844,709 @@
       </p:sp>
       <p:sp>
         <p:nvSpPr>
-          <p:cNvPr id="5" name="Rectangle 4"/>
+          <p:cNvPr id="5" name="TextBox 4"/>
+          <p:cNvSpPr txBox="1"/>
+          <p:nvPr/>
+        </p:nvSpPr>
+        <p:spPr>
+          <a:xfrm>
+            <a:off x="365760" y="1508760"/>
+            <a:ext cx="5088367" cy="274320"/>
+          </a:xfrm>
+          <a:prstGeom prst="rect">
+            <a:avLst/>
+          </a:prstGeom>
+          <a:noFill/>
+          <a:ln/>
+        </p:spPr>
+        <p:txBody>
+          <a:bodyPr wrap="square" anchor="t" lIns="25400" rIns="25400" tIns="25400" bIns="25400">
+            <a:spAutoFit/>
+          </a:bodyPr>
+          <a:lstStyle/>
+          <a:p>
+            <a:pPr algn="l">
+              <a:lnSpc>
+                <a:spcPct val="100000"/>
+              </a:lnSpc>
+              <a:spcBef>
+                <a:spcPts val="0"/>
+              </a:spcBef>
+              <a:spcAft>
+                <a:spcPts val="0"/>
+              </a:spcAft>
+            </a:pPr>
+            <a:r>
+              <a:rPr sz="950" b="1" i="0">
+                <a:solidFill>
+                  <a:srgbClr val="8A8478"/>
+                </a:solidFill>
+                <a:latin typeface="Courier New"/>
+              </a:rPr>
+              <a:t>INDICATIVE GROSS SALARY, € PER YEAR</a:t>
+            </a:r>
+          </a:p>
+        </p:txBody>
+      </p:sp>
+      <p:sp>
+        <p:nvSpPr>
+          <p:cNvPr id="6" name="TextBox 5"/>
+          <p:cNvSpPr txBox="1"/>
+          <p:nvPr/>
+        </p:nvSpPr>
+        <p:spPr>
+          <a:xfrm>
+            <a:off x="365760" y="1883664"/>
+            <a:ext cx="3808207" cy="256032"/>
+          </a:xfrm>
+          <a:prstGeom prst="rect">
+            <a:avLst/>
+          </a:prstGeom>
+          <a:noFill/>
+          <a:ln/>
+        </p:spPr>
+        <p:txBody>
+          <a:bodyPr wrap="square" anchor="b" lIns="25400" rIns="25400" tIns="25400" bIns="25400">
+            <a:spAutoFit/>
+          </a:bodyPr>
+          <a:lstStyle/>
+          <a:p>
+            <a:pPr algn="l">
+              <a:lnSpc>
+                <a:spcPct val="100000"/>
+              </a:lnSpc>
+              <a:spcBef>
+                <a:spcPts val="0"/>
+              </a:spcBef>
+              <a:spcAft>
+                <a:spcPts val="0"/>
+              </a:spcAft>
+            </a:pPr>
+            <a:r>
+              <a:rPr sz="1100" b="0" i="0">
+                <a:solidFill>
+                  <a:srgbClr val="8A8478"/>
+                </a:solidFill>
+                <a:latin typeface="Helvetica Neue"/>
+              </a:rPr>
+              <a:t>ICT &amp; technology (mid-level)</a:t>
+            </a:r>
+          </a:p>
+        </p:txBody>
+      </p:sp>
+      <p:sp>
+        <p:nvSpPr>
+          <p:cNvPr id="7" name="Rounded Rectangle 6"/>
           <p:cNvSpPr/>
           <p:nvPr/>
         </p:nvSpPr>
         <p:spPr>
           <a:xfrm>
-            <a:off x="566928" y="1191006"/>
-            <a:ext cx="1097280" cy="45720"/>
-          </a:xfrm>
-          <a:prstGeom prst="rect">
-            <a:avLst/>
+            <a:off x="365760" y="2139696"/>
+            <a:ext cx="3808207" cy="164592"/>
+          </a:xfrm>
+          <a:prstGeom prst="roundRect">
+            <a:avLst>
+              <a:gd name="adj" fmla="val 50000"/>
+            </a:avLst>
+          </a:prstGeom>
+          <a:solidFill>
+            <a:srgbClr val="E7DFD1"/>
+          </a:solidFill>
+          <a:ln>
+            <a:noFill/>
+          </a:ln>
+          <a:effectLst/>
+        </p:spPr>
+        <p:style>
+          <a:lnRef idx="1">
+            <a:schemeClr val="accent1"/>
+          </a:lnRef>
+          <a:fillRef idx="3">
+            <a:schemeClr val="accent1"/>
+          </a:fillRef>
+          <a:effectRef idx="2">
+            <a:schemeClr val="accent1"/>
+          </a:effectRef>
+          <a:fontRef idx="minor">
+            <a:schemeClr val="lt1"/>
+          </a:fontRef>
+        </p:style>
+        <p:txBody>
+          <a:bodyPr rtlCol="0" anchor="ctr"/>
+          <a:lstStyle/>
+          <a:p>
+            <a:pPr algn="ctr"/>
+          </a:p>
+        </p:txBody>
+      </p:sp>
+      <p:sp>
+        <p:nvSpPr>
+          <p:cNvPr id="8" name="Rounded Rectangle 7"/>
+          <p:cNvSpPr/>
+          <p:nvPr/>
+        </p:nvSpPr>
+        <p:spPr>
+          <a:xfrm>
+            <a:off x="365760" y="2139696"/>
+            <a:ext cx="3427386" cy="164592"/>
+          </a:xfrm>
+          <a:prstGeom prst="roundRect">
+            <a:avLst>
+              <a:gd name="adj" fmla="val 50000"/>
+            </a:avLst>
+          </a:prstGeom>
+          <a:solidFill>
+            <a:srgbClr val="0E5C63"/>
+          </a:solidFill>
+          <a:ln>
+            <a:noFill/>
+          </a:ln>
+          <a:effectLst/>
+        </p:spPr>
+        <p:style>
+          <a:lnRef idx="1">
+            <a:schemeClr val="accent1"/>
+          </a:lnRef>
+          <a:fillRef idx="3">
+            <a:schemeClr val="accent1"/>
+          </a:fillRef>
+          <a:effectRef idx="2">
+            <a:schemeClr val="accent1"/>
+          </a:effectRef>
+          <a:fontRef idx="minor">
+            <a:schemeClr val="lt1"/>
+          </a:fontRef>
+        </p:style>
+        <p:txBody>
+          <a:bodyPr rtlCol="0" anchor="ctr"/>
+          <a:lstStyle/>
+          <a:p>
+            <a:pPr algn="ctr"/>
+          </a:p>
+        </p:txBody>
+      </p:sp>
+      <p:sp>
+        <p:nvSpPr>
+          <p:cNvPr id="9" name="TextBox 8"/>
+          <p:cNvSpPr txBox="1"/>
+          <p:nvPr/>
+        </p:nvSpPr>
+        <p:spPr>
+          <a:xfrm>
+            <a:off x="4356847" y="2139696"/>
+            <a:ext cx="1005840" cy="164592"/>
+          </a:xfrm>
+          <a:prstGeom prst="rect">
+            <a:avLst/>
+          </a:prstGeom>
+          <a:noFill/>
+          <a:ln/>
+        </p:spPr>
+        <p:txBody>
+          <a:bodyPr wrap="square" anchor="ctr" lIns="25400" rIns="25400" tIns="25400" bIns="25400">
+            <a:spAutoFit/>
+          </a:bodyPr>
+          <a:lstStyle/>
+          <a:p>
+            <a:pPr algn="l">
+              <a:lnSpc>
+                <a:spcPct val="100000"/>
+              </a:lnSpc>
+              <a:spcBef>
+                <a:spcPts val="0"/>
+              </a:spcBef>
+              <a:spcAft>
+                <a:spcPts val="0"/>
+              </a:spcAft>
+            </a:pPr>
+            <a:r>
+              <a:rPr sz="1350" b="1" i="0">
+                <a:solidFill>
+                  <a:srgbClr val="20242A"/>
+                </a:solidFill>
+                <a:latin typeface="Helvetica Neue"/>
+              </a:rPr>
+              <a:t>€72k</a:t>
+            </a:r>
+          </a:p>
+        </p:txBody>
+      </p:sp>
+      <p:sp>
+        <p:nvSpPr>
+          <p:cNvPr id="10" name="TextBox 9"/>
+          <p:cNvSpPr txBox="1"/>
+          <p:nvPr/>
+        </p:nvSpPr>
+        <p:spPr>
+          <a:xfrm>
+            <a:off x="365760" y="2257806"/>
+            <a:ext cx="3808207" cy="256032"/>
+          </a:xfrm>
+          <a:prstGeom prst="rect">
+            <a:avLst/>
+          </a:prstGeom>
+          <a:noFill/>
+          <a:ln/>
+        </p:spPr>
+        <p:txBody>
+          <a:bodyPr wrap="square" anchor="b" lIns="25400" rIns="25400" tIns="25400" bIns="25400">
+            <a:spAutoFit/>
+          </a:bodyPr>
+          <a:lstStyle/>
+          <a:p>
+            <a:pPr algn="l">
+              <a:lnSpc>
+                <a:spcPct val="100000"/>
+              </a:lnSpc>
+              <a:spcBef>
+                <a:spcPts val="0"/>
+              </a:spcBef>
+              <a:spcAft>
+                <a:spcPts val="0"/>
+              </a:spcAft>
+            </a:pPr>
+            <a:r>
+              <a:rPr sz="1100" b="0" i="0">
+                <a:solidFill>
+                  <a:srgbClr val="8A8478"/>
+                </a:solidFill>
+                <a:latin typeface="Helvetica Neue"/>
+              </a:rPr>
+              <a:t>Engineering</a:t>
+            </a:r>
+          </a:p>
+        </p:txBody>
+      </p:sp>
+      <p:sp>
+        <p:nvSpPr>
+          <p:cNvPr id="11" name="Rounded Rectangle 10"/>
+          <p:cNvSpPr/>
+          <p:nvPr/>
+        </p:nvSpPr>
+        <p:spPr>
+          <a:xfrm>
+            <a:off x="365760" y="2513838"/>
+            <a:ext cx="3808207" cy="164592"/>
+          </a:xfrm>
+          <a:prstGeom prst="roundRect">
+            <a:avLst>
+              <a:gd name="adj" fmla="val 50000"/>
+            </a:avLst>
+          </a:prstGeom>
+          <a:solidFill>
+            <a:srgbClr val="E7DFD1"/>
+          </a:solidFill>
+          <a:ln>
+            <a:noFill/>
+          </a:ln>
+          <a:effectLst/>
+        </p:spPr>
+        <p:style>
+          <a:lnRef idx="1">
+            <a:schemeClr val="accent1"/>
+          </a:lnRef>
+          <a:fillRef idx="3">
+            <a:schemeClr val="accent1"/>
+          </a:fillRef>
+          <a:effectRef idx="2">
+            <a:schemeClr val="accent1"/>
+          </a:effectRef>
+          <a:fontRef idx="minor">
+            <a:schemeClr val="lt1"/>
+          </a:fontRef>
+        </p:style>
+        <p:txBody>
+          <a:bodyPr rtlCol="0" anchor="ctr"/>
+          <a:lstStyle/>
+          <a:p>
+            <a:pPr algn="ctr"/>
+          </a:p>
+        </p:txBody>
+      </p:sp>
+      <p:sp>
+        <p:nvSpPr>
+          <p:cNvPr id="12" name="Rounded Rectangle 11"/>
+          <p:cNvSpPr/>
+          <p:nvPr/>
+        </p:nvSpPr>
+        <p:spPr>
+          <a:xfrm>
+            <a:off x="365760" y="2513838"/>
+            <a:ext cx="3236975" cy="164592"/>
+          </a:xfrm>
+          <a:prstGeom prst="roundRect">
+            <a:avLst>
+              <a:gd name="adj" fmla="val 50000"/>
+            </a:avLst>
+          </a:prstGeom>
+          <a:solidFill>
+            <a:srgbClr val="0E5C63"/>
+          </a:solidFill>
+          <a:ln>
+            <a:noFill/>
+          </a:ln>
+          <a:effectLst/>
+        </p:spPr>
+        <p:style>
+          <a:lnRef idx="1">
+            <a:schemeClr val="accent1"/>
+          </a:lnRef>
+          <a:fillRef idx="3">
+            <a:schemeClr val="accent1"/>
+          </a:fillRef>
+          <a:effectRef idx="2">
+            <a:schemeClr val="accent1"/>
+          </a:effectRef>
+          <a:fontRef idx="minor">
+            <a:schemeClr val="lt1"/>
+          </a:fontRef>
+        </p:style>
+        <p:txBody>
+          <a:bodyPr rtlCol="0" anchor="ctr"/>
+          <a:lstStyle/>
+          <a:p>
+            <a:pPr algn="ctr"/>
+          </a:p>
+        </p:txBody>
+      </p:sp>
+      <p:sp>
+        <p:nvSpPr>
+          <p:cNvPr id="13" name="TextBox 12"/>
+          <p:cNvSpPr txBox="1"/>
+          <p:nvPr/>
+        </p:nvSpPr>
+        <p:spPr>
+          <a:xfrm>
+            <a:off x="4356847" y="2513838"/>
+            <a:ext cx="1005840" cy="164592"/>
+          </a:xfrm>
+          <a:prstGeom prst="rect">
+            <a:avLst/>
+          </a:prstGeom>
+          <a:noFill/>
+          <a:ln/>
+        </p:spPr>
+        <p:txBody>
+          <a:bodyPr wrap="square" anchor="ctr" lIns="25400" rIns="25400" tIns="25400" bIns="25400">
+            <a:spAutoFit/>
+          </a:bodyPr>
+          <a:lstStyle/>
+          <a:p>
+            <a:pPr algn="l">
+              <a:lnSpc>
+                <a:spcPct val="100000"/>
+              </a:lnSpc>
+              <a:spcBef>
+                <a:spcPts val="0"/>
+              </a:spcBef>
+              <a:spcAft>
+                <a:spcPts val="0"/>
+              </a:spcAft>
+            </a:pPr>
+            <a:r>
+              <a:rPr sz="1350" b="1" i="0">
+                <a:solidFill>
+                  <a:srgbClr val="20242A"/>
+                </a:solidFill>
+                <a:latin typeface="Helvetica Neue"/>
+              </a:rPr>
+              <a:t>€68k</a:t>
+            </a:r>
+          </a:p>
+        </p:txBody>
+      </p:sp>
+      <p:sp>
+        <p:nvSpPr>
+          <p:cNvPr id="14" name="TextBox 13"/>
+          <p:cNvSpPr txBox="1"/>
+          <p:nvPr/>
+        </p:nvSpPr>
+        <p:spPr>
+          <a:xfrm>
+            <a:off x="365760" y="2631948"/>
+            <a:ext cx="3808207" cy="256032"/>
+          </a:xfrm>
+          <a:prstGeom prst="rect">
+            <a:avLst/>
+          </a:prstGeom>
+          <a:noFill/>
+          <a:ln/>
+        </p:spPr>
+        <p:txBody>
+          <a:bodyPr wrap="square" anchor="b" lIns="25400" rIns="25400" tIns="25400" bIns="25400">
+            <a:spAutoFit/>
+          </a:bodyPr>
+          <a:lstStyle/>
+          <a:p>
+            <a:pPr algn="l">
+              <a:lnSpc>
+                <a:spcPct val="100000"/>
+              </a:lnSpc>
+              <a:spcBef>
+                <a:spcPts val="0"/>
+              </a:spcBef>
+              <a:spcAft>
+                <a:spcPts val="0"/>
+              </a:spcAft>
+            </a:pPr>
+            <a:r>
+              <a:rPr sz="1100" b="0" i="0">
+                <a:solidFill>
+                  <a:srgbClr val="8A8478"/>
+                </a:solidFill>
+                <a:latin typeface="Helvetica Neue"/>
+              </a:rPr>
+              <a:t>Finance &amp; business services</a:t>
+            </a:r>
+          </a:p>
+        </p:txBody>
+      </p:sp>
+      <p:sp>
+        <p:nvSpPr>
+          <p:cNvPr id="15" name="Rounded Rectangle 14"/>
+          <p:cNvSpPr/>
+          <p:nvPr/>
+        </p:nvSpPr>
+        <p:spPr>
+          <a:xfrm>
+            <a:off x="365760" y="2887980"/>
+            <a:ext cx="3808207" cy="164592"/>
+          </a:xfrm>
+          <a:prstGeom prst="roundRect">
+            <a:avLst>
+              <a:gd name="adj" fmla="val 50000"/>
+            </a:avLst>
+          </a:prstGeom>
+          <a:solidFill>
+            <a:srgbClr val="E7DFD1"/>
+          </a:solidFill>
+          <a:ln>
+            <a:noFill/>
+          </a:ln>
+          <a:effectLst/>
+        </p:spPr>
+        <p:style>
+          <a:lnRef idx="1">
+            <a:schemeClr val="accent1"/>
+          </a:lnRef>
+          <a:fillRef idx="3">
+            <a:schemeClr val="accent1"/>
+          </a:fillRef>
+          <a:effectRef idx="2">
+            <a:schemeClr val="accent1"/>
+          </a:effectRef>
+          <a:fontRef idx="minor">
+            <a:schemeClr val="lt1"/>
+          </a:fontRef>
+        </p:style>
+        <p:txBody>
+          <a:bodyPr rtlCol="0" anchor="ctr"/>
+          <a:lstStyle/>
+          <a:p>
+            <a:pPr algn="ctr"/>
+          </a:p>
+        </p:txBody>
+      </p:sp>
+      <p:sp>
+        <p:nvSpPr>
+          <p:cNvPr id="16" name="Rounded Rectangle 15"/>
+          <p:cNvSpPr/>
+          <p:nvPr/>
+        </p:nvSpPr>
+        <p:spPr>
+          <a:xfrm>
+            <a:off x="365760" y="2887980"/>
+            <a:ext cx="3094168" cy="164592"/>
+          </a:xfrm>
+          <a:prstGeom prst="roundRect">
+            <a:avLst>
+              <a:gd name="adj" fmla="val 50000"/>
+            </a:avLst>
+          </a:prstGeom>
+          <a:solidFill>
+            <a:srgbClr val="0E5C63"/>
+          </a:solidFill>
+          <a:ln>
+            <a:noFill/>
+          </a:ln>
+          <a:effectLst/>
+        </p:spPr>
+        <p:style>
+          <a:lnRef idx="1">
+            <a:schemeClr val="accent1"/>
+          </a:lnRef>
+          <a:fillRef idx="3">
+            <a:schemeClr val="accent1"/>
+          </a:fillRef>
+          <a:effectRef idx="2">
+            <a:schemeClr val="accent1"/>
+          </a:effectRef>
+          <a:fontRef idx="minor">
+            <a:schemeClr val="lt1"/>
+          </a:fontRef>
+        </p:style>
+        <p:txBody>
+          <a:bodyPr rtlCol="0" anchor="ctr"/>
+          <a:lstStyle/>
+          <a:p>
+            <a:pPr algn="ctr"/>
+          </a:p>
+        </p:txBody>
+      </p:sp>
+      <p:sp>
+        <p:nvSpPr>
+          <p:cNvPr id="17" name="TextBox 16"/>
+          <p:cNvSpPr txBox="1"/>
+          <p:nvPr/>
+        </p:nvSpPr>
+        <p:spPr>
+          <a:xfrm>
+            <a:off x="4356847" y="2887980"/>
+            <a:ext cx="1005840" cy="164592"/>
+          </a:xfrm>
+          <a:prstGeom prst="rect">
+            <a:avLst/>
+          </a:prstGeom>
+          <a:noFill/>
+          <a:ln/>
+        </p:spPr>
+        <p:txBody>
+          <a:bodyPr wrap="square" anchor="ctr" lIns="25400" rIns="25400" tIns="25400" bIns="25400">
+            <a:spAutoFit/>
+          </a:bodyPr>
+          <a:lstStyle/>
+          <a:p>
+            <a:pPr algn="l">
+              <a:lnSpc>
+                <a:spcPct val="100000"/>
+              </a:lnSpc>
+              <a:spcBef>
+                <a:spcPts val="0"/>
+              </a:spcBef>
+              <a:spcAft>
+                <a:spcPts val="0"/>
+              </a:spcAft>
+            </a:pPr>
+            <a:r>
+              <a:rPr sz="1350" b="1" i="0">
+                <a:solidFill>
+                  <a:srgbClr val="20242A"/>
+                </a:solidFill>
+                <a:latin typeface="Helvetica Neue"/>
+              </a:rPr>
+              <a:t>€65k</a:t>
+            </a:r>
+          </a:p>
+        </p:txBody>
+      </p:sp>
+      <p:sp>
+        <p:nvSpPr>
+          <p:cNvPr id="18" name="TextBox 17"/>
+          <p:cNvSpPr txBox="1"/>
+          <p:nvPr/>
+        </p:nvSpPr>
+        <p:spPr>
+          <a:xfrm>
+            <a:off x="365760" y="3006090"/>
+            <a:ext cx="3808207" cy="256032"/>
+          </a:xfrm>
+          <a:prstGeom prst="rect">
+            <a:avLst/>
+          </a:prstGeom>
+          <a:noFill/>
+          <a:ln/>
+        </p:spPr>
+        <p:txBody>
+          <a:bodyPr wrap="square" anchor="b" lIns="25400" rIns="25400" tIns="25400" bIns="25400">
+            <a:spAutoFit/>
+          </a:bodyPr>
+          <a:lstStyle/>
+          <a:p>
+            <a:pPr algn="l">
+              <a:lnSpc>
+                <a:spcPct val="100000"/>
+              </a:lnSpc>
+              <a:spcBef>
+                <a:spcPts val="0"/>
+              </a:spcBef>
+              <a:spcAft>
+                <a:spcPts val="0"/>
+              </a:spcAft>
+            </a:pPr>
+            <a:r>
+              <a:rPr sz="1100" b="0" i="0">
+                <a:solidFill>
+                  <a:srgbClr val="8A8478"/>
+                </a:solidFill>
+                <a:latin typeface="Helvetica Neue"/>
+              </a:rPr>
+              <a:t>National average (CBS)</a:t>
+            </a:r>
+          </a:p>
+        </p:txBody>
+      </p:sp>
+      <p:sp>
+        <p:nvSpPr>
+          <p:cNvPr id="19" name="Rounded Rectangle 18"/>
+          <p:cNvSpPr/>
+          <p:nvPr/>
+        </p:nvSpPr>
+        <p:spPr>
+          <a:xfrm>
+            <a:off x="365760" y="3262122"/>
+            <a:ext cx="3808207" cy="164592"/>
+          </a:xfrm>
+          <a:prstGeom prst="roundRect">
+            <a:avLst>
+              <a:gd name="adj" fmla="val 50000"/>
+            </a:avLst>
+          </a:prstGeom>
+          <a:solidFill>
+            <a:srgbClr val="E7DFD1"/>
+          </a:solidFill>
+          <a:ln>
+            <a:noFill/>
+          </a:ln>
+          <a:effectLst/>
+        </p:spPr>
+        <p:style>
+          <a:lnRef idx="1">
+            <a:schemeClr val="accent1"/>
+          </a:lnRef>
+          <a:fillRef idx="3">
+            <a:schemeClr val="accent1"/>
+          </a:fillRef>
+          <a:effectRef idx="2">
+            <a:schemeClr val="accent1"/>
+          </a:effectRef>
+          <a:fontRef idx="minor">
+            <a:schemeClr val="lt1"/>
+          </a:fontRef>
+        </p:style>
+        <p:txBody>
+          <a:bodyPr rtlCol="0" anchor="ctr"/>
+          <a:lstStyle/>
+          <a:p>
+            <a:pPr algn="ctr"/>
+          </a:p>
+        </p:txBody>
+      </p:sp>
+      <p:sp>
+        <p:nvSpPr>
+          <p:cNvPr id="20" name="Rounded Rectangle 19"/>
+          <p:cNvSpPr/>
+          <p:nvPr/>
+        </p:nvSpPr>
+        <p:spPr>
+          <a:xfrm>
+            <a:off x="365760" y="3262122"/>
+            <a:ext cx="2543691" cy="164592"/>
+          </a:xfrm>
+          <a:prstGeom prst="roundRect">
+            <a:avLst>
+              <a:gd name="adj" fmla="val 50000"/>
+            </a:avLst>
           </a:prstGeom>
           <a:solidFill>
             <a:srgbClr val="D8542A"/>
@@ -16240,23 +16580,23 @@
       </p:sp>
       <p:sp>
         <p:nvSpPr>
-          <p:cNvPr id="6" name="TextBox 5"/>
-          <p:cNvSpPr txBox="1"/>
-          <p:nvPr/>
-        </p:nvSpPr>
-        <p:spPr>
-          <a:xfrm>
-            <a:off x="365760" y="1508760"/>
-            <a:ext cx="5088367" cy="274320"/>
-          </a:xfrm>
-          <a:prstGeom prst="rect">
-            <a:avLst/>
-          </a:prstGeom>
-          <a:noFill/>
-          <a:ln/>
-        </p:spPr>
-        <p:txBody>
-          <a:bodyPr wrap="square" anchor="t" lIns="25400" rIns="25400" tIns="25400" bIns="25400">
+          <p:cNvPr id="21" name="TextBox 20"/>
+          <p:cNvSpPr txBox="1"/>
+          <p:nvPr/>
+        </p:nvSpPr>
+        <p:spPr>
+          <a:xfrm>
+            <a:off x="4356847" y="3262122"/>
+            <a:ext cx="1005840" cy="164592"/>
+          </a:xfrm>
+          <a:prstGeom prst="rect">
+            <a:avLst/>
+          </a:prstGeom>
+          <a:noFill/>
+          <a:ln/>
+        </p:spPr>
+        <p:txBody>
+          <a:bodyPr wrap="square" anchor="ctr" lIns="25400" rIns="25400" tIns="25400" bIns="25400">
             <a:spAutoFit/>
           </a:bodyPr>
           <a:lstStyle/>
@@ -16273,72 +16613,72 @@
               </a:spcAft>
             </a:pPr>
             <a:r>
-              <a:rPr sz="950" b="1" i="0">
+              <a:rPr sz="1350" b="1" i="0">
+                <a:solidFill>
+                  <a:srgbClr val="20242A"/>
+                </a:solidFill>
+                <a:latin typeface="Helvetica Neue"/>
+              </a:rPr>
+              <a:t>€53k</a:t>
+            </a:r>
+          </a:p>
+        </p:txBody>
+      </p:sp>
+      <p:sp>
+        <p:nvSpPr>
+          <p:cNvPr id="22" name="TextBox 21"/>
+          <p:cNvSpPr txBox="1"/>
+          <p:nvPr/>
+        </p:nvSpPr>
+        <p:spPr>
+          <a:xfrm>
+            <a:off x="365760" y="3380232"/>
+            <a:ext cx="3808207" cy="256032"/>
+          </a:xfrm>
+          <a:prstGeom prst="rect">
+            <a:avLst/>
+          </a:prstGeom>
+          <a:noFill/>
+          <a:ln/>
+        </p:spPr>
+        <p:txBody>
+          <a:bodyPr wrap="square" anchor="b" lIns="25400" rIns="25400" tIns="25400" bIns="25400">
+            <a:spAutoFit/>
+          </a:bodyPr>
+          <a:lstStyle/>
+          <a:p>
+            <a:pPr algn="l">
+              <a:lnSpc>
+                <a:spcPct val="100000"/>
+              </a:lnSpc>
+              <a:spcBef>
+                <a:spcPts val="0"/>
+              </a:spcBef>
+              <a:spcAft>
+                <a:spcPts val="0"/>
+              </a:spcAft>
+            </a:pPr>
+            <a:r>
+              <a:rPr sz="1100" b="0" i="0">
                 <a:solidFill>
                   <a:srgbClr val="8A8478"/>
                 </a:solidFill>
-                <a:latin typeface="Courier New"/>
-              </a:rPr>
-              <a:t>INDICATIVE GROSS SALARY, € PER YEAR</a:t>
-            </a:r>
-          </a:p>
-        </p:txBody>
-      </p:sp>
-      <p:sp>
-        <p:nvSpPr>
-          <p:cNvPr id="7" name="TextBox 6"/>
-          <p:cNvSpPr txBox="1"/>
-          <p:nvPr/>
-        </p:nvSpPr>
-        <p:spPr>
-          <a:xfrm>
-            <a:off x="365760" y="1883664"/>
-            <a:ext cx="3808207" cy="256032"/>
-          </a:xfrm>
-          <a:prstGeom prst="rect">
-            <a:avLst/>
-          </a:prstGeom>
-          <a:noFill/>
-          <a:ln/>
-        </p:spPr>
-        <p:txBody>
-          <a:bodyPr wrap="square" anchor="b" lIns="25400" rIns="25400" tIns="25400" bIns="25400">
-            <a:spAutoFit/>
-          </a:bodyPr>
-          <a:lstStyle/>
-          <a:p>
-            <a:pPr algn="l">
-              <a:lnSpc>
-                <a:spcPct val="100000"/>
-              </a:lnSpc>
-              <a:spcBef>
-                <a:spcPts val="0"/>
-              </a:spcBef>
-              <a:spcAft>
-                <a:spcPts val="0"/>
-              </a:spcAft>
-            </a:pPr>
-            <a:r>
-              <a:rPr sz="1100" b="0" i="0">
-                <a:solidFill>
-                  <a:srgbClr val="8A8478"/>
-                </a:solidFill>
                 <a:latin typeface="Helvetica Neue"/>
               </a:rPr>
-              <a:t>ICT &amp; technology (mid-level)</a:t>
-            </a:r>
-          </a:p>
-        </p:txBody>
-      </p:sp>
-      <p:sp>
-        <p:nvSpPr>
-          <p:cNvPr id="8" name="Rounded Rectangle 7"/>
+              <a:t>Healthcare (registered nurse)</a:t>
+            </a:r>
+          </a:p>
+        </p:txBody>
+      </p:sp>
+      <p:sp>
+        <p:nvSpPr>
+          <p:cNvPr id="23" name="Rounded Rectangle 22"/>
           <p:cNvSpPr/>
           <p:nvPr/>
         </p:nvSpPr>
         <p:spPr>
           <a:xfrm>
-            <a:off x="365760" y="2139696"/>
+            <a:off x="365760" y="3636264"/>
             <a:ext cx="3808207" cy="164592"/>
           </a:xfrm>
           <a:prstGeom prst="roundRect">
@@ -16378,14 +16718,14 @@
       </p:sp>
       <p:sp>
         <p:nvSpPr>
-          <p:cNvPr id="9" name="Rounded Rectangle 8"/>
+          <p:cNvPr id="24" name="Rounded Rectangle 23"/>
           <p:cNvSpPr/>
           <p:nvPr/>
         </p:nvSpPr>
         <p:spPr>
           <a:xfrm>
-            <a:off x="365760" y="2139696"/>
-            <a:ext cx="3427386" cy="164592"/>
+            <a:off x="365760" y="3636264"/>
+            <a:ext cx="2142116" cy="164592"/>
           </a:xfrm>
           <a:prstGeom prst="roundRect">
             <a:avLst>
@@ -16424,13 +16764,13 @@
       </p:sp>
       <p:sp>
         <p:nvSpPr>
-          <p:cNvPr id="10" name="TextBox 9"/>
-          <p:cNvSpPr txBox="1"/>
-          <p:nvPr/>
-        </p:nvSpPr>
-        <p:spPr>
-          <a:xfrm>
-            <a:off x="4356847" y="2139696"/>
+          <p:cNvPr id="25" name="TextBox 24"/>
+          <p:cNvSpPr txBox="1"/>
+          <p:nvPr/>
+        </p:nvSpPr>
+        <p:spPr>
+          <a:xfrm>
+            <a:off x="4356847" y="3636264"/>
             <a:ext cx="1005840" cy="164592"/>
           </a:xfrm>
           <a:prstGeom prst="rect">
@@ -16463,20 +16803,20 @@
                 </a:solidFill>
                 <a:latin typeface="Helvetica Neue"/>
               </a:rPr>
-              <a:t>€72k</a:t>
-            </a:r>
-          </a:p>
-        </p:txBody>
-      </p:sp>
-      <p:sp>
-        <p:nvSpPr>
-          <p:cNvPr id="11" name="TextBox 10"/>
-          <p:cNvSpPr txBox="1"/>
-          <p:nvPr/>
-        </p:nvSpPr>
-        <p:spPr>
-          <a:xfrm>
-            <a:off x="365760" y="2257806"/>
+              <a:t>€45k</a:t>
+            </a:r>
+          </a:p>
+        </p:txBody>
+      </p:sp>
+      <p:sp>
+        <p:nvSpPr>
+          <p:cNvPr id="26" name="TextBox 25"/>
+          <p:cNvSpPr txBox="1"/>
+          <p:nvPr/>
+        </p:nvSpPr>
+        <p:spPr>
+          <a:xfrm>
+            <a:off x="365760" y="3754373"/>
             <a:ext cx="3808207" cy="256032"/>
           </a:xfrm>
           <a:prstGeom prst="rect">
@@ -16509,20 +16849,20 @@
                 </a:solidFill>
                 <a:latin typeface="Helvetica Neue"/>
               </a:rPr>
-              <a:t>Engineering</a:t>
-            </a:r>
-          </a:p>
-        </p:txBody>
-      </p:sp>
-      <p:sp>
-        <p:nvSpPr>
-          <p:cNvPr id="12" name="Rounded Rectangle 11"/>
+              <a:t>Hospitality &amp; retail</a:t>
+            </a:r>
+          </a:p>
+        </p:txBody>
+      </p:sp>
+      <p:sp>
+        <p:nvSpPr>
+          <p:cNvPr id="27" name="Rounded Rectangle 26"/>
           <p:cNvSpPr/>
           <p:nvPr/>
         </p:nvSpPr>
         <p:spPr>
           <a:xfrm>
-            <a:off x="365760" y="2513838"/>
+            <a:off x="365760" y="4010406"/>
             <a:ext cx="3808207" cy="164592"/>
           </a:xfrm>
           <a:prstGeom prst="roundRect">
@@ -16562,14 +16902,14 @@
       </p:sp>
       <p:sp>
         <p:nvSpPr>
-          <p:cNvPr id="13" name="Rounded Rectangle 12"/>
+          <p:cNvPr id="28" name="Rounded Rectangle 27"/>
           <p:cNvSpPr/>
           <p:nvPr/>
         </p:nvSpPr>
         <p:spPr>
           <a:xfrm>
-            <a:off x="365760" y="2513838"/>
-            <a:ext cx="3236975" cy="164592"/>
+            <a:off x="365760" y="4010406"/>
+            <a:ext cx="1570885" cy="164592"/>
           </a:xfrm>
           <a:prstGeom prst="roundRect">
             <a:avLst>
@@ -16608,743 +16948,7 @@
       </p:sp>
       <p:sp>
         <p:nvSpPr>
-          <p:cNvPr id="14" name="TextBox 13"/>
-          <p:cNvSpPr txBox="1"/>
-          <p:nvPr/>
-        </p:nvSpPr>
-        <p:spPr>
-          <a:xfrm>
-            <a:off x="4356847" y="2513838"/>
-            <a:ext cx="1005840" cy="164592"/>
-          </a:xfrm>
-          <a:prstGeom prst="rect">
-            <a:avLst/>
-          </a:prstGeom>
-          <a:noFill/>
-          <a:ln/>
-        </p:spPr>
-        <p:txBody>
-          <a:bodyPr wrap="square" anchor="ctr" lIns="25400" rIns="25400" tIns="25400" bIns="25400">
-            <a:spAutoFit/>
-          </a:bodyPr>
-          <a:lstStyle/>
-          <a:p>
-            <a:pPr algn="l">
-              <a:lnSpc>
-                <a:spcPct val="100000"/>
-              </a:lnSpc>
-              <a:spcBef>
-                <a:spcPts val="0"/>
-              </a:spcBef>
-              <a:spcAft>
-                <a:spcPts val="0"/>
-              </a:spcAft>
-            </a:pPr>
-            <a:r>
-              <a:rPr sz="1350" b="1" i="0">
-                <a:solidFill>
-                  <a:srgbClr val="20242A"/>
-                </a:solidFill>
-                <a:latin typeface="Helvetica Neue"/>
-              </a:rPr>
-              <a:t>€68k</a:t>
-            </a:r>
-          </a:p>
-        </p:txBody>
-      </p:sp>
-      <p:sp>
-        <p:nvSpPr>
-          <p:cNvPr id="15" name="TextBox 14"/>
-          <p:cNvSpPr txBox="1"/>
-          <p:nvPr/>
-        </p:nvSpPr>
-        <p:spPr>
-          <a:xfrm>
-            <a:off x="365760" y="2631948"/>
-            <a:ext cx="3808207" cy="256032"/>
-          </a:xfrm>
-          <a:prstGeom prst="rect">
-            <a:avLst/>
-          </a:prstGeom>
-          <a:noFill/>
-          <a:ln/>
-        </p:spPr>
-        <p:txBody>
-          <a:bodyPr wrap="square" anchor="b" lIns="25400" rIns="25400" tIns="25400" bIns="25400">
-            <a:spAutoFit/>
-          </a:bodyPr>
-          <a:lstStyle/>
-          <a:p>
-            <a:pPr algn="l">
-              <a:lnSpc>
-                <a:spcPct val="100000"/>
-              </a:lnSpc>
-              <a:spcBef>
-                <a:spcPts val="0"/>
-              </a:spcBef>
-              <a:spcAft>
-                <a:spcPts val="0"/>
-              </a:spcAft>
-            </a:pPr>
-            <a:r>
-              <a:rPr sz="1100" b="0" i="0">
-                <a:solidFill>
-                  <a:srgbClr val="8A8478"/>
-                </a:solidFill>
-                <a:latin typeface="Helvetica Neue"/>
-              </a:rPr>
-              <a:t>Finance &amp; business services</a:t>
-            </a:r>
-          </a:p>
-        </p:txBody>
-      </p:sp>
-      <p:sp>
-        <p:nvSpPr>
-          <p:cNvPr id="16" name="Rounded Rectangle 15"/>
-          <p:cNvSpPr/>
-          <p:nvPr/>
-        </p:nvSpPr>
-        <p:spPr>
-          <a:xfrm>
-            <a:off x="365760" y="2887980"/>
-            <a:ext cx="3808207" cy="164592"/>
-          </a:xfrm>
-          <a:prstGeom prst="roundRect">
-            <a:avLst>
-              <a:gd name="adj" fmla="val 50000"/>
-            </a:avLst>
-          </a:prstGeom>
-          <a:solidFill>
-            <a:srgbClr val="E7DFD1"/>
-          </a:solidFill>
-          <a:ln>
-            <a:noFill/>
-          </a:ln>
-          <a:effectLst/>
-        </p:spPr>
-        <p:style>
-          <a:lnRef idx="1">
-            <a:schemeClr val="accent1"/>
-          </a:lnRef>
-          <a:fillRef idx="3">
-            <a:schemeClr val="accent1"/>
-          </a:fillRef>
-          <a:effectRef idx="2">
-            <a:schemeClr val="accent1"/>
-          </a:effectRef>
-          <a:fontRef idx="minor">
-            <a:schemeClr val="lt1"/>
-          </a:fontRef>
-        </p:style>
-        <p:txBody>
-          <a:bodyPr rtlCol="0" anchor="ctr"/>
-          <a:lstStyle/>
-          <a:p>
-            <a:pPr algn="ctr"/>
-          </a:p>
-        </p:txBody>
-      </p:sp>
-      <p:sp>
-        <p:nvSpPr>
-          <p:cNvPr id="17" name="Rounded Rectangle 16"/>
-          <p:cNvSpPr/>
-          <p:nvPr/>
-        </p:nvSpPr>
-        <p:spPr>
-          <a:xfrm>
-            <a:off x="365760" y="2887980"/>
-            <a:ext cx="3094168" cy="164592"/>
-          </a:xfrm>
-          <a:prstGeom prst="roundRect">
-            <a:avLst>
-              <a:gd name="adj" fmla="val 50000"/>
-            </a:avLst>
-          </a:prstGeom>
-          <a:solidFill>
-            <a:srgbClr val="0E5C63"/>
-          </a:solidFill>
-          <a:ln>
-            <a:noFill/>
-          </a:ln>
-          <a:effectLst/>
-        </p:spPr>
-        <p:style>
-          <a:lnRef idx="1">
-            <a:schemeClr val="accent1"/>
-          </a:lnRef>
-          <a:fillRef idx="3">
-            <a:schemeClr val="accent1"/>
-          </a:fillRef>
-          <a:effectRef idx="2">
-            <a:schemeClr val="accent1"/>
-          </a:effectRef>
-          <a:fontRef idx="minor">
-            <a:schemeClr val="lt1"/>
-          </a:fontRef>
-        </p:style>
-        <p:txBody>
-          <a:bodyPr rtlCol="0" anchor="ctr"/>
-          <a:lstStyle/>
-          <a:p>
-            <a:pPr algn="ctr"/>
-          </a:p>
-        </p:txBody>
-      </p:sp>
-      <p:sp>
-        <p:nvSpPr>
-          <p:cNvPr id="18" name="TextBox 17"/>
-          <p:cNvSpPr txBox="1"/>
-          <p:nvPr/>
-        </p:nvSpPr>
-        <p:spPr>
-          <a:xfrm>
-            <a:off x="4356847" y="2887980"/>
-            <a:ext cx="1005840" cy="164592"/>
-          </a:xfrm>
-          <a:prstGeom prst="rect">
-            <a:avLst/>
-          </a:prstGeom>
-          <a:noFill/>
-          <a:ln/>
-        </p:spPr>
-        <p:txBody>
-          <a:bodyPr wrap="square" anchor="ctr" lIns="25400" rIns="25400" tIns="25400" bIns="25400">
-            <a:spAutoFit/>
-          </a:bodyPr>
-          <a:lstStyle/>
-          <a:p>
-            <a:pPr algn="l">
-              <a:lnSpc>
-                <a:spcPct val="100000"/>
-              </a:lnSpc>
-              <a:spcBef>
-                <a:spcPts val="0"/>
-              </a:spcBef>
-              <a:spcAft>
-                <a:spcPts val="0"/>
-              </a:spcAft>
-            </a:pPr>
-            <a:r>
-              <a:rPr sz="1350" b="1" i="0">
-                <a:solidFill>
-                  <a:srgbClr val="20242A"/>
-                </a:solidFill>
-                <a:latin typeface="Helvetica Neue"/>
-              </a:rPr>
-              <a:t>€65k</a:t>
-            </a:r>
-          </a:p>
-        </p:txBody>
-      </p:sp>
-      <p:sp>
-        <p:nvSpPr>
-          <p:cNvPr id="19" name="TextBox 18"/>
-          <p:cNvSpPr txBox="1"/>
-          <p:nvPr/>
-        </p:nvSpPr>
-        <p:spPr>
-          <a:xfrm>
-            <a:off x="365760" y="3006090"/>
-            <a:ext cx="3808207" cy="256032"/>
-          </a:xfrm>
-          <a:prstGeom prst="rect">
-            <a:avLst/>
-          </a:prstGeom>
-          <a:noFill/>
-          <a:ln/>
-        </p:spPr>
-        <p:txBody>
-          <a:bodyPr wrap="square" anchor="b" lIns="25400" rIns="25400" tIns="25400" bIns="25400">
-            <a:spAutoFit/>
-          </a:bodyPr>
-          <a:lstStyle/>
-          <a:p>
-            <a:pPr algn="l">
-              <a:lnSpc>
-                <a:spcPct val="100000"/>
-              </a:lnSpc>
-              <a:spcBef>
-                <a:spcPts val="0"/>
-              </a:spcBef>
-              <a:spcAft>
-                <a:spcPts val="0"/>
-              </a:spcAft>
-            </a:pPr>
-            <a:r>
-              <a:rPr sz="1100" b="0" i="0">
-                <a:solidFill>
-                  <a:srgbClr val="8A8478"/>
-                </a:solidFill>
-                <a:latin typeface="Helvetica Neue"/>
-              </a:rPr>
-              <a:t>National average (CBS)</a:t>
-            </a:r>
-          </a:p>
-        </p:txBody>
-      </p:sp>
-      <p:sp>
-        <p:nvSpPr>
-          <p:cNvPr id="20" name="Rounded Rectangle 19"/>
-          <p:cNvSpPr/>
-          <p:nvPr/>
-        </p:nvSpPr>
-        <p:spPr>
-          <a:xfrm>
-            <a:off x="365760" y="3262122"/>
-            <a:ext cx="3808207" cy="164592"/>
-          </a:xfrm>
-          <a:prstGeom prst="roundRect">
-            <a:avLst>
-              <a:gd name="adj" fmla="val 50000"/>
-            </a:avLst>
-          </a:prstGeom>
-          <a:solidFill>
-            <a:srgbClr val="E7DFD1"/>
-          </a:solidFill>
-          <a:ln>
-            <a:noFill/>
-          </a:ln>
-          <a:effectLst/>
-        </p:spPr>
-        <p:style>
-          <a:lnRef idx="1">
-            <a:schemeClr val="accent1"/>
-          </a:lnRef>
-          <a:fillRef idx="3">
-            <a:schemeClr val="accent1"/>
-          </a:fillRef>
-          <a:effectRef idx="2">
-            <a:schemeClr val="accent1"/>
-          </a:effectRef>
-          <a:fontRef idx="minor">
-            <a:schemeClr val="lt1"/>
-          </a:fontRef>
-        </p:style>
-        <p:txBody>
-          <a:bodyPr rtlCol="0" anchor="ctr"/>
-          <a:lstStyle/>
-          <a:p>
-            <a:pPr algn="ctr"/>
-          </a:p>
-        </p:txBody>
-      </p:sp>
-      <p:sp>
-        <p:nvSpPr>
-          <p:cNvPr id="21" name="Rounded Rectangle 20"/>
-          <p:cNvSpPr/>
-          <p:nvPr/>
-        </p:nvSpPr>
-        <p:spPr>
-          <a:xfrm>
-            <a:off x="365760" y="3262122"/>
-            <a:ext cx="2543691" cy="164592"/>
-          </a:xfrm>
-          <a:prstGeom prst="roundRect">
-            <a:avLst>
-              <a:gd name="adj" fmla="val 50000"/>
-            </a:avLst>
-          </a:prstGeom>
-          <a:solidFill>
-            <a:srgbClr val="D8542A"/>
-          </a:solidFill>
-          <a:ln>
-            <a:noFill/>
-          </a:ln>
-          <a:effectLst/>
-        </p:spPr>
-        <p:style>
-          <a:lnRef idx="1">
-            <a:schemeClr val="accent1"/>
-          </a:lnRef>
-          <a:fillRef idx="3">
-            <a:schemeClr val="accent1"/>
-          </a:fillRef>
-          <a:effectRef idx="2">
-            <a:schemeClr val="accent1"/>
-          </a:effectRef>
-          <a:fontRef idx="minor">
-            <a:schemeClr val="lt1"/>
-          </a:fontRef>
-        </p:style>
-        <p:txBody>
-          <a:bodyPr rtlCol="0" anchor="ctr"/>
-          <a:lstStyle/>
-          <a:p>
-            <a:pPr algn="ctr"/>
-          </a:p>
-        </p:txBody>
-      </p:sp>
-      <p:sp>
-        <p:nvSpPr>
-          <p:cNvPr id="22" name="TextBox 21"/>
-          <p:cNvSpPr txBox="1"/>
-          <p:nvPr/>
-        </p:nvSpPr>
-        <p:spPr>
-          <a:xfrm>
-            <a:off x="4356847" y="3262122"/>
-            <a:ext cx="1005840" cy="164592"/>
-          </a:xfrm>
-          <a:prstGeom prst="rect">
-            <a:avLst/>
-          </a:prstGeom>
-          <a:noFill/>
-          <a:ln/>
-        </p:spPr>
-        <p:txBody>
-          <a:bodyPr wrap="square" anchor="ctr" lIns="25400" rIns="25400" tIns="25400" bIns="25400">
-            <a:spAutoFit/>
-          </a:bodyPr>
-          <a:lstStyle/>
-          <a:p>
-            <a:pPr algn="l">
-              <a:lnSpc>
-                <a:spcPct val="100000"/>
-              </a:lnSpc>
-              <a:spcBef>
-                <a:spcPts val="0"/>
-              </a:spcBef>
-              <a:spcAft>
-                <a:spcPts val="0"/>
-              </a:spcAft>
-            </a:pPr>
-            <a:r>
-              <a:rPr sz="1350" b="1" i="0">
-                <a:solidFill>
-                  <a:srgbClr val="20242A"/>
-                </a:solidFill>
-                <a:latin typeface="Helvetica Neue"/>
-              </a:rPr>
-              <a:t>€53k</a:t>
-            </a:r>
-          </a:p>
-        </p:txBody>
-      </p:sp>
-      <p:sp>
-        <p:nvSpPr>
-          <p:cNvPr id="23" name="TextBox 22"/>
-          <p:cNvSpPr txBox="1"/>
-          <p:nvPr/>
-        </p:nvSpPr>
-        <p:spPr>
-          <a:xfrm>
-            <a:off x="365760" y="3380232"/>
-            <a:ext cx="3808207" cy="256032"/>
-          </a:xfrm>
-          <a:prstGeom prst="rect">
-            <a:avLst/>
-          </a:prstGeom>
-          <a:noFill/>
-          <a:ln/>
-        </p:spPr>
-        <p:txBody>
-          <a:bodyPr wrap="square" anchor="b" lIns="25400" rIns="25400" tIns="25400" bIns="25400">
-            <a:spAutoFit/>
-          </a:bodyPr>
-          <a:lstStyle/>
-          <a:p>
-            <a:pPr algn="l">
-              <a:lnSpc>
-                <a:spcPct val="100000"/>
-              </a:lnSpc>
-              <a:spcBef>
-                <a:spcPts val="0"/>
-              </a:spcBef>
-              <a:spcAft>
-                <a:spcPts val="0"/>
-              </a:spcAft>
-            </a:pPr>
-            <a:r>
-              <a:rPr sz="1100" b="0" i="0">
-                <a:solidFill>
-                  <a:srgbClr val="8A8478"/>
-                </a:solidFill>
-                <a:latin typeface="Helvetica Neue"/>
-              </a:rPr>
-              <a:t>Healthcare (registered nurse)</a:t>
-            </a:r>
-          </a:p>
-        </p:txBody>
-      </p:sp>
-      <p:sp>
-        <p:nvSpPr>
-          <p:cNvPr id="24" name="Rounded Rectangle 23"/>
-          <p:cNvSpPr/>
-          <p:nvPr/>
-        </p:nvSpPr>
-        <p:spPr>
-          <a:xfrm>
-            <a:off x="365760" y="3636264"/>
-            <a:ext cx="3808207" cy="164592"/>
-          </a:xfrm>
-          <a:prstGeom prst="roundRect">
-            <a:avLst>
-              <a:gd name="adj" fmla="val 50000"/>
-            </a:avLst>
-          </a:prstGeom>
-          <a:solidFill>
-            <a:srgbClr val="E7DFD1"/>
-          </a:solidFill>
-          <a:ln>
-            <a:noFill/>
-          </a:ln>
-          <a:effectLst/>
-        </p:spPr>
-        <p:style>
-          <a:lnRef idx="1">
-            <a:schemeClr val="accent1"/>
-          </a:lnRef>
-          <a:fillRef idx="3">
-            <a:schemeClr val="accent1"/>
-          </a:fillRef>
-          <a:effectRef idx="2">
-            <a:schemeClr val="accent1"/>
-          </a:effectRef>
-          <a:fontRef idx="minor">
-            <a:schemeClr val="lt1"/>
-          </a:fontRef>
-        </p:style>
-        <p:txBody>
-          <a:bodyPr rtlCol="0" anchor="ctr"/>
-          <a:lstStyle/>
-          <a:p>
-            <a:pPr algn="ctr"/>
-          </a:p>
-        </p:txBody>
-      </p:sp>
-      <p:sp>
-        <p:nvSpPr>
-          <p:cNvPr id="25" name="Rounded Rectangle 24"/>
-          <p:cNvSpPr/>
-          <p:nvPr/>
-        </p:nvSpPr>
-        <p:spPr>
-          <a:xfrm>
-            <a:off x="365760" y="3636264"/>
-            <a:ext cx="2142116" cy="164592"/>
-          </a:xfrm>
-          <a:prstGeom prst="roundRect">
-            <a:avLst>
-              <a:gd name="adj" fmla="val 50000"/>
-            </a:avLst>
-          </a:prstGeom>
-          <a:solidFill>
-            <a:srgbClr val="0E5C63"/>
-          </a:solidFill>
-          <a:ln>
-            <a:noFill/>
-          </a:ln>
-          <a:effectLst/>
-        </p:spPr>
-        <p:style>
-          <a:lnRef idx="1">
-            <a:schemeClr val="accent1"/>
-          </a:lnRef>
-          <a:fillRef idx="3">
-            <a:schemeClr val="accent1"/>
-          </a:fillRef>
-          <a:effectRef idx="2">
-            <a:schemeClr val="accent1"/>
-          </a:effectRef>
-          <a:fontRef idx="minor">
-            <a:schemeClr val="lt1"/>
-          </a:fontRef>
-        </p:style>
-        <p:txBody>
-          <a:bodyPr rtlCol="0" anchor="ctr"/>
-          <a:lstStyle/>
-          <a:p>
-            <a:pPr algn="ctr"/>
-          </a:p>
-        </p:txBody>
-      </p:sp>
-      <p:sp>
-        <p:nvSpPr>
-          <p:cNvPr id="26" name="TextBox 25"/>
-          <p:cNvSpPr txBox="1"/>
-          <p:nvPr/>
-        </p:nvSpPr>
-        <p:spPr>
-          <a:xfrm>
-            <a:off x="4356847" y="3636264"/>
-            <a:ext cx="1005840" cy="164592"/>
-          </a:xfrm>
-          <a:prstGeom prst="rect">
-            <a:avLst/>
-          </a:prstGeom>
-          <a:noFill/>
-          <a:ln/>
-        </p:spPr>
-        <p:txBody>
-          <a:bodyPr wrap="square" anchor="ctr" lIns="25400" rIns="25400" tIns="25400" bIns="25400">
-            <a:spAutoFit/>
-          </a:bodyPr>
-          <a:lstStyle/>
-          <a:p>
-            <a:pPr algn="l">
-              <a:lnSpc>
-                <a:spcPct val="100000"/>
-              </a:lnSpc>
-              <a:spcBef>
-                <a:spcPts val="0"/>
-              </a:spcBef>
-              <a:spcAft>
-                <a:spcPts val="0"/>
-              </a:spcAft>
-            </a:pPr>
-            <a:r>
-              <a:rPr sz="1350" b="1" i="0">
-                <a:solidFill>
-                  <a:srgbClr val="20242A"/>
-                </a:solidFill>
-                <a:latin typeface="Helvetica Neue"/>
-              </a:rPr>
-              <a:t>€45k</a:t>
-            </a:r>
-          </a:p>
-        </p:txBody>
-      </p:sp>
-      <p:sp>
-        <p:nvSpPr>
-          <p:cNvPr id="27" name="TextBox 26"/>
-          <p:cNvSpPr txBox="1"/>
-          <p:nvPr/>
-        </p:nvSpPr>
-        <p:spPr>
-          <a:xfrm>
-            <a:off x="365760" y="3754373"/>
-            <a:ext cx="3808207" cy="256032"/>
-          </a:xfrm>
-          <a:prstGeom prst="rect">
-            <a:avLst/>
-          </a:prstGeom>
-          <a:noFill/>
-          <a:ln/>
-        </p:spPr>
-        <p:txBody>
-          <a:bodyPr wrap="square" anchor="b" lIns="25400" rIns="25400" tIns="25400" bIns="25400">
-            <a:spAutoFit/>
-          </a:bodyPr>
-          <a:lstStyle/>
-          <a:p>
-            <a:pPr algn="l">
-              <a:lnSpc>
-                <a:spcPct val="100000"/>
-              </a:lnSpc>
-              <a:spcBef>
-                <a:spcPts val="0"/>
-              </a:spcBef>
-              <a:spcAft>
-                <a:spcPts val="0"/>
-              </a:spcAft>
-            </a:pPr>
-            <a:r>
-              <a:rPr sz="1100" b="0" i="0">
-                <a:solidFill>
-                  <a:srgbClr val="8A8478"/>
-                </a:solidFill>
-                <a:latin typeface="Helvetica Neue"/>
-              </a:rPr>
-              <a:t>Hospitality &amp; retail</a:t>
-            </a:r>
-          </a:p>
-        </p:txBody>
-      </p:sp>
-      <p:sp>
-        <p:nvSpPr>
-          <p:cNvPr id="28" name="Rounded Rectangle 27"/>
-          <p:cNvSpPr/>
-          <p:nvPr/>
-        </p:nvSpPr>
-        <p:spPr>
-          <a:xfrm>
-            <a:off x="365760" y="4010406"/>
-            <a:ext cx="3808207" cy="164592"/>
-          </a:xfrm>
-          <a:prstGeom prst="roundRect">
-            <a:avLst>
-              <a:gd name="adj" fmla="val 50000"/>
-            </a:avLst>
-          </a:prstGeom>
-          <a:solidFill>
-            <a:srgbClr val="E7DFD1"/>
-          </a:solidFill>
-          <a:ln>
-            <a:noFill/>
-          </a:ln>
-          <a:effectLst/>
-        </p:spPr>
-        <p:style>
-          <a:lnRef idx="1">
-            <a:schemeClr val="accent1"/>
-          </a:lnRef>
-          <a:fillRef idx="3">
-            <a:schemeClr val="accent1"/>
-          </a:fillRef>
-          <a:effectRef idx="2">
-            <a:schemeClr val="accent1"/>
-          </a:effectRef>
-          <a:fontRef idx="minor">
-            <a:schemeClr val="lt1"/>
-          </a:fontRef>
-        </p:style>
-        <p:txBody>
-          <a:bodyPr rtlCol="0" anchor="ctr"/>
-          <a:lstStyle/>
-          <a:p>
-            <a:pPr algn="ctr"/>
-          </a:p>
-        </p:txBody>
-      </p:sp>
-      <p:sp>
-        <p:nvSpPr>
-          <p:cNvPr id="29" name="Rounded Rectangle 28"/>
-          <p:cNvSpPr/>
-          <p:nvPr/>
-        </p:nvSpPr>
-        <p:spPr>
-          <a:xfrm>
-            <a:off x="365760" y="4010406"/>
-            <a:ext cx="1570885" cy="164592"/>
-          </a:xfrm>
-          <a:prstGeom prst="roundRect">
-            <a:avLst>
-              <a:gd name="adj" fmla="val 50000"/>
-            </a:avLst>
-          </a:prstGeom>
-          <a:solidFill>
-            <a:srgbClr val="0E5C63"/>
-          </a:solidFill>
-          <a:ln>
-            <a:noFill/>
-          </a:ln>
-          <a:effectLst/>
-        </p:spPr>
-        <p:style>
-          <a:lnRef idx="1">
-            <a:schemeClr val="accent1"/>
-          </a:lnRef>
-          <a:fillRef idx="3">
-            <a:schemeClr val="accent1"/>
-          </a:fillRef>
-          <a:effectRef idx="2">
-            <a:schemeClr val="accent1"/>
-          </a:effectRef>
-          <a:fontRef idx="minor">
-            <a:schemeClr val="lt1"/>
-          </a:fontRef>
-        </p:style>
-        <p:txBody>
-          <a:bodyPr rtlCol="0" anchor="ctr"/>
-          <a:lstStyle/>
-          <a:p>
-            <a:pPr algn="ctr"/>
-          </a:p>
-        </p:txBody>
-      </p:sp>
-      <p:sp>
-        <p:nvSpPr>
-          <p:cNvPr id="30" name="TextBox 29"/>
+          <p:cNvPr id="29" name="TextBox 28"/>
           <p:cNvSpPr txBox="1"/>
           <p:nvPr/>
         </p:nvSpPr>
@@ -17390,7 +16994,7 @@
       </p:sp>
       <p:sp>
         <p:nvSpPr>
-          <p:cNvPr id="31" name="TextBox 30"/>
+          <p:cNvPr id="30" name="TextBox 29"/>
           <p:cNvSpPr txBox="1"/>
           <p:nvPr/>
         </p:nvSpPr>
@@ -17436,7 +17040,7 @@
       </p:sp>
       <p:sp>
         <p:nvSpPr>
-          <p:cNvPr id="32" name="TextBox 31"/>
+          <p:cNvPr id="31" name="TextBox 30"/>
           <p:cNvSpPr txBox="1"/>
           <p:nvPr/>
         </p:nvSpPr>
@@ -17500,7 +17104,7 @@
       </p:sp>
       <p:sp>
         <p:nvSpPr>
-          <p:cNvPr id="33" name="Rounded Rectangle 32"/>
+          <p:cNvPr id="32" name="Rounded Rectangle 31"/>
           <p:cNvSpPr/>
           <p:nvPr/>
         </p:nvSpPr>
@@ -17548,7 +17152,7 @@
       </p:sp>
       <p:sp>
         <p:nvSpPr>
-          <p:cNvPr id="34" name="TextBox 33"/>
+          <p:cNvPr id="33" name="TextBox 32"/>
           <p:cNvSpPr txBox="1"/>
           <p:nvPr/>
         </p:nvSpPr>
@@ -17594,7 +17198,7 @@
       </p:sp>
       <p:sp>
         <p:nvSpPr>
-          <p:cNvPr id="35" name="TextBox 34"/>
+          <p:cNvPr id="34" name="TextBox 33"/>
           <p:cNvSpPr txBox="1"/>
           <p:nvPr/>
         </p:nvSpPr>
@@ -17649,7 +17253,7 @@
       </p:sp>
       <p:sp>
         <p:nvSpPr>
-          <p:cNvPr id="36" name="TextBox 35"/>
+          <p:cNvPr id="35" name="TextBox 34"/>
           <p:cNvSpPr txBox="1"/>
           <p:nvPr/>
         </p:nvSpPr>
@@ -17695,7 +17299,7 @@
       </p:sp>
       <p:sp>
         <p:nvSpPr>
-          <p:cNvPr id="37" name="TextBox 36"/>
+          <p:cNvPr id="36" name="TextBox 35"/>
           <p:cNvSpPr txBox="1"/>
           <p:nvPr/>
         </p:nvSpPr>
@@ -17895,51 +17499,7 @@
       </p:sp>
       <p:sp>
         <p:nvSpPr>
-          <p:cNvPr id="5" name="Rectangle 4"/>
-          <p:cNvSpPr/>
-          <p:nvPr/>
-        </p:nvSpPr>
-        <p:spPr>
-          <a:xfrm>
-            <a:off x="566928" y="1191006"/>
-            <a:ext cx="1097280" cy="45720"/>
-          </a:xfrm>
-          <a:prstGeom prst="rect">
-            <a:avLst/>
-          </a:prstGeom>
-          <a:solidFill>
-            <a:srgbClr val="0E5C63"/>
-          </a:solidFill>
-          <a:ln>
-            <a:noFill/>
-          </a:ln>
-          <a:effectLst/>
-        </p:spPr>
-        <p:style>
-          <a:lnRef idx="1">
-            <a:schemeClr val="accent1"/>
-          </a:lnRef>
-          <a:fillRef idx="3">
-            <a:schemeClr val="accent1"/>
-          </a:fillRef>
-          <a:effectRef idx="2">
-            <a:schemeClr val="accent1"/>
-          </a:effectRef>
-          <a:fontRef idx="minor">
-            <a:schemeClr val="lt1"/>
-          </a:fontRef>
-        </p:style>
-        <p:txBody>
-          <a:bodyPr rtlCol="0" anchor="ctr"/>
-          <a:lstStyle/>
-          <a:p>
-            <a:pPr algn="ctr"/>
-          </a:p>
-        </p:txBody>
-      </p:sp>
-      <p:sp>
-        <p:nvSpPr>
-          <p:cNvPr id="6" name="TextBox 5"/>
+          <p:cNvPr id="5" name="TextBox 4"/>
           <p:cNvSpPr txBox="1"/>
           <p:nvPr/>
         </p:nvSpPr>
@@ -17985,7 +17545,7 @@
       </p:sp>
       <p:sp>
         <p:nvSpPr>
-          <p:cNvPr id="7" name="Rounded Rectangle 6"/>
+          <p:cNvPr id="6" name="Rounded Rectangle 5"/>
           <p:cNvSpPr/>
           <p:nvPr/>
         </p:nvSpPr>
@@ -18033,7 +17593,7 @@
       </p:sp>
       <p:sp>
         <p:nvSpPr>
-          <p:cNvPr id="8" name="Round Same Side Corner Rectangle 7"/>
+          <p:cNvPr id="7" name="Round Same Side Corner Rectangle 6"/>
           <p:cNvSpPr/>
           <p:nvPr/>
         </p:nvSpPr>
@@ -18080,7 +17640,7 @@
       </p:sp>
       <p:sp>
         <p:nvSpPr>
-          <p:cNvPr id="9" name="TextBox 8"/>
+          <p:cNvPr id="8" name="TextBox 7"/>
           <p:cNvSpPr txBox="1"/>
           <p:nvPr/>
         </p:nvSpPr>
@@ -18126,7 +17686,7 @@
       </p:sp>
       <p:sp>
         <p:nvSpPr>
-          <p:cNvPr id="10" name="TextBox 9"/>
+          <p:cNvPr id="9" name="TextBox 8"/>
           <p:cNvSpPr txBox="1"/>
           <p:nvPr/>
         </p:nvSpPr>
@@ -18172,7 +17732,7 @@
       </p:sp>
       <p:sp>
         <p:nvSpPr>
-          <p:cNvPr id="11" name="TextBox 10"/>
+          <p:cNvPr id="10" name="TextBox 9"/>
           <p:cNvSpPr txBox="1"/>
           <p:nvPr/>
         </p:nvSpPr>
@@ -18218,7 +17778,7 @@
       </p:sp>
       <p:sp>
         <p:nvSpPr>
-          <p:cNvPr id="12" name="Rectangle 11"/>
+          <p:cNvPr id="11" name="Rectangle 10"/>
           <p:cNvSpPr/>
           <p:nvPr/>
         </p:nvSpPr>
@@ -18262,7 +17822,7 @@
       </p:sp>
       <p:sp>
         <p:nvSpPr>
-          <p:cNvPr id="13" name="TextBox 12"/>
+          <p:cNvPr id="12" name="TextBox 11"/>
           <p:cNvSpPr txBox="1"/>
           <p:nvPr/>
         </p:nvSpPr>
@@ -18308,7 +17868,7 @@
       </p:sp>
       <p:sp>
         <p:nvSpPr>
-          <p:cNvPr id="14" name="Rounded Rectangle 13"/>
+          <p:cNvPr id="13" name="Rounded Rectangle 12"/>
           <p:cNvSpPr/>
           <p:nvPr/>
         </p:nvSpPr>
@@ -18356,7 +17916,7 @@
       </p:sp>
       <p:sp>
         <p:nvSpPr>
-          <p:cNvPr id="15" name="Round Same Side Corner Rectangle 14"/>
+          <p:cNvPr id="14" name="Round Same Side Corner Rectangle 13"/>
           <p:cNvSpPr/>
           <p:nvPr/>
         </p:nvSpPr>
@@ -18403,7 +17963,7 @@
       </p:sp>
       <p:sp>
         <p:nvSpPr>
-          <p:cNvPr id="16" name="TextBox 15"/>
+          <p:cNvPr id="15" name="TextBox 14"/>
           <p:cNvSpPr txBox="1"/>
           <p:nvPr/>
         </p:nvSpPr>
@@ -18449,7 +18009,7 @@
       </p:sp>
       <p:sp>
         <p:nvSpPr>
-          <p:cNvPr id="17" name="TextBox 16"/>
+          <p:cNvPr id="16" name="TextBox 15"/>
           <p:cNvSpPr txBox="1"/>
           <p:nvPr/>
         </p:nvSpPr>
@@ -18495,7 +18055,7 @@
       </p:sp>
       <p:sp>
         <p:nvSpPr>
-          <p:cNvPr id="18" name="TextBox 17"/>
+          <p:cNvPr id="17" name="TextBox 16"/>
           <p:cNvSpPr txBox="1"/>
           <p:nvPr/>
         </p:nvSpPr>
@@ -18541,7 +18101,7 @@
       </p:sp>
       <p:sp>
         <p:nvSpPr>
-          <p:cNvPr id="19" name="Rectangle 18"/>
+          <p:cNvPr id="18" name="Rectangle 17"/>
           <p:cNvSpPr/>
           <p:nvPr/>
         </p:nvSpPr>
@@ -18585,7 +18145,7 @@
       </p:sp>
       <p:sp>
         <p:nvSpPr>
-          <p:cNvPr id="20" name="TextBox 19"/>
+          <p:cNvPr id="19" name="TextBox 18"/>
           <p:cNvSpPr txBox="1"/>
           <p:nvPr/>
         </p:nvSpPr>
@@ -18631,7 +18191,7 @@
       </p:sp>
       <p:sp>
         <p:nvSpPr>
-          <p:cNvPr id="21" name="Rounded Rectangle 20"/>
+          <p:cNvPr id="20" name="Rounded Rectangle 19"/>
           <p:cNvSpPr/>
           <p:nvPr/>
         </p:nvSpPr>
@@ -18679,7 +18239,7 @@
       </p:sp>
       <p:sp>
         <p:nvSpPr>
-          <p:cNvPr id="22" name="Round Same Side Corner Rectangle 21"/>
+          <p:cNvPr id="21" name="Round Same Side Corner Rectangle 20"/>
           <p:cNvSpPr/>
           <p:nvPr/>
         </p:nvSpPr>
@@ -18726,7 +18286,7 @@
       </p:sp>
       <p:sp>
         <p:nvSpPr>
-          <p:cNvPr id="23" name="TextBox 22"/>
+          <p:cNvPr id="22" name="TextBox 21"/>
           <p:cNvSpPr txBox="1"/>
           <p:nvPr/>
         </p:nvSpPr>
@@ -18772,7 +18332,7 @@
       </p:sp>
       <p:sp>
         <p:nvSpPr>
-          <p:cNvPr id="24" name="TextBox 23"/>
+          <p:cNvPr id="23" name="TextBox 22"/>
           <p:cNvSpPr txBox="1"/>
           <p:nvPr/>
         </p:nvSpPr>
@@ -18818,7 +18378,7 @@
       </p:sp>
       <p:sp>
         <p:nvSpPr>
-          <p:cNvPr id="25" name="TextBox 24"/>
+          <p:cNvPr id="24" name="TextBox 23"/>
           <p:cNvSpPr txBox="1"/>
           <p:nvPr/>
         </p:nvSpPr>
@@ -18864,7 +18424,7 @@
       </p:sp>
       <p:sp>
         <p:nvSpPr>
-          <p:cNvPr id="26" name="Rectangle 25"/>
+          <p:cNvPr id="25" name="Rectangle 24"/>
           <p:cNvSpPr/>
           <p:nvPr/>
         </p:nvSpPr>
@@ -18908,7 +18468,7 @@
       </p:sp>
       <p:sp>
         <p:nvSpPr>
-          <p:cNvPr id="27" name="TextBox 26"/>
+          <p:cNvPr id="26" name="TextBox 25"/>
           <p:cNvSpPr txBox="1"/>
           <p:nvPr/>
         </p:nvSpPr>
@@ -18954,7 +18514,7 @@
       </p:sp>
       <p:sp>
         <p:nvSpPr>
-          <p:cNvPr id="28" name="Rounded Rectangle 27"/>
+          <p:cNvPr id="27" name="Rounded Rectangle 26"/>
           <p:cNvSpPr/>
           <p:nvPr/>
         </p:nvSpPr>
@@ -19002,7 +18562,7 @@
       </p:sp>
       <p:sp>
         <p:nvSpPr>
-          <p:cNvPr id="29" name="Round Same Side Corner Rectangle 28"/>
+          <p:cNvPr id="28" name="Round Same Side Corner Rectangle 27"/>
           <p:cNvSpPr/>
           <p:nvPr/>
         </p:nvSpPr>
@@ -19049,7 +18609,7 @@
       </p:sp>
       <p:sp>
         <p:nvSpPr>
-          <p:cNvPr id="30" name="TextBox 29"/>
+          <p:cNvPr id="29" name="TextBox 28"/>
           <p:cNvSpPr txBox="1"/>
           <p:nvPr/>
         </p:nvSpPr>
@@ -19095,7 +18655,7 @@
       </p:sp>
       <p:sp>
         <p:nvSpPr>
-          <p:cNvPr id="31" name="TextBox 30"/>
+          <p:cNvPr id="30" name="TextBox 29"/>
           <p:cNvSpPr txBox="1"/>
           <p:nvPr/>
         </p:nvSpPr>
@@ -19141,7 +18701,7 @@
       </p:sp>
       <p:sp>
         <p:nvSpPr>
-          <p:cNvPr id="32" name="TextBox 31"/>
+          <p:cNvPr id="31" name="TextBox 30"/>
           <p:cNvSpPr txBox="1"/>
           <p:nvPr/>
         </p:nvSpPr>
@@ -19187,7 +18747,7 @@
       </p:sp>
       <p:sp>
         <p:nvSpPr>
-          <p:cNvPr id="33" name="Rectangle 32"/>
+          <p:cNvPr id="32" name="Rectangle 31"/>
           <p:cNvSpPr/>
           <p:nvPr/>
         </p:nvSpPr>
@@ -19231,7 +18791,7 @@
       </p:sp>
       <p:sp>
         <p:nvSpPr>
-          <p:cNvPr id="34" name="TextBox 33"/>
+          <p:cNvPr id="33" name="TextBox 32"/>
           <p:cNvSpPr txBox="1"/>
           <p:nvPr/>
         </p:nvSpPr>
@@ -19277,7 +18837,7 @@
       </p:sp>
       <p:sp>
         <p:nvSpPr>
-          <p:cNvPr id="35" name="TextBox 34"/>
+          <p:cNvPr id="34" name="TextBox 33"/>
           <p:cNvSpPr txBox="1"/>
           <p:nvPr/>
         </p:nvSpPr>
@@ -19350,7 +18910,7 @@
       </p:sp>
       <p:sp>
         <p:nvSpPr>
-          <p:cNvPr id="36" name="TextBox 35"/>
+          <p:cNvPr id="35" name="TextBox 34"/>
           <p:cNvSpPr txBox="1"/>
           <p:nvPr/>
         </p:nvSpPr>
@@ -19405,7 +18965,7 @@
       </p:sp>
       <p:sp>
         <p:nvSpPr>
-          <p:cNvPr id="37" name="TextBox 36"/>
+          <p:cNvPr id="36" name="TextBox 35"/>
           <p:cNvSpPr txBox="1"/>
           <p:nvPr/>
         </p:nvSpPr>
@@ -19451,7 +19011,7 @@
       </p:sp>
       <p:sp>
         <p:nvSpPr>
-          <p:cNvPr id="38" name="TextBox 37"/>
+          <p:cNvPr id="37" name="TextBox 36"/>
           <p:cNvSpPr txBox="1"/>
           <p:nvPr/>
         </p:nvSpPr>

--- a/templates/decks/en/nl-job-market-2026/template.pptx
+++ b/templates/decks/en/nl-job-market-2026/template.pptx
@@ -4145,51 +4145,7 @@
       </p:sp>
       <p:sp>
         <p:nvSpPr>
-          <p:cNvPr id="4" name="Rectangle 3"/>
-          <p:cNvSpPr/>
-          <p:nvPr/>
-        </p:nvSpPr>
-        <p:spPr>
-          <a:xfrm>
-            <a:off x="640080" y="4320540"/>
-            <a:ext cx="1280160" cy="54864"/>
-          </a:xfrm>
-          <a:prstGeom prst="rect">
-            <a:avLst/>
-          </a:prstGeom>
-          <a:solidFill>
-            <a:srgbClr val="D8542A"/>
-          </a:solidFill>
-          <a:ln>
-            <a:noFill/>
-          </a:ln>
-          <a:effectLst/>
-        </p:spPr>
-        <p:style>
-          <a:lnRef idx="1">
-            <a:schemeClr val="accent1"/>
-          </a:lnRef>
-          <a:fillRef idx="3">
-            <a:schemeClr val="accent1"/>
-          </a:fillRef>
-          <a:effectRef idx="2">
-            <a:schemeClr val="accent1"/>
-          </a:effectRef>
-          <a:fontRef idx="minor">
-            <a:schemeClr val="lt1"/>
-          </a:fontRef>
-        </p:style>
-        <p:txBody>
-          <a:bodyPr rtlCol="0" anchor="ctr"/>
-          <a:lstStyle/>
-          <a:p>
-            <a:pPr algn="ctr"/>
-          </a:p>
-        </p:txBody>
-      </p:sp>
-      <p:sp>
-        <p:nvSpPr>
-          <p:cNvPr id="5" name="TextBox 4"/>
+          <p:cNvPr id="4" name="TextBox 3"/>
           <p:cNvSpPr txBox="1"/>
           <p:nvPr/>
         </p:nvSpPr>
@@ -4235,7 +4191,7 @@
       </p:sp>
       <p:sp>
         <p:nvSpPr>
-          <p:cNvPr id="6" name="TextBox 5"/>
+          <p:cNvPr id="5" name="TextBox 4"/>
           <p:cNvSpPr txBox="1"/>
           <p:nvPr/>
         </p:nvSpPr>
@@ -4312,51 +4268,7 @@
       </p:sp>
       <p:sp>
         <p:nvSpPr>
-          <p:cNvPr id="7" name="Rectangle 6"/>
-          <p:cNvSpPr/>
-          <p:nvPr/>
-        </p:nvSpPr>
-        <p:spPr>
-          <a:xfrm>
-            <a:off x="658368" y="3310128"/>
-            <a:ext cx="1280160" cy="54864"/>
-          </a:xfrm>
-          <a:prstGeom prst="rect">
-            <a:avLst/>
-          </a:prstGeom>
-          <a:solidFill>
-            <a:srgbClr val="D8542A"/>
-          </a:solidFill>
-          <a:ln>
-            <a:noFill/>
-          </a:ln>
-          <a:effectLst/>
-        </p:spPr>
-        <p:style>
-          <a:lnRef idx="1">
-            <a:schemeClr val="accent1"/>
-          </a:lnRef>
-          <a:fillRef idx="3">
-            <a:schemeClr val="accent1"/>
-          </a:fillRef>
-          <a:effectRef idx="2">
-            <a:schemeClr val="accent1"/>
-          </a:effectRef>
-          <a:fontRef idx="minor">
-            <a:schemeClr val="lt1"/>
-          </a:fontRef>
-        </p:style>
-        <p:txBody>
-          <a:bodyPr rtlCol="0" anchor="ctr"/>
-          <a:lstStyle/>
-          <a:p>
-            <a:pPr algn="ctr"/>
-          </a:p>
-        </p:txBody>
-      </p:sp>
-      <p:sp>
-        <p:nvSpPr>
-          <p:cNvPr id="8" name="TextBox 7"/>
+          <p:cNvPr id="6" name="TextBox 5"/>
           <p:cNvSpPr txBox="1"/>
           <p:nvPr/>
         </p:nvSpPr>
@@ -4402,7 +4314,7 @@
       </p:sp>
       <p:sp>
         <p:nvSpPr>
-          <p:cNvPr id="9" name="TextBox 8"/>
+          <p:cNvPr id="7" name="TextBox 6"/>
           <p:cNvSpPr txBox="1"/>
           <p:nvPr/>
         </p:nvSpPr>

--- a/templates/decks/en/nl-job-market-2026/template.pptx
+++ b/templates/decks/en/nl-job-market-2026/template.pptx
@@ -312,7 +312,7 @@
                 <a:solidFill>
                   <a:srgbClr val="222A37"/>
                 </a:solidFill>
-                <a:latin typeface="Helvetica Neue"/>
+                <a:latin typeface="Hiragino Sans GB"/>
               </a:defRPr>
             </a:pPr>
           </a:p>
@@ -358,7 +358,7 @@
                 <a:solidFill>
                   <a:srgbClr val="222A37"/>
                 </a:solidFill>
-                <a:latin typeface="Helvetica Neue"/>
+                <a:latin typeface="Hiragino Sans GB"/>
               </a:defRPr>
             </a:pPr>
           </a:p>
@@ -380,7 +380,7 @@
               <a:solidFill>
                 <a:srgbClr val="222A37"/>
               </a:solidFill>
-              <a:latin typeface="Helvetica Neue"/>
+              <a:latin typeface="Hiragino Sans GB"/>
             </a:defRPr>
           </a:pPr>
         </a:p>
@@ -399,7 +399,7 @@
           <a:solidFill>
             <a:srgbClr val="222A37"/>
           </a:solidFill>
-          <a:latin typeface="Helvetica Neue"/>
+          <a:latin typeface="Hiragino Sans GB"/>
         </a:defRPr>
       </a:pPr>
       <a:endParaRPr lang="en-US"/>
@@ -551,7 +551,7 @@
                 <a:solidFill>
                   <a:srgbClr val="222A37"/>
                 </a:solidFill>
-                <a:latin typeface="Helvetica Neue"/>
+                <a:latin typeface="Hiragino Sans GB"/>
               </a:defRPr>
             </a:pPr>
           </a:p>
@@ -598,7 +598,7 @@
                 <a:solidFill>
                   <a:srgbClr val="222A37"/>
                 </a:solidFill>
-                <a:latin typeface="Helvetica Neue"/>
+                <a:latin typeface="Hiragino Sans GB"/>
               </a:defRPr>
             </a:pPr>
           </a:p>
@@ -618,7 +618,7 @@
           <a:solidFill>
             <a:srgbClr val="222A37"/>
           </a:solidFill>
-          <a:latin typeface="Helvetica Neue"/>
+          <a:latin typeface="Hiragino Sans GB"/>
         </a:defRPr>
       </a:pPr>
       <a:endParaRPr lang="en-US"/>
@@ -788,7 +788,7 @@
                 <a:solidFill>
                   <a:srgbClr val="222A37"/>
                 </a:solidFill>
-                <a:latin typeface="Helvetica Neue"/>
+                <a:latin typeface="Hiragino Sans GB"/>
               </a:defRPr>
             </a:pPr>
           </a:p>
@@ -836,7 +836,7 @@
                 <a:solidFill>
                   <a:srgbClr val="222A37"/>
                 </a:solidFill>
-                <a:latin typeface="Helvetica Neue"/>
+                <a:latin typeface="Hiragino Sans GB"/>
               </a:defRPr>
             </a:pPr>
           </a:p>
@@ -857,7 +857,7 @@
               <a:solidFill>
                 <a:srgbClr val="222A37"/>
               </a:solidFill>
-              <a:latin typeface="Helvetica Neue"/>
+              <a:latin typeface="Hiragino Sans GB"/>
             </a:defRPr>
           </a:pPr>
         </a:p>
@@ -874,7 +874,7 @@
           <a:solidFill>
             <a:srgbClr val="222A37"/>
           </a:solidFill>
-          <a:latin typeface="Helvetica Neue"/>
+          <a:latin typeface="Hiragino Sans GB"/>
         </a:defRPr>
       </a:pPr>
       <a:endParaRPr lang="en-US"/>
@@ -994,7 +994,7 @@
                 <a:solidFill>
                   <a:srgbClr val="222A37"/>
                 </a:solidFill>
-                <a:latin typeface="Helvetica Neue"/>
+                <a:latin typeface="Hiragino Sans GB"/>
               </a:defRPr>
             </a:pPr>
           </a:p>
@@ -1042,7 +1042,7 @@
                 <a:solidFill>
                   <a:srgbClr val="222A37"/>
                 </a:solidFill>
-                <a:latin typeface="Helvetica Neue"/>
+                <a:latin typeface="Hiragino Sans GB"/>
               </a:defRPr>
             </a:pPr>
           </a:p>
@@ -1062,7 +1062,7 @@
           <a:solidFill>
             <a:srgbClr val="222A37"/>
           </a:solidFill>
-          <a:latin typeface="Helvetica Neue"/>
+          <a:latin typeface="Hiragino Sans GB"/>
         </a:defRPr>
       </a:pPr>
       <a:endParaRPr lang="en-US"/>
@@ -4070,7 +4070,7 @@
             <a:avLst/>
           </a:prstGeom>
           <a:solidFill>
-            <a:srgbClr val="F4EFE6"/>
+            <a:srgbClr val="16223A"/>
           </a:solidFill>
           <a:ln>
             <a:noFill/>
@@ -4114,7 +4114,7 @@
             <a:avLst/>
           </a:prstGeom>
           <a:solidFill>
-            <a:srgbClr val="EAE1D2"/>
+            <a:srgbClr val="0F1A2E"/>
           </a:solidFill>
           <a:ln>
             <a:noFill/>
@@ -4145,7 +4145,51 @@
       </p:sp>
       <p:sp>
         <p:nvSpPr>
-          <p:cNvPr id="4" name="TextBox 3"/>
+          <p:cNvPr id="4" name="Rectangle 3"/>
+          <p:cNvSpPr/>
+          <p:nvPr/>
+        </p:nvSpPr>
+        <p:spPr>
+          <a:xfrm>
+            <a:off x="640080" y="4320540"/>
+            <a:ext cx="1280160" cy="54864"/>
+          </a:xfrm>
+          <a:prstGeom prst="rect">
+            <a:avLst/>
+          </a:prstGeom>
+          <a:solidFill>
+            <a:srgbClr val="D8542A"/>
+          </a:solidFill>
+          <a:ln>
+            <a:noFill/>
+          </a:ln>
+          <a:effectLst/>
+        </p:spPr>
+        <p:style>
+          <a:lnRef idx="1">
+            <a:schemeClr val="accent1"/>
+          </a:lnRef>
+          <a:fillRef idx="3">
+            <a:schemeClr val="accent1"/>
+          </a:fillRef>
+          <a:effectRef idx="2">
+            <a:schemeClr val="accent1"/>
+          </a:effectRef>
+          <a:fontRef idx="minor">
+            <a:schemeClr val="lt1"/>
+          </a:fontRef>
+        </p:style>
+        <p:txBody>
+          <a:bodyPr rtlCol="0" anchor="ctr"/>
+          <a:lstStyle/>
+          <a:p>
+            <a:pPr algn="ctr"/>
+          </a:p>
+        </p:txBody>
+      </p:sp>
+      <p:sp>
+        <p:nvSpPr>
+          <p:cNvPr id="5" name="TextBox 4"/>
           <p:cNvSpPr txBox="1"/>
           <p:nvPr/>
         </p:nvSpPr>
@@ -4180,9 +4224,10 @@
             <a:r>
               <a:rPr sz="1100" b="1" i="0" spc="150">
                 <a:solidFill>
-                  <a:srgbClr val="0E5C63"/>
+                  <a:srgbClr val="2E8A8C"/>
                 </a:solidFill>
                 <a:latin typeface="Courier New"/>
+                <a:ea typeface="Hiragino Sans GB"/>
               </a:rPr>
               <a:t>THE POLDER REPORT  ·  LABOUR-MARKET ANALYSIS</a:t>
             </a:r>
@@ -4191,7 +4236,7 @@
       </p:sp>
       <p:sp>
         <p:nvSpPr>
-          <p:cNvPr id="5" name="TextBox 4"/>
+          <p:cNvPr id="6" name="TextBox 5"/>
           <p:cNvSpPr txBox="1"/>
           <p:nvPr/>
         </p:nvSpPr>
@@ -4226,9 +4271,10 @@
             <a:r>
               <a:rPr sz="5200" b="1" i="0">
                 <a:solidFill>
-                  <a:srgbClr val="20242A"/>
+                  <a:srgbClr val="F1EBDD"/>
                 </a:solidFill>
                 <a:latin typeface="Georgia"/>
+                <a:ea typeface="Hiragino Sans GB"/>
               </a:rPr>
               <a:t>The Netherlands</a:t>
             </a:r>
@@ -4248,9 +4294,10 @@
             <a:r>
               <a:rPr sz="5200" b="1" i="0">
                 <a:solidFill>
-                  <a:srgbClr val="20242A"/>
+                  <a:srgbClr val="F1EBDD"/>
                 </a:solidFill>
                 <a:latin typeface="Georgia"/>
+                <a:ea typeface="Hiragino Sans GB"/>
               </a:rPr>
               <a:t>Job Market </a:t>
             </a:r>
@@ -4260,6 +4307,7 @@
                   <a:srgbClr val="D8542A"/>
                 </a:solidFill>
                 <a:latin typeface="Georgia"/>
+                <a:ea typeface="Hiragino Sans GB"/>
               </a:rPr>
               <a:t>2026</a:t>
             </a:r>
@@ -4268,7 +4316,51 @@
       </p:sp>
       <p:sp>
         <p:nvSpPr>
-          <p:cNvPr id="6" name="TextBox 5"/>
+          <p:cNvPr id="7" name="Rectangle 6"/>
+          <p:cNvSpPr/>
+          <p:nvPr/>
+        </p:nvSpPr>
+        <p:spPr>
+          <a:xfrm>
+            <a:off x="658368" y="3310128"/>
+            <a:ext cx="1280160" cy="54864"/>
+          </a:xfrm>
+          <a:prstGeom prst="rect">
+            <a:avLst/>
+          </a:prstGeom>
+          <a:solidFill>
+            <a:srgbClr val="D8542A"/>
+          </a:solidFill>
+          <a:ln>
+            <a:noFill/>
+          </a:ln>
+          <a:effectLst/>
+        </p:spPr>
+        <p:style>
+          <a:lnRef idx="1">
+            <a:schemeClr val="accent1"/>
+          </a:lnRef>
+          <a:fillRef idx="3">
+            <a:schemeClr val="accent1"/>
+          </a:fillRef>
+          <a:effectRef idx="2">
+            <a:schemeClr val="accent1"/>
+          </a:effectRef>
+          <a:fontRef idx="minor">
+            <a:schemeClr val="lt1"/>
+          </a:fontRef>
+        </p:style>
+        <p:txBody>
+          <a:bodyPr rtlCol="0" anchor="ctr"/>
+          <a:lstStyle/>
+          <a:p>
+            <a:pPr algn="ctr"/>
+          </a:p>
+        </p:txBody>
+      </p:sp>
+      <p:sp>
+        <p:nvSpPr>
+          <p:cNvPr id="8" name="TextBox 7"/>
           <p:cNvSpPr txBox="1"/>
           <p:nvPr/>
         </p:nvSpPr>
@@ -4303,9 +4395,10 @@
             <a:r>
               <a:rPr sz="1650" b="0" i="0">
                 <a:solidFill>
-                  <a:srgbClr val="4A4E56"/>
+                  <a:srgbClr val="C9D2DE"/>
                 </a:solidFill>
                 <a:latin typeface="Helvetica Neue"/>
+                <a:ea typeface="Hiragino Sans GB"/>
               </a:rPr>
               <a:t>A data-driven read on a market that has cooled at the top and stayed scarce underneath.</a:t>
             </a:r>
@@ -4314,7 +4407,7 @@
       </p:sp>
       <p:sp>
         <p:nvSpPr>
-          <p:cNvPr id="7" name="TextBox 6"/>
+          <p:cNvPr id="9" name="TextBox 8"/>
           <p:cNvSpPr txBox="1"/>
           <p:nvPr/>
         </p:nvSpPr>
@@ -4349,9 +4442,10 @@
             <a:r>
               <a:rPr sz="950" b="1" i="0" spc="150">
                 <a:solidFill>
-                  <a:srgbClr val="8A8478"/>
+                  <a:srgbClr val="9BA6B4"/>
                 </a:solidFill>
                 <a:latin typeface="Courier New"/>
+                <a:ea typeface="Hiragino Sans GB"/>
               </a:rPr>
               <a:t>AS OF 12 JULY 2026   ·   SOURCES: CBS · IND · UWV · EUROSTAT · OECD</a:t>
             </a:r>
@@ -4460,6 +4554,7 @@
                   <a:srgbClr val="D8542A"/>
                 </a:solidFill>
                 <a:latin typeface="Helvetica Neue"/>
+                <a:ea typeface="Hiragino Sans GB"/>
               </a:rPr>
               <a:t>POLICY SHIFT</a:t>
             </a:r>
@@ -4506,6 +4601,7 @@
                   <a:srgbClr val="20242A"/>
                 </a:solidFill>
                 <a:latin typeface="Georgia"/>
+                <a:ea typeface="Hiragino Sans GB"/>
               </a:rPr>
               <a:t>The welcome is quietly tightening</a:t>
             </a:r>
@@ -4514,7 +4610,51 @@
       </p:sp>
       <p:sp>
         <p:nvSpPr>
-          <p:cNvPr id="5" name="TextBox 4"/>
+          <p:cNvPr id="5" name="Rectangle 4"/>
+          <p:cNvSpPr/>
+          <p:nvPr/>
+        </p:nvSpPr>
+        <p:spPr>
+          <a:xfrm>
+            <a:off x="566928" y="1191006"/>
+            <a:ext cx="1097280" cy="45720"/>
+          </a:xfrm>
+          <a:prstGeom prst="rect">
+            <a:avLst/>
+          </a:prstGeom>
+          <a:solidFill>
+            <a:srgbClr val="D8542A"/>
+          </a:solidFill>
+          <a:ln>
+            <a:noFill/>
+          </a:ln>
+          <a:effectLst/>
+        </p:spPr>
+        <p:style>
+          <a:lnRef idx="1">
+            <a:schemeClr val="accent1"/>
+          </a:lnRef>
+          <a:fillRef idx="3">
+            <a:schemeClr val="accent1"/>
+          </a:fillRef>
+          <a:effectRef idx="2">
+            <a:schemeClr val="accent1"/>
+          </a:effectRef>
+          <a:fontRef idx="minor">
+            <a:schemeClr val="lt1"/>
+          </a:fontRef>
+        </p:style>
+        <p:txBody>
+          <a:bodyPr rtlCol="0" anchor="ctr"/>
+          <a:lstStyle/>
+          <a:p>
+            <a:pPr algn="ctr"/>
+          </a:p>
+        </p:txBody>
+      </p:sp>
+      <p:sp>
+        <p:nvSpPr>
+          <p:cNvPr id="6" name="TextBox 5"/>
           <p:cNvSpPr txBox="1"/>
           <p:nvPr/>
         </p:nvSpPr>
@@ -4552,6 +4692,7 @@
                   <a:srgbClr val="8A8478"/>
                 </a:solidFill>
                 <a:latin typeface="Courier New"/>
+                <a:ea typeface="Hiragino Sans GB"/>
               </a:rPr>
               <a:t>THE 30% EXPAT RULING, PHASED DOWN</a:t>
             </a:r>
@@ -4560,7 +4701,7 @@
       </p:sp>
       <p:sp>
         <p:nvSpPr>
-          <p:cNvPr id="6" name="Rectangle 5"/>
+          <p:cNvPr id="7" name="Rectangle 6"/>
           <p:cNvSpPr/>
           <p:nvPr/>
         </p:nvSpPr>
@@ -4604,7 +4745,7 @@
       </p:sp>
       <p:sp>
         <p:nvSpPr>
-          <p:cNvPr id="7" name="Rounded Rectangle 6"/>
+          <p:cNvPr id="8" name="Rounded Rectangle 7"/>
           <p:cNvSpPr/>
           <p:nvPr/>
         </p:nvSpPr>
@@ -4650,7 +4791,7 @@
       </p:sp>
       <p:sp>
         <p:nvSpPr>
-          <p:cNvPr id="8" name="TextBox 7"/>
+          <p:cNvPr id="9" name="TextBox 8"/>
           <p:cNvSpPr txBox="1"/>
           <p:nvPr/>
         </p:nvSpPr>
@@ -4688,6 +4829,7 @@
                   <a:srgbClr val="8A8478"/>
                 </a:solidFill>
                 <a:latin typeface="Helvetica Neue"/>
+                <a:ea typeface="Hiragino Sans GB"/>
               </a:rPr>
               <a:t>2024–26  </a:t>
             </a:r>
@@ -4697,6 +4839,7 @@
                   <a:srgbClr val="20242A"/>
                 </a:solidFill>
                 <a:latin typeface="Helvetica Neue"/>
+                <a:ea typeface="Hiragino Sans GB"/>
               </a:rPr>
               <a:t>30% tax-free</a:t>
             </a:r>
@@ -4705,7 +4848,7 @@
       </p:sp>
       <p:sp>
         <p:nvSpPr>
-          <p:cNvPr id="9" name="TextBox 8"/>
+          <p:cNvPr id="10" name="TextBox 9"/>
           <p:cNvSpPr txBox="1"/>
           <p:nvPr/>
         </p:nvSpPr>
@@ -4743,6 +4886,7 @@
                   <a:srgbClr val="8A8478"/>
                 </a:solidFill>
                 <a:latin typeface="Helvetica Neue"/>
+                <a:ea typeface="Hiragino Sans GB"/>
               </a:rPr>
               <a:t>income norm €46,107</a:t>
             </a:r>
@@ -4751,7 +4895,7 @@
       </p:sp>
       <p:sp>
         <p:nvSpPr>
-          <p:cNvPr id="10" name="Rounded Rectangle 9"/>
+          <p:cNvPr id="11" name="Rounded Rectangle 10"/>
           <p:cNvSpPr/>
           <p:nvPr/>
         </p:nvSpPr>
@@ -4797,7 +4941,7 @@
       </p:sp>
       <p:sp>
         <p:nvSpPr>
-          <p:cNvPr id="11" name="TextBox 10"/>
+          <p:cNvPr id="12" name="TextBox 11"/>
           <p:cNvSpPr txBox="1"/>
           <p:nvPr/>
         </p:nvSpPr>
@@ -4835,6 +4979,7 @@
                   <a:srgbClr val="D8542A"/>
                 </a:solidFill>
                 <a:latin typeface="Helvetica Neue"/>
+                <a:ea typeface="Hiragino Sans GB"/>
               </a:rPr>
               <a:t>1 Jan 2027  </a:t>
             </a:r>
@@ -4844,6 +4989,7 @@
                   <a:srgbClr val="20242A"/>
                 </a:solidFill>
                 <a:latin typeface="Helvetica Neue"/>
+                <a:ea typeface="Hiragino Sans GB"/>
               </a:rPr>
               <a:t>→ 27% tax-free</a:t>
             </a:r>
@@ -4852,7 +4998,7 @@
       </p:sp>
       <p:sp>
         <p:nvSpPr>
-          <p:cNvPr id="12" name="TextBox 11"/>
+          <p:cNvPr id="13" name="TextBox 12"/>
           <p:cNvSpPr txBox="1"/>
           <p:nvPr/>
         </p:nvSpPr>
@@ -4890,6 +5036,7 @@
                   <a:srgbClr val="8A8478"/>
                 </a:solidFill>
                 <a:latin typeface="Helvetica Neue"/>
+                <a:ea typeface="Hiragino Sans GB"/>
               </a:rPr>
               <a:t>norm rises to €50,436</a:t>
             </a:r>
@@ -4898,7 +5045,7 @@
       </p:sp>
       <p:sp>
         <p:nvSpPr>
-          <p:cNvPr id="13" name="Rounded Rectangle 12"/>
+          <p:cNvPr id="14" name="Rounded Rectangle 13"/>
           <p:cNvSpPr/>
           <p:nvPr/>
         </p:nvSpPr>
@@ -4944,7 +5091,7 @@
       </p:sp>
       <p:sp>
         <p:nvSpPr>
-          <p:cNvPr id="14" name="TextBox 13"/>
+          <p:cNvPr id="15" name="TextBox 14"/>
           <p:cNvSpPr txBox="1"/>
           <p:nvPr/>
         </p:nvSpPr>
@@ -4982,6 +5129,7 @@
                   <a:srgbClr val="8A8478"/>
                 </a:solidFill>
                 <a:latin typeface="Helvetica Neue"/>
+                <a:ea typeface="Hiragino Sans GB"/>
               </a:rPr>
               <a:t>Under-30 MSc  </a:t>
             </a:r>
@@ -4991,6 +5139,7 @@
                   <a:srgbClr val="20242A"/>
                 </a:solidFill>
                 <a:latin typeface="Helvetica Neue"/>
+                <a:ea typeface="Hiragino Sans GB"/>
               </a:rPr>
               <a:t>higher bar</a:t>
             </a:r>
@@ -4999,7 +5148,7 @@
       </p:sp>
       <p:sp>
         <p:nvSpPr>
-          <p:cNvPr id="15" name="TextBox 14"/>
+          <p:cNvPr id="16" name="TextBox 15"/>
           <p:cNvSpPr txBox="1"/>
           <p:nvPr/>
         </p:nvSpPr>
@@ -5037,6 +5186,7 @@
                   <a:srgbClr val="8A8478"/>
                 </a:solidFill>
                 <a:latin typeface="Helvetica Neue"/>
+                <a:ea typeface="Hiragino Sans GB"/>
               </a:rPr>
               <a:t>€35,048 → €38,388</a:t>
             </a:r>
@@ -5045,7 +5195,7 @@
       </p:sp>
       <p:sp>
         <p:nvSpPr>
-          <p:cNvPr id="16" name="TextBox 15"/>
+          <p:cNvPr id="17" name="TextBox 16"/>
           <p:cNvSpPr txBox="1"/>
           <p:nvPr/>
         </p:nvSpPr>
@@ -5083,6 +5233,7 @@
                   <a:srgbClr val="8A8478"/>
                 </a:solidFill>
                 <a:latin typeface="Courier New"/>
+                <a:ea typeface="Hiragino Sans GB"/>
               </a:rPr>
               <a:t>HIGHLY SKILLED MIGRANT APPLICATIONS</a:t>
             </a:r>
@@ -5091,7 +5242,7 @@
       </p:sp>
       <p:graphicFrame>
         <p:nvGraphicFramePr>
-          <p:cNvPr id="17" name="Chart 16"/>
+          <p:cNvPr id="18" name="Chart 17"/>
           <p:cNvGraphicFramePr>
             <a:graphicFrameLocks noGrp="1"/>
           </p:cNvGraphicFramePr>
@@ -5109,7 +5260,7 @@
       </p:graphicFrame>
       <p:sp>
         <p:nvSpPr>
-          <p:cNvPr id="18" name="TextBox 17"/>
+          <p:cNvPr id="19" name="TextBox 18"/>
           <p:cNvSpPr txBox="1"/>
           <p:nvPr/>
         </p:nvSpPr>
@@ -5147,6 +5298,7 @@
                   <a:srgbClr val="4A4E56"/>
                 </a:solidFill>
                 <a:latin typeface="Helvetica Neue"/>
+                <a:ea typeface="Hiragino Sans GB"/>
               </a:rPr>
               <a:t>Applications fell ~16% in a year; non-EU skilled arrivals dropped further to ≈14,000 in 2025.</a:t>
             </a:r>
@@ -5155,7 +5307,7 @@
       </p:sp>
       <p:sp>
         <p:nvSpPr>
-          <p:cNvPr id="19" name="TextBox 18"/>
+          <p:cNvPr id="20" name="TextBox 19"/>
           <p:cNvSpPr txBox="1"/>
           <p:nvPr/>
         </p:nvSpPr>
@@ -5193,6 +5345,7 @@
                   <a:srgbClr val="B23F1C"/>
                 </a:solidFill>
                 <a:latin typeface="Helvetica Neue"/>
+                <a:ea typeface="Hiragino Sans GB"/>
               </a:rPr>
               <a:t>Lower tax break + higher salary bars = a costlier, more selective door.</a:t>
             </a:r>
@@ -5201,7 +5354,7 @@
       </p:sp>
       <p:sp>
         <p:nvSpPr>
-          <p:cNvPr id="20" name="TextBox 19"/>
+          <p:cNvPr id="21" name="TextBox 20"/>
           <p:cNvSpPr txBox="1"/>
           <p:nvPr/>
         </p:nvSpPr>
@@ -5239,6 +5392,7 @@
                   <a:srgbClr val="D8542A"/>
                 </a:solidFill>
                 <a:latin typeface="Courier New"/>
+                <a:ea typeface="Hiragino Sans GB"/>
               </a:rPr>
               <a:t>SOURCE   </a:t>
             </a:r>
@@ -5248,6 +5402,7 @@
                   <a:srgbClr val="8A8478"/>
                 </a:solidFill>
                 <a:latin typeface="Courier New"/>
+                <a:ea typeface="Hiragino Sans GB"/>
               </a:rPr>
               <a:t>Business.gov.nl (30%→27% ruling and income norms, 2027); IND &amp; OECD (applications and arrivals).</a:t>
             </a:r>
@@ -5256,7 +5411,7 @@
       </p:sp>
       <p:sp>
         <p:nvSpPr>
-          <p:cNvPr id="21" name="TextBox 20"/>
+          <p:cNvPr id="22" name="TextBox 21"/>
           <p:cNvSpPr txBox="1"/>
           <p:nvPr/>
         </p:nvSpPr>
@@ -5294,6 +5449,7 @@
                   <a:srgbClr val="8A8478"/>
                 </a:solidFill>
                 <a:latin typeface="Courier New"/>
+                <a:ea typeface="Hiragino Sans GB"/>
               </a:rPr>
               <a:t>The Netherlands Job Market · 2026   ·   an example deck built with slide-maker</a:t>
             </a:r>
@@ -5302,7 +5458,7 @@
       </p:sp>
       <p:sp>
         <p:nvSpPr>
-          <p:cNvPr id="22" name="TextBox 21"/>
+          <p:cNvPr id="23" name="TextBox 22"/>
           <p:cNvSpPr txBox="1"/>
           <p:nvPr/>
         </p:nvSpPr>
@@ -5340,6 +5496,7 @@
                   <a:srgbClr val="8A8478"/>
                 </a:solidFill>
                 <a:latin typeface="Courier New"/>
+                <a:ea typeface="Hiragino Sans GB"/>
               </a:rPr>
               <a:t>10 / 14</a:t>
             </a:r>
@@ -5448,6 +5605,7 @@
                   <a:srgbClr val="0E5C63"/>
                 </a:solidFill>
                 <a:latin typeface="Helvetica Neue"/>
+                <a:ea typeface="Hiragino Sans GB"/>
               </a:rPr>
               <a:t>REGIONAL DIFFERENCES</a:t>
             </a:r>
@@ -5494,6 +5652,7 @@
                   <a:srgbClr val="20242A"/>
                 </a:solidFill>
                 <a:latin typeface="Georgia"/>
+                <a:ea typeface="Hiragino Sans GB"/>
               </a:rPr>
               <a:t>Tight everywhere, hotter in pockets</a:t>
             </a:r>
@@ -5502,7 +5661,51 @@
       </p:sp>
       <p:sp>
         <p:nvSpPr>
-          <p:cNvPr id="5" name="TextBox 4"/>
+          <p:cNvPr id="5" name="Rectangle 4"/>
+          <p:cNvSpPr/>
+          <p:nvPr/>
+        </p:nvSpPr>
+        <p:spPr>
+          <a:xfrm>
+            <a:off x="566928" y="1191006"/>
+            <a:ext cx="1097280" cy="45720"/>
+          </a:xfrm>
+          <a:prstGeom prst="rect">
+            <a:avLst/>
+          </a:prstGeom>
+          <a:solidFill>
+            <a:srgbClr val="0E5C63"/>
+          </a:solidFill>
+          <a:ln>
+            <a:noFill/>
+          </a:ln>
+          <a:effectLst/>
+        </p:spPr>
+        <p:style>
+          <a:lnRef idx="1">
+            <a:schemeClr val="accent1"/>
+          </a:lnRef>
+          <a:fillRef idx="3">
+            <a:schemeClr val="accent1"/>
+          </a:fillRef>
+          <a:effectRef idx="2">
+            <a:schemeClr val="accent1"/>
+          </a:effectRef>
+          <a:fontRef idx="minor">
+            <a:schemeClr val="lt1"/>
+          </a:fontRef>
+        </p:style>
+        <p:txBody>
+          <a:bodyPr rtlCol="0" anchor="ctr"/>
+          <a:lstStyle/>
+          <a:p>
+            <a:pPr algn="ctr"/>
+          </a:p>
+        </p:txBody>
+      </p:sp>
+      <p:sp>
+        <p:nvSpPr>
+          <p:cNvPr id="6" name="TextBox 5"/>
           <p:cNvSpPr txBox="1"/>
           <p:nvPr/>
         </p:nvSpPr>
@@ -5540,6 +5743,7 @@
                   <a:srgbClr val="8A8478"/>
                 </a:solidFill>
                 <a:latin typeface="Courier New"/>
+                <a:ea typeface="Hiragino Sans GB"/>
               </a:rPr>
               <a:t>VACANCIES PER 100 UNEMPLOYED</a:t>
             </a:r>
@@ -5548,7 +5752,7 @@
       </p:sp>
       <p:sp>
         <p:nvSpPr>
-          <p:cNvPr id="6" name="TextBox 5"/>
+          <p:cNvPr id="7" name="TextBox 6"/>
           <p:cNvSpPr txBox="1"/>
           <p:nvPr/>
         </p:nvSpPr>
@@ -5586,6 +5790,7 @@
                   <a:srgbClr val="8A8478"/>
                 </a:solidFill>
                 <a:latin typeface="Helvetica Neue"/>
+                <a:ea typeface="Hiragino Sans GB"/>
               </a:rPr>
               <a:t>Utrecht</a:t>
             </a:r>
@@ -5594,7 +5799,7 @@
       </p:sp>
       <p:sp>
         <p:nvSpPr>
-          <p:cNvPr id="7" name="Rounded Rectangle 6"/>
+          <p:cNvPr id="8" name="Rounded Rectangle 7"/>
           <p:cNvSpPr/>
           <p:nvPr/>
         </p:nvSpPr>
@@ -5640,7 +5845,7 @@
       </p:sp>
       <p:sp>
         <p:nvSpPr>
-          <p:cNvPr id="8" name="Rounded Rectangle 7"/>
+          <p:cNvPr id="9" name="Rounded Rectangle 8"/>
           <p:cNvSpPr/>
           <p:nvPr/>
         </p:nvSpPr>
@@ -5686,7 +5891,7 @@
       </p:sp>
       <p:sp>
         <p:nvSpPr>
-          <p:cNvPr id="9" name="TextBox 8"/>
+          <p:cNvPr id="10" name="TextBox 9"/>
           <p:cNvSpPr txBox="1"/>
           <p:nvPr/>
         </p:nvSpPr>
@@ -5724,6 +5929,7 @@
                   <a:srgbClr val="20242A"/>
                 </a:solidFill>
                 <a:latin typeface="Helvetica Neue"/>
+                <a:ea typeface="Hiragino Sans GB"/>
               </a:rPr>
               <a:t>122</a:t>
             </a:r>
@@ -5732,7 +5938,7 @@
       </p:sp>
       <p:sp>
         <p:nvSpPr>
-          <p:cNvPr id="10" name="TextBox 9"/>
+          <p:cNvPr id="11" name="TextBox 10"/>
           <p:cNvSpPr txBox="1"/>
           <p:nvPr/>
         </p:nvSpPr>
@@ -5770,6 +5976,7 @@
                   <a:srgbClr val="8A8478"/>
                 </a:solidFill>
                 <a:latin typeface="Helvetica Neue"/>
+                <a:ea typeface="Hiragino Sans GB"/>
               </a:rPr>
               <a:t>Zeeland</a:t>
             </a:r>
@@ -5778,7 +5985,7 @@
       </p:sp>
       <p:sp>
         <p:nvSpPr>
-          <p:cNvPr id="11" name="Rounded Rectangle 10"/>
+          <p:cNvPr id="12" name="Rounded Rectangle 11"/>
           <p:cNvSpPr/>
           <p:nvPr/>
         </p:nvSpPr>
@@ -5824,7 +6031,7 @@
       </p:sp>
       <p:sp>
         <p:nvSpPr>
-          <p:cNvPr id="12" name="Rounded Rectangle 11"/>
+          <p:cNvPr id="13" name="Rounded Rectangle 12"/>
           <p:cNvSpPr/>
           <p:nvPr/>
         </p:nvSpPr>
@@ -5870,7 +6077,7 @@
       </p:sp>
       <p:sp>
         <p:nvSpPr>
-          <p:cNvPr id="13" name="TextBox 12"/>
+          <p:cNvPr id="14" name="TextBox 13"/>
           <p:cNvSpPr txBox="1"/>
           <p:nvPr/>
         </p:nvSpPr>
@@ -5908,6 +6115,7 @@
                   <a:srgbClr val="20242A"/>
                 </a:solidFill>
                 <a:latin typeface="Helvetica Neue"/>
+                <a:ea typeface="Hiragino Sans GB"/>
               </a:rPr>
               <a:t>122</a:t>
             </a:r>
@@ -5916,7 +6124,7 @@
       </p:sp>
       <p:sp>
         <p:nvSpPr>
-          <p:cNvPr id="14" name="TextBox 13"/>
+          <p:cNvPr id="15" name="TextBox 14"/>
           <p:cNvSpPr txBox="1"/>
           <p:nvPr/>
         </p:nvSpPr>
@@ -5954,6 +6162,7 @@
                   <a:srgbClr val="8A8478"/>
                 </a:solidFill>
                 <a:latin typeface="Helvetica Neue"/>
+                <a:ea typeface="Hiragino Sans GB"/>
               </a:rPr>
               <a:t>Netherlands (avg)</a:t>
             </a:r>
@@ -5962,7 +6171,7 @@
       </p:sp>
       <p:sp>
         <p:nvSpPr>
-          <p:cNvPr id="15" name="Rounded Rectangle 14"/>
+          <p:cNvPr id="16" name="Rounded Rectangle 15"/>
           <p:cNvSpPr/>
           <p:nvPr/>
         </p:nvSpPr>
@@ -6008,7 +6217,7 @@
       </p:sp>
       <p:sp>
         <p:nvSpPr>
-          <p:cNvPr id="16" name="Rounded Rectangle 15"/>
+          <p:cNvPr id="17" name="Rounded Rectangle 16"/>
           <p:cNvSpPr/>
           <p:nvPr/>
         </p:nvSpPr>
@@ -6054,7 +6263,7 @@
       </p:sp>
       <p:sp>
         <p:nvSpPr>
-          <p:cNvPr id="17" name="TextBox 16"/>
+          <p:cNvPr id="18" name="TextBox 17"/>
           <p:cNvSpPr txBox="1"/>
           <p:nvPr/>
         </p:nvSpPr>
@@ -6092,6 +6301,7 @@
                   <a:srgbClr val="20242A"/>
                 </a:solidFill>
                 <a:latin typeface="Helvetica Neue"/>
+                <a:ea typeface="Hiragino Sans GB"/>
               </a:rPr>
               <a:t>91</a:t>
             </a:r>
@@ -6100,7 +6310,7 @@
       </p:sp>
       <p:sp>
         <p:nvSpPr>
-          <p:cNvPr id="18" name="TextBox 17"/>
+          <p:cNvPr id="19" name="TextBox 18"/>
           <p:cNvSpPr txBox="1"/>
           <p:nvPr/>
         </p:nvSpPr>
@@ -6138,6 +6348,7 @@
                   <a:srgbClr val="8A8478"/>
                 </a:solidFill>
                 <a:latin typeface="Helvetica Neue"/>
+                <a:ea typeface="Hiragino Sans GB"/>
               </a:rPr>
               <a:t>Groningen (recovering)</a:t>
             </a:r>
@@ -6146,7 +6357,7 @@
       </p:sp>
       <p:sp>
         <p:nvSpPr>
-          <p:cNvPr id="19" name="Rounded Rectangle 18"/>
+          <p:cNvPr id="20" name="Rounded Rectangle 19"/>
           <p:cNvSpPr/>
           <p:nvPr/>
         </p:nvSpPr>
@@ -6192,7 +6403,7 @@
       </p:sp>
       <p:sp>
         <p:nvSpPr>
-          <p:cNvPr id="20" name="Rounded Rectangle 19"/>
+          <p:cNvPr id="21" name="Rounded Rectangle 20"/>
           <p:cNvSpPr/>
           <p:nvPr/>
         </p:nvSpPr>
@@ -6238,7 +6449,7 @@
       </p:sp>
       <p:sp>
         <p:nvSpPr>
-          <p:cNvPr id="21" name="TextBox 20"/>
+          <p:cNvPr id="22" name="TextBox 21"/>
           <p:cNvSpPr txBox="1"/>
           <p:nvPr/>
         </p:nvSpPr>
@@ -6276,6 +6487,7 @@
                   <a:srgbClr val="20242A"/>
                 </a:solidFill>
                 <a:latin typeface="Helvetica Neue"/>
+                <a:ea typeface="Hiragino Sans GB"/>
               </a:rPr>
               <a:t>78</a:t>
             </a:r>
@@ -6284,7 +6496,7 @@
       </p:sp>
       <p:sp>
         <p:nvSpPr>
-          <p:cNvPr id="22" name="Rounded Rectangle 21"/>
+          <p:cNvPr id="23" name="Rounded Rectangle 22"/>
           <p:cNvSpPr/>
           <p:nvPr/>
         </p:nvSpPr>
@@ -6299,12 +6511,10 @@
             </a:avLst>
           </a:prstGeom>
           <a:solidFill>
-            <a:srgbClr val="ECE4D6"/>
+            <a:srgbClr val="16223A"/>
           </a:solidFill>
-          <a:ln w="12700">
-            <a:solidFill>
-              <a:srgbClr val="DED7C8"/>
-            </a:solidFill>
+          <a:ln>
+            <a:noFill/>
           </a:ln>
           <a:effectLst/>
         </p:spPr>
@@ -6332,7 +6542,7 @@
       </p:sp>
       <p:sp>
         <p:nvSpPr>
-          <p:cNvPr id="23" name="TextBox 22"/>
+          <p:cNvPr id="24" name="TextBox 23"/>
           <p:cNvSpPr txBox="1"/>
           <p:nvPr/>
         </p:nvSpPr>
@@ -6370,15 +6580,17 @@
                   <a:srgbClr val="D8542A"/>
                 </a:solidFill>
                 <a:latin typeface="Helvetica Neue"/>
+                <a:ea typeface="Hiragino Sans GB"/>
               </a:rPr>
               <a:t>13 of 35</a:t>
             </a:r>
             <a:r>
               <a:rPr sz="1300" b="0" i="0">
                 <a:solidFill>
-                  <a:srgbClr val="4A4E56"/>
+                  <a:srgbClr val="C9D2DE"/>
                 </a:solidFill>
                 <a:latin typeface="Helvetica Neue"/>
+                <a:ea typeface="Hiragino Sans GB"/>
               </a:rPr>
               <a:t>  regions</a:t>
             </a:r>
@@ -6387,7 +6599,7 @@
       </p:sp>
       <p:sp>
         <p:nvSpPr>
-          <p:cNvPr id="24" name="TextBox 23"/>
+          <p:cNvPr id="25" name="TextBox 24"/>
           <p:cNvSpPr txBox="1"/>
           <p:nvPr/>
         </p:nvSpPr>
@@ -6422,9 +6634,10 @@
             <a:r>
               <a:rPr sz="1050" b="0" i="0">
                 <a:solidFill>
-                  <a:srgbClr val="8A8478"/>
+                  <a:srgbClr val="9BA6B4"/>
                 </a:solidFill>
                 <a:latin typeface="Helvetica Neue"/>
+                <a:ea typeface="Hiragino Sans GB"/>
               </a:rPr>
               <a:t>classed “extremely tight” (5+ vacancies per jobseeker).</a:t>
             </a:r>
@@ -6433,7 +6646,7 @@
       </p:sp>
       <p:sp>
         <p:nvSpPr>
-          <p:cNvPr id="25" name="Rectangle 24"/>
+          <p:cNvPr id="26" name="Rectangle 25"/>
           <p:cNvSpPr/>
           <p:nvPr/>
         </p:nvSpPr>
@@ -6477,7 +6690,7 @@
       </p:sp>
       <p:sp>
         <p:nvSpPr>
-          <p:cNvPr id="26" name="TextBox 25"/>
+          <p:cNvPr id="27" name="TextBox 26"/>
           <p:cNvSpPr txBox="1"/>
           <p:nvPr/>
         </p:nvSpPr>
@@ -6515,6 +6728,7 @@
                   <a:srgbClr val="20242A"/>
                 </a:solidFill>
                 <a:latin typeface="Helvetica Neue"/>
+                <a:ea typeface="Hiragino Sans GB"/>
               </a:rPr>
               <a:t>Randstad core runs hottest</a:t>
             </a:r>
@@ -6523,7 +6737,7 @@
       </p:sp>
       <p:sp>
         <p:nvSpPr>
-          <p:cNvPr id="27" name="TextBox 26"/>
+          <p:cNvPr id="28" name="TextBox 27"/>
           <p:cNvSpPr txBox="1"/>
           <p:nvPr/>
         </p:nvSpPr>
@@ -6561,6 +6775,7 @@
                   <a:srgbClr val="4A4E56"/>
                 </a:solidFill>
                 <a:latin typeface="Helvetica Neue"/>
+                <a:ea typeface="Hiragino Sans GB"/>
               </a:rPr>
               <a:t>Utrecht and the central belt lead the country for tension.</a:t>
             </a:r>
@@ -6569,7 +6784,7 @@
       </p:sp>
       <p:sp>
         <p:nvSpPr>
-          <p:cNvPr id="28" name="Rectangle 27"/>
+          <p:cNvPr id="29" name="Rectangle 28"/>
           <p:cNvSpPr/>
           <p:nvPr/>
         </p:nvSpPr>
@@ -6613,7 +6828,7 @@
       </p:sp>
       <p:sp>
         <p:nvSpPr>
-          <p:cNvPr id="29" name="TextBox 28"/>
+          <p:cNvPr id="30" name="TextBox 29"/>
           <p:cNvSpPr txBox="1"/>
           <p:nvPr/>
         </p:nvSpPr>
@@ -6651,6 +6866,7 @@
                   <a:srgbClr val="20242A"/>
                 </a:solidFill>
                 <a:latin typeface="Helvetica Neue"/>
+                <a:ea typeface="Hiragino Sans GB"/>
               </a:rPr>
               <a:t>Only two provinces held steady</a:t>
             </a:r>
@@ -6659,7 +6875,7 @@
       </p:sp>
       <p:sp>
         <p:nvSpPr>
-          <p:cNvPr id="30" name="TextBox 29"/>
+          <p:cNvPr id="31" name="TextBox 30"/>
           <p:cNvSpPr txBox="1"/>
           <p:nvPr/>
         </p:nvSpPr>
@@ -6697,6 +6913,7 @@
                   <a:srgbClr val="4A4E56"/>
                 </a:solidFill>
                 <a:latin typeface="Helvetica Neue"/>
+                <a:ea typeface="Hiragino Sans GB"/>
               </a:rPr>
               <a:t>Unemployment rose in 2025 everywhere except Utrecht and Limburg.</a:t>
             </a:r>
@@ -6705,7 +6922,7 @@
       </p:sp>
       <p:sp>
         <p:nvSpPr>
-          <p:cNvPr id="31" name="TextBox 30"/>
+          <p:cNvPr id="32" name="TextBox 31"/>
           <p:cNvSpPr txBox="1"/>
           <p:nvPr/>
         </p:nvSpPr>
@@ -6743,6 +6960,7 @@
                   <a:srgbClr val="D8542A"/>
                 </a:solidFill>
                 <a:latin typeface="Courier New"/>
+                <a:ea typeface="Hiragino Sans GB"/>
               </a:rPr>
               <a:t>SOURCE   </a:t>
             </a:r>
@@ -6752,6 +6970,7 @@
                   <a:srgbClr val="8A8478"/>
                 </a:solidFill>
                 <a:latin typeface="Courier New"/>
+                <a:ea typeface="Hiragino Sans GB"/>
               </a:rPr>
               <a:t>CBS &amp; UWV (provincial tension ratios and 35-region labour-market classification, 2025–2026).</a:t>
             </a:r>
@@ -6760,7 +6979,7 @@
       </p:sp>
       <p:sp>
         <p:nvSpPr>
-          <p:cNvPr id="32" name="TextBox 31"/>
+          <p:cNvPr id="33" name="TextBox 32"/>
           <p:cNvSpPr txBox="1"/>
           <p:nvPr/>
         </p:nvSpPr>
@@ -6798,6 +7017,7 @@
                   <a:srgbClr val="8A8478"/>
                 </a:solidFill>
                 <a:latin typeface="Courier New"/>
+                <a:ea typeface="Hiragino Sans GB"/>
               </a:rPr>
               <a:t>The Netherlands Job Market · 2026   ·   an example deck built with slide-maker</a:t>
             </a:r>
@@ -6806,7 +7026,7 @@
       </p:sp>
       <p:sp>
         <p:nvSpPr>
-          <p:cNvPr id="33" name="TextBox 32"/>
+          <p:cNvPr id="34" name="TextBox 33"/>
           <p:cNvSpPr txBox="1"/>
           <p:nvPr/>
         </p:nvSpPr>
@@ -6844,6 +7064,7 @@
                   <a:srgbClr val="8A8478"/>
                 </a:solidFill>
                 <a:latin typeface="Courier New"/>
+                <a:ea typeface="Hiragino Sans GB"/>
               </a:rPr>
               <a:t>11 / 14</a:t>
             </a:r>
@@ -6883,7 +7104,7 @@
             <a:avLst/>
           </a:prstGeom>
           <a:solidFill>
-            <a:srgbClr val="F4EFE6"/>
+            <a:srgbClr val="16223A"/>
           </a:solidFill>
           <a:ln>
             <a:noFill/>
@@ -6949,9 +7170,10 @@
             <a:r>
               <a:rPr sz="1100" b="1" i="0" spc="150">
                 <a:solidFill>
-                  <a:srgbClr val="0E5C63"/>
+                  <a:srgbClr val="2E8A8C"/>
                 </a:solidFill>
                 <a:latin typeface="Courier New"/>
+                <a:ea typeface="Hiragino Sans GB"/>
               </a:rPr>
               <a:t>OUTLOOK  ·  2026–2027</a:t>
             </a:r>
@@ -7039,9 +7261,10 @@
             <a:r>
               <a:rPr sz="3000" b="1" i="0">
                 <a:solidFill>
-                  <a:srgbClr val="20242A"/>
+                  <a:srgbClr val="F1EBDD"/>
                 </a:solidFill>
                 <a:latin typeface="Georgia"/>
+                <a:ea typeface="Hiragino Sans GB"/>
               </a:rPr>
               <a:t>Balance at the top, scarcity underneath.</a:t>
             </a:r>
@@ -7065,12 +7288,10 @@
             </a:avLst>
           </a:prstGeom>
           <a:solidFill>
-            <a:srgbClr val="ECE4D6"/>
+            <a:srgbClr val="0F1A2E"/>
           </a:solidFill>
-          <a:ln w="12700">
-            <a:solidFill>
-              <a:srgbClr val="DED7C8"/>
-            </a:solidFill>
+          <a:ln>
+            <a:noFill/>
           </a:ln>
           <a:effectLst/>
         </p:spPr>
@@ -7113,7 +7334,7 @@
             </a:avLst>
           </a:prstGeom>
           <a:solidFill>
-            <a:srgbClr val="DDE8E9"/>
+            <a:srgbClr val="24314C"/>
           </a:solidFill>
           <a:ln>
             <a:noFill/>
@@ -7206,6 +7427,7 @@
                   <a:srgbClr val="0E5C63"/>
                 </a:solidFill>
                 <a:latin typeface="Helvetica Neue"/>
+                <a:ea typeface="Hiragino Sans GB"/>
               </a:rPr>
               <a:t>4.2 → 4.4%</a:t>
             </a:r>
@@ -7249,9 +7471,10 @@
             <a:r>
               <a:rPr sz="1150" b="0" i="0">
                 <a:solidFill>
-                  <a:srgbClr val="4A4E56"/>
+                  <a:srgbClr val="C9D2DE"/>
                 </a:solidFill>
                 <a:latin typeface="Helvetica Neue"/>
+                <a:ea typeface="Hiragino Sans GB"/>
               </a:rPr>
               <a:t>Unemployment edges up to 2027 as growth stays modest — still historically low.</a:t>
             </a:r>
@@ -7275,12 +7498,10 @@
             </a:avLst>
           </a:prstGeom>
           <a:solidFill>
-            <a:srgbClr val="ECE4D6"/>
+            <a:srgbClr val="0F1A2E"/>
           </a:solidFill>
-          <a:ln w="12700">
-            <a:solidFill>
-              <a:srgbClr val="DED7C8"/>
-            </a:solidFill>
+          <a:ln>
+            <a:noFill/>
           </a:ln>
           <a:effectLst/>
         </p:spPr>
@@ -7323,7 +7544,7 @@
             </a:avLst>
           </a:prstGeom>
           <a:solidFill>
-            <a:srgbClr val="E1EEEE"/>
+            <a:srgbClr val="24314C"/>
           </a:solidFill>
           <a:ln>
             <a:noFill/>
@@ -7416,6 +7637,7 @@
                   <a:srgbClr val="2E8A8C"/>
                 </a:solidFill>
                 <a:latin typeface="Helvetica Neue"/>
+                <a:ea typeface="Hiragino Sans GB"/>
               </a:rPr>
               <a:t>+1.1%</a:t>
             </a:r>
@@ -7459,9 +7681,10 @@
             <a:r>
               <a:rPr sz="1150" b="0" i="0">
                 <a:solidFill>
-                  <a:srgbClr val="4A4E56"/>
+                  <a:srgbClr val="C9D2DE"/>
                 </a:solidFill>
                 <a:latin typeface="Helvetica Neue"/>
+                <a:ea typeface="Hiragino Sans GB"/>
               </a:rPr>
               <a:t>Total jobs still grow through 2027 (UWV): cooling, not contracting.</a:t>
             </a:r>
@@ -7485,12 +7708,10 @@
             </a:avLst>
           </a:prstGeom>
           <a:solidFill>
-            <a:srgbClr val="ECE4D6"/>
+            <a:srgbClr val="0F1A2E"/>
           </a:solidFill>
-          <a:ln w="12700">
-            <a:solidFill>
-              <a:srgbClr val="DED7C8"/>
-            </a:solidFill>
+          <a:ln>
+            <a:noFill/>
           </a:ln>
           <a:effectLst/>
         </p:spPr>
@@ -7533,7 +7754,7 @@
             </a:avLst>
           </a:prstGeom>
           <a:solidFill>
-            <a:srgbClr val="F9E7E1"/>
+            <a:srgbClr val="24314C"/>
           </a:solidFill>
           <a:ln>
             <a:noFill/>
@@ -7626,6 +7847,7 @@
                   <a:srgbClr val="D8542A"/>
                 </a:solidFill>
                 <a:latin typeface="Helvetica Neue"/>
+                <a:ea typeface="Hiragino Sans GB"/>
               </a:rPr>
               <a:t>2 in 3</a:t>
             </a:r>
@@ -7669,9 +7891,10 @@
             <a:r>
               <a:rPr sz="1150" b="0" i="0">
                 <a:solidFill>
-                  <a:srgbClr val="4A4E56"/>
+                  <a:srgbClr val="C9D2DE"/>
                 </a:solidFill>
                 <a:latin typeface="Helvetica Neue"/>
+                <a:ea typeface="Hiragino Sans GB"/>
               </a:rPr>
               <a:t>employed mothers work part-time; an ageing workforce keeps shortages tight.</a:t>
             </a:r>
@@ -7715,18 +7938,20 @@
             <a:r>
               <a:rPr sz="800" b="1" i="0">
                 <a:solidFill>
-                  <a:srgbClr val="D8542A"/>
+                  <a:srgbClr val="2E8A8C"/>
                 </a:solidFill>
                 <a:latin typeface="Courier New"/>
+                <a:ea typeface="Hiragino Sans GB"/>
               </a:rPr>
               <a:t>SOURCE   </a:t>
             </a:r>
             <a:r>
               <a:rPr sz="850" b="0" i="0">
                 <a:solidFill>
-                  <a:srgbClr val="8A8478"/>
+                  <a:srgbClr val="9BA6B4"/>
                 </a:solidFill>
                 <a:latin typeface="Courier New"/>
+                <a:ea typeface="Hiragino Sans GB"/>
               </a:rPr>
               <a:t>Rabobank, European Commission &amp; ABN AMRO (2026–27 forecasts); UWV (job-growth &amp; reskilling outlook).</a:t>
             </a:r>
@@ -7770,9 +7995,10 @@
             <a:r>
               <a:rPr sz="800" b="0" i="0">
                 <a:solidFill>
-                  <a:srgbClr val="8A8478"/>
+                  <a:srgbClr val="9BA6B4"/>
                 </a:solidFill>
                 <a:latin typeface="Courier New"/>
+                <a:ea typeface="Hiragino Sans GB"/>
               </a:rPr>
               <a:t>The Netherlands Job Market · 2026   ·   an example deck built with slide-maker</a:t>
             </a:r>
@@ -7816,9 +8042,10 @@
             <a:r>
               <a:rPr sz="900" b="1" i="0">
                 <a:solidFill>
-                  <a:srgbClr val="8A8478"/>
+                  <a:srgbClr val="9BA6B4"/>
                 </a:solidFill>
                 <a:latin typeface="Courier New"/>
+                <a:ea typeface="Hiragino Sans GB"/>
               </a:rPr>
               <a:t>12 / 14</a:t>
             </a:r>
@@ -7858,7 +8085,7 @@
             <a:avLst/>
           </a:prstGeom>
           <a:solidFill>
-            <a:srgbClr val="F4EFE6"/>
+            <a:srgbClr val="16223A"/>
           </a:solidFill>
           <a:ln>
             <a:noFill/>
@@ -7924,9 +8151,10 @@
             <a:r>
               <a:rPr sz="1100" b="1" i="0" spc="150">
                 <a:solidFill>
-                  <a:srgbClr val="0E5C63"/>
+                  <a:srgbClr val="2E8A8C"/>
                 </a:solidFill>
                 <a:latin typeface="Courier New"/>
+                <a:ea typeface="Hiragino Sans GB"/>
               </a:rPr>
               <a:t>IN SUMMARY</a:t>
             </a:r>
@@ -8014,9 +8242,10 @@
             <a:r>
               <a:rPr sz="2900" b="1" i="0">
                 <a:solidFill>
-                  <a:srgbClr val="20242A"/>
+                  <a:srgbClr val="F1EBDD"/>
                 </a:solidFill>
                 <a:latin typeface="Georgia"/>
+                <a:ea typeface="Hiragino Sans GB"/>
               </a:rPr>
               <a:t>Five things to remember</a:t>
             </a:r>
@@ -8063,6 +8292,7 @@
                   <a:srgbClr val="D8542A"/>
                 </a:solidFill>
                 <a:latin typeface="Georgia"/>
+                <a:ea typeface="Hiragino Sans GB"/>
               </a:rPr>
               <a:t>01</a:t>
             </a:r>
@@ -8106,9 +8336,10 @@
             <a:r>
               <a:rPr sz="1400" b="1" i="0">
                 <a:solidFill>
-                  <a:srgbClr val="20242A"/>
+                  <a:srgbClr val="F1EBDD"/>
                 </a:solidFill>
                 <a:latin typeface="Georgia"/>
+                <a:ea typeface="Hiragino Sans GB"/>
               </a:rPr>
               <a:t>Cooled, not slack</a:t>
             </a:r>
@@ -8152,9 +8383,10 @@
             <a:r>
               <a:rPr sz="1150" b="0" i="0">
                 <a:solidFill>
-                  <a:srgbClr val="4A4E56"/>
+                  <a:srgbClr val="C9D2DE"/>
                 </a:solidFill>
                 <a:latin typeface="Helvetica Neue"/>
+                <a:ea typeface="Hiragino Sans GB"/>
               </a:rPr>
               <a:t>Vacancies now roughly match jobseekers — down from the 2022 peak, but still ~3× the pre-2020 norm.</a:t>
             </a:r>
@@ -8176,7 +8408,7 @@
             <a:avLst/>
           </a:prstGeom>
           <a:solidFill>
-            <a:srgbClr val="DED7C8"/>
+            <a:srgbClr val="2A3852"/>
           </a:solidFill>
           <a:ln>
             <a:noFill/>
@@ -8245,6 +8477,7 @@
                   <a:srgbClr val="D8542A"/>
                 </a:solidFill>
                 <a:latin typeface="Georgia"/>
+                <a:ea typeface="Hiragino Sans GB"/>
               </a:rPr>
               <a:t>02</a:t>
             </a:r>
@@ -8288,9 +8521,10 @@
             <a:r>
               <a:rPr sz="1400" b="1" i="0">
                 <a:solidFill>
-                  <a:srgbClr val="20242A"/>
+                  <a:srgbClr val="F1EBDD"/>
                 </a:solidFill>
                 <a:latin typeface="Georgia"/>
+                <a:ea typeface="Hiragino Sans GB"/>
               </a:rPr>
               <a:t>Scarcity is structural</a:t>
             </a:r>
@@ -8334,9 +8568,10 @@
             <a:r>
               <a:rPr sz="1150" b="0" i="0">
                 <a:solidFill>
-                  <a:srgbClr val="4A4E56"/>
+                  <a:srgbClr val="C9D2DE"/>
                 </a:solidFill>
                 <a:latin typeface="Helvetica Neue"/>
+                <a:ea typeface="Hiragino Sans GB"/>
               </a:rPr>
               <a:t>Care, ICT, technical trades, teaching and logistics stay acutely short whatever the aggregate does.</a:t>
             </a:r>
@@ -8358,7 +8593,7 @@
             <a:avLst/>
           </a:prstGeom>
           <a:solidFill>
-            <a:srgbClr val="DED7C8"/>
+            <a:srgbClr val="2A3852"/>
           </a:solidFill>
           <a:ln>
             <a:noFill/>
@@ -8427,6 +8662,7 @@
                   <a:srgbClr val="D8542A"/>
                 </a:solidFill>
                 <a:latin typeface="Georgia"/>
+                <a:ea typeface="Hiragino Sans GB"/>
               </a:rPr>
               <a:t>03</a:t>
             </a:r>
@@ -8470,9 +8706,10 @@
             <a:r>
               <a:rPr sz="1400" b="1" i="0">
                 <a:solidFill>
-                  <a:srgbClr val="20242A"/>
+                  <a:srgbClr val="F1EBDD"/>
                 </a:solidFill>
                 <a:latin typeface="Georgia"/>
+                <a:ea typeface="Hiragino Sans GB"/>
               </a:rPr>
               <a:t>Pay is winning</a:t>
             </a:r>
@@ -8516,9 +8753,10 @@
             <a:r>
               <a:rPr sz="1150" b="0" i="0">
                 <a:solidFill>
-                  <a:srgbClr val="4A4E56"/>
+                  <a:srgbClr val="C9D2DE"/>
                 </a:solidFill>
                 <a:latin typeface="Helvetica Neue"/>
+                <a:ea typeface="Hiragino Sans GB"/>
               </a:rPr>
               <a:t>Negotiated wages have beaten inflation three years running; real incomes are rising.</a:t>
             </a:r>
@@ -8540,7 +8778,7 @@
             <a:avLst/>
           </a:prstGeom>
           <a:solidFill>
-            <a:srgbClr val="DED7C8"/>
+            <a:srgbClr val="2A3852"/>
           </a:solidFill>
           <a:ln>
             <a:noFill/>
@@ -8609,6 +8847,7 @@
                   <a:srgbClr val="D8542A"/>
                 </a:solidFill>
                 <a:latin typeface="Georgia"/>
+                <a:ea typeface="Hiragino Sans GB"/>
               </a:rPr>
               <a:t>04</a:t>
             </a:r>
@@ -8652,9 +8891,10 @@
             <a:r>
               <a:rPr sz="1400" b="1" i="0">
                 <a:solidFill>
-                  <a:srgbClr val="20242A"/>
+                  <a:srgbClr val="F1EBDD"/>
                 </a:solidFill>
                 <a:latin typeface="Georgia"/>
+                <a:ea typeface="Hiragino Sans GB"/>
               </a:rPr>
               <a:t>The door is narrowing</a:t>
             </a:r>
@@ -8698,9 +8938,10 @@
             <a:r>
               <a:rPr sz="1150" b="0" i="0">
                 <a:solidFill>
-                  <a:srgbClr val="4A4E56"/>
+                  <a:srgbClr val="C9D2DE"/>
                 </a:solidFill>
                 <a:latin typeface="Helvetica Neue"/>
+                <a:ea typeface="Hiragino Sans GB"/>
               </a:rPr>
               <a:t>A 27% expat ruling, higher salary bars and fewer permits make foreign hiring costlier and more selective.</a:t>
             </a:r>
@@ -8722,7 +8963,7 @@
             <a:avLst/>
           </a:prstGeom>
           <a:solidFill>
-            <a:srgbClr val="DED7C8"/>
+            <a:srgbClr val="2A3852"/>
           </a:solidFill>
           <a:ln>
             <a:noFill/>
@@ -8791,6 +9032,7 @@
                   <a:srgbClr val="D8542A"/>
                 </a:solidFill>
                 <a:latin typeface="Georgia"/>
+                <a:ea typeface="Hiragino Sans GB"/>
               </a:rPr>
               <a:t>05</a:t>
             </a:r>
@@ -8834,9 +9076,10 @@
             <a:r>
               <a:rPr sz="1400" b="1" i="0">
                 <a:solidFill>
-                  <a:srgbClr val="20242A"/>
+                  <a:srgbClr val="F1EBDD"/>
                 </a:solidFill>
                 <a:latin typeface="Georgia"/>
+                <a:ea typeface="Hiragino Sans GB"/>
               </a:rPr>
               <a:t>Demographics set the floor</a:t>
             </a:r>
@@ -8880,9 +9123,10 @@
             <a:r>
               <a:rPr sz="1150" b="0" i="0">
                 <a:solidFill>
-                  <a:srgbClr val="4A4E56"/>
+                  <a:srgbClr val="C9D2DE"/>
                 </a:solidFill>
                 <a:latin typeface="Helvetica Neue"/>
+                <a:ea typeface="Hiragino Sans GB"/>
               </a:rPr>
               <a:t>An ageing, part-time workforce keeps the market tight — reskilling, not slack, is the release valve.</a:t>
             </a:r>
@@ -8926,9 +9170,10 @@
             <a:r>
               <a:rPr sz="800" b="0" i="0">
                 <a:solidFill>
-                  <a:srgbClr val="8A8478"/>
+                  <a:srgbClr val="9BA6B4"/>
                 </a:solidFill>
                 <a:latin typeface="Courier New"/>
+                <a:ea typeface="Hiragino Sans GB"/>
               </a:rPr>
               <a:t>The Netherlands Job Market · 2026   ·   an example deck built with slide-maker</a:t>
             </a:r>
@@ -8972,9 +9217,10 @@
             <a:r>
               <a:rPr sz="900" b="1" i="0">
                 <a:solidFill>
-                  <a:srgbClr val="8A8478"/>
+                  <a:srgbClr val="9BA6B4"/>
                 </a:solidFill>
                 <a:latin typeface="Courier New"/>
+                <a:ea typeface="Hiragino Sans GB"/>
               </a:rPr>
               <a:t>13 / 14</a:t>
             </a:r>
@@ -9083,6 +9329,7 @@
                   <a:srgbClr val="D8542A"/>
                 </a:solidFill>
                 <a:latin typeface="Courier New"/>
+                <a:ea typeface="Hiragino Sans GB"/>
               </a:rPr>
               <a:t>SOURCES  ·  VERIFIED AS OF 12 JULY 2026</a:t>
             </a:r>
@@ -9173,6 +9420,7 @@
                   <a:srgbClr val="D8542A"/>
                 </a:solidFill>
                 <a:latin typeface="Courier New"/>
+                <a:ea typeface="Hiragino Sans GB"/>
               </a:rPr>
               <a:t>01  </a:t>
             </a:r>
@@ -9182,6 +9430,7 @@
                   <a:srgbClr val="20242A"/>
                 </a:solidFill>
                 <a:latin typeface="Courier New"/>
+                <a:ea typeface="Hiragino Sans GB"/>
               </a:rPr>
               <a:t>CBS — unemployment, vacancies &amp; tension, wages (CAO index), participation, average salary.</a:t>
             </a:r>
@@ -9228,6 +9477,7 @@
                   <a:srgbClr val="D8542A"/>
                 </a:solidFill>
                 <a:latin typeface="Courier New"/>
+                <a:ea typeface="Hiragino Sans GB"/>
               </a:rPr>
               <a:t>02  </a:t>
             </a:r>
@@ -9237,6 +9487,7 @@
                   <a:srgbClr val="20242A"/>
                 </a:solidFill>
                 <a:latin typeface="Courier New"/>
+                <a:ea typeface="Hiragino Sans GB"/>
               </a:rPr>
               <a:t>European Commission — Autumn 2025 forecast, Netherlands (unemployment 2026–27).</a:t>
             </a:r>
@@ -9283,6 +9534,7 @@
                   <a:srgbClr val="D8542A"/>
                 </a:solidFill>
                 <a:latin typeface="Courier New"/>
+                <a:ea typeface="Hiragino Sans GB"/>
               </a:rPr>
               <a:t>03  </a:t>
             </a:r>
@@ -9292,6 +9544,7 @@
                   <a:srgbClr val="20242A"/>
                 </a:solidFill>
                 <a:latin typeface="Courier New"/>
+                <a:ea typeface="Hiragino Sans GB"/>
               </a:rPr>
               <a:t>Eurostat — harmonised unemployment, NL vs EU / euro-area (May 2026).</a:t>
             </a:r>
@@ -9338,6 +9591,7 @@
                   <a:srgbClr val="D8542A"/>
                 </a:solidFill>
                 <a:latin typeface="Courier New"/>
+                <a:ea typeface="Hiragino Sans GB"/>
               </a:rPr>
               <a:t>04  </a:t>
             </a:r>
@@ -9347,6 +9601,7 @@
                   <a:srgbClr val="20242A"/>
                 </a:solidFill>
                 <a:latin typeface="Courier New"/>
+                <a:ea typeface="Hiragino Sans GB"/>
               </a:rPr>
               <a:t>UWV — shortage occupations, 35-region tightness map, 2026–27 job-growth outlook.</a:t>
             </a:r>
@@ -9393,6 +9648,7 @@
                   <a:srgbClr val="D8542A"/>
                 </a:solidFill>
                 <a:latin typeface="Courier New"/>
+                <a:ea typeface="Hiragino Sans GB"/>
               </a:rPr>
               <a:t>05  </a:t>
             </a:r>
@@ -9402,6 +9658,7 @@
                   <a:srgbClr val="20242A"/>
                 </a:solidFill>
                 <a:latin typeface="Courier New"/>
+                <a:ea typeface="Hiragino Sans GB"/>
               </a:rPr>
               <a:t>IND — highly skilled migrant salary thresholds 2026; recognised-sponsor register.</a:t>
             </a:r>
@@ -9448,6 +9705,7 @@
                   <a:srgbClr val="D8542A"/>
                 </a:solidFill>
                 <a:latin typeface="Courier New"/>
+                <a:ea typeface="Hiragino Sans GB"/>
               </a:rPr>
               <a:t>06  </a:t>
             </a:r>
@@ -9457,6 +9715,7 @@
                   <a:srgbClr val="20242A"/>
                 </a:solidFill>
                 <a:latin typeface="Courier New"/>
+                <a:ea typeface="Hiragino Sans GB"/>
               </a:rPr>
               <a:t>Business.gov.nl — statutory minimum wage (Jul 2026); 30%→27% expat ruling (2027).</a:t>
             </a:r>
@@ -9503,6 +9762,7 @@
                   <a:srgbClr val="D8542A"/>
                 </a:solidFill>
                 <a:latin typeface="Courier New"/>
+                <a:ea typeface="Hiragino Sans GB"/>
               </a:rPr>
               <a:t>07  </a:t>
             </a:r>
@@ -9512,6 +9772,7 @@
                   <a:srgbClr val="20242A"/>
                 </a:solidFill>
                 <a:latin typeface="Courier New"/>
+                <a:ea typeface="Hiragino Sans GB"/>
               </a:rPr>
               <a:t>OECD — International Migration Outlook 2025 (permits, arrivals, nationality mix).</a:t>
             </a:r>
@@ -9558,6 +9819,7 @@
                   <a:srgbClr val="D8542A"/>
                 </a:solidFill>
                 <a:latin typeface="Courier New"/>
+                <a:ea typeface="Hiragino Sans GB"/>
               </a:rPr>
               <a:t>08  </a:t>
             </a:r>
@@ -9567,6 +9829,7 @@
                   <a:srgbClr val="20242A"/>
                 </a:solidFill>
                 <a:latin typeface="Courier New"/>
+                <a:ea typeface="Hiragino Sans GB"/>
               </a:rPr>
               <a:t>Rabobank · ABN AMRO · DNB — 2026–27 macro &amp; labour-market commentary.</a:t>
             </a:r>
@@ -9613,6 +9876,7 @@
                   <a:srgbClr val="D8542A"/>
                 </a:solidFill>
                 <a:latin typeface="Courier New"/>
+                <a:ea typeface="Hiragino Sans GB"/>
               </a:rPr>
               <a:t>09  </a:t>
             </a:r>
@@ -9622,6 +9886,7 @@
                   <a:srgbClr val="20242A"/>
                 </a:solidFill>
                 <a:latin typeface="Courier New"/>
+                <a:ea typeface="Hiragino Sans GB"/>
               </a:rPr>
               <a:t>Recruiter salary guides — indicative sector midpoints (not official statistics).</a:t>
             </a:r>
@@ -9712,6 +9977,7 @@
                   <a:srgbClr val="4A4E56"/>
                 </a:solidFill>
                 <a:latin typeface="Helvetica Neue"/>
+                <a:ea typeface="Hiragino Sans GB"/>
               </a:rPr>
               <a:t>An example deck for the slide-maker template gallery. </a:t>
             </a:r>
@@ -9721,6 +9987,7 @@
                   <a:srgbClr val="B23F1C"/>
                 </a:solidFill>
                 <a:latin typeface="Helvetica Neue"/>
+                <a:ea typeface="Hiragino Sans GB"/>
               </a:rPr>
               <a:t>The visual system is reusable — swap in your own verified content.</a:t>
             </a:r>
@@ -9767,6 +10034,7 @@
                   <a:srgbClr val="8A8478"/>
                 </a:solidFill>
                 <a:latin typeface="Courier New"/>
+                <a:ea typeface="Hiragino Sans GB"/>
               </a:rPr>
               <a:t>The Netherlands Job Market · 2026   ·   an example deck built with slide-maker</a:t>
             </a:r>
@@ -9813,6 +10081,7 @@
                   <a:srgbClr val="8A8478"/>
                 </a:solidFill>
                 <a:latin typeface="Courier New"/>
+                <a:ea typeface="Hiragino Sans GB"/>
               </a:rPr>
               <a:t>14 / 14</a:t>
             </a:r>
@@ -9921,6 +10190,7 @@
                   <a:srgbClr val="D8542A"/>
                 </a:solidFill>
                 <a:latin typeface="Helvetica Neue"/>
+                <a:ea typeface="Hiragino Sans GB"/>
               </a:rPr>
               <a:t>EXECUTIVE SUMMARY</a:t>
             </a:r>
@@ -9967,6 +10237,7 @@
                   <a:srgbClr val="20242A"/>
                 </a:solidFill>
                 <a:latin typeface="Georgia"/>
+                <a:ea typeface="Hiragino Sans GB"/>
               </a:rPr>
               <a:t>The story in four numbers</a:t>
             </a:r>
@@ -9975,7 +10246,51 @@
       </p:sp>
       <p:sp>
         <p:nvSpPr>
-          <p:cNvPr id="5" name="TextBox 4"/>
+          <p:cNvPr id="5" name="Rectangle 4"/>
+          <p:cNvSpPr/>
+          <p:nvPr/>
+        </p:nvSpPr>
+        <p:spPr>
+          <a:xfrm>
+            <a:off x="566928" y="1191006"/>
+            <a:ext cx="1097280" cy="45720"/>
+          </a:xfrm>
+          <a:prstGeom prst="rect">
+            <a:avLst/>
+          </a:prstGeom>
+          <a:solidFill>
+            <a:srgbClr val="D8542A"/>
+          </a:solidFill>
+          <a:ln>
+            <a:noFill/>
+          </a:ln>
+          <a:effectLst/>
+        </p:spPr>
+        <p:style>
+          <a:lnRef idx="1">
+            <a:schemeClr val="accent1"/>
+          </a:lnRef>
+          <a:fillRef idx="3">
+            <a:schemeClr val="accent1"/>
+          </a:fillRef>
+          <a:effectRef idx="2">
+            <a:schemeClr val="accent1"/>
+          </a:effectRef>
+          <a:fontRef idx="minor">
+            <a:schemeClr val="lt1"/>
+          </a:fontRef>
+        </p:style>
+        <p:txBody>
+          <a:bodyPr rtlCol="0" anchor="ctr"/>
+          <a:lstStyle/>
+          <a:p>
+            <a:pPr algn="ctr"/>
+          </a:p>
+        </p:txBody>
+      </p:sp>
+      <p:sp>
+        <p:nvSpPr>
+          <p:cNvPr id="6" name="TextBox 5"/>
           <p:cNvSpPr txBox="1"/>
           <p:nvPr/>
         </p:nvSpPr>
@@ -10013,6 +10328,7 @@
                   <a:srgbClr val="4A4E56"/>
                 </a:solidFill>
                 <a:latin typeface="Helvetica Neue"/>
+                <a:ea typeface="Hiragino Sans GB"/>
               </a:rPr>
               <a:t>Strong employment, easing tension, real wage gains — and a door to foreign talent that is quietly narrowing.</a:t>
             </a:r>
@@ -10021,7 +10337,7 @@
       </p:sp>
       <p:sp>
         <p:nvSpPr>
-          <p:cNvPr id="6" name="Rounded Rectangle 5"/>
+          <p:cNvPr id="7" name="Rounded Rectangle 6"/>
           <p:cNvSpPr/>
           <p:nvPr/>
         </p:nvSpPr>
@@ -10069,7 +10385,7 @@
       </p:sp>
       <p:sp>
         <p:nvSpPr>
-          <p:cNvPr id="7" name="Round Same Side Corner Rectangle 6"/>
+          <p:cNvPr id="8" name="Round Same Side Corner Rectangle 7"/>
           <p:cNvSpPr/>
           <p:nvPr/>
         </p:nvSpPr>
@@ -10116,7 +10432,7 @@
       </p:sp>
       <p:sp>
         <p:nvSpPr>
-          <p:cNvPr id="8" name="TextBox 7"/>
+          <p:cNvPr id="9" name="TextBox 8"/>
           <p:cNvSpPr txBox="1"/>
           <p:nvPr/>
         </p:nvSpPr>
@@ -10154,6 +10470,7 @@
                   <a:srgbClr val="8A8478"/>
                 </a:solidFill>
                 <a:latin typeface="Courier New"/>
+                <a:ea typeface="Hiragino Sans GB"/>
               </a:rPr>
               <a:t>UNEMPLOYMENT</a:t>
             </a:r>
@@ -10162,7 +10479,7 @@
       </p:sp>
       <p:sp>
         <p:nvSpPr>
-          <p:cNvPr id="9" name="TextBox 8"/>
+          <p:cNvPr id="10" name="TextBox 9"/>
           <p:cNvSpPr txBox="1"/>
           <p:nvPr/>
         </p:nvSpPr>
@@ -10200,6 +10517,7 @@
                   <a:srgbClr val="0E5C63"/>
                 </a:solidFill>
                 <a:latin typeface="Helvetica Neue"/>
+                <a:ea typeface="Hiragino Sans GB"/>
               </a:rPr>
               <a:t>3.9%</a:t>
             </a:r>
@@ -10208,7 +10526,7 @@
       </p:sp>
       <p:sp>
         <p:nvSpPr>
-          <p:cNvPr id="10" name="TextBox 9"/>
+          <p:cNvPr id="11" name="TextBox 10"/>
           <p:cNvSpPr txBox="1"/>
           <p:nvPr/>
         </p:nvSpPr>
@@ -10246,6 +10564,7 @@
                   <a:srgbClr val="4A4E56"/>
                 </a:solidFill>
                 <a:latin typeface="Helvetica Neue"/>
+                <a:ea typeface="Hiragino Sans GB"/>
               </a:rPr>
               <a:t>Q2 2026 — among the EU's lowest</a:t>
             </a:r>
@@ -10254,7 +10573,7 @@
       </p:sp>
       <p:sp>
         <p:nvSpPr>
-          <p:cNvPr id="11" name="Rounded Rectangle 10"/>
+          <p:cNvPr id="12" name="Rounded Rectangle 11"/>
           <p:cNvSpPr/>
           <p:nvPr/>
         </p:nvSpPr>
@@ -10302,7 +10621,7 @@
       </p:sp>
       <p:sp>
         <p:nvSpPr>
-          <p:cNvPr id="12" name="Round Same Side Corner Rectangle 11"/>
+          <p:cNvPr id="13" name="Round Same Side Corner Rectangle 12"/>
           <p:cNvSpPr/>
           <p:nvPr/>
         </p:nvSpPr>
@@ -10349,7 +10668,7 @@
       </p:sp>
       <p:sp>
         <p:nvSpPr>
-          <p:cNvPr id="13" name="TextBox 12"/>
+          <p:cNvPr id="14" name="TextBox 13"/>
           <p:cNvSpPr txBox="1"/>
           <p:nvPr/>
         </p:nvSpPr>
@@ -10387,6 +10706,7 @@
                   <a:srgbClr val="8A8478"/>
                 </a:solidFill>
                 <a:latin typeface="Courier New"/>
+                <a:ea typeface="Hiragino Sans GB"/>
               </a:rPr>
               <a:t>LABOUR-MARKET TENSION</a:t>
             </a:r>
@@ -10395,7 +10715,7 @@
       </p:sp>
       <p:sp>
         <p:nvSpPr>
-          <p:cNvPr id="14" name="TextBox 13"/>
+          <p:cNvPr id="15" name="TextBox 14"/>
           <p:cNvSpPr txBox="1"/>
           <p:nvPr/>
         </p:nvSpPr>
@@ -10433,6 +10753,7 @@
                   <a:srgbClr val="D8542A"/>
                 </a:solidFill>
                 <a:latin typeface="Helvetica Neue"/>
+                <a:ea typeface="Hiragino Sans GB"/>
               </a:rPr>
               <a:t>91</a:t>
             </a:r>
@@ -10441,7 +10762,7 @@
       </p:sp>
       <p:sp>
         <p:nvSpPr>
-          <p:cNvPr id="15" name="TextBox 14"/>
+          <p:cNvPr id="16" name="TextBox 15"/>
           <p:cNvSpPr txBox="1"/>
           <p:nvPr/>
         </p:nvSpPr>
@@ -10479,6 +10800,7 @@
                   <a:srgbClr val="4A4E56"/>
                 </a:solidFill>
                 <a:latin typeface="Helvetica Neue"/>
+                <a:ea typeface="Hiragino Sans GB"/>
               </a:rPr>
               <a:t>vacancies per 100 unemployed (Q1 2026)</a:t>
             </a:r>
@@ -10487,7 +10809,7 @@
       </p:sp>
       <p:sp>
         <p:nvSpPr>
-          <p:cNvPr id="16" name="Rounded Rectangle 15"/>
+          <p:cNvPr id="17" name="Rounded Rectangle 16"/>
           <p:cNvSpPr/>
           <p:nvPr/>
         </p:nvSpPr>
@@ -10535,7 +10857,7 @@
       </p:sp>
       <p:sp>
         <p:nvSpPr>
-          <p:cNvPr id="17" name="Round Same Side Corner Rectangle 16"/>
+          <p:cNvPr id="18" name="Round Same Side Corner Rectangle 17"/>
           <p:cNvSpPr/>
           <p:nvPr/>
         </p:nvSpPr>
@@ -10582,7 +10904,7 @@
       </p:sp>
       <p:sp>
         <p:nvSpPr>
-          <p:cNvPr id="18" name="TextBox 17"/>
+          <p:cNvPr id="19" name="TextBox 18"/>
           <p:cNvSpPr txBox="1"/>
           <p:nvPr/>
         </p:nvSpPr>
@@ -10620,6 +10942,7 @@
                   <a:srgbClr val="8A8478"/>
                 </a:solidFill>
                 <a:latin typeface="Courier New"/>
+                <a:ea typeface="Hiragino Sans GB"/>
               </a:rPr>
               <a:t>NEGOTIATED WAGES</a:t>
             </a:r>
@@ -10628,7 +10951,7 @@
       </p:sp>
       <p:sp>
         <p:nvSpPr>
-          <p:cNvPr id="19" name="TextBox 18"/>
+          <p:cNvPr id="20" name="TextBox 19"/>
           <p:cNvSpPr txBox="1"/>
           <p:nvPr/>
         </p:nvSpPr>
@@ -10666,6 +10989,7 @@
                   <a:srgbClr val="0E5C63"/>
                 </a:solidFill>
                 <a:latin typeface="Helvetica Neue"/>
+                <a:ea typeface="Hiragino Sans GB"/>
               </a:rPr>
               <a:t>+4.5%</a:t>
             </a:r>
@@ -10674,7 +10998,7 @@
       </p:sp>
       <p:sp>
         <p:nvSpPr>
-          <p:cNvPr id="20" name="TextBox 19"/>
+          <p:cNvPr id="21" name="TextBox 20"/>
           <p:cNvSpPr txBox="1"/>
           <p:nvPr/>
         </p:nvSpPr>
@@ -10712,6 +11036,7 @@
                   <a:srgbClr val="4A4E56"/>
                 </a:solidFill>
                 <a:latin typeface="Helvetica Neue"/>
+                <a:ea typeface="Hiragino Sans GB"/>
               </a:rPr>
               <a:t>year-on-year, +2.0% in real terms</a:t>
             </a:r>
@@ -10720,7 +11045,7 @@
       </p:sp>
       <p:sp>
         <p:nvSpPr>
-          <p:cNvPr id="21" name="Rounded Rectangle 20"/>
+          <p:cNvPr id="22" name="Rounded Rectangle 21"/>
           <p:cNvSpPr/>
           <p:nvPr/>
         </p:nvSpPr>
@@ -10768,7 +11093,7 @@
       </p:sp>
       <p:sp>
         <p:nvSpPr>
-          <p:cNvPr id="22" name="Round Same Side Corner Rectangle 21"/>
+          <p:cNvPr id="23" name="Round Same Side Corner Rectangle 22"/>
           <p:cNvSpPr/>
           <p:nvPr/>
         </p:nvSpPr>
@@ -10815,7 +11140,7 @@
       </p:sp>
       <p:sp>
         <p:nvSpPr>
-          <p:cNvPr id="23" name="TextBox 22"/>
+          <p:cNvPr id="24" name="TextBox 23"/>
           <p:cNvSpPr txBox="1"/>
           <p:nvPr/>
         </p:nvSpPr>
@@ -10853,6 +11178,7 @@
                   <a:srgbClr val="8A8478"/>
                 </a:solidFill>
                 <a:latin typeface="Courier New"/>
+                <a:ea typeface="Hiragino Sans GB"/>
               </a:rPr>
               <a:t>FEMALE EMPLOYMENT</a:t>
             </a:r>
@@ -10861,7 +11187,7 @@
       </p:sp>
       <p:sp>
         <p:nvSpPr>
-          <p:cNvPr id="24" name="TextBox 23"/>
+          <p:cNvPr id="25" name="TextBox 24"/>
           <p:cNvSpPr txBox="1"/>
           <p:nvPr/>
         </p:nvSpPr>
@@ -10899,6 +11225,7 @@
                   <a:srgbClr val="0E5C63"/>
                 </a:solidFill>
                 <a:latin typeface="Helvetica Neue"/>
+                <a:ea typeface="Hiragino Sans GB"/>
               </a:rPr>
               <a:t>69%</a:t>
             </a:r>
@@ -10907,7 +11234,7 @@
       </p:sp>
       <p:sp>
         <p:nvSpPr>
-          <p:cNvPr id="25" name="TextBox 24"/>
+          <p:cNvPr id="26" name="TextBox 25"/>
           <p:cNvSpPr txBox="1"/>
           <p:nvPr/>
         </p:nvSpPr>
@@ -10945,6 +11272,7 @@
                   <a:srgbClr val="4A4E56"/>
                 </a:solidFill>
                 <a:latin typeface="Helvetica Neue"/>
+                <a:ea typeface="Hiragino Sans GB"/>
               </a:rPr>
               <a:t>the highest rate in the EU-27</a:t>
             </a:r>
@@ -10953,7 +11281,7 @@
       </p:sp>
       <p:sp>
         <p:nvSpPr>
-          <p:cNvPr id="26" name="TextBox 25"/>
+          <p:cNvPr id="27" name="TextBox 26"/>
           <p:cNvSpPr txBox="1"/>
           <p:nvPr/>
         </p:nvSpPr>
@@ -10991,6 +11319,7 @@
                   <a:srgbClr val="D8542A"/>
                 </a:solidFill>
                 <a:latin typeface="Courier New"/>
+                <a:ea typeface="Hiragino Sans GB"/>
               </a:rPr>
               <a:t>SOURCE   </a:t>
             </a:r>
@@ -11000,6 +11329,7 @@
                   <a:srgbClr val="8A8478"/>
                 </a:solidFill>
                 <a:latin typeface="Courier New"/>
+                <a:ea typeface="Hiragino Sans GB"/>
               </a:rPr>
               <a:t>CBS (unemployment, tension, wages, female employment); Eurostat (EU average).</a:t>
             </a:r>
@@ -11008,7 +11338,7 @@
       </p:sp>
       <p:sp>
         <p:nvSpPr>
-          <p:cNvPr id="27" name="TextBox 26"/>
+          <p:cNvPr id="28" name="TextBox 27"/>
           <p:cNvSpPr txBox="1"/>
           <p:nvPr/>
         </p:nvSpPr>
@@ -11046,6 +11376,7 @@
                   <a:srgbClr val="8A8478"/>
                 </a:solidFill>
                 <a:latin typeface="Courier New"/>
+                <a:ea typeface="Hiragino Sans GB"/>
               </a:rPr>
               <a:t>The Netherlands Job Market · 2026   ·   an example deck built with slide-maker</a:t>
             </a:r>
@@ -11054,7 +11385,7 @@
       </p:sp>
       <p:sp>
         <p:nvSpPr>
-          <p:cNvPr id="28" name="TextBox 27"/>
+          <p:cNvPr id="29" name="TextBox 28"/>
           <p:cNvSpPr txBox="1"/>
           <p:nvPr/>
         </p:nvSpPr>
@@ -11092,6 +11423,7 @@
                   <a:srgbClr val="8A8478"/>
                 </a:solidFill>
                 <a:latin typeface="Courier New"/>
+                <a:ea typeface="Hiragino Sans GB"/>
               </a:rPr>
               <a:t>02 / 14</a:t>
             </a:r>
@@ -11200,6 +11532,7 @@
                   <a:srgbClr val="D8542A"/>
                 </a:solidFill>
                 <a:latin typeface="Helvetica Neue"/>
+                <a:ea typeface="Hiragino Sans GB"/>
               </a:rPr>
               <a:t>MACRO EMPLOYMENT</a:t>
             </a:r>
@@ -11246,6 +11579,7 @@
                   <a:srgbClr val="20242A"/>
                 </a:solidFill>
                 <a:latin typeface="Georgia"/>
+                <a:ea typeface="Hiragino Sans GB"/>
               </a:rPr>
               <a:t>Cooling gently, from a historic low</a:t>
             </a:r>
@@ -11254,7 +11588,51 @@
       </p:sp>
       <p:sp>
         <p:nvSpPr>
-          <p:cNvPr id="5" name="TextBox 4"/>
+          <p:cNvPr id="5" name="Rectangle 4"/>
+          <p:cNvSpPr/>
+          <p:nvPr/>
+        </p:nvSpPr>
+        <p:spPr>
+          <a:xfrm>
+            <a:off x="566928" y="1191006"/>
+            <a:ext cx="1097280" cy="45720"/>
+          </a:xfrm>
+          <a:prstGeom prst="rect">
+            <a:avLst/>
+          </a:prstGeom>
+          <a:solidFill>
+            <a:srgbClr val="D8542A"/>
+          </a:solidFill>
+          <a:ln>
+            <a:noFill/>
+          </a:ln>
+          <a:effectLst/>
+        </p:spPr>
+        <p:style>
+          <a:lnRef idx="1">
+            <a:schemeClr val="accent1"/>
+          </a:lnRef>
+          <a:fillRef idx="3">
+            <a:schemeClr val="accent1"/>
+          </a:fillRef>
+          <a:effectRef idx="2">
+            <a:schemeClr val="accent1"/>
+          </a:effectRef>
+          <a:fontRef idx="minor">
+            <a:schemeClr val="lt1"/>
+          </a:fontRef>
+        </p:style>
+        <p:txBody>
+          <a:bodyPr rtlCol="0" anchor="ctr"/>
+          <a:lstStyle/>
+          <a:p>
+            <a:pPr algn="ctr"/>
+          </a:p>
+        </p:txBody>
+      </p:sp>
+      <p:sp>
+        <p:nvSpPr>
+          <p:cNvPr id="6" name="TextBox 5"/>
           <p:cNvSpPr txBox="1"/>
           <p:nvPr/>
         </p:nvSpPr>
@@ -11292,6 +11670,7 @@
                   <a:srgbClr val="8A8478"/>
                 </a:solidFill>
                 <a:latin typeface="Courier New"/>
+                <a:ea typeface="Hiragino Sans GB"/>
               </a:rPr>
               <a:t>UNEMPLOYMENT RATE, % OF LABOUR FORCE</a:t>
             </a:r>
@@ -11300,7 +11679,7 @@
       </p:sp>
       <p:graphicFrame>
         <p:nvGraphicFramePr>
-          <p:cNvPr id="6" name="Chart 5"/>
+          <p:cNvPr id="7" name="Chart 6"/>
           <p:cNvGraphicFramePr>
             <a:graphicFrameLocks noGrp="1"/>
           </p:cNvGraphicFramePr>
@@ -11318,7 +11697,7 @@
       </p:graphicFrame>
       <p:sp>
         <p:nvSpPr>
-          <p:cNvPr id="7" name="TextBox 6"/>
+          <p:cNvPr id="8" name="TextBox 7"/>
           <p:cNvSpPr txBox="1"/>
           <p:nvPr/>
         </p:nvSpPr>
@@ -11356,6 +11735,7 @@
                   <a:srgbClr val="B23F1C"/>
                 </a:solidFill>
                 <a:latin typeface="Courier New"/>
+                <a:ea typeface="Hiragino Sans GB"/>
               </a:rPr>
               <a:t>THE FLOOR IS HOLDING</a:t>
             </a:r>
@@ -11364,7 +11744,7 @@
       </p:sp>
       <p:sp>
         <p:nvSpPr>
-          <p:cNvPr id="8" name="TextBox 7"/>
+          <p:cNvPr id="9" name="TextBox 8"/>
           <p:cNvSpPr txBox="1"/>
           <p:nvPr/>
         </p:nvSpPr>
@@ -11402,6 +11782,7 @@
                   <a:srgbClr val="D8542A"/>
                 </a:solidFill>
                 <a:latin typeface="Helvetica Neue"/>
+                <a:ea typeface="Hiragino Sans GB"/>
               </a:rPr>
               <a:t>3.9%</a:t>
             </a:r>
@@ -11410,7 +11791,7 @@
       </p:sp>
       <p:sp>
         <p:nvSpPr>
-          <p:cNvPr id="9" name="TextBox 8"/>
+          <p:cNvPr id="10" name="TextBox 9"/>
           <p:cNvSpPr txBox="1"/>
           <p:nvPr/>
         </p:nvSpPr>
@@ -11448,6 +11829,7 @@
                   <a:srgbClr val="4A4E56"/>
                 </a:solidFill>
                 <a:latin typeface="Helvetica Neue"/>
+                <a:ea typeface="Hiragino Sans GB"/>
               </a:rPr>
               <a:t>Joblessness is edging up as growth slows — but from a genuine low. It sits far under the EU average of 6.0% and the euro-area's 6.2%.</a:t>
             </a:r>
@@ -11456,7 +11838,7 @@
       </p:sp>
       <p:sp>
         <p:nvSpPr>
-          <p:cNvPr id="10" name="Rectangle 9"/>
+          <p:cNvPr id="11" name="Rectangle 10"/>
           <p:cNvSpPr/>
           <p:nvPr/>
         </p:nvSpPr>
@@ -11500,7 +11882,7 @@
       </p:sp>
       <p:sp>
         <p:nvSpPr>
-          <p:cNvPr id="11" name="TextBox 10"/>
+          <p:cNvPr id="12" name="TextBox 11"/>
           <p:cNvSpPr txBox="1"/>
           <p:nvPr/>
         </p:nvSpPr>
@@ -11538,6 +11920,7 @@
                   <a:srgbClr val="0E5C63"/>
                 </a:solidFill>
                 <a:latin typeface="Helvetica Neue"/>
+                <a:ea typeface="Hiragino Sans GB"/>
               </a:rPr>
               <a:t>≈ 400,000</a:t>
             </a:r>
@@ -11547,6 +11930,7 @@
                   <a:srgbClr val="4A4E56"/>
                 </a:solidFill>
                 <a:latin typeface="Helvetica Neue"/>
+                <a:ea typeface="Hiragino Sans GB"/>
               </a:rPr>
               <a:t>  unemployed</a:t>
             </a:r>
@@ -11555,7 +11939,7 @@
       </p:sp>
       <p:sp>
         <p:nvSpPr>
-          <p:cNvPr id="12" name="TextBox 11"/>
+          <p:cNvPr id="13" name="TextBox 12"/>
           <p:cNvSpPr txBox="1"/>
           <p:nvPr/>
         </p:nvSpPr>
@@ -11593,6 +11977,7 @@
                   <a:srgbClr val="8A8478"/>
                 </a:solidFill>
                 <a:latin typeface="Helvetica Neue"/>
+                <a:ea typeface="Hiragino Sans GB"/>
               </a:rPr>
               <a:t>out of a ~10 million labour force (CBS, Q4 2025).</a:t>
             </a:r>
@@ -11601,7 +11986,7 @@
       </p:sp>
       <p:sp>
         <p:nvSpPr>
-          <p:cNvPr id="13" name="TextBox 12"/>
+          <p:cNvPr id="14" name="TextBox 13"/>
           <p:cNvSpPr txBox="1"/>
           <p:nvPr/>
         </p:nvSpPr>
@@ -11639,6 +12024,7 @@
                   <a:srgbClr val="D8542A"/>
                 </a:solidFill>
                 <a:latin typeface="Courier New"/>
+                <a:ea typeface="Hiragino Sans GB"/>
               </a:rPr>
               <a:t>SOURCE   </a:t>
             </a:r>
@@ -11648,6 +12034,7 @@
                   <a:srgbClr val="8A8478"/>
                 </a:solidFill>
                 <a:latin typeface="Courier New"/>
+                <a:ea typeface="Hiragino Sans GB"/>
               </a:rPr>
               <a:t>CBS labour-force figures; European Commission forecast; Eurostat (May 2026).</a:t>
             </a:r>
@@ -11656,7 +12043,7 @@
       </p:sp>
       <p:sp>
         <p:nvSpPr>
-          <p:cNvPr id="14" name="TextBox 13"/>
+          <p:cNvPr id="15" name="TextBox 14"/>
           <p:cNvSpPr txBox="1"/>
           <p:nvPr/>
         </p:nvSpPr>
@@ -11694,6 +12081,7 @@
                   <a:srgbClr val="8A8478"/>
                 </a:solidFill>
                 <a:latin typeface="Courier New"/>
+                <a:ea typeface="Hiragino Sans GB"/>
               </a:rPr>
               <a:t>The Netherlands Job Market · 2026   ·   an example deck built with slide-maker</a:t>
             </a:r>
@@ -11702,7 +12090,7 @@
       </p:sp>
       <p:sp>
         <p:nvSpPr>
-          <p:cNvPr id="15" name="TextBox 14"/>
+          <p:cNvPr id="16" name="TextBox 15"/>
           <p:cNvSpPr txBox="1"/>
           <p:nvPr/>
         </p:nvSpPr>
@@ -11740,6 +12128,7 @@
                   <a:srgbClr val="8A8478"/>
                 </a:solidFill>
                 <a:latin typeface="Courier New"/>
+                <a:ea typeface="Hiragino Sans GB"/>
               </a:rPr>
               <a:t>03 / 14</a:t>
             </a:r>
@@ -11848,6 +12237,7 @@
                   <a:srgbClr val="D8542A"/>
                 </a:solidFill>
                 <a:latin typeface="Helvetica Neue"/>
+                <a:ea typeface="Hiragino Sans GB"/>
               </a:rPr>
               <a:t>LABOUR-MARKET TIGHTNESS  ·  THE PIVOT</a:t>
             </a:r>
@@ -11894,6 +12284,7 @@
                   <a:srgbClr val="20242A"/>
                 </a:solidFill>
                 <a:latin typeface="Georgia"/>
+                <a:ea typeface="Hiragino Sans GB"/>
               </a:rPr>
               <a:t>Cooled from red-hot — but far from loose</a:t>
             </a:r>
@@ -11902,7 +12293,51 @@
       </p:sp>
       <p:sp>
         <p:nvSpPr>
-          <p:cNvPr id="5" name="TextBox 4"/>
+          <p:cNvPr id="5" name="Rectangle 4"/>
+          <p:cNvSpPr/>
+          <p:nvPr/>
+        </p:nvSpPr>
+        <p:spPr>
+          <a:xfrm>
+            <a:off x="566928" y="1191006"/>
+            <a:ext cx="1097280" cy="45720"/>
+          </a:xfrm>
+          <a:prstGeom prst="rect">
+            <a:avLst/>
+          </a:prstGeom>
+          <a:solidFill>
+            <a:srgbClr val="D8542A"/>
+          </a:solidFill>
+          <a:ln>
+            <a:noFill/>
+          </a:ln>
+          <a:effectLst/>
+        </p:spPr>
+        <p:style>
+          <a:lnRef idx="1">
+            <a:schemeClr val="accent1"/>
+          </a:lnRef>
+          <a:fillRef idx="3">
+            <a:schemeClr val="accent1"/>
+          </a:fillRef>
+          <a:effectRef idx="2">
+            <a:schemeClr val="accent1"/>
+          </a:effectRef>
+          <a:fontRef idx="minor">
+            <a:schemeClr val="lt1"/>
+          </a:fontRef>
+        </p:style>
+        <p:txBody>
+          <a:bodyPr rtlCol="0" anchor="ctr"/>
+          <a:lstStyle/>
+          <a:p>
+            <a:pPr algn="ctr"/>
+          </a:p>
+        </p:txBody>
+      </p:sp>
+      <p:sp>
+        <p:nvSpPr>
+          <p:cNvPr id="6" name="TextBox 5"/>
           <p:cNvSpPr txBox="1"/>
           <p:nvPr/>
         </p:nvSpPr>
@@ -11940,6 +12375,7 @@
                   <a:srgbClr val="8A8478"/>
                 </a:solidFill>
                 <a:latin typeface="Courier New"/>
+                <a:ea typeface="Hiragino Sans GB"/>
               </a:rPr>
               <a:t>VACANCIES PER 100 UNEMPLOYED</a:t>
             </a:r>
@@ -11948,7 +12384,7 @@
       </p:sp>
       <p:graphicFrame>
         <p:nvGraphicFramePr>
-          <p:cNvPr id="6" name="Chart 5"/>
+          <p:cNvPr id="7" name="Chart 6"/>
           <p:cNvGraphicFramePr>
             <a:graphicFrameLocks noGrp="1"/>
           </p:cNvGraphicFramePr>
@@ -11966,7 +12402,7 @@
       </p:graphicFrame>
       <p:sp>
         <p:nvSpPr>
-          <p:cNvPr id="7" name="TextBox 6"/>
+          <p:cNvPr id="8" name="TextBox 7"/>
           <p:cNvSpPr txBox="1"/>
           <p:nvPr/>
         </p:nvSpPr>
@@ -12004,6 +12440,7 @@
                   <a:srgbClr val="B23F1C"/>
                 </a:solidFill>
                 <a:latin typeface="Courier New"/>
+                <a:ea typeface="Hiragino Sans GB"/>
               </a:rPr>
               <a:t>NOW</a:t>
             </a:r>
@@ -12012,7 +12449,7 @@
       </p:sp>
       <p:sp>
         <p:nvSpPr>
-          <p:cNvPr id="8" name="TextBox 7"/>
+          <p:cNvPr id="9" name="TextBox 8"/>
           <p:cNvSpPr txBox="1"/>
           <p:nvPr/>
         </p:nvSpPr>
@@ -12049,6 +12486,7 @@
                   <a:srgbClr val="D8542A"/>
                 </a:solidFill>
                 <a:latin typeface="Helvetica Neue"/>
+                <a:ea typeface="Hiragino Sans GB"/>
               </a:rPr>
               <a:t>91</a:t>
             </a:r>
@@ -12057,7 +12495,7 @@
       </p:sp>
       <p:sp>
         <p:nvSpPr>
-          <p:cNvPr id="9" name="TextBox 8"/>
+          <p:cNvPr id="10" name="TextBox 9"/>
           <p:cNvSpPr txBox="1"/>
           <p:nvPr/>
         </p:nvSpPr>
@@ -12095,6 +12533,7 @@
                   <a:srgbClr val="4A4E56"/>
                 </a:solidFill>
                 <a:latin typeface="Helvetica Neue"/>
+                <a:ea typeface="Hiragino Sans GB"/>
               </a:rPr>
               <a:t>vacancies per 100 jobseekers — just below parity, down from a 2022 peak of 142, yet still </a:t>
             </a:r>
@@ -12104,6 +12543,7 @@
                   <a:srgbClr val="0E5C63"/>
                 </a:solidFill>
                 <a:latin typeface="Helvetica Neue"/>
+                <a:ea typeface="Hiragino Sans GB"/>
               </a:rPr>
               <a:t>~3× the pre-2020 norm</a:t>
             </a:r>
@@ -12113,6 +12553,7 @@
                   <a:srgbClr val="4A4E56"/>
                 </a:solidFill>
                 <a:latin typeface="Helvetica Neue"/>
+                <a:ea typeface="Hiragino Sans GB"/>
               </a:rPr>
               <a:t> of 32.</a:t>
             </a:r>
@@ -12121,7 +12562,7 @@
       </p:sp>
       <p:sp>
         <p:nvSpPr>
-          <p:cNvPr id="10" name="Rounded Rectangle 9"/>
+          <p:cNvPr id="11" name="Rounded Rectangle 10"/>
           <p:cNvSpPr/>
           <p:nvPr/>
         </p:nvSpPr>
@@ -12136,7 +12577,7 @@
             </a:avLst>
           </a:prstGeom>
           <a:solidFill>
-            <a:srgbClr val="FAEAE5"/>
+            <a:srgbClr val="16223A"/>
           </a:solidFill>
           <a:ln>
             <a:noFill/>
@@ -12167,7 +12608,7 @@
       </p:sp>
       <p:sp>
         <p:nvSpPr>
-          <p:cNvPr id="11" name="Rectangle 10"/>
+          <p:cNvPr id="12" name="Rectangle 11"/>
           <p:cNvSpPr/>
           <p:nvPr/>
         </p:nvSpPr>
@@ -12211,7 +12652,7 @@
       </p:sp>
       <p:sp>
         <p:nvSpPr>
-          <p:cNvPr id="12" name="TextBox 11"/>
+          <p:cNvPr id="13" name="TextBox 12"/>
           <p:cNvSpPr txBox="1"/>
           <p:nvPr/>
         </p:nvSpPr>
@@ -12249,15 +12690,17 @@
                   <a:srgbClr val="D8542A"/>
                 </a:solidFill>
                 <a:latin typeface="Helvetica Neue"/>
+                <a:ea typeface="Hiragino Sans GB"/>
               </a:rPr>
               <a:t>SO WHAT   </a:t>
             </a:r>
             <a:r>
               <a:rPr sz="1350" b="0" i="0">
                 <a:solidFill>
-                  <a:srgbClr val="20242A"/>
+                  <a:srgbClr val="FFFFFF"/>
                 </a:solidFill>
                 <a:latin typeface="Helvetica Neue"/>
+                <a:ea typeface="Hiragino Sans GB"/>
               </a:rPr>
               <a:t>Aggregate balance masks structural scarcity: specific sectors and regions stay acutely short of workers.</a:t>
             </a:r>
@@ -12266,7 +12709,7 @@
       </p:sp>
       <p:sp>
         <p:nvSpPr>
-          <p:cNvPr id="13" name="TextBox 12"/>
+          <p:cNvPr id="14" name="TextBox 13"/>
           <p:cNvSpPr txBox="1"/>
           <p:nvPr/>
         </p:nvSpPr>
@@ -12304,6 +12747,7 @@
                   <a:srgbClr val="D8542A"/>
                 </a:solidFill>
                 <a:latin typeface="Courier New"/>
+                <a:ea typeface="Hiragino Sans GB"/>
               </a:rPr>
               <a:t>SOURCE   </a:t>
             </a:r>
@@ -12313,6 +12757,7 @@
                   <a:srgbClr val="8A8478"/>
                 </a:solidFill>
                 <a:latin typeface="Courier New"/>
+                <a:ea typeface="Hiragino Sans GB"/>
               </a:rPr>
               <a:t>CBS (quarterly vacancy-to-unemployment tension ratio; 2022 peak and pre-pandemic norm per CBS series).</a:t>
             </a:r>
@@ -12321,7 +12766,7 @@
       </p:sp>
       <p:sp>
         <p:nvSpPr>
-          <p:cNvPr id="14" name="TextBox 13"/>
+          <p:cNvPr id="15" name="TextBox 14"/>
           <p:cNvSpPr txBox="1"/>
           <p:nvPr/>
         </p:nvSpPr>
@@ -12359,6 +12804,7 @@
                   <a:srgbClr val="8A8478"/>
                 </a:solidFill>
                 <a:latin typeface="Courier New"/>
+                <a:ea typeface="Hiragino Sans GB"/>
               </a:rPr>
               <a:t>The Netherlands Job Market · 2026   ·   an example deck built with slide-maker</a:t>
             </a:r>
@@ -12367,7 +12813,7 @@
       </p:sp>
       <p:sp>
         <p:nvSpPr>
-          <p:cNvPr id="15" name="TextBox 14"/>
+          <p:cNvPr id="16" name="TextBox 15"/>
           <p:cNvSpPr txBox="1"/>
           <p:nvPr/>
         </p:nvSpPr>
@@ -12405,6 +12851,7 @@
                   <a:srgbClr val="8A8478"/>
                 </a:solidFill>
                 <a:latin typeface="Courier New"/>
+                <a:ea typeface="Hiragino Sans GB"/>
               </a:rPr>
               <a:t>04 / 14</a:t>
             </a:r>
@@ -12513,6 +12960,7 @@
                   <a:srgbClr val="0E5C63"/>
                 </a:solidFill>
                 <a:latin typeface="Helvetica Neue"/>
+                <a:ea typeface="Hiragino Sans GB"/>
               </a:rPr>
               <a:t>STRUCTURAL TRAITS</a:t>
             </a:r>
@@ -12559,6 +13007,7 @@
                   <a:srgbClr val="20242A"/>
                 </a:solidFill>
                 <a:latin typeface="Georgia"/>
+                <a:ea typeface="Hiragino Sans GB"/>
               </a:rPr>
               <a:t>A high-participation, part-time economy</a:t>
             </a:r>
@@ -12567,7 +13016,51 @@
       </p:sp>
       <p:sp>
         <p:nvSpPr>
-          <p:cNvPr id="5" name="Rounded Rectangle 4"/>
+          <p:cNvPr id="5" name="Rectangle 4"/>
+          <p:cNvSpPr/>
+          <p:nvPr/>
+        </p:nvSpPr>
+        <p:spPr>
+          <a:xfrm>
+            <a:off x="566928" y="1191006"/>
+            <a:ext cx="1097280" cy="45720"/>
+          </a:xfrm>
+          <a:prstGeom prst="rect">
+            <a:avLst/>
+          </a:prstGeom>
+          <a:solidFill>
+            <a:srgbClr val="0E5C63"/>
+          </a:solidFill>
+          <a:ln>
+            <a:noFill/>
+          </a:ln>
+          <a:effectLst/>
+        </p:spPr>
+        <p:style>
+          <a:lnRef idx="1">
+            <a:schemeClr val="accent1"/>
+          </a:lnRef>
+          <a:fillRef idx="3">
+            <a:schemeClr val="accent1"/>
+          </a:fillRef>
+          <a:effectRef idx="2">
+            <a:schemeClr val="accent1"/>
+          </a:effectRef>
+          <a:fontRef idx="minor">
+            <a:schemeClr val="lt1"/>
+          </a:fontRef>
+        </p:style>
+        <p:txBody>
+          <a:bodyPr rtlCol="0" anchor="ctr"/>
+          <a:lstStyle/>
+          <a:p>
+            <a:pPr algn="ctr"/>
+          </a:p>
+        </p:txBody>
+      </p:sp>
+      <p:sp>
+        <p:nvSpPr>
+          <p:cNvPr id="6" name="Rounded Rectangle 5"/>
           <p:cNvSpPr/>
           <p:nvPr/>
         </p:nvSpPr>
@@ -12615,7 +13108,7 @@
       </p:sp>
       <p:sp>
         <p:nvSpPr>
-          <p:cNvPr id="6" name="TextBox 5"/>
+          <p:cNvPr id="7" name="TextBox 6"/>
           <p:cNvSpPr txBox="1"/>
           <p:nvPr/>
         </p:nvSpPr>
@@ -12653,6 +13146,7 @@
                   <a:srgbClr val="0E5C63"/>
                 </a:solidFill>
                 <a:latin typeface="Courier New"/>
+                <a:ea typeface="Hiragino Sans GB"/>
               </a:rPr>
               <a:t>PARTICIPATION</a:t>
             </a:r>
@@ -12661,7 +13155,7 @@
       </p:sp>
       <p:sp>
         <p:nvSpPr>
-          <p:cNvPr id="7" name="TextBox 6"/>
+          <p:cNvPr id="8" name="TextBox 7"/>
           <p:cNvSpPr txBox="1"/>
           <p:nvPr/>
         </p:nvSpPr>
@@ -12699,6 +13193,7 @@
                   <a:srgbClr val="20242A"/>
                 </a:solidFill>
                 <a:latin typeface="Georgia"/>
+                <a:ea typeface="Hiragino Sans GB"/>
               </a:rPr>
               <a:t>The EU's highest female</a:t>
             </a:r>
@@ -12721,6 +13216,7 @@
                   <a:srgbClr val="20242A"/>
                 </a:solidFill>
                 <a:latin typeface="Georgia"/>
+                <a:ea typeface="Hiragino Sans GB"/>
               </a:rPr>
               <a:t>employment rate</a:t>
             </a:r>
@@ -12729,7 +13225,7 @@
       </p:sp>
       <p:sp>
         <p:nvSpPr>
-          <p:cNvPr id="8" name="TextBox 7"/>
+          <p:cNvPr id="9" name="TextBox 8"/>
           <p:cNvSpPr txBox="1"/>
           <p:nvPr/>
         </p:nvSpPr>
@@ -12767,6 +13263,7 @@
                   <a:srgbClr val="8A8478"/>
                 </a:solidFill>
                 <a:latin typeface="Helvetica Neue"/>
+                <a:ea typeface="Hiragino Sans GB"/>
               </a:rPr>
               <a:t>Female employment, ages 15–74</a:t>
             </a:r>
@@ -12775,7 +13272,7 @@
       </p:sp>
       <p:sp>
         <p:nvSpPr>
-          <p:cNvPr id="9" name="Rounded Rectangle 8"/>
+          <p:cNvPr id="10" name="Rounded Rectangle 9"/>
           <p:cNvSpPr/>
           <p:nvPr/>
         </p:nvSpPr>
@@ -12821,7 +13318,7 @@
       </p:sp>
       <p:sp>
         <p:nvSpPr>
-          <p:cNvPr id="10" name="Rounded Rectangle 9"/>
+          <p:cNvPr id="11" name="Rounded Rectangle 10"/>
           <p:cNvSpPr/>
           <p:nvPr/>
         </p:nvSpPr>
@@ -12867,7 +13364,7 @@
       </p:sp>
       <p:sp>
         <p:nvSpPr>
-          <p:cNvPr id="11" name="TextBox 10"/>
+          <p:cNvPr id="12" name="TextBox 11"/>
           <p:cNvSpPr txBox="1"/>
           <p:nvPr/>
         </p:nvSpPr>
@@ -12905,6 +13402,7 @@
                   <a:srgbClr val="20242A"/>
                 </a:solidFill>
                 <a:latin typeface="Helvetica Neue"/>
+                <a:ea typeface="Hiragino Sans GB"/>
               </a:rPr>
               <a:t>69%</a:t>
             </a:r>
@@ -12913,7 +13411,7 @@
       </p:sp>
       <p:sp>
         <p:nvSpPr>
-          <p:cNvPr id="12" name="TextBox 11"/>
+          <p:cNvPr id="13" name="TextBox 12"/>
           <p:cNvSpPr txBox="1"/>
           <p:nvPr/>
         </p:nvSpPr>
@@ -12951,6 +13449,7 @@
                   <a:srgbClr val="0E5C63"/>
                 </a:solidFill>
                 <a:latin typeface="Helvetica Neue"/>
+                <a:ea typeface="Hiragino Sans GB"/>
               </a:rPr>
               <a:t>+12.7 pp</a:t>
             </a:r>
@@ -12960,6 +13459,7 @@
                   <a:srgbClr val="4A4E56"/>
                 </a:solidFill>
                 <a:latin typeface="Helvetica Neue"/>
+                <a:ea typeface="Hiragino Sans GB"/>
               </a:rPr>
               <a:t>  above the EU average</a:t>
             </a:r>
@@ -12968,7 +13468,7 @@
       </p:sp>
       <p:sp>
         <p:nvSpPr>
-          <p:cNvPr id="13" name="Rounded Rectangle 12"/>
+          <p:cNvPr id="14" name="Rounded Rectangle 13"/>
           <p:cNvSpPr/>
           <p:nvPr/>
         </p:nvSpPr>
@@ -12983,12 +13483,10 @@
             </a:avLst>
           </a:prstGeom>
           <a:solidFill>
-            <a:srgbClr val="ECE4D6"/>
+            <a:srgbClr val="16223A"/>
           </a:solidFill>
-          <a:ln w="12700">
-            <a:solidFill>
-              <a:srgbClr val="DED7C8"/>
-            </a:solidFill>
+          <a:ln>
+            <a:noFill/>
           </a:ln>
           <a:effectLst/>
         </p:spPr>
@@ -13016,7 +13514,7 @@
       </p:sp>
       <p:sp>
         <p:nvSpPr>
-          <p:cNvPr id="14" name="TextBox 13"/>
+          <p:cNvPr id="15" name="TextBox 14"/>
           <p:cNvSpPr txBox="1"/>
           <p:nvPr/>
         </p:nvSpPr>
@@ -13051,9 +13549,10 @@
             <a:r>
               <a:rPr sz="1050" b="1" i="0">
                 <a:solidFill>
-                  <a:srgbClr val="0E5C63"/>
+                  <a:srgbClr val="2E8A8C"/>
                 </a:solidFill>
                 <a:latin typeface="Courier New"/>
+                <a:ea typeface="Hiragino Sans GB"/>
               </a:rPr>
               <a:t>PART-TIME CULTURE</a:t>
             </a:r>
@@ -13062,7 +13561,7 @@
       </p:sp>
       <p:sp>
         <p:nvSpPr>
-          <p:cNvPr id="15" name="TextBox 14"/>
+          <p:cNvPr id="16" name="TextBox 15"/>
           <p:cNvSpPr txBox="1"/>
           <p:nvPr/>
         </p:nvSpPr>
@@ -13097,9 +13596,10 @@
             <a:r>
               <a:rPr sz="2000" b="1" i="0">
                 <a:solidFill>
-                  <a:srgbClr val="20242A"/>
+                  <a:srgbClr val="F1EBDD"/>
                 </a:solidFill>
                 <a:latin typeface="Georgia"/>
+                <a:ea typeface="Hiragino Sans GB"/>
               </a:rPr>
               <a:t>Europe's part-time capital</a:t>
             </a:r>
@@ -13108,7 +13608,7 @@
       </p:sp>
       <p:sp>
         <p:nvSpPr>
-          <p:cNvPr id="16" name="TextBox 15"/>
+          <p:cNvPr id="17" name="TextBox 16"/>
           <p:cNvSpPr txBox="1"/>
           <p:nvPr/>
         </p:nvSpPr>
@@ -13146,6 +13646,7 @@
                   <a:srgbClr val="D8542A"/>
                 </a:solidFill>
                 <a:latin typeface="Helvetica Neue"/>
+                <a:ea typeface="Hiragino Sans GB"/>
               </a:rPr>
               <a:t>~1.9 M</a:t>
             </a:r>
@@ -13154,7 +13655,7 @@
       </p:sp>
       <p:sp>
         <p:nvSpPr>
-          <p:cNvPr id="17" name="TextBox 16"/>
+          <p:cNvPr id="18" name="TextBox 17"/>
           <p:cNvSpPr txBox="1"/>
           <p:nvPr/>
         </p:nvSpPr>
@@ -13189,9 +13690,10 @@
             <a:r>
               <a:rPr sz="1100" b="0" i="0">
                 <a:solidFill>
-                  <a:srgbClr val="4A4E56"/>
+                  <a:srgbClr val="C9D2DE"/>
                 </a:solidFill>
                 <a:latin typeface="Helvetica Neue"/>
+                <a:ea typeface="Hiragino Sans GB"/>
               </a:rPr>
               <a:t>work a 28–35h week — up 300,000 in four years. Two-thirds of employed mothers work part-time: a reserve of hours the tight market can still draw on.</a:t>
             </a:r>
@@ -13200,7 +13702,7 @@
       </p:sp>
       <p:sp>
         <p:nvSpPr>
-          <p:cNvPr id="18" name="TextBox 17"/>
+          <p:cNvPr id="19" name="TextBox 18"/>
           <p:cNvSpPr txBox="1"/>
           <p:nvPr/>
         </p:nvSpPr>
@@ -13238,6 +13740,7 @@
                   <a:srgbClr val="D8542A"/>
                 </a:solidFill>
                 <a:latin typeface="Courier New"/>
+                <a:ea typeface="Hiragino Sans GB"/>
               </a:rPr>
               <a:t>SOURCE   </a:t>
             </a:r>
@@ -13247,6 +13750,7 @@
                   <a:srgbClr val="8A8478"/>
                 </a:solidFill>
                 <a:latin typeface="Courier New"/>
+                <a:ea typeface="Hiragino Sans GB"/>
               </a:rPr>
               <a:t>CBS &amp; Eurostat (employment rates and part-time shares, 2025).</a:t>
             </a:r>
@@ -13255,7 +13759,7 @@
       </p:sp>
       <p:sp>
         <p:nvSpPr>
-          <p:cNvPr id="19" name="TextBox 18"/>
+          <p:cNvPr id="20" name="TextBox 19"/>
           <p:cNvSpPr txBox="1"/>
           <p:nvPr/>
         </p:nvSpPr>
@@ -13293,6 +13797,7 @@
                   <a:srgbClr val="8A8478"/>
                 </a:solidFill>
                 <a:latin typeface="Courier New"/>
+                <a:ea typeface="Hiragino Sans GB"/>
               </a:rPr>
               <a:t>The Netherlands Job Market · 2026   ·   an example deck built with slide-maker</a:t>
             </a:r>
@@ -13301,7 +13806,7 @@
       </p:sp>
       <p:sp>
         <p:nvSpPr>
-          <p:cNvPr id="20" name="TextBox 19"/>
+          <p:cNvPr id="21" name="TextBox 20"/>
           <p:cNvSpPr txBox="1"/>
           <p:nvPr/>
         </p:nvSpPr>
@@ -13339,6 +13844,7 @@
                   <a:srgbClr val="8A8478"/>
                 </a:solidFill>
                 <a:latin typeface="Courier New"/>
+                <a:ea typeface="Hiragino Sans GB"/>
               </a:rPr>
               <a:t>05 / 14</a:t>
             </a:r>
@@ -13447,6 +13953,7 @@
                   <a:srgbClr val="D8542A"/>
                 </a:solidFill>
                 <a:latin typeface="Helvetica Neue"/>
+                <a:ea typeface="Hiragino Sans GB"/>
               </a:rPr>
               <a:t>SHORTAGE SECTORS</a:t>
             </a:r>
@@ -13493,6 +14000,7 @@
                   <a:srgbClr val="20242A"/>
                 </a:solidFill>
                 <a:latin typeface="Georgia"/>
+                <a:ea typeface="Hiragino Sans GB"/>
               </a:rPr>
               <a:t>Where the scarcity concentrates</a:t>
             </a:r>
@@ -13501,7 +14009,51 @@
       </p:sp>
       <p:sp>
         <p:nvSpPr>
-          <p:cNvPr id="5" name="TextBox 4"/>
+          <p:cNvPr id="5" name="Rectangle 4"/>
+          <p:cNvSpPr/>
+          <p:nvPr/>
+        </p:nvSpPr>
+        <p:spPr>
+          <a:xfrm>
+            <a:off x="566928" y="1191006"/>
+            <a:ext cx="1097280" cy="45720"/>
+          </a:xfrm>
+          <a:prstGeom prst="rect">
+            <a:avLst/>
+          </a:prstGeom>
+          <a:solidFill>
+            <a:srgbClr val="D8542A"/>
+          </a:solidFill>
+          <a:ln>
+            <a:noFill/>
+          </a:ln>
+          <a:effectLst/>
+        </p:spPr>
+        <p:style>
+          <a:lnRef idx="1">
+            <a:schemeClr val="accent1"/>
+          </a:lnRef>
+          <a:fillRef idx="3">
+            <a:schemeClr val="accent1"/>
+          </a:fillRef>
+          <a:effectRef idx="2">
+            <a:schemeClr val="accent1"/>
+          </a:effectRef>
+          <a:fontRef idx="minor">
+            <a:schemeClr val="lt1"/>
+          </a:fontRef>
+        </p:style>
+        <p:txBody>
+          <a:bodyPr rtlCol="0" anchor="ctr"/>
+          <a:lstStyle/>
+          <a:p>
+            <a:pPr algn="ctr"/>
+          </a:p>
+        </p:txBody>
+      </p:sp>
+      <p:sp>
+        <p:nvSpPr>
+          <p:cNvPr id="6" name="TextBox 5"/>
           <p:cNvSpPr txBox="1"/>
           <p:nvPr/>
         </p:nvSpPr>
@@ -13539,6 +14091,7 @@
                   <a:srgbClr val="4A4E56"/>
                 </a:solidFill>
                 <a:latin typeface="Helvetica Neue"/>
+                <a:ea typeface="Hiragino Sans GB"/>
               </a:rPr>
               <a:t>Even as the aggregate cools, UWV flags persistent, structural shortages in five areas — roughly 45% of vacancies in these fields went unfilled in late 2025.</a:t>
             </a:r>
@@ -13547,7 +14100,7 @@
       </p:sp>
       <p:sp>
         <p:nvSpPr>
-          <p:cNvPr id="6" name="Rounded Rectangle 5"/>
+          <p:cNvPr id="7" name="Rounded Rectangle 6"/>
           <p:cNvSpPr/>
           <p:nvPr/>
         </p:nvSpPr>
@@ -13595,7 +14148,7 @@
       </p:sp>
       <p:sp>
         <p:nvSpPr>
-          <p:cNvPr id="7" name="Rectangle 6"/>
+          <p:cNvPr id="8" name="Rectangle 7"/>
           <p:cNvSpPr/>
           <p:nvPr/>
         </p:nvSpPr>
@@ -13639,7 +14192,7 @@
       </p:sp>
       <p:sp>
         <p:nvSpPr>
-          <p:cNvPr id="8" name="Oval 7"/>
+          <p:cNvPr id="9" name="Oval 8"/>
           <p:cNvSpPr/>
           <p:nvPr/>
         </p:nvSpPr>
@@ -13683,7 +14236,7 @@
       </p:sp>
       <p:pic>
         <p:nvPicPr>
-          <p:cNvPr id="9" name="Picture 8" descr="heartbeat_D8542A.png"/>
+          <p:cNvPr id="10" name="Picture 9" descr="heartbeat_D8542A.png"/>
           <p:cNvPicPr>
             <a:picLocks noChangeAspect="1"/>
           </p:cNvPicPr>
@@ -13707,7 +14260,7 @@
       </p:pic>
       <p:sp>
         <p:nvSpPr>
-          <p:cNvPr id="10" name="TextBox 9"/>
+          <p:cNvPr id="11" name="TextBox 10"/>
           <p:cNvSpPr txBox="1"/>
           <p:nvPr/>
         </p:nvSpPr>
@@ -13745,6 +14298,7 @@
                   <a:srgbClr val="20242A"/>
                 </a:solidFill>
                 <a:latin typeface="Helvetica Neue"/>
+                <a:ea typeface="Hiragino Sans GB"/>
               </a:rPr>
               <a:t>Healthcare &amp; social care</a:t>
             </a:r>
@@ -13753,7 +14307,7 @@
       </p:sp>
       <p:sp>
         <p:nvSpPr>
-          <p:cNvPr id="11" name="TextBox 10"/>
+          <p:cNvPr id="12" name="TextBox 11"/>
           <p:cNvSpPr txBox="1"/>
           <p:nvPr/>
         </p:nvSpPr>
@@ -13791,6 +14345,7 @@
                   <a:srgbClr val="4A4E56"/>
                 </a:solidFill>
                 <a:latin typeface="Helvetica Neue"/>
+                <a:ea typeface="Hiragino Sans GB"/>
               </a:rPr>
               <a:t>Nurses, carers and specialists — an ageing population's structural gap</a:t>
             </a:r>
@@ -13799,7 +14354,7 @@
       </p:sp>
       <p:sp>
         <p:nvSpPr>
-          <p:cNvPr id="12" name="Rounded Rectangle 11"/>
+          <p:cNvPr id="13" name="Rounded Rectangle 12"/>
           <p:cNvSpPr/>
           <p:nvPr/>
         </p:nvSpPr>
@@ -13847,7 +14402,7 @@
       </p:sp>
       <p:sp>
         <p:nvSpPr>
-          <p:cNvPr id="13" name="Rectangle 12"/>
+          <p:cNvPr id="14" name="Rectangle 13"/>
           <p:cNvSpPr/>
           <p:nvPr/>
         </p:nvSpPr>
@@ -13891,7 +14446,7 @@
       </p:sp>
       <p:sp>
         <p:nvSpPr>
-          <p:cNvPr id="14" name="Oval 13"/>
+          <p:cNvPr id="15" name="Oval 14"/>
           <p:cNvSpPr/>
           <p:nvPr/>
         </p:nvSpPr>
@@ -13935,7 +14490,7 @@
       </p:sp>
       <p:pic>
         <p:nvPicPr>
-          <p:cNvPr id="15" name="Picture 14" descr="cpu_0E5C63.png"/>
+          <p:cNvPr id="16" name="Picture 15" descr="cpu_0E5C63.png"/>
           <p:cNvPicPr>
             <a:picLocks noChangeAspect="1"/>
           </p:cNvPicPr>
@@ -13959,7 +14514,7 @@
       </p:pic>
       <p:sp>
         <p:nvSpPr>
-          <p:cNvPr id="16" name="TextBox 15"/>
+          <p:cNvPr id="17" name="TextBox 16"/>
           <p:cNvSpPr txBox="1"/>
           <p:nvPr/>
         </p:nvSpPr>
@@ -13997,6 +14552,7 @@
                   <a:srgbClr val="20242A"/>
                 </a:solidFill>
                 <a:latin typeface="Helvetica Neue"/>
+                <a:ea typeface="Hiragino Sans GB"/>
               </a:rPr>
               <a:t>ICT &amp; technology</a:t>
             </a:r>
@@ -14005,7 +14561,7 @@
       </p:sp>
       <p:sp>
         <p:nvSpPr>
-          <p:cNvPr id="17" name="TextBox 16"/>
+          <p:cNvPr id="18" name="TextBox 17"/>
           <p:cNvSpPr txBox="1"/>
           <p:nvPr/>
         </p:nvSpPr>
@@ -14043,6 +14599,7 @@
                   <a:srgbClr val="4A4E56"/>
                 </a:solidFill>
                 <a:latin typeface="Helvetica Neue"/>
+                <a:ea typeface="Hiragino Sans GB"/>
               </a:rPr>
               <a:t>Software developers and data specialists top the demand list</a:t>
             </a:r>
@@ -14051,7 +14608,7 @@
       </p:sp>
       <p:sp>
         <p:nvSpPr>
-          <p:cNvPr id="18" name="Rounded Rectangle 17"/>
+          <p:cNvPr id="19" name="Rounded Rectangle 18"/>
           <p:cNvSpPr/>
           <p:nvPr/>
         </p:nvSpPr>
@@ -14099,7 +14656,7 @@
       </p:sp>
       <p:sp>
         <p:nvSpPr>
-          <p:cNvPr id="19" name="Rectangle 18"/>
+          <p:cNvPr id="20" name="Rectangle 19"/>
           <p:cNvSpPr/>
           <p:nvPr/>
         </p:nvSpPr>
@@ -14143,7 +14700,7 @@
       </p:sp>
       <p:sp>
         <p:nvSpPr>
-          <p:cNvPr id="20" name="Oval 19"/>
+          <p:cNvPr id="21" name="Oval 20"/>
           <p:cNvSpPr/>
           <p:nvPr/>
         </p:nvSpPr>
@@ -14187,7 +14744,7 @@
       </p:sp>
       <p:pic>
         <p:nvPicPr>
-          <p:cNvPr id="21" name="Picture 20" descr="tools_C08A2E.png"/>
+          <p:cNvPr id="22" name="Picture 21" descr="tools_C08A2E.png"/>
           <p:cNvPicPr>
             <a:picLocks noChangeAspect="1"/>
           </p:cNvPicPr>
@@ -14211,7 +14768,7 @@
       </p:pic>
       <p:sp>
         <p:nvSpPr>
-          <p:cNvPr id="22" name="TextBox 21"/>
+          <p:cNvPr id="23" name="TextBox 22"/>
           <p:cNvSpPr txBox="1"/>
           <p:nvPr/>
         </p:nvSpPr>
@@ -14249,6 +14806,7 @@
                   <a:srgbClr val="20242A"/>
                 </a:solidFill>
                 <a:latin typeface="Helvetica Neue"/>
+                <a:ea typeface="Hiragino Sans GB"/>
               </a:rPr>
               <a:t>Technical trades</a:t>
             </a:r>
@@ -14257,7 +14815,7 @@
       </p:sp>
       <p:sp>
         <p:nvSpPr>
-          <p:cNvPr id="23" name="TextBox 22"/>
+          <p:cNvPr id="24" name="TextBox 23"/>
           <p:cNvSpPr txBox="1"/>
           <p:nvPr/>
         </p:nvSpPr>
@@ -14295,6 +14853,7 @@
                   <a:srgbClr val="4A4E56"/>
                 </a:solidFill>
                 <a:latin typeface="Helvetica Neue"/>
+                <a:ea typeface="Hiragino Sans GB"/>
               </a:rPr>
               <a:t>Electricians, mechanics, installation and maintenance fitters</a:t>
             </a:r>
@@ -14303,7 +14862,7 @@
       </p:sp>
       <p:sp>
         <p:nvSpPr>
-          <p:cNvPr id="24" name="Rounded Rectangle 23"/>
+          <p:cNvPr id="25" name="Rounded Rectangle 24"/>
           <p:cNvSpPr/>
           <p:nvPr/>
         </p:nvSpPr>
@@ -14351,7 +14910,7 @@
       </p:sp>
       <p:sp>
         <p:nvSpPr>
-          <p:cNvPr id="25" name="Rectangle 24"/>
+          <p:cNvPr id="26" name="Rectangle 25"/>
           <p:cNvSpPr/>
           <p:nvPr/>
         </p:nvSpPr>
@@ -14395,7 +14954,7 @@
       </p:sp>
       <p:sp>
         <p:nvSpPr>
-          <p:cNvPr id="26" name="Oval 25"/>
+          <p:cNvPr id="27" name="Oval 26"/>
           <p:cNvSpPr/>
           <p:nvPr/>
         </p:nvSpPr>
@@ -14439,7 +14998,7 @@
       </p:sp>
       <p:pic>
         <p:nvPicPr>
-          <p:cNvPr id="27" name="Picture 26" descr="school_3E6B57.png"/>
+          <p:cNvPr id="28" name="Picture 27" descr="school_3E6B57.png"/>
           <p:cNvPicPr>
             <a:picLocks noChangeAspect="1"/>
           </p:cNvPicPr>
@@ -14463,7 +15022,7 @@
       </p:pic>
       <p:sp>
         <p:nvSpPr>
-          <p:cNvPr id="28" name="TextBox 27"/>
+          <p:cNvPr id="29" name="TextBox 28"/>
           <p:cNvSpPr txBox="1"/>
           <p:nvPr/>
         </p:nvSpPr>
@@ -14501,6 +15060,7 @@
                   <a:srgbClr val="20242A"/>
                 </a:solidFill>
                 <a:latin typeface="Helvetica Neue"/>
+                <a:ea typeface="Hiragino Sans GB"/>
               </a:rPr>
               <a:t>Education</a:t>
             </a:r>
@@ -14509,7 +15069,7 @@
       </p:sp>
       <p:sp>
         <p:nvSpPr>
-          <p:cNvPr id="29" name="TextBox 28"/>
+          <p:cNvPr id="30" name="TextBox 29"/>
           <p:cNvSpPr txBox="1"/>
           <p:nvPr/>
         </p:nvSpPr>
@@ -14547,6 +15107,7 @@
                   <a:srgbClr val="4A4E56"/>
                 </a:solidFill>
                 <a:latin typeface="Helvetica Neue"/>
+                <a:ea typeface="Hiragino Sans GB"/>
               </a:rPr>
               <a:t>Primary-school teachers and STEM staff in chronic short supply</a:t>
             </a:r>
@@ -14555,7 +15116,7 @@
       </p:sp>
       <p:sp>
         <p:nvSpPr>
-          <p:cNvPr id="30" name="Rounded Rectangle 29"/>
+          <p:cNvPr id="31" name="Rounded Rectangle 30"/>
           <p:cNvSpPr/>
           <p:nvPr/>
         </p:nvSpPr>
@@ -14603,7 +15164,7 @@
       </p:sp>
       <p:sp>
         <p:nvSpPr>
-          <p:cNvPr id="31" name="Rectangle 30"/>
+          <p:cNvPr id="32" name="Rectangle 31"/>
           <p:cNvSpPr/>
           <p:nvPr/>
         </p:nvSpPr>
@@ -14647,7 +15208,7 @@
       </p:sp>
       <p:sp>
         <p:nvSpPr>
-          <p:cNvPr id="32" name="Oval 31"/>
+          <p:cNvPr id="33" name="Oval 32"/>
           <p:cNvSpPr/>
           <p:nvPr/>
         </p:nvSpPr>
@@ -14691,7 +15252,7 @@
       </p:sp>
       <p:pic>
         <p:nvPicPr>
-          <p:cNvPr id="33" name="Picture 32" descr="truck-delivery_9C4722.png"/>
+          <p:cNvPr id="34" name="Picture 33" descr="truck-delivery_9C4722.png"/>
           <p:cNvPicPr>
             <a:picLocks noChangeAspect="1"/>
           </p:cNvPicPr>
@@ -14715,7 +15276,7 @@
       </p:pic>
       <p:sp>
         <p:nvSpPr>
-          <p:cNvPr id="34" name="TextBox 33"/>
+          <p:cNvPr id="35" name="TextBox 34"/>
           <p:cNvSpPr txBox="1"/>
           <p:nvPr/>
         </p:nvSpPr>
@@ -14753,6 +15314,7 @@
                   <a:srgbClr val="20242A"/>
                 </a:solidFill>
                 <a:latin typeface="Helvetica Neue"/>
+                <a:ea typeface="Hiragino Sans GB"/>
               </a:rPr>
               <a:t>Transport &amp; logistics</a:t>
             </a:r>
@@ -14761,7 +15323,7 @@
       </p:sp>
       <p:sp>
         <p:nvSpPr>
-          <p:cNvPr id="35" name="TextBox 34"/>
+          <p:cNvPr id="36" name="TextBox 35"/>
           <p:cNvSpPr txBox="1"/>
           <p:nvPr/>
         </p:nvSpPr>
@@ -14799,6 +15361,7 @@
                   <a:srgbClr val="4A4E56"/>
                 </a:solidFill>
                 <a:latin typeface="Helvetica Neue"/>
+                <a:ea typeface="Hiragino Sans GB"/>
               </a:rPr>
               <a:t>Drivers and logistics planners across the Randstad corridor</a:t>
             </a:r>
@@ -14807,7 +15370,7 @@
       </p:sp>
       <p:sp>
         <p:nvSpPr>
-          <p:cNvPr id="36" name="TextBox 35"/>
+          <p:cNvPr id="37" name="TextBox 36"/>
           <p:cNvSpPr txBox="1"/>
           <p:nvPr/>
         </p:nvSpPr>
@@ -14845,6 +15408,7 @@
                   <a:srgbClr val="D8542A"/>
                 </a:solidFill>
                 <a:latin typeface="Courier New"/>
+                <a:ea typeface="Hiragino Sans GB"/>
               </a:rPr>
               <a:t>SOURCE   </a:t>
             </a:r>
@@ -14854,6 +15418,7 @@
                   <a:srgbClr val="8A8478"/>
                 </a:solidFill>
                 <a:latin typeface="Courier New"/>
+                <a:ea typeface="Hiragino Sans GB"/>
               </a:rPr>
               <a:t>UWV (shortage-occupation and unfilled-vacancy reporting, 2025–2026).</a:t>
             </a:r>
@@ -14862,7 +15427,7 @@
       </p:sp>
       <p:sp>
         <p:nvSpPr>
-          <p:cNvPr id="37" name="TextBox 36"/>
+          <p:cNvPr id="38" name="TextBox 37"/>
           <p:cNvSpPr txBox="1"/>
           <p:nvPr/>
         </p:nvSpPr>
@@ -14900,6 +15465,7 @@
                   <a:srgbClr val="8A8478"/>
                 </a:solidFill>
                 <a:latin typeface="Courier New"/>
+                <a:ea typeface="Hiragino Sans GB"/>
               </a:rPr>
               <a:t>The Netherlands Job Market · 2026   ·   an example deck built with slide-maker</a:t>
             </a:r>
@@ -14908,7 +15474,7 @@
       </p:sp>
       <p:sp>
         <p:nvSpPr>
-          <p:cNvPr id="38" name="TextBox 37"/>
+          <p:cNvPr id="39" name="TextBox 38"/>
           <p:cNvSpPr txBox="1"/>
           <p:nvPr/>
         </p:nvSpPr>
@@ -14946,6 +15512,7 @@
                   <a:srgbClr val="8A8478"/>
                 </a:solidFill>
                 <a:latin typeface="Courier New"/>
+                <a:ea typeface="Hiragino Sans GB"/>
               </a:rPr>
               <a:t>06 / 14</a:t>
             </a:r>
@@ -15054,6 +15621,7 @@
                   <a:srgbClr val="0E5C63"/>
                 </a:solidFill>
                 <a:latin typeface="Helvetica Neue"/>
+                <a:ea typeface="Hiragino Sans GB"/>
               </a:rPr>
               <a:t>PAY &amp; WAGES</a:t>
             </a:r>
@@ -15100,6 +15668,7 @@
                   <a:srgbClr val="20242A"/>
                 </a:solidFill>
                 <a:latin typeface="Georgia"/>
+                <a:ea typeface="Hiragino Sans GB"/>
               </a:rPr>
               <a:t>Wages are beating inflation again</a:t>
             </a:r>
@@ -15108,7 +15677,51 @@
       </p:sp>
       <p:sp>
         <p:nvSpPr>
-          <p:cNvPr id="5" name="TextBox 4"/>
+          <p:cNvPr id="5" name="Rectangle 4"/>
+          <p:cNvSpPr/>
+          <p:nvPr/>
+        </p:nvSpPr>
+        <p:spPr>
+          <a:xfrm>
+            <a:off x="566928" y="1191006"/>
+            <a:ext cx="1097280" cy="45720"/>
+          </a:xfrm>
+          <a:prstGeom prst="rect">
+            <a:avLst/>
+          </a:prstGeom>
+          <a:solidFill>
+            <a:srgbClr val="0E5C63"/>
+          </a:solidFill>
+          <a:ln>
+            <a:noFill/>
+          </a:ln>
+          <a:effectLst/>
+        </p:spPr>
+        <p:style>
+          <a:lnRef idx="1">
+            <a:schemeClr val="accent1"/>
+          </a:lnRef>
+          <a:fillRef idx="3">
+            <a:schemeClr val="accent1"/>
+          </a:fillRef>
+          <a:effectRef idx="2">
+            <a:schemeClr val="accent1"/>
+          </a:effectRef>
+          <a:fontRef idx="minor">
+            <a:schemeClr val="lt1"/>
+          </a:fontRef>
+        </p:style>
+        <p:txBody>
+          <a:bodyPr rtlCol="0" anchor="ctr"/>
+          <a:lstStyle/>
+          <a:p>
+            <a:pPr algn="ctr"/>
+          </a:p>
+        </p:txBody>
+      </p:sp>
+      <p:sp>
+        <p:nvSpPr>
+          <p:cNvPr id="6" name="TextBox 5"/>
           <p:cNvSpPr txBox="1"/>
           <p:nvPr/>
         </p:nvSpPr>
@@ -15146,6 +15759,7 @@
                   <a:srgbClr val="8A8478"/>
                 </a:solidFill>
                 <a:latin typeface="Courier New"/>
+                <a:ea typeface="Hiragino Sans GB"/>
               </a:rPr>
               <a:t>NEGOTIATED (CAO) WAGE GROWTH, YEAR-ON-YEAR %</a:t>
             </a:r>
@@ -15154,7 +15768,7 @@
       </p:sp>
       <p:graphicFrame>
         <p:nvGraphicFramePr>
-          <p:cNvPr id="6" name="Chart 5"/>
+          <p:cNvPr id="7" name="Chart 6"/>
           <p:cNvGraphicFramePr>
             <a:graphicFrameLocks noGrp="1"/>
           </p:cNvGraphicFramePr>
@@ -15172,7 +15786,7 @@
       </p:graphicFrame>
       <p:sp>
         <p:nvSpPr>
-          <p:cNvPr id="7" name="TextBox 6"/>
+          <p:cNvPr id="8" name="TextBox 7"/>
           <p:cNvSpPr txBox="1"/>
           <p:nvPr/>
         </p:nvSpPr>
@@ -15210,6 +15824,7 @@
                   <a:srgbClr val="0E5C63"/>
                 </a:solidFill>
                 <a:latin typeface="Courier New"/>
+                <a:ea typeface="Hiragino Sans GB"/>
               </a:rPr>
               <a:t>REAL GAINS, THREE YEARS ON</a:t>
             </a:r>
@@ -15218,7 +15833,7 @@
       </p:sp>
       <p:sp>
         <p:nvSpPr>
-          <p:cNvPr id="8" name="TextBox 7"/>
+          <p:cNvPr id="9" name="TextBox 8"/>
           <p:cNvSpPr txBox="1"/>
           <p:nvPr/>
         </p:nvSpPr>
@@ -15256,6 +15871,7 @@
                   <a:srgbClr val="0E5C63"/>
                 </a:solidFill>
                 <a:latin typeface="Helvetica Neue"/>
+                <a:ea typeface="Hiragino Sans GB"/>
               </a:rPr>
               <a:t>+2.0%</a:t>
             </a:r>
@@ -15264,7 +15880,7 @@
       </p:sp>
       <p:sp>
         <p:nvSpPr>
-          <p:cNvPr id="9" name="TextBox 8"/>
+          <p:cNvPr id="10" name="TextBox 9"/>
           <p:cNvSpPr txBox="1"/>
           <p:nvPr/>
         </p:nvSpPr>
@@ -15302,6 +15918,7 @@
                   <a:srgbClr val="4A4E56"/>
                 </a:solidFill>
                 <a:latin typeface="Helvetica Neue"/>
+                <a:ea typeface="Hiragino Sans GB"/>
               </a:rPr>
               <a:t>Collectively-agreed pay rose 4.5% in early 2026 — 2.0 points ahead of inflation. Households are genuinely getting richer.</a:t>
             </a:r>
@@ -15310,7 +15927,7 @@
       </p:sp>
       <p:sp>
         <p:nvSpPr>
-          <p:cNvPr id="10" name="Rectangle 9"/>
+          <p:cNvPr id="11" name="Rectangle 10"/>
           <p:cNvSpPr/>
           <p:nvPr/>
         </p:nvSpPr>
@@ -15354,7 +15971,7 @@
       </p:sp>
       <p:sp>
         <p:nvSpPr>
-          <p:cNvPr id="11" name="TextBox 10"/>
+          <p:cNvPr id="12" name="TextBox 11"/>
           <p:cNvSpPr txBox="1"/>
           <p:nvPr/>
         </p:nvSpPr>
@@ -15392,6 +16009,7 @@
                   <a:srgbClr val="D8542A"/>
                 </a:solidFill>
                 <a:latin typeface="Helvetica Neue"/>
+                <a:ea typeface="Hiragino Sans GB"/>
               </a:rPr>
               <a:t>€14.99</a:t>
             </a:r>
@@ -15401,6 +16019,7 @@
                   <a:srgbClr val="4A4E56"/>
                 </a:solidFill>
                 <a:latin typeface="Helvetica Neue"/>
+                <a:ea typeface="Hiragino Sans GB"/>
               </a:rPr>
               <a:t>  /hr minimum wage (21+)</a:t>
             </a:r>
@@ -15409,7 +16028,7 @@
       </p:sp>
       <p:sp>
         <p:nvSpPr>
-          <p:cNvPr id="12" name="TextBox 11"/>
+          <p:cNvPr id="13" name="TextBox 12"/>
           <p:cNvSpPr txBox="1"/>
           <p:nvPr/>
         </p:nvSpPr>
@@ -15447,6 +16066,7 @@
                   <a:srgbClr val="8A8478"/>
                 </a:solidFill>
                 <a:latin typeface="Helvetica Neue"/>
+                <a:ea typeface="Hiragino Sans GB"/>
               </a:rPr>
               <a:t>from 1 July 2026 · average pay ≈ €53.4k/yr.</a:t>
             </a:r>
@@ -15455,7 +16075,7 @@
       </p:sp>
       <p:sp>
         <p:nvSpPr>
-          <p:cNvPr id="13" name="TextBox 12"/>
+          <p:cNvPr id="14" name="TextBox 13"/>
           <p:cNvSpPr txBox="1"/>
           <p:nvPr/>
         </p:nvSpPr>
@@ -15493,6 +16113,7 @@
                   <a:srgbClr val="D8542A"/>
                 </a:solidFill>
                 <a:latin typeface="Courier New"/>
+                <a:ea typeface="Hiragino Sans GB"/>
               </a:rPr>
               <a:t>SOURCE   </a:t>
             </a:r>
@@ -15502,6 +16123,7 @@
                   <a:srgbClr val="8A8478"/>
                 </a:solidFill>
                 <a:latin typeface="Courier New"/>
+                <a:ea typeface="Hiragino Sans GB"/>
               </a:rPr>
               <a:t>CBS (CAO negotiated-wage index); Business.gov.nl (minimum wage). 2024 figure indicative.</a:t>
             </a:r>
@@ -15510,7 +16132,7 @@
       </p:sp>
       <p:sp>
         <p:nvSpPr>
-          <p:cNvPr id="14" name="TextBox 13"/>
+          <p:cNvPr id="15" name="TextBox 14"/>
           <p:cNvSpPr txBox="1"/>
           <p:nvPr/>
         </p:nvSpPr>
@@ -15548,6 +16170,7 @@
                   <a:srgbClr val="8A8478"/>
                 </a:solidFill>
                 <a:latin typeface="Courier New"/>
+                <a:ea typeface="Hiragino Sans GB"/>
               </a:rPr>
               <a:t>The Netherlands Job Market · 2026   ·   an example deck built with slide-maker</a:t>
             </a:r>
@@ -15556,7 +16179,7 @@
       </p:sp>
       <p:sp>
         <p:nvSpPr>
-          <p:cNvPr id="15" name="TextBox 14"/>
+          <p:cNvPr id="16" name="TextBox 15"/>
           <p:cNvSpPr txBox="1"/>
           <p:nvPr/>
         </p:nvSpPr>
@@ -15594,6 +16217,7 @@
                   <a:srgbClr val="8A8478"/>
                 </a:solidFill>
                 <a:latin typeface="Courier New"/>
+                <a:ea typeface="Hiragino Sans GB"/>
               </a:rPr>
               <a:t>07 / 14</a:t>
             </a:r>
@@ -15702,6 +16326,7 @@
                   <a:srgbClr val="D8542A"/>
                 </a:solidFill>
                 <a:latin typeface="Helvetica Neue"/>
+                <a:ea typeface="Hiragino Sans GB"/>
               </a:rPr>
               <a:t>SALARY LEVELS</a:t>
             </a:r>
@@ -15748,6 +16373,7 @@
                   <a:srgbClr val="20242A"/>
                 </a:solidFill>
                 <a:latin typeface="Georgia"/>
+                <a:ea typeface="Hiragino Sans GB"/>
               </a:rPr>
               <a:t>A wide spread across the sectors</a:t>
             </a:r>
@@ -15756,7 +16382,51 @@
       </p:sp>
       <p:sp>
         <p:nvSpPr>
-          <p:cNvPr id="5" name="TextBox 4"/>
+          <p:cNvPr id="5" name="Rectangle 4"/>
+          <p:cNvSpPr/>
+          <p:nvPr/>
+        </p:nvSpPr>
+        <p:spPr>
+          <a:xfrm>
+            <a:off x="566928" y="1191006"/>
+            <a:ext cx="1097280" cy="45720"/>
+          </a:xfrm>
+          <a:prstGeom prst="rect">
+            <a:avLst/>
+          </a:prstGeom>
+          <a:solidFill>
+            <a:srgbClr val="D8542A"/>
+          </a:solidFill>
+          <a:ln>
+            <a:noFill/>
+          </a:ln>
+          <a:effectLst/>
+        </p:spPr>
+        <p:style>
+          <a:lnRef idx="1">
+            <a:schemeClr val="accent1"/>
+          </a:lnRef>
+          <a:fillRef idx="3">
+            <a:schemeClr val="accent1"/>
+          </a:fillRef>
+          <a:effectRef idx="2">
+            <a:schemeClr val="accent1"/>
+          </a:effectRef>
+          <a:fontRef idx="minor">
+            <a:schemeClr val="lt1"/>
+          </a:fontRef>
+        </p:style>
+        <p:txBody>
+          <a:bodyPr rtlCol="0" anchor="ctr"/>
+          <a:lstStyle/>
+          <a:p>
+            <a:pPr algn="ctr"/>
+          </a:p>
+        </p:txBody>
+      </p:sp>
+      <p:sp>
+        <p:nvSpPr>
+          <p:cNvPr id="6" name="TextBox 5"/>
           <p:cNvSpPr txBox="1"/>
           <p:nvPr/>
         </p:nvSpPr>
@@ -15794,6 +16464,7 @@
                   <a:srgbClr val="8A8478"/>
                 </a:solidFill>
                 <a:latin typeface="Courier New"/>
+                <a:ea typeface="Hiragino Sans GB"/>
               </a:rPr>
               <a:t>INDICATIVE GROSS SALARY, € PER YEAR</a:t>
             </a:r>
@@ -15802,7 +16473,7 @@
       </p:sp>
       <p:sp>
         <p:nvSpPr>
-          <p:cNvPr id="6" name="TextBox 5"/>
+          <p:cNvPr id="7" name="TextBox 6"/>
           <p:cNvSpPr txBox="1"/>
           <p:nvPr/>
         </p:nvSpPr>
@@ -15840,6 +16511,7 @@
                   <a:srgbClr val="8A8478"/>
                 </a:solidFill>
                 <a:latin typeface="Helvetica Neue"/>
+                <a:ea typeface="Hiragino Sans GB"/>
               </a:rPr>
               <a:t>ICT &amp; technology (mid-level)</a:t>
             </a:r>
@@ -15848,7 +16520,7 @@
       </p:sp>
       <p:sp>
         <p:nvSpPr>
-          <p:cNvPr id="7" name="Rounded Rectangle 6"/>
+          <p:cNvPr id="8" name="Rounded Rectangle 7"/>
           <p:cNvSpPr/>
           <p:nvPr/>
         </p:nvSpPr>
@@ -15894,7 +16566,7 @@
       </p:sp>
       <p:sp>
         <p:nvSpPr>
-          <p:cNvPr id="8" name="Rounded Rectangle 7"/>
+          <p:cNvPr id="9" name="Rounded Rectangle 8"/>
           <p:cNvSpPr/>
           <p:nvPr/>
         </p:nvSpPr>
@@ -15940,7 +16612,7 @@
       </p:sp>
       <p:sp>
         <p:nvSpPr>
-          <p:cNvPr id="9" name="TextBox 8"/>
+          <p:cNvPr id="10" name="TextBox 9"/>
           <p:cNvSpPr txBox="1"/>
           <p:nvPr/>
         </p:nvSpPr>
@@ -15978,6 +16650,7 @@
                   <a:srgbClr val="20242A"/>
                 </a:solidFill>
                 <a:latin typeface="Helvetica Neue"/>
+                <a:ea typeface="Hiragino Sans GB"/>
               </a:rPr>
               <a:t>€72k</a:t>
             </a:r>
@@ -15986,7 +16659,7 @@
       </p:sp>
       <p:sp>
         <p:nvSpPr>
-          <p:cNvPr id="10" name="TextBox 9"/>
+          <p:cNvPr id="11" name="TextBox 10"/>
           <p:cNvSpPr txBox="1"/>
           <p:nvPr/>
         </p:nvSpPr>
@@ -16024,6 +16697,7 @@
                   <a:srgbClr val="8A8478"/>
                 </a:solidFill>
                 <a:latin typeface="Helvetica Neue"/>
+                <a:ea typeface="Hiragino Sans GB"/>
               </a:rPr>
               <a:t>Engineering</a:t>
             </a:r>
@@ -16032,7 +16706,7 @@
       </p:sp>
       <p:sp>
         <p:nvSpPr>
-          <p:cNvPr id="11" name="Rounded Rectangle 10"/>
+          <p:cNvPr id="12" name="Rounded Rectangle 11"/>
           <p:cNvSpPr/>
           <p:nvPr/>
         </p:nvSpPr>
@@ -16078,7 +16752,7 @@
       </p:sp>
       <p:sp>
         <p:nvSpPr>
-          <p:cNvPr id="12" name="Rounded Rectangle 11"/>
+          <p:cNvPr id="13" name="Rounded Rectangle 12"/>
           <p:cNvSpPr/>
           <p:nvPr/>
         </p:nvSpPr>
@@ -16124,7 +16798,7 @@
       </p:sp>
       <p:sp>
         <p:nvSpPr>
-          <p:cNvPr id="13" name="TextBox 12"/>
+          <p:cNvPr id="14" name="TextBox 13"/>
           <p:cNvSpPr txBox="1"/>
           <p:nvPr/>
         </p:nvSpPr>
@@ -16162,6 +16836,7 @@
                   <a:srgbClr val="20242A"/>
                 </a:solidFill>
                 <a:latin typeface="Helvetica Neue"/>
+                <a:ea typeface="Hiragino Sans GB"/>
               </a:rPr>
               <a:t>€68k</a:t>
             </a:r>
@@ -16170,7 +16845,7 @@
       </p:sp>
       <p:sp>
         <p:nvSpPr>
-          <p:cNvPr id="14" name="TextBox 13"/>
+          <p:cNvPr id="15" name="TextBox 14"/>
           <p:cNvSpPr txBox="1"/>
           <p:nvPr/>
         </p:nvSpPr>
@@ -16208,6 +16883,7 @@
                   <a:srgbClr val="8A8478"/>
                 </a:solidFill>
                 <a:latin typeface="Helvetica Neue"/>
+                <a:ea typeface="Hiragino Sans GB"/>
               </a:rPr>
               <a:t>Finance &amp; business services</a:t>
             </a:r>
@@ -16216,7 +16892,7 @@
       </p:sp>
       <p:sp>
         <p:nvSpPr>
-          <p:cNvPr id="15" name="Rounded Rectangle 14"/>
+          <p:cNvPr id="16" name="Rounded Rectangle 15"/>
           <p:cNvSpPr/>
           <p:nvPr/>
         </p:nvSpPr>
@@ -16262,7 +16938,7 @@
       </p:sp>
       <p:sp>
         <p:nvSpPr>
-          <p:cNvPr id="16" name="Rounded Rectangle 15"/>
+          <p:cNvPr id="17" name="Rounded Rectangle 16"/>
           <p:cNvSpPr/>
           <p:nvPr/>
         </p:nvSpPr>
@@ -16308,7 +16984,7 @@
       </p:sp>
       <p:sp>
         <p:nvSpPr>
-          <p:cNvPr id="17" name="TextBox 16"/>
+          <p:cNvPr id="18" name="TextBox 17"/>
           <p:cNvSpPr txBox="1"/>
           <p:nvPr/>
         </p:nvSpPr>
@@ -16346,6 +17022,7 @@
                   <a:srgbClr val="20242A"/>
                 </a:solidFill>
                 <a:latin typeface="Helvetica Neue"/>
+                <a:ea typeface="Hiragino Sans GB"/>
               </a:rPr>
               <a:t>€65k</a:t>
             </a:r>
@@ -16354,7 +17031,7 @@
       </p:sp>
       <p:sp>
         <p:nvSpPr>
-          <p:cNvPr id="18" name="TextBox 17"/>
+          <p:cNvPr id="19" name="TextBox 18"/>
           <p:cNvSpPr txBox="1"/>
           <p:nvPr/>
         </p:nvSpPr>
@@ -16392,6 +17069,7 @@
                   <a:srgbClr val="8A8478"/>
                 </a:solidFill>
                 <a:latin typeface="Helvetica Neue"/>
+                <a:ea typeface="Hiragino Sans GB"/>
               </a:rPr>
               <a:t>National average (CBS)</a:t>
             </a:r>
@@ -16400,7 +17078,7 @@
       </p:sp>
       <p:sp>
         <p:nvSpPr>
-          <p:cNvPr id="19" name="Rounded Rectangle 18"/>
+          <p:cNvPr id="20" name="Rounded Rectangle 19"/>
           <p:cNvSpPr/>
           <p:nvPr/>
         </p:nvSpPr>
@@ -16446,7 +17124,7 @@
       </p:sp>
       <p:sp>
         <p:nvSpPr>
-          <p:cNvPr id="20" name="Rounded Rectangle 19"/>
+          <p:cNvPr id="21" name="Rounded Rectangle 20"/>
           <p:cNvSpPr/>
           <p:nvPr/>
         </p:nvSpPr>
@@ -16492,7 +17170,7 @@
       </p:sp>
       <p:sp>
         <p:nvSpPr>
-          <p:cNvPr id="21" name="TextBox 20"/>
+          <p:cNvPr id="22" name="TextBox 21"/>
           <p:cNvSpPr txBox="1"/>
           <p:nvPr/>
         </p:nvSpPr>
@@ -16530,6 +17208,7 @@
                   <a:srgbClr val="20242A"/>
                 </a:solidFill>
                 <a:latin typeface="Helvetica Neue"/>
+                <a:ea typeface="Hiragino Sans GB"/>
               </a:rPr>
               <a:t>€53k</a:t>
             </a:r>
@@ -16538,7 +17217,7 @@
       </p:sp>
       <p:sp>
         <p:nvSpPr>
-          <p:cNvPr id="22" name="TextBox 21"/>
+          <p:cNvPr id="23" name="TextBox 22"/>
           <p:cNvSpPr txBox="1"/>
           <p:nvPr/>
         </p:nvSpPr>
@@ -16576,6 +17255,7 @@
                   <a:srgbClr val="8A8478"/>
                 </a:solidFill>
                 <a:latin typeface="Helvetica Neue"/>
+                <a:ea typeface="Hiragino Sans GB"/>
               </a:rPr>
               <a:t>Healthcare (registered nurse)</a:t>
             </a:r>
@@ -16584,7 +17264,7 @@
       </p:sp>
       <p:sp>
         <p:nvSpPr>
-          <p:cNvPr id="23" name="Rounded Rectangle 22"/>
+          <p:cNvPr id="24" name="Rounded Rectangle 23"/>
           <p:cNvSpPr/>
           <p:nvPr/>
         </p:nvSpPr>
@@ -16630,7 +17310,7 @@
       </p:sp>
       <p:sp>
         <p:nvSpPr>
-          <p:cNvPr id="24" name="Rounded Rectangle 23"/>
+          <p:cNvPr id="25" name="Rounded Rectangle 24"/>
           <p:cNvSpPr/>
           <p:nvPr/>
         </p:nvSpPr>
@@ -16676,7 +17356,7 @@
       </p:sp>
       <p:sp>
         <p:nvSpPr>
-          <p:cNvPr id="25" name="TextBox 24"/>
+          <p:cNvPr id="26" name="TextBox 25"/>
           <p:cNvSpPr txBox="1"/>
           <p:nvPr/>
         </p:nvSpPr>
@@ -16714,6 +17394,7 @@
                   <a:srgbClr val="20242A"/>
                 </a:solidFill>
                 <a:latin typeface="Helvetica Neue"/>
+                <a:ea typeface="Hiragino Sans GB"/>
               </a:rPr>
               <a:t>€45k</a:t>
             </a:r>
@@ -16722,7 +17403,7 @@
       </p:sp>
       <p:sp>
         <p:nvSpPr>
-          <p:cNvPr id="26" name="TextBox 25"/>
+          <p:cNvPr id="27" name="TextBox 26"/>
           <p:cNvSpPr txBox="1"/>
           <p:nvPr/>
         </p:nvSpPr>
@@ -16760,6 +17441,7 @@
                   <a:srgbClr val="8A8478"/>
                 </a:solidFill>
                 <a:latin typeface="Helvetica Neue"/>
+                <a:ea typeface="Hiragino Sans GB"/>
               </a:rPr>
               <a:t>Hospitality &amp; retail</a:t>
             </a:r>
@@ -16768,7 +17450,7 @@
       </p:sp>
       <p:sp>
         <p:nvSpPr>
-          <p:cNvPr id="27" name="Rounded Rectangle 26"/>
+          <p:cNvPr id="28" name="Rounded Rectangle 27"/>
           <p:cNvSpPr/>
           <p:nvPr/>
         </p:nvSpPr>
@@ -16814,7 +17496,7 @@
       </p:sp>
       <p:sp>
         <p:nvSpPr>
-          <p:cNvPr id="28" name="Rounded Rectangle 27"/>
+          <p:cNvPr id="29" name="Rounded Rectangle 28"/>
           <p:cNvSpPr/>
           <p:nvPr/>
         </p:nvSpPr>
@@ -16860,7 +17542,7 @@
       </p:sp>
       <p:sp>
         <p:nvSpPr>
-          <p:cNvPr id="29" name="TextBox 28"/>
+          <p:cNvPr id="30" name="TextBox 29"/>
           <p:cNvSpPr txBox="1"/>
           <p:nvPr/>
         </p:nvSpPr>
@@ -16898,6 +17580,7 @@
                   <a:srgbClr val="20242A"/>
                 </a:solidFill>
                 <a:latin typeface="Helvetica Neue"/>
+                <a:ea typeface="Hiragino Sans GB"/>
               </a:rPr>
               <a:t>€33k</a:t>
             </a:r>
@@ -16906,7 +17589,7 @@
       </p:sp>
       <p:sp>
         <p:nvSpPr>
-          <p:cNvPr id="30" name="TextBox 29"/>
+          <p:cNvPr id="31" name="TextBox 30"/>
           <p:cNvSpPr txBox="1"/>
           <p:nvPr/>
         </p:nvSpPr>
@@ -16944,6 +17627,7 @@
                   <a:srgbClr val="B23F1C"/>
                 </a:solidFill>
                 <a:latin typeface="Courier New"/>
+                <a:ea typeface="Hiragino Sans GB"/>
               </a:rPr>
               <a:t>THE SPREAD</a:t>
             </a:r>
@@ -16952,7 +17636,7 @@
       </p:sp>
       <p:sp>
         <p:nvSpPr>
-          <p:cNvPr id="31" name="TextBox 30"/>
+          <p:cNvPr id="32" name="TextBox 31"/>
           <p:cNvSpPr txBox="1"/>
           <p:nvPr/>
         </p:nvSpPr>
@@ -16990,6 +17674,7 @@
                   <a:srgbClr val="4A4E56"/>
                 </a:solidFill>
                 <a:latin typeface="Helvetica Neue"/>
+                <a:ea typeface="Hiragino Sans GB"/>
               </a:rPr>
               <a:t>Technology pays roughly </a:t>
             </a:r>
@@ -16999,6 +17684,7 @@
                   <a:srgbClr val="D8542A"/>
                 </a:solidFill>
                 <a:latin typeface="Helvetica Neue"/>
+                <a:ea typeface="Hiragino Sans GB"/>
               </a:rPr>
               <a:t>double</a:t>
             </a:r>
@@ -17008,6 +17694,7 @@
                   <a:srgbClr val="4A4E56"/>
                 </a:solidFill>
                 <a:latin typeface="Helvetica Neue"/>
+                <a:ea typeface="Hiragino Sans GB"/>
               </a:rPr>
               <a:t> what hospitality and retail do — the widest gap between two big sectors.</a:t>
             </a:r>
@@ -17016,7 +17703,7 @@
       </p:sp>
       <p:sp>
         <p:nvSpPr>
-          <p:cNvPr id="32" name="Rounded Rectangle 31"/>
+          <p:cNvPr id="33" name="Rounded Rectangle 32"/>
           <p:cNvSpPr/>
           <p:nvPr/>
         </p:nvSpPr>
@@ -17064,7 +17751,7 @@
       </p:sp>
       <p:sp>
         <p:nvSpPr>
-          <p:cNvPr id="33" name="TextBox 32"/>
+          <p:cNvPr id="34" name="TextBox 33"/>
           <p:cNvSpPr txBox="1"/>
           <p:nvPr/>
         </p:nvSpPr>
@@ -17102,6 +17789,7 @@
                   <a:srgbClr val="8A8478"/>
                 </a:solidFill>
                 <a:latin typeface="Helvetica Neue"/>
+                <a:ea typeface="Hiragino Sans GB"/>
               </a:rPr>
               <a:t>Read as ranges, not points. Sector figures are indicative recruiter-survey midpoints; the €53.4k average is CBS.</a:t>
             </a:r>
@@ -17110,7 +17798,7 @@
       </p:sp>
       <p:sp>
         <p:nvSpPr>
-          <p:cNvPr id="34" name="TextBox 33"/>
+          <p:cNvPr id="35" name="TextBox 34"/>
           <p:cNvSpPr txBox="1"/>
           <p:nvPr/>
         </p:nvSpPr>
@@ -17148,6 +17836,7 @@
                   <a:srgbClr val="D8542A"/>
                 </a:solidFill>
                 <a:latin typeface="Courier New"/>
+                <a:ea typeface="Hiragino Sans GB"/>
               </a:rPr>
               <a:t>SOURCE   </a:t>
             </a:r>
@@ -17157,6 +17846,7 @@
                   <a:srgbClr val="8A8478"/>
                 </a:solidFill>
                 <a:latin typeface="Courier New"/>
+                <a:ea typeface="Hiragino Sans GB"/>
               </a:rPr>
               <a:t>CBS (national average salary, 2026); sector midpoints from recruiter salary guides — indicative.</a:t>
             </a:r>
@@ -17165,7 +17855,7 @@
       </p:sp>
       <p:sp>
         <p:nvSpPr>
-          <p:cNvPr id="35" name="TextBox 34"/>
+          <p:cNvPr id="36" name="TextBox 35"/>
           <p:cNvSpPr txBox="1"/>
           <p:nvPr/>
         </p:nvSpPr>
@@ -17203,6 +17893,7 @@
                   <a:srgbClr val="8A8478"/>
                 </a:solidFill>
                 <a:latin typeface="Courier New"/>
+                <a:ea typeface="Hiragino Sans GB"/>
               </a:rPr>
               <a:t>The Netherlands Job Market · 2026   ·   an example deck built with slide-maker</a:t>
             </a:r>
@@ -17211,7 +17902,7 @@
       </p:sp>
       <p:sp>
         <p:nvSpPr>
-          <p:cNvPr id="36" name="TextBox 35"/>
+          <p:cNvPr id="37" name="TextBox 36"/>
           <p:cNvSpPr txBox="1"/>
           <p:nvPr/>
         </p:nvSpPr>
@@ -17249,6 +17940,7 @@
                   <a:srgbClr val="8A8478"/>
                 </a:solidFill>
                 <a:latin typeface="Courier New"/>
+                <a:ea typeface="Hiragino Sans GB"/>
               </a:rPr>
               <a:t>08 / 14</a:t>
             </a:r>
@@ -17357,6 +18049,7 @@
                   <a:srgbClr val="0E5C63"/>
                 </a:solidFill>
                 <a:latin typeface="Helvetica Neue"/>
+                <a:ea typeface="Hiragino Sans GB"/>
               </a:rPr>
               <a:t>INTERNATIONAL TALENT</a:t>
             </a:r>
@@ -17403,6 +18096,7 @@
                   <a:srgbClr val="20242A"/>
                 </a:solidFill>
                 <a:latin typeface="Georgia"/>
+                <a:ea typeface="Hiragino Sans GB"/>
               </a:rPr>
               <a:t>The highly skilled migrant route</a:t>
             </a:r>
@@ -17411,7 +18105,51 @@
       </p:sp>
       <p:sp>
         <p:nvSpPr>
-          <p:cNvPr id="5" name="TextBox 4"/>
+          <p:cNvPr id="5" name="Rectangle 4"/>
+          <p:cNvSpPr/>
+          <p:nvPr/>
+        </p:nvSpPr>
+        <p:spPr>
+          <a:xfrm>
+            <a:off x="566928" y="1191006"/>
+            <a:ext cx="1097280" cy="45720"/>
+          </a:xfrm>
+          <a:prstGeom prst="rect">
+            <a:avLst/>
+          </a:prstGeom>
+          <a:solidFill>
+            <a:srgbClr val="0E5C63"/>
+          </a:solidFill>
+          <a:ln>
+            <a:noFill/>
+          </a:ln>
+          <a:effectLst/>
+        </p:spPr>
+        <p:style>
+          <a:lnRef idx="1">
+            <a:schemeClr val="accent1"/>
+          </a:lnRef>
+          <a:fillRef idx="3">
+            <a:schemeClr val="accent1"/>
+          </a:fillRef>
+          <a:effectRef idx="2">
+            <a:schemeClr val="accent1"/>
+          </a:effectRef>
+          <a:fontRef idx="minor">
+            <a:schemeClr val="lt1"/>
+          </a:fontRef>
+        </p:style>
+        <p:txBody>
+          <a:bodyPr rtlCol="0" anchor="ctr"/>
+          <a:lstStyle/>
+          <a:p>
+            <a:pPr algn="ctr"/>
+          </a:p>
+        </p:txBody>
+      </p:sp>
+      <p:sp>
+        <p:nvSpPr>
+          <p:cNvPr id="6" name="TextBox 5"/>
           <p:cNvSpPr txBox="1"/>
           <p:nvPr/>
         </p:nvSpPr>
@@ -17449,6 +18187,7 @@
                   <a:srgbClr val="4A4E56"/>
                 </a:solidFill>
                 <a:latin typeface="Helvetica Neue"/>
+                <a:ea typeface="Hiragino Sans GB"/>
               </a:rPr>
               <a:t>The kennismigrant scheme has no labour-market test — eligibility runs almost entirely on a gross monthly salary threshold set by age and profile (2026, excl. 8% holiday pay).</a:t>
             </a:r>
@@ -17457,7 +18196,7 @@
       </p:sp>
       <p:sp>
         <p:nvSpPr>
-          <p:cNvPr id="6" name="Rounded Rectangle 5"/>
+          <p:cNvPr id="7" name="Rounded Rectangle 6"/>
           <p:cNvSpPr/>
           <p:nvPr/>
         </p:nvSpPr>
@@ -17505,7 +18244,7 @@
       </p:sp>
       <p:sp>
         <p:nvSpPr>
-          <p:cNvPr id="7" name="Round Same Side Corner Rectangle 6"/>
+          <p:cNvPr id="8" name="Round Same Side Corner Rectangle 7"/>
           <p:cNvSpPr/>
           <p:nvPr/>
         </p:nvSpPr>
@@ -17552,7 +18291,7 @@
       </p:sp>
       <p:sp>
         <p:nvSpPr>
-          <p:cNvPr id="8" name="TextBox 7"/>
+          <p:cNvPr id="9" name="TextBox 8"/>
           <p:cNvSpPr txBox="1"/>
           <p:nvPr/>
         </p:nvSpPr>
@@ -17590,6 +18329,7 @@
                   <a:srgbClr val="8A8478"/>
                 </a:solidFill>
                 <a:latin typeface="Courier New"/>
+                <a:ea typeface="Hiragino Sans GB"/>
               </a:rPr>
               <a:t>HIGHLY SKILLED MIGRANT</a:t>
             </a:r>
@@ -17598,7 +18338,7 @@
       </p:sp>
       <p:sp>
         <p:nvSpPr>
-          <p:cNvPr id="9" name="TextBox 8"/>
+          <p:cNvPr id="10" name="TextBox 9"/>
           <p:cNvSpPr txBox="1"/>
           <p:nvPr/>
         </p:nvSpPr>
@@ -17636,6 +18376,7 @@
                   <a:srgbClr val="D8542A"/>
                 </a:solidFill>
                 <a:latin typeface="Helvetica Neue"/>
+                <a:ea typeface="Hiragino Sans GB"/>
               </a:rPr>
               <a:t>€5,942</a:t>
             </a:r>
@@ -17644,7 +18385,7 @@
       </p:sp>
       <p:sp>
         <p:nvSpPr>
-          <p:cNvPr id="10" name="TextBox 9"/>
+          <p:cNvPr id="11" name="TextBox 10"/>
           <p:cNvSpPr txBox="1"/>
           <p:nvPr/>
         </p:nvSpPr>
@@ -17682,6 +18423,7 @@
                   <a:srgbClr val="8A8478"/>
                 </a:solidFill>
                 <a:latin typeface="Courier New"/>
+                <a:ea typeface="Hiragino Sans GB"/>
               </a:rPr>
               <a:t>gross / month</a:t>
             </a:r>
@@ -17690,7 +18432,7 @@
       </p:sp>
       <p:sp>
         <p:nvSpPr>
-          <p:cNvPr id="11" name="Rectangle 10"/>
+          <p:cNvPr id="12" name="Rectangle 11"/>
           <p:cNvSpPr/>
           <p:nvPr/>
         </p:nvSpPr>
@@ -17734,7 +18476,7 @@
       </p:sp>
       <p:sp>
         <p:nvSpPr>
-          <p:cNvPr id="12" name="TextBox 11"/>
+          <p:cNvPr id="13" name="TextBox 12"/>
           <p:cNvSpPr txBox="1"/>
           <p:nvPr/>
         </p:nvSpPr>
@@ -17772,6 +18514,7 @@
                   <a:srgbClr val="20242A"/>
                 </a:solidFill>
                 <a:latin typeface="Helvetica Neue"/>
+                <a:ea typeface="Hiragino Sans GB"/>
               </a:rPr>
               <a:t>age 30 and over</a:t>
             </a:r>
@@ -17780,7 +18523,7 @@
       </p:sp>
       <p:sp>
         <p:nvSpPr>
-          <p:cNvPr id="13" name="Rounded Rectangle 12"/>
+          <p:cNvPr id="14" name="Rounded Rectangle 13"/>
           <p:cNvSpPr/>
           <p:nvPr/>
         </p:nvSpPr>
@@ -17828,7 +18571,7 @@
       </p:sp>
       <p:sp>
         <p:nvSpPr>
-          <p:cNvPr id="14" name="Round Same Side Corner Rectangle 13"/>
+          <p:cNvPr id="15" name="Round Same Side Corner Rectangle 14"/>
           <p:cNvSpPr/>
           <p:nvPr/>
         </p:nvSpPr>
@@ -17875,7 +18618,7 @@
       </p:sp>
       <p:sp>
         <p:nvSpPr>
-          <p:cNvPr id="15" name="TextBox 14"/>
+          <p:cNvPr id="16" name="TextBox 15"/>
           <p:cNvSpPr txBox="1"/>
           <p:nvPr/>
         </p:nvSpPr>
@@ -17913,6 +18656,7 @@
                   <a:srgbClr val="8A8478"/>
                 </a:solidFill>
                 <a:latin typeface="Courier New"/>
+                <a:ea typeface="Hiragino Sans GB"/>
               </a:rPr>
               <a:t>HIGHLY SKILLED MIGRANT</a:t>
             </a:r>
@@ -17921,7 +18665,7 @@
       </p:sp>
       <p:sp>
         <p:nvSpPr>
-          <p:cNvPr id="16" name="TextBox 15"/>
+          <p:cNvPr id="17" name="TextBox 16"/>
           <p:cNvSpPr txBox="1"/>
           <p:nvPr/>
         </p:nvSpPr>
@@ -17959,6 +18703,7 @@
                   <a:srgbClr val="0E5C63"/>
                 </a:solidFill>
                 <a:latin typeface="Helvetica Neue"/>
+                <a:ea typeface="Hiragino Sans GB"/>
               </a:rPr>
               <a:t>€4,357</a:t>
             </a:r>
@@ -17967,7 +18712,7 @@
       </p:sp>
       <p:sp>
         <p:nvSpPr>
-          <p:cNvPr id="17" name="TextBox 16"/>
+          <p:cNvPr id="18" name="TextBox 17"/>
           <p:cNvSpPr txBox="1"/>
           <p:nvPr/>
         </p:nvSpPr>
@@ -18005,6 +18750,7 @@
                   <a:srgbClr val="8A8478"/>
                 </a:solidFill>
                 <a:latin typeface="Courier New"/>
+                <a:ea typeface="Hiragino Sans GB"/>
               </a:rPr>
               <a:t>gross / month</a:t>
             </a:r>
@@ -18013,7 +18759,7 @@
       </p:sp>
       <p:sp>
         <p:nvSpPr>
-          <p:cNvPr id="18" name="Rectangle 17"/>
+          <p:cNvPr id="19" name="Rectangle 18"/>
           <p:cNvSpPr/>
           <p:nvPr/>
         </p:nvSpPr>
@@ -18057,7 +18803,7 @@
       </p:sp>
       <p:sp>
         <p:nvSpPr>
-          <p:cNvPr id="19" name="TextBox 18"/>
+          <p:cNvPr id="20" name="TextBox 19"/>
           <p:cNvSpPr txBox="1"/>
           <p:nvPr/>
         </p:nvSpPr>
@@ -18095,6 +18841,7 @@
                   <a:srgbClr val="20242A"/>
                 </a:solidFill>
                 <a:latin typeface="Helvetica Neue"/>
+                <a:ea typeface="Hiragino Sans GB"/>
               </a:rPr>
               <a:t>under age 30</a:t>
             </a:r>
@@ -18103,7 +18850,7 @@
       </p:sp>
       <p:sp>
         <p:nvSpPr>
-          <p:cNvPr id="20" name="Rounded Rectangle 19"/>
+          <p:cNvPr id="21" name="Rounded Rectangle 20"/>
           <p:cNvSpPr/>
           <p:nvPr/>
         </p:nvSpPr>
@@ -18151,7 +18898,7 @@
       </p:sp>
       <p:sp>
         <p:nvSpPr>
-          <p:cNvPr id="21" name="Round Same Side Corner Rectangle 20"/>
+          <p:cNvPr id="22" name="Round Same Side Corner Rectangle 21"/>
           <p:cNvSpPr/>
           <p:nvPr/>
         </p:nvSpPr>
@@ -18198,7 +18945,7 @@
       </p:sp>
       <p:sp>
         <p:nvSpPr>
-          <p:cNvPr id="22" name="TextBox 21"/>
+          <p:cNvPr id="23" name="TextBox 22"/>
           <p:cNvSpPr txBox="1"/>
           <p:nvPr/>
         </p:nvSpPr>
@@ -18236,6 +18983,7 @@
                   <a:srgbClr val="8A8478"/>
                 </a:solidFill>
                 <a:latin typeface="Courier New"/>
+                <a:ea typeface="Hiragino Sans GB"/>
               </a:rPr>
               <a:t>RECENT GRADUATE</a:t>
             </a:r>
@@ -18244,7 +18992,7 @@
       </p:sp>
       <p:sp>
         <p:nvSpPr>
-          <p:cNvPr id="23" name="TextBox 22"/>
+          <p:cNvPr id="24" name="TextBox 23"/>
           <p:cNvSpPr txBox="1"/>
           <p:nvPr/>
         </p:nvSpPr>
@@ -18282,6 +19030,7 @@
                   <a:srgbClr val="C08A2E"/>
                 </a:solidFill>
                 <a:latin typeface="Helvetica Neue"/>
+                <a:ea typeface="Hiragino Sans GB"/>
               </a:rPr>
               <a:t>€3,122</a:t>
             </a:r>
@@ -18290,7 +19039,7 @@
       </p:sp>
       <p:sp>
         <p:nvSpPr>
-          <p:cNvPr id="24" name="TextBox 23"/>
+          <p:cNvPr id="25" name="TextBox 24"/>
           <p:cNvSpPr txBox="1"/>
           <p:nvPr/>
         </p:nvSpPr>
@@ -18328,6 +19077,7 @@
                   <a:srgbClr val="8A8478"/>
                 </a:solidFill>
                 <a:latin typeface="Courier New"/>
+                <a:ea typeface="Hiragino Sans GB"/>
               </a:rPr>
               <a:t>gross / month</a:t>
             </a:r>
@@ -18336,7 +19086,7 @@
       </p:sp>
       <p:sp>
         <p:nvSpPr>
-          <p:cNvPr id="25" name="Rectangle 24"/>
+          <p:cNvPr id="26" name="Rectangle 25"/>
           <p:cNvSpPr/>
           <p:nvPr/>
         </p:nvSpPr>
@@ -18380,7 +19130,7 @@
       </p:sp>
       <p:sp>
         <p:nvSpPr>
-          <p:cNvPr id="26" name="TextBox 25"/>
+          <p:cNvPr id="27" name="TextBox 26"/>
           <p:cNvSpPr txBox="1"/>
           <p:nvPr/>
         </p:nvSpPr>
@@ -18418,6 +19168,7 @@
                   <a:srgbClr val="20242A"/>
                 </a:solidFill>
                 <a:latin typeface="Helvetica Neue"/>
+                <a:ea typeface="Hiragino Sans GB"/>
               </a:rPr>
               <a:t>orientation-year visa</a:t>
             </a:r>
@@ -18426,7 +19177,7 @@
       </p:sp>
       <p:sp>
         <p:nvSpPr>
-          <p:cNvPr id="27" name="Rounded Rectangle 26"/>
+          <p:cNvPr id="28" name="Rounded Rectangle 27"/>
           <p:cNvSpPr/>
           <p:nvPr/>
         </p:nvSpPr>
@@ -18474,7 +19225,7 @@
       </p:sp>
       <p:sp>
         <p:nvSpPr>
-          <p:cNvPr id="28" name="Round Same Side Corner Rectangle 27"/>
+          <p:cNvPr id="29" name="Round Same Side Corner Rectangle 28"/>
           <p:cNvSpPr/>
           <p:nvPr/>
         </p:nvSpPr>
@@ -18521,7 +19272,7 @@
       </p:sp>
       <p:sp>
         <p:nvSpPr>
-          <p:cNvPr id="29" name="TextBox 28"/>
+          <p:cNvPr id="30" name="TextBox 29"/>
           <p:cNvSpPr txBox="1"/>
           <p:nvPr/>
         </p:nvSpPr>
@@ -18559,6 +19310,7 @@
                   <a:srgbClr val="8A8478"/>
                 </a:solidFill>
                 <a:latin typeface="Courier New"/>
+                <a:ea typeface="Hiragino Sans GB"/>
               </a:rPr>
               <a:t>ACADEMIC RESEARCHER</a:t>
             </a:r>
@@ -18567,7 +19319,7 @@
       </p:sp>
       <p:sp>
         <p:nvSpPr>
-          <p:cNvPr id="30" name="TextBox 29"/>
+          <p:cNvPr id="31" name="TextBox 30"/>
           <p:cNvSpPr txBox="1"/>
           <p:nvPr/>
         </p:nvSpPr>
@@ -18605,6 +19357,7 @@
                   <a:srgbClr val="3E6B57"/>
                 </a:solidFill>
                 <a:latin typeface="Helvetica Neue"/>
+                <a:ea typeface="Hiragino Sans GB"/>
               </a:rPr>
               <a:t>€3,583</a:t>
             </a:r>
@@ -18613,7 +19366,7 @@
       </p:sp>
       <p:sp>
         <p:nvSpPr>
-          <p:cNvPr id="31" name="TextBox 30"/>
+          <p:cNvPr id="32" name="TextBox 31"/>
           <p:cNvSpPr txBox="1"/>
           <p:nvPr/>
         </p:nvSpPr>
@@ -18651,6 +19404,7 @@
                   <a:srgbClr val="8A8478"/>
                 </a:solidFill>
                 <a:latin typeface="Courier New"/>
+                <a:ea typeface="Hiragino Sans GB"/>
               </a:rPr>
               <a:t>gross / month</a:t>
             </a:r>
@@ -18659,7 +19413,7 @@
       </p:sp>
       <p:sp>
         <p:nvSpPr>
-          <p:cNvPr id="32" name="Rectangle 31"/>
+          <p:cNvPr id="33" name="Rectangle 32"/>
           <p:cNvSpPr/>
           <p:nvPr/>
         </p:nvSpPr>
@@ -18703,7 +19457,7 @@
       </p:sp>
       <p:sp>
         <p:nvSpPr>
-          <p:cNvPr id="33" name="TextBox 32"/>
+          <p:cNvPr id="34" name="TextBox 33"/>
           <p:cNvSpPr txBox="1"/>
           <p:nvPr/>
         </p:nvSpPr>
@@ -18741,6 +19495,7 @@
                   <a:srgbClr val="20242A"/>
                 </a:solidFill>
                 <a:latin typeface="Helvetica Neue"/>
+                <a:ea typeface="Hiragino Sans GB"/>
               </a:rPr>
               <a:t>public research</a:t>
             </a:r>
@@ -18749,7 +19504,7 @@
       </p:sp>
       <p:sp>
         <p:nvSpPr>
-          <p:cNvPr id="34" name="TextBox 33"/>
+          <p:cNvPr id="35" name="TextBox 34"/>
           <p:cNvSpPr txBox="1"/>
           <p:nvPr/>
         </p:nvSpPr>
@@ -18787,6 +19542,7 @@
                   <a:srgbClr val="0E5C63"/>
                 </a:solidFill>
                 <a:latin typeface="Helvetica Neue"/>
+                <a:ea typeface="Hiragino Sans GB"/>
               </a:rPr>
               <a:t>~10,000</a:t>
             </a:r>
@@ -18796,6 +19552,7 @@
                   <a:srgbClr val="4A4E56"/>
                 </a:solidFill>
                 <a:latin typeface="Helvetica Neue"/>
+                <a:ea typeface="Hiragino Sans GB"/>
               </a:rPr>
               <a:t>  recognised sponsors    ·    top nationalities: </a:t>
             </a:r>
@@ -18805,6 +19562,7 @@
                   <a:srgbClr val="20242A"/>
                 </a:solidFill>
                 <a:latin typeface="Helvetica Neue"/>
+                <a:ea typeface="Hiragino Sans GB"/>
               </a:rPr>
               <a:t>India, Türkiye, China</a:t>
             </a:r>
@@ -18814,6 +19572,7 @@
                   <a:srgbClr val="4A4E56"/>
                 </a:solidFill>
                 <a:latin typeface="Helvetica Neue"/>
+                <a:ea typeface="Hiragino Sans GB"/>
               </a:rPr>
               <a:t>    ·    thresholds indexed yearly</a:t>
             </a:r>
@@ -18822,7 +19581,7 @@
       </p:sp>
       <p:sp>
         <p:nvSpPr>
-          <p:cNvPr id="35" name="TextBox 34"/>
+          <p:cNvPr id="36" name="TextBox 35"/>
           <p:cNvSpPr txBox="1"/>
           <p:nvPr/>
         </p:nvSpPr>
@@ -18860,6 +19619,7 @@
                   <a:srgbClr val="D8542A"/>
                 </a:solidFill>
                 <a:latin typeface="Courier New"/>
+                <a:ea typeface="Hiragino Sans GB"/>
               </a:rPr>
               <a:t>SOURCE   </a:t>
             </a:r>
@@ -18869,6 +19629,7 @@
                   <a:srgbClr val="8A8478"/>
                 </a:solidFill>
                 <a:latin typeface="Courier New"/>
+                <a:ea typeface="Hiragino Sans GB"/>
               </a:rPr>
               <a:t>IND (required salary amounts 2026; recognised-sponsor register); OECD (nationality mix).</a:t>
             </a:r>
@@ -18877,7 +19638,7 @@
       </p:sp>
       <p:sp>
         <p:nvSpPr>
-          <p:cNvPr id="36" name="TextBox 35"/>
+          <p:cNvPr id="37" name="TextBox 36"/>
           <p:cNvSpPr txBox="1"/>
           <p:nvPr/>
         </p:nvSpPr>
@@ -18915,6 +19676,7 @@
                   <a:srgbClr val="8A8478"/>
                 </a:solidFill>
                 <a:latin typeface="Courier New"/>
+                <a:ea typeface="Hiragino Sans GB"/>
               </a:rPr>
               <a:t>The Netherlands Job Market · 2026   ·   an example deck built with slide-maker</a:t>
             </a:r>
@@ -18923,7 +19685,7 @@
       </p:sp>
       <p:sp>
         <p:nvSpPr>
-          <p:cNvPr id="37" name="TextBox 36"/>
+          <p:cNvPr id="38" name="TextBox 37"/>
           <p:cNvSpPr txBox="1"/>
           <p:nvPr/>
         </p:nvSpPr>
@@ -18961,6 +19723,7 @@
                   <a:srgbClr val="8A8478"/>
                 </a:solidFill>
                 <a:latin typeface="Courier New"/>
+                <a:ea typeface="Hiragino Sans GB"/>
               </a:rPr>
               <a:t>09 / 14</a:t>
             </a:r>

--- a/templates/decks/en/nl-job-market-2026/template.pptx
+++ b/templates/decks/en/nl-job-market-2026/template.pptx
@@ -4145,51 +4145,7 @@
       </p:sp>
       <p:sp>
         <p:nvSpPr>
-          <p:cNvPr id="4" name="Rectangle 3"/>
-          <p:cNvSpPr/>
-          <p:nvPr/>
-        </p:nvSpPr>
-        <p:spPr>
-          <a:xfrm>
-            <a:off x="640080" y="4320540"/>
-            <a:ext cx="1280160" cy="54864"/>
-          </a:xfrm>
-          <a:prstGeom prst="rect">
-            <a:avLst/>
-          </a:prstGeom>
-          <a:solidFill>
-            <a:srgbClr val="D8542A"/>
-          </a:solidFill>
-          <a:ln>
-            <a:noFill/>
-          </a:ln>
-          <a:effectLst/>
-        </p:spPr>
-        <p:style>
-          <a:lnRef idx="1">
-            <a:schemeClr val="accent1"/>
-          </a:lnRef>
-          <a:fillRef idx="3">
-            <a:schemeClr val="accent1"/>
-          </a:fillRef>
-          <a:effectRef idx="2">
-            <a:schemeClr val="accent1"/>
-          </a:effectRef>
-          <a:fontRef idx="minor">
-            <a:schemeClr val="lt1"/>
-          </a:fontRef>
-        </p:style>
-        <p:txBody>
-          <a:bodyPr rtlCol="0" anchor="ctr"/>
-          <a:lstStyle/>
-          <a:p>
-            <a:pPr algn="ctr"/>
-          </a:p>
-        </p:txBody>
-      </p:sp>
-      <p:sp>
-        <p:nvSpPr>
-          <p:cNvPr id="5" name="TextBox 4"/>
+          <p:cNvPr id="4" name="TextBox 3"/>
           <p:cNvSpPr txBox="1"/>
           <p:nvPr/>
         </p:nvSpPr>
@@ -4236,7 +4192,7 @@
       </p:sp>
       <p:sp>
         <p:nvSpPr>
-          <p:cNvPr id="6" name="TextBox 5"/>
+          <p:cNvPr id="5" name="TextBox 4"/>
           <p:cNvSpPr txBox="1"/>
           <p:nvPr/>
         </p:nvSpPr>
@@ -4316,51 +4272,7 @@
       </p:sp>
       <p:sp>
         <p:nvSpPr>
-          <p:cNvPr id="7" name="Rectangle 6"/>
-          <p:cNvSpPr/>
-          <p:nvPr/>
-        </p:nvSpPr>
-        <p:spPr>
-          <a:xfrm>
-            <a:off x="658368" y="3310128"/>
-            <a:ext cx="1280160" cy="54864"/>
-          </a:xfrm>
-          <a:prstGeom prst="rect">
-            <a:avLst/>
-          </a:prstGeom>
-          <a:solidFill>
-            <a:srgbClr val="D8542A"/>
-          </a:solidFill>
-          <a:ln>
-            <a:noFill/>
-          </a:ln>
-          <a:effectLst/>
-        </p:spPr>
-        <p:style>
-          <a:lnRef idx="1">
-            <a:schemeClr val="accent1"/>
-          </a:lnRef>
-          <a:fillRef idx="3">
-            <a:schemeClr val="accent1"/>
-          </a:fillRef>
-          <a:effectRef idx="2">
-            <a:schemeClr val="accent1"/>
-          </a:effectRef>
-          <a:fontRef idx="minor">
-            <a:schemeClr val="lt1"/>
-          </a:fontRef>
-        </p:style>
-        <p:txBody>
-          <a:bodyPr rtlCol="0" anchor="ctr"/>
-          <a:lstStyle/>
-          <a:p>
-            <a:pPr algn="ctr"/>
-          </a:p>
-        </p:txBody>
-      </p:sp>
-      <p:sp>
-        <p:nvSpPr>
-          <p:cNvPr id="8" name="TextBox 7"/>
+          <p:cNvPr id="6" name="TextBox 5"/>
           <p:cNvSpPr txBox="1"/>
           <p:nvPr/>
         </p:nvSpPr>
@@ -4407,7 +4319,7 @@
       </p:sp>
       <p:sp>
         <p:nvSpPr>
-          <p:cNvPr id="9" name="TextBox 8"/>
+          <p:cNvPr id="7" name="TextBox 6"/>
           <p:cNvSpPr txBox="1"/>
           <p:nvPr/>
         </p:nvSpPr>
@@ -4610,17 +4522,260 @@
       </p:sp>
       <p:sp>
         <p:nvSpPr>
-          <p:cNvPr id="5" name="Rectangle 4"/>
+          <p:cNvPr id="5" name="TextBox 4"/>
+          <p:cNvSpPr txBox="1"/>
+          <p:nvPr/>
+        </p:nvSpPr>
+        <p:spPr>
+          <a:xfrm>
+            <a:off x="365760" y="1508760"/>
+            <a:ext cx="4548146" cy="274320"/>
+          </a:xfrm>
+          <a:prstGeom prst="rect">
+            <a:avLst/>
+          </a:prstGeom>
+          <a:noFill/>
+          <a:ln/>
+        </p:spPr>
+        <p:txBody>
+          <a:bodyPr wrap="square" anchor="t" lIns="25400" rIns="25400" tIns="25400" bIns="25400">
+            <a:spAutoFit/>
+          </a:bodyPr>
+          <a:lstStyle/>
+          <a:p>
+            <a:pPr algn="l">
+              <a:lnSpc>
+                <a:spcPct val="100000"/>
+              </a:lnSpc>
+              <a:spcBef>
+                <a:spcPts val="0"/>
+              </a:spcBef>
+              <a:spcAft>
+                <a:spcPts val="0"/>
+              </a:spcAft>
+            </a:pPr>
+            <a:r>
+              <a:rPr sz="950" b="1" i="0">
+                <a:solidFill>
+                  <a:srgbClr val="8A8478"/>
+                </a:solidFill>
+                <a:latin typeface="Courier New"/>
+                <a:ea typeface="Hiragino Sans GB"/>
+              </a:rPr>
+              <a:t>THE 30% EXPAT RULING, PHASED DOWN</a:t>
+            </a:r>
+          </a:p>
+        </p:txBody>
+      </p:sp>
+      <p:sp>
+        <p:nvSpPr>
+          <p:cNvPr id="6" name="Rectangle 5"/>
           <p:cNvSpPr/>
           <p:nvPr/>
         </p:nvSpPr>
         <p:spPr>
           <a:xfrm>
-            <a:off x="566928" y="1191006"/>
-            <a:ext cx="1097280" cy="45720"/>
-          </a:xfrm>
-          <a:prstGeom prst="rect">
-            <a:avLst/>
+            <a:off x="464515" y="2011680"/>
+            <a:ext cx="21945" cy="1280160"/>
+          </a:xfrm>
+          <a:prstGeom prst="rect">
+            <a:avLst/>
+          </a:prstGeom>
+          <a:solidFill>
+            <a:srgbClr val="9AA0AE"/>
+          </a:solidFill>
+          <a:ln>
+            <a:noFill/>
+          </a:ln>
+          <a:effectLst/>
+        </p:spPr>
+        <p:style>
+          <a:lnRef idx="1">
+            <a:schemeClr val="accent1"/>
+          </a:lnRef>
+          <a:fillRef idx="3">
+            <a:schemeClr val="accent1"/>
+          </a:fillRef>
+          <a:effectRef idx="2">
+            <a:schemeClr val="accent1"/>
+          </a:effectRef>
+          <a:fontRef idx="minor">
+            <a:schemeClr val="lt1"/>
+          </a:fontRef>
+        </p:style>
+        <p:txBody>
+          <a:bodyPr rtlCol="0" anchor="ctr"/>
+          <a:lstStyle/>
+          <a:p>
+            <a:pPr algn="ctr"/>
+          </a:p>
+        </p:txBody>
+      </p:sp>
+      <p:sp>
+        <p:nvSpPr>
+          <p:cNvPr id="7" name="Rounded Rectangle 6"/>
+          <p:cNvSpPr/>
+          <p:nvPr/>
+        </p:nvSpPr>
+        <p:spPr>
+          <a:xfrm>
+            <a:off x="393192" y="2020824"/>
+            <a:ext cx="164592" cy="164592"/>
+          </a:xfrm>
+          <a:prstGeom prst="roundRect">
+            <a:avLst>
+              <a:gd name="adj" fmla="val 50000"/>
+            </a:avLst>
+          </a:prstGeom>
+          <a:solidFill>
+            <a:srgbClr val="9AA0AE"/>
+          </a:solidFill>
+          <a:ln>
+            <a:noFill/>
+          </a:ln>
+          <a:effectLst/>
+        </p:spPr>
+        <p:style>
+          <a:lnRef idx="1">
+            <a:schemeClr val="accent1"/>
+          </a:lnRef>
+          <a:fillRef idx="3">
+            <a:schemeClr val="accent1"/>
+          </a:fillRef>
+          <a:effectRef idx="2">
+            <a:schemeClr val="accent1"/>
+          </a:effectRef>
+          <a:fontRef idx="minor">
+            <a:schemeClr val="lt1"/>
+          </a:fontRef>
+        </p:style>
+        <p:txBody>
+          <a:bodyPr rtlCol="0" anchor="ctr"/>
+          <a:lstStyle/>
+          <a:p>
+            <a:pPr algn="ctr"/>
+          </a:p>
+        </p:txBody>
+      </p:sp>
+      <p:sp>
+        <p:nvSpPr>
+          <p:cNvPr id="8" name="TextBox 7"/>
+          <p:cNvSpPr txBox="1"/>
+          <p:nvPr/>
+        </p:nvSpPr>
+        <p:spPr>
+          <a:xfrm>
+            <a:off x="795528" y="1956816"/>
+            <a:ext cx="4090946" cy="274320"/>
+          </a:xfrm>
+          <a:prstGeom prst="rect">
+            <a:avLst/>
+          </a:prstGeom>
+          <a:noFill/>
+          <a:ln/>
+        </p:spPr>
+        <p:txBody>
+          <a:bodyPr wrap="square" anchor="t" lIns="25400" rIns="25400" tIns="25400" bIns="25400">
+            <a:spAutoFit/>
+          </a:bodyPr>
+          <a:lstStyle/>
+          <a:p>
+            <a:pPr algn="l">
+              <a:lnSpc>
+                <a:spcPct val="100000"/>
+              </a:lnSpc>
+              <a:spcBef>
+                <a:spcPts val="0"/>
+              </a:spcBef>
+              <a:spcAft>
+                <a:spcPts val="0"/>
+              </a:spcAft>
+            </a:pPr>
+            <a:r>
+              <a:rPr sz="1300" b="1" i="0">
+                <a:solidFill>
+                  <a:srgbClr val="8A8478"/>
+                </a:solidFill>
+                <a:latin typeface="Helvetica Neue"/>
+                <a:ea typeface="Hiragino Sans GB"/>
+              </a:rPr>
+              <a:t>2024–26  </a:t>
+            </a:r>
+            <a:r>
+              <a:rPr sz="1300" b="1" i="0">
+                <a:solidFill>
+                  <a:srgbClr val="20242A"/>
+                </a:solidFill>
+                <a:latin typeface="Helvetica Neue"/>
+                <a:ea typeface="Hiragino Sans GB"/>
+              </a:rPr>
+              <a:t>30% tax-free</a:t>
+            </a:r>
+          </a:p>
+        </p:txBody>
+      </p:sp>
+      <p:sp>
+        <p:nvSpPr>
+          <p:cNvPr id="9" name="TextBox 8"/>
+          <p:cNvSpPr txBox="1"/>
+          <p:nvPr/>
+        </p:nvSpPr>
+        <p:spPr>
+          <a:xfrm>
+            <a:off x="795528" y="2249424"/>
+            <a:ext cx="4090946" cy="365760"/>
+          </a:xfrm>
+          <a:prstGeom prst="rect">
+            <a:avLst/>
+          </a:prstGeom>
+          <a:noFill/>
+          <a:ln/>
+        </p:spPr>
+        <p:txBody>
+          <a:bodyPr wrap="square" anchor="t" lIns="25400" rIns="25400" tIns="25400" bIns="25400">
+            <a:spAutoFit/>
+          </a:bodyPr>
+          <a:lstStyle/>
+          <a:p>
+            <a:pPr algn="l">
+              <a:lnSpc>
+                <a:spcPct val="100000"/>
+              </a:lnSpc>
+              <a:spcBef>
+                <a:spcPts val="0"/>
+              </a:spcBef>
+              <a:spcAft>
+                <a:spcPts val="0"/>
+              </a:spcAft>
+            </a:pPr>
+            <a:r>
+              <a:rPr sz="1050" b="0" i="0">
+                <a:solidFill>
+                  <a:srgbClr val="8A8478"/>
+                </a:solidFill>
+                <a:latin typeface="Helvetica Neue"/>
+                <a:ea typeface="Hiragino Sans GB"/>
+              </a:rPr>
+              <a:t>income norm €46,107</a:t>
+            </a:r>
+          </a:p>
+        </p:txBody>
+      </p:sp>
+      <p:sp>
+        <p:nvSpPr>
+          <p:cNvPr id="10" name="Rounded Rectangle 9"/>
+          <p:cNvSpPr/>
+          <p:nvPr/>
+        </p:nvSpPr>
+        <p:spPr>
+          <a:xfrm>
+            <a:off x="393192" y="2447544"/>
+            <a:ext cx="164592" cy="164592"/>
+          </a:xfrm>
+          <a:prstGeom prst="roundRect">
+            <a:avLst>
+              <a:gd name="adj" fmla="val 50000"/>
+            </a:avLst>
           </a:prstGeom>
           <a:solidFill>
             <a:srgbClr val="D8542A"/>
@@ -4654,14 +4809,14 @@
       </p:sp>
       <p:sp>
         <p:nvSpPr>
-          <p:cNvPr id="6" name="TextBox 5"/>
-          <p:cNvSpPr txBox="1"/>
-          <p:nvPr/>
-        </p:nvSpPr>
-        <p:spPr>
-          <a:xfrm>
-            <a:off x="365760" y="1508760"/>
-            <a:ext cx="4548146" cy="274320"/>
+          <p:cNvPr id="11" name="TextBox 10"/>
+          <p:cNvSpPr txBox="1"/>
+          <p:nvPr/>
+        </p:nvSpPr>
+        <p:spPr>
+          <a:xfrm>
+            <a:off x="795528" y="2383536"/>
+            <a:ext cx="4090946" cy="274320"/>
           </a:xfrm>
           <a:prstGeom prst="rect">
             <a:avLst/>
@@ -4687,31 +4842,90 @@
               </a:spcAft>
             </a:pPr>
             <a:r>
-              <a:rPr sz="950" b="1" i="0">
+              <a:rPr sz="1300" b="1" i="0">
+                <a:solidFill>
+                  <a:srgbClr val="D8542A"/>
+                </a:solidFill>
+                <a:latin typeface="Helvetica Neue"/>
+                <a:ea typeface="Hiragino Sans GB"/>
+              </a:rPr>
+              <a:t>1 Jan 2027  </a:t>
+            </a:r>
+            <a:r>
+              <a:rPr sz="1300" b="1" i="0">
+                <a:solidFill>
+                  <a:srgbClr val="20242A"/>
+                </a:solidFill>
+                <a:latin typeface="Helvetica Neue"/>
+                <a:ea typeface="Hiragino Sans GB"/>
+              </a:rPr>
+              <a:t>→ 27% tax-free</a:t>
+            </a:r>
+          </a:p>
+        </p:txBody>
+      </p:sp>
+      <p:sp>
+        <p:nvSpPr>
+          <p:cNvPr id="12" name="TextBox 11"/>
+          <p:cNvSpPr txBox="1"/>
+          <p:nvPr/>
+        </p:nvSpPr>
+        <p:spPr>
+          <a:xfrm>
+            <a:off x="795528" y="2676144"/>
+            <a:ext cx="4090946" cy="365760"/>
+          </a:xfrm>
+          <a:prstGeom prst="rect">
+            <a:avLst/>
+          </a:prstGeom>
+          <a:noFill/>
+          <a:ln/>
+        </p:spPr>
+        <p:txBody>
+          <a:bodyPr wrap="square" anchor="t" lIns="25400" rIns="25400" tIns="25400" bIns="25400">
+            <a:spAutoFit/>
+          </a:bodyPr>
+          <a:lstStyle/>
+          <a:p>
+            <a:pPr algn="l">
+              <a:lnSpc>
+                <a:spcPct val="100000"/>
+              </a:lnSpc>
+              <a:spcBef>
+                <a:spcPts val="0"/>
+              </a:spcBef>
+              <a:spcAft>
+                <a:spcPts val="0"/>
+              </a:spcAft>
+            </a:pPr>
+            <a:r>
+              <a:rPr sz="1050" b="0" i="0">
                 <a:solidFill>
                   <a:srgbClr val="8A8478"/>
                 </a:solidFill>
-                <a:latin typeface="Courier New"/>
-                <a:ea typeface="Hiragino Sans GB"/>
-              </a:rPr>
-              <a:t>THE 30% EXPAT RULING, PHASED DOWN</a:t>
-            </a:r>
-          </a:p>
-        </p:txBody>
-      </p:sp>
-      <p:sp>
-        <p:nvSpPr>
-          <p:cNvPr id="7" name="Rectangle 6"/>
+                <a:latin typeface="Helvetica Neue"/>
+                <a:ea typeface="Hiragino Sans GB"/>
+              </a:rPr>
+              <a:t>norm rises to €50,436</a:t>
+            </a:r>
+          </a:p>
+        </p:txBody>
+      </p:sp>
+      <p:sp>
+        <p:nvSpPr>
+          <p:cNvPr id="13" name="Rounded Rectangle 12"/>
           <p:cNvSpPr/>
           <p:nvPr/>
         </p:nvSpPr>
         <p:spPr>
           <a:xfrm>
-            <a:off x="464515" y="2011680"/>
-            <a:ext cx="21945" cy="1280160"/>
-          </a:xfrm>
-          <a:prstGeom prst="rect">
-            <a:avLst/>
+            <a:off x="393192" y="2874264"/>
+            <a:ext cx="164592" cy="164592"/>
+          </a:xfrm>
+          <a:prstGeom prst="roundRect">
+            <a:avLst>
+              <a:gd name="adj" fmla="val 50000"/>
+            </a:avLst>
           </a:prstGeom>
           <a:solidFill>
             <a:srgbClr val="9AA0AE"/>
@@ -4745,353 +4959,7 @@
       </p:sp>
       <p:sp>
         <p:nvSpPr>
-          <p:cNvPr id="8" name="Rounded Rectangle 7"/>
-          <p:cNvSpPr/>
-          <p:nvPr/>
-        </p:nvSpPr>
-        <p:spPr>
-          <a:xfrm>
-            <a:off x="393192" y="2020824"/>
-            <a:ext cx="164592" cy="164592"/>
-          </a:xfrm>
-          <a:prstGeom prst="roundRect">
-            <a:avLst>
-              <a:gd name="adj" fmla="val 50000"/>
-            </a:avLst>
-          </a:prstGeom>
-          <a:solidFill>
-            <a:srgbClr val="9AA0AE"/>
-          </a:solidFill>
-          <a:ln>
-            <a:noFill/>
-          </a:ln>
-          <a:effectLst/>
-        </p:spPr>
-        <p:style>
-          <a:lnRef idx="1">
-            <a:schemeClr val="accent1"/>
-          </a:lnRef>
-          <a:fillRef idx="3">
-            <a:schemeClr val="accent1"/>
-          </a:fillRef>
-          <a:effectRef idx="2">
-            <a:schemeClr val="accent1"/>
-          </a:effectRef>
-          <a:fontRef idx="minor">
-            <a:schemeClr val="lt1"/>
-          </a:fontRef>
-        </p:style>
-        <p:txBody>
-          <a:bodyPr rtlCol="0" anchor="ctr"/>
-          <a:lstStyle/>
-          <a:p>
-            <a:pPr algn="ctr"/>
-          </a:p>
-        </p:txBody>
-      </p:sp>
-      <p:sp>
-        <p:nvSpPr>
-          <p:cNvPr id="9" name="TextBox 8"/>
-          <p:cNvSpPr txBox="1"/>
-          <p:nvPr/>
-        </p:nvSpPr>
-        <p:spPr>
-          <a:xfrm>
-            <a:off x="795528" y="1956816"/>
-            <a:ext cx="4090946" cy="274320"/>
-          </a:xfrm>
-          <a:prstGeom prst="rect">
-            <a:avLst/>
-          </a:prstGeom>
-          <a:noFill/>
-          <a:ln/>
-        </p:spPr>
-        <p:txBody>
-          <a:bodyPr wrap="square" anchor="t" lIns="25400" rIns="25400" tIns="25400" bIns="25400">
-            <a:spAutoFit/>
-          </a:bodyPr>
-          <a:lstStyle/>
-          <a:p>
-            <a:pPr algn="l">
-              <a:lnSpc>
-                <a:spcPct val="100000"/>
-              </a:lnSpc>
-              <a:spcBef>
-                <a:spcPts val="0"/>
-              </a:spcBef>
-              <a:spcAft>
-                <a:spcPts val="0"/>
-              </a:spcAft>
-            </a:pPr>
-            <a:r>
-              <a:rPr sz="1300" b="1" i="0">
-                <a:solidFill>
-                  <a:srgbClr val="8A8478"/>
-                </a:solidFill>
-                <a:latin typeface="Helvetica Neue"/>
-                <a:ea typeface="Hiragino Sans GB"/>
-              </a:rPr>
-              <a:t>2024–26  </a:t>
-            </a:r>
-            <a:r>
-              <a:rPr sz="1300" b="1" i="0">
-                <a:solidFill>
-                  <a:srgbClr val="20242A"/>
-                </a:solidFill>
-                <a:latin typeface="Helvetica Neue"/>
-                <a:ea typeface="Hiragino Sans GB"/>
-              </a:rPr>
-              <a:t>30% tax-free</a:t>
-            </a:r>
-          </a:p>
-        </p:txBody>
-      </p:sp>
-      <p:sp>
-        <p:nvSpPr>
-          <p:cNvPr id="10" name="TextBox 9"/>
-          <p:cNvSpPr txBox="1"/>
-          <p:nvPr/>
-        </p:nvSpPr>
-        <p:spPr>
-          <a:xfrm>
-            <a:off x="795528" y="2249424"/>
-            <a:ext cx="4090946" cy="365760"/>
-          </a:xfrm>
-          <a:prstGeom prst="rect">
-            <a:avLst/>
-          </a:prstGeom>
-          <a:noFill/>
-          <a:ln/>
-        </p:spPr>
-        <p:txBody>
-          <a:bodyPr wrap="square" anchor="t" lIns="25400" rIns="25400" tIns="25400" bIns="25400">
-            <a:spAutoFit/>
-          </a:bodyPr>
-          <a:lstStyle/>
-          <a:p>
-            <a:pPr algn="l">
-              <a:lnSpc>
-                <a:spcPct val="100000"/>
-              </a:lnSpc>
-              <a:spcBef>
-                <a:spcPts val="0"/>
-              </a:spcBef>
-              <a:spcAft>
-                <a:spcPts val="0"/>
-              </a:spcAft>
-            </a:pPr>
-            <a:r>
-              <a:rPr sz="1050" b="0" i="0">
-                <a:solidFill>
-                  <a:srgbClr val="8A8478"/>
-                </a:solidFill>
-                <a:latin typeface="Helvetica Neue"/>
-                <a:ea typeface="Hiragino Sans GB"/>
-              </a:rPr>
-              <a:t>income norm €46,107</a:t>
-            </a:r>
-          </a:p>
-        </p:txBody>
-      </p:sp>
-      <p:sp>
-        <p:nvSpPr>
-          <p:cNvPr id="11" name="Rounded Rectangle 10"/>
-          <p:cNvSpPr/>
-          <p:nvPr/>
-        </p:nvSpPr>
-        <p:spPr>
-          <a:xfrm>
-            <a:off x="393192" y="2447544"/>
-            <a:ext cx="164592" cy="164592"/>
-          </a:xfrm>
-          <a:prstGeom prst="roundRect">
-            <a:avLst>
-              <a:gd name="adj" fmla="val 50000"/>
-            </a:avLst>
-          </a:prstGeom>
-          <a:solidFill>
-            <a:srgbClr val="D8542A"/>
-          </a:solidFill>
-          <a:ln>
-            <a:noFill/>
-          </a:ln>
-          <a:effectLst/>
-        </p:spPr>
-        <p:style>
-          <a:lnRef idx="1">
-            <a:schemeClr val="accent1"/>
-          </a:lnRef>
-          <a:fillRef idx="3">
-            <a:schemeClr val="accent1"/>
-          </a:fillRef>
-          <a:effectRef idx="2">
-            <a:schemeClr val="accent1"/>
-          </a:effectRef>
-          <a:fontRef idx="minor">
-            <a:schemeClr val="lt1"/>
-          </a:fontRef>
-        </p:style>
-        <p:txBody>
-          <a:bodyPr rtlCol="0" anchor="ctr"/>
-          <a:lstStyle/>
-          <a:p>
-            <a:pPr algn="ctr"/>
-          </a:p>
-        </p:txBody>
-      </p:sp>
-      <p:sp>
-        <p:nvSpPr>
-          <p:cNvPr id="12" name="TextBox 11"/>
-          <p:cNvSpPr txBox="1"/>
-          <p:nvPr/>
-        </p:nvSpPr>
-        <p:spPr>
-          <a:xfrm>
-            <a:off x="795528" y="2383536"/>
-            <a:ext cx="4090946" cy="274320"/>
-          </a:xfrm>
-          <a:prstGeom prst="rect">
-            <a:avLst/>
-          </a:prstGeom>
-          <a:noFill/>
-          <a:ln/>
-        </p:spPr>
-        <p:txBody>
-          <a:bodyPr wrap="square" anchor="t" lIns="25400" rIns="25400" tIns="25400" bIns="25400">
-            <a:spAutoFit/>
-          </a:bodyPr>
-          <a:lstStyle/>
-          <a:p>
-            <a:pPr algn="l">
-              <a:lnSpc>
-                <a:spcPct val="100000"/>
-              </a:lnSpc>
-              <a:spcBef>
-                <a:spcPts val="0"/>
-              </a:spcBef>
-              <a:spcAft>
-                <a:spcPts val="0"/>
-              </a:spcAft>
-            </a:pPr>
-            <a:r>
-              <a:rPr sz="1300" b="1" i="0">
-                <a:solidFill>
-                  <a:srgbClr val="D8542A"/>
-                </a:solidFill>
-                <a:latin typeface="Helvetica Neue"/>
-                <a:ea typeface="Hiragino Sans GB"/>
-              </a:rPr>
-              <a:t>1 Jan 2027  </a:t>
-            </a:r>
-            <a:r>
-              <a:rPr sz="1300" b="1" i="0">
-                <a:solidFill>
-                  <a:srgbClr val="20242A"/>
-                </a:solidFill>
-                <a:latin typeface="Helvetica Neue"/>
-                <a:ea typeface="Hiragino Sans GB"/>
-              </a:rPr>
-              <a:t>→ 27% tax-free</a:t>
-            </a:r>
-          </a:p>
-        </p:txBody>
-      </p:sp>
-      <p:sp>
-        <p:nvSpPr>
-          <p:cNvPr id="13" name="TextBox 12"/>
-          <p:cNvSpPr txBox="1"/>
-          <p:nvPr/>
-        </p:nvSpPr>
-        <p:spPr>
-          <a:xfrm>
-            <a:off x="795528" y="2676144"/>
-            <a:ext cx="4090946" cy="365760"/>
-          </a:xfrm>
-          <a:prstGeom prst="rect">
-            <a:avLst/>
-          </a:prstGeom>
-          <a:noFill/>
-          <a:ln/>
-        </p:spPr>
-        <p:txBody>
-          <a:bodyPr wrap="square" anchor="t" lIns="25400" rIns="25400" tIns="25400" bIns="25400">
-            <a:spAutoFit/>
-          </a:bodyPr>
-          <a:lstStyle/>
-          <a:p>
-            <a:pPr algn="l">
-              <a:lnSpc>
-                <a:spcPct val="100000"/>
-              </a:lnSpc>
-              <a:spcBef>
-                <a:spcPts val="0"/>
-              </a:spcBef>
-              <a:spcAft>
-                <a:spcPts val="0"/>
-              </a:spcAft>
-            </a:pPr>
-            <a:r>
-              <a:rPr sz="1050" b="0" i="0">
-                <a:solidFill>
-                  <a:srgbClr val="8A8478"/>
-                </a:solidFill>
-                <a:latin typeface="Helvetica Neue"/>
-                <a:ea typeface="Hiragino Sans GB"/>
-              </a:rPr>
-              <a:t>norm rises to €50,436</a:t>
-            </a:r>
-          </a:p>
-        </p:txBody>
-      </p:sp>
-      <p:sp>
-        <p:nvSpPr>
-          <p:cNvPr id="14" name="Rounded Rectangle 13"/>
-          <p:cNvSpPr/>
-          <p:nvPr/>
-        </p:nvSpPr>
-        <p:spPr>
-          <a:xfrm>
-            <a:off x="393192" y="2874264"/>
-            <a:ext cx="164592" cy="164592"/>
-          </a:xfrm>
-          <a:prstGeom prst="roundRect">
-            <a:avLst>
-              <a:gd name="adj" fmla="val 50000"/>
-            </a:avLst>
-          </a:prstGeom>
-          <a:solidFill>
-            <a:srgbClr val="9AA0AE"/>
-          </a:solidFill>
-          <a:ln>
-            <a:noFill/>
-          </a:ln>
-          <a:effectLst/>
-        </p:spPr>
-        <p:style>
-          <a:lnRef idx="1">
-            <a:schemeClr val="accent1"/>
-          </a:lnRef>
-          <a:fillRef idx="3">
-            <a:schemeClr val="accent1"/>
-          </a:fillRef>
-          <a:effectRef idx="2">
-            <a:schemeClr val="accent1"/>
-          </a:effectRef>
-          <a:fontRef idx="minor">
-            <a:schemeClr val="lt1"/>
-          </a:fontRef>
-        </p:style>
-        <p:txBody>
-          <a:bodyPr rtlCol="0" anchor="ctr"/>
-          <a:lstStyle/>
-          <a:p>
-            <a:pPr algn="ctr"/>
-          </a:p>
-        </p:txBody>
-      </p:sp>
-      <p:sp>
-        <p:nvSpPr>
-          <p:cNvPr id="15" name="TextBox 14"/>
+          <p:cNvPr id="14" name="TextBox 13"/>
           <p:cNvSpPr txBox="1"/>
           <p:nvPr/>
         </p:nvSpPr>
@@ -5148,7 +5016,7 @@
       </p:sp>
       <p:sp>
         <p:nvSpPr>
-          <p:cNvPr id="16" name="TextBox 15"/>
+          <p:cNvPr id="15" name="TextBox 14"/>
           <p:cNvSpPr txBox="1"/>
           <p:nvPr/>
         </p:nvSpPr>
@@ -5195,7 +5063,7 @@
       </p:sp>
       <p:sp>
         <p:nvSpPr>
-          <p:cNvPr id="17" name="TextBox 16"/>
+          <p:cNvPr id="16" name="TextBox 15"/>
           <p:cNvSpPr txBox="1"/>
           <p:nvPr/>
         </p:nvSpPr>
@@ -5242,7 +5110,7 @@
       </p:sp>
       <p:graphicFrame>
         <p:nvGraphicFramePr>
-          <p:cNvPr id="18" name="Chart 17"/>
+          <p:cNvPr id="17" name="Chart 16"/>
           <p:cNvGraphicFramePr>
             <a:graphicFrameLocks noGrp="1"/>
           </p:cNvGraphicFramePr>
@@ -5260,7 +5128,7 @@
       </p:graphicFrame>
       <p:sp>
         <p:nvSpPr>
-          <p:cNvPr id="19" name="TextBox 18"/>
+          <p:cNvPr id="18" name="TextBox 17"/>
           <p:cNvSpPr txBox="1"/>
           <p:nvPr/>
         </p:nvSpPr>
@@ -5307,7 +5175,7 @@
       </p:sp>
       <p:sp>
         <p:nvSpPr>
-          <p:cNvPr id="20" name="TextBox 19"/>
+          <p:cNvPr id="19" name="TextBox 18"/>
           <p:cNvSpPr txBox="1"/>
           <p:nvPr/>
         </p:nvSpPr>
@@ -5354,7 +5222,7 @@
       </p:sp>
       <p:sp>
         <p:nvSpPr>
-          <p:cNvPr id="21" name="TextBox 20"/>
+          <p:cNvPr id="20" name="TextBox 19"/>
           <p:cNvSpPr txBox="1"/>
           <p:nvPr/>
         </p:nvSpPr>
@@ -5411,7 +5279,7 @@
       </p:sp>
       <p:sp>
         <p:nvSpPr>
-          <p:cNvPr id="22" name="TextBox 21"/>
+          <p:cNvPr id="21" name="TextBox 20"/>
           <p:cNvSpPr txBox="1"/>
           <p:nvPr/>
         </p:nvSpPr>
@@ -5458,7 +5326,7 @@
       </p:sp>
       <p:sp>
         <p:nvSpPr>
-          <p:cNvPr id="23" name="TextBox 22"/>
+          <p:cNvPr id="22" name="TextBox 21"/>
           <p:cNvSpPr txBox="1"/>
           <p:nvPr/>
         </p:nvSpPr>
@@ -5661,17 +5529,531 @@
       </p:sp>
       <p:sp>
         <p:nvSpPr>
-          <p:cNvPr id="5" name="Rectangle 4"/>
+          <p:cNvPr id="5" name="TextBox 4"/>
+          <p:cNvSpPr txBox="1"/>
+          <p:nvPr/>
+        </p:nvSpPr>
+        <p:spPr>
+          <a:xfrm>
+            <a:off x="365760" y="1508760"/>
+            <a:ext cx="4251097" cy="274320"/>
+          </a:xfrm>
+          <a:prstGeom prst="rect">
+            <a:avLst/>
+          </a:prstGeom>
+          <a:noFill/>
+          <a:ln/>
+        </p:spPr>
+        <p:txBody>
+          <a:bodyPr wrap="square" anchor="t" lIns="25400" rIns="25400" tIns="25400" bIns="25400">
+            <a:spAutoFit/>
+          </a:bodyPr>
+          <a:lstStyle/>
+          <a:p>
+            <a:pPr algn="l">
+              <a:lnSpc>
+                <a:spcPct val="100000"/>
+              </a:lnSpc>
+              <a:spcBef>
+                <a:spcPts val="0"/>
+              </a:spcBef>
+              <a:spcAft>
+                <a:spcPts val="0"/>
+              </a:spcAft>
+            </a:pPr>
+            <a:r>
+              <a:rPr sz="950" b="1" i="0">
+                <a:solidFill>
+                  <a:srgbClr val="8A8478"/>
+                </a:solidFill>
+                <a:latin typeface="Courier New"/>
+                <a:ea typeface="Hiragino Sans GB"/>
+              </a:rPr>
+              <a:t>VACANCIES PER 100 UNEMPLOYED</a:t>
+            </a:r>
+          </a:p>
+        </p:txBody>
+      </p:sp>
+      <p:sp>
+        <p:nvSpPr>
+          <p:cNvPr id="6" name="TextBox 5"/>
+          <p:cNvSpPr txBox="1"/>
+          <p:nvPr/>
+        </p:nvSpPr>
+        <p:spPr>
+          <a:xfrm>
+            <a:off x="365760" y="1965960"/>
+            <a:ext cx="3108097" cy="256032"/>
+          </a:xfrm>
+          <a:prstGeom prst="rect">
+            <a:avLst/>
+          </a:prstGeom>
+          <a:noFill/>
+          <a:ln/>
+        </p:spPr>
+        <p:txBody>
+          <a:bodyPr wrap="square" anchor="b" lIns="25400" rIns="25400" tIns="25400" bIns="25400">
+            <a:spAutoFit/>
+          </a:bodyPr>
+          <a:lstStyle/>
+          <a:p>
+            <a:pPr algn="l">
+              <a:lnSpc>
+                <a:spcPct val="100000"/>
+              </a:lnSpc>
+              <a:spcBef>
+                <a:spcPts val="0"/>
+              </a:spcBef>
+              <a:spcAft>
+                <a:spcPts val="0"/>
+              </a:spcAft>
+            </a:pPr>
+            <a:r>
+              <a:rPr sz="1250" b="0" i="0">
+                <a:solidFill>
+                  <a:srgbClr val="8A8478"/>
+                </a:solidFill>
+                <a:latin typeface="Helvetica Neue"/>
+                <a:ea typeface="Hiragino Sans GB"/>
+              </a:rPr>
+              <a:t>Utrecht</a:t>
+            </a:r>
+          </a:p>
+        </p:txBody>
+      </p:sp>
+      <p:sp>
+        <p:nvSpPr>
+          <p:cNvPr id="7" name="Rounded Rectangle 6"/>
           <p:cNvSpPr/>
           <p:nvPr/>
         </p:nvSpPr>
         <p:spPr>
           <a:xfrm>
-            <a:off x="566928" y="1191006"/>
-            <a:ext cx="1097280" cy="45720"/>
-          </a:xfrm>
-          <a:prstGeom prst="rect">
-            <a:avLst/>
+            <a:off x="365760" y="2221991"/>
+            <a:ext cx="3108097" cy="182880"/>
+          </a:xfrm>
+          <a:prstGeom prst="roundRect">
+            <a:avLst>
+              <a:gd name="adj" fmla="val 50000"/>
+            </a:avLst>
+          </a:prstGeom>
+          <a:solidFill>
+            <a:srgbClr val="E7DFD1"/>
+          </a:solidFill>
+          <a:ln>
+            <a:noFill/>
+          </a:ln>
+          <a:effectLst/>
+        </p:spPr>
+        <p:style>
+          <a:lnRef idx="1">
+            <a:schemeClr val="accent1"/>
+          </a:lnRef>
+          <a:fillRef idx="3">
+            <a:schemeClr val="accent1"/>
+          </a:fillRef>
+          <a:effectRef idx="2">
+            <a:schemeClr val="accent1"/>
+          </a:effectRef>
+          <a:fontRef idx="minor">
+            <a:schemeClr val="lt1"/>
+          </a:fontRef>
+        </p:style>
+        <p:txBody>
+          <a:bodyPr rtlCol="0" anchor="ctr"/>
+          <a:lstStyle/>
+          <a:p>
+            <a:pPr algn="ctr"/>
+          </a:p>
+        </p:txBody>
+      </p:sp>
+      <p:sp>
+        <p:nvSpPr>
+          <p:cNvPr id="8" name="Rounded Rectangle 7"/>
+          <p:cNvSpPr/>
+          <p:nvPr/>
+        </p:nvSpPr>
+        <p:spPr>
+          <a:xfrm>
+            <a:off x="365760" y="2221991"/>
+            <a:ext cx="2615088" cy="182880"/>
+          </a:xfrm>
+          <a:prstGeom prst="roundRect">
+            <a:avLst>
+              <a:gd name="adj" fmla="val 50000"/>
+            </a:avLst>
+          </a:prstGeom>
+          <a:solidFill>
+            <a:srgbClr val="D8542A"/>
+          </a:solidFill>
+          <a:ln>
+            <a:noFill/>
+          </a:ln>
+          <a:effectLst/>
+        </p:spPr>
+        <p:style>
+          <a:lnRef idx="1">
+            <a:schemeClr val="accent1"/>
+          </a:lnRef>
+          <a:fillRef idx="3">
+            <a:schemeClr val="accent1"/>
+          </a:fillRef>
+          <a:effectRef idx="2">
+            <a:schemeClr val="accent1"/>
+          </a:effectRef>
+          <a:fontRef idx="minor">
+            <a:schemeClr val="lt1"/>
+          </a:fontRef>
+        </p:style>
+        <p:txBody>
+          <a:bodyPr rtlCol="0" anchor="ctr"/>
+          <a:lstStyle/>
+          <a:p>
+            <a:pPr algn="ctr"/>
+          </a:p>
+        </p:txBody>
+      </p:sp>
+      <p:sp>
+        <p:nvSpPr>
+          <p:cNvPr id="9" name="TextBox 8"/>
+          <p:cNvSpPr txBox="1"/>
+          <p:nvPr/>
+        </p:nvSpPr>
+        <p:spPr>
+          <a:xfrm>
+            <a:off x="3656737" y="2221991"/>
+            <a:ext cx="777240" cy="182880"/>
+          </a:xfrm>
+          <a:prstGeom prst="rect">
+            <a:avLst/>
+          </a:prstGeom>
+          <a:noFill/>
+          <a:ln/>
+        </p:spPr>
+        <p:txBody>
+          <a:bodyPr wrap="square" anchor="ctr" lIns="25400" rIns="25400" tIns="25400" bIns="25400">
+            <a:spAutoFit/>
+          </a:bodyPr>
+          <a:lstStyle/>
+          <a:p>
+            <a:pPr algn="l">
+              <a:lnSpc>
+                <a:spcPct val="100000"/>
+              </a:lnSpc>
+              <a:spcBef>
+                <a:spcPts val="0"/>
+              </a:spcBef>
+              <a:spcAft>
+                <a:spcPts val="0"/>
+              </a:spcAft>
+            </a:pPr>
+            <a:r>
+              <a:rPr sz="1450" b="1" i="0">
+                <a:solidFill>
+                  <a:srgbClr val="20242A"/>
+                </a:solidFill>
+                <a:latin typeface="Helvetica Neue"/>
+                <a:ea typeface="Hiragino Sans GB"/>
+              </a:rPr>
+              <a:t>122</a:t>
+            </a:r>
+          </a:p>
+        </p:txBody>
+      </p:sp>
+      <p:sp>
+        <p:nvSpPr>
+          <p:cNvPr id="10" name="TextBox 9"/>
+          <p:cNvSpPr txBox="1"/>
+          <p:nvPr/>
+        </p:nvSpPr>
+        <p:spPr>
+          <a:xfrm>
+            <a:off x="365760" y="2514600"/>
+            <a:ext cx="3108097" cy="256032"/>
+          </a:xfrm>
+          <a:prstGeom prst="rect">
+            <a:avLst/>
+          </a:prstGeom>
+          <a:noFill/>
+          <a:ln/>
+        </p:spPr>
+        <p:txBody>
+          <a:bodyPr wrap="square" anchor="b" lIns="25400" rIns="25400" tIns="25400" bIns="25400">
+            <a:spAutoFit/>
+          </a:bodyPr>
+          <a:lstStyle/>
+          <a:p>
+            <a:pPr algn="l">
+              <a:lnSpc>
+                <a:spcPct val="100000"/>
+              </a:lnSpc>
+              <a:spcBef>
+                <a:spcPts val="0"/>
+              </a:spcBef>
+              <a:spcAft>
+                <a:spcPts val="0"/>
+              </a:spcAft>
+            </a:pPr>
+            <a:r>
+              <a:rPr sz="1250" b="0" i="0">
+                <a:solidFill>
+                  <a:srgbClr val="8A8478"/>
+                </a:solidFill>
+                <a:latin typeface="Helvetica Neue"/>
+                <a:ea typeface="Hiragino Sans GB"/>
+              </a:rPr>
+              <a:t>Zeeland</a:t>
+            </a:r>
+          </a:p>
+        </p:txBody>
+      </p:sp>
+      <p:sp>
+        <p:nvSpPr>
+          <p:cNvPr id="11" name="Rounded Rectangle 10"/>
+          <p:cNvSpPr/>
+          <p:nvPr/>
+        </p:nvSpPr>
+        <p:spPr>
+          <a:xfrm>
+            <a:off x="365760" y="2770632"/>
+            <a:ext cx="3108097" cy="182880"/>
+          </a:xfrm>
+          <a:prstGeom prst="roundRect">
+            <a:avLst>
+              <a:gd name="adj" fmla="val 50000"/>
+            </a:avLst>
+          </a:prstGeom>
+          <a:solidFill>
+            <a:srgbClr val="E7DFD1"/>
+          </a:solidFill>
+          <a:ln>
+            <a:noFill/>
+          </a:ln>
+          <a:effectLst/>
+        </p:spPr>
+        <p:style>
+          <a:lnRef idx="1">
+            <a:schemeClr val="accent1"/>
+          </a:lnRef>
+          <a:fillRef idx="3">
+            <a:schemeClr val="accent1"/>
+          </a:fillRef>
+          <a:effectRef idx="2">
+            <a:schemeClr val="accent1"/>
+          </a:effectRef>
+          <a:fontRef idx="minor">
+            <a:schemeClr val="lt1"/>
+          </a:fontRef>
+        </p:style>
+        <p:txBody>
+          <a:bodyPr rtlCol="0" anchor="ctr"/>
+          <a:lstStyle/>
+          <a:p>
+            <a:pPr algn="ctr"/>
+          </a:p>
+        </p:txBody>
+      </p:sp>
+      <p:sp>
+        <p:nvSpPr>
+          <p:cNvPr id="12" name="Rounded Rectangle 11"/>
+          <p:cNvSpPr/>
+          <p:nvPr/>
+        </p:nvSpPr>
+        <p:spPr>
+          <a:xfrm>
+            <a:off x="365760" y="2770632"/>
+            <a:ext cx="2615088" cy="182880"/>
+          </a:xfrm>
+          <a:prstGeom prst="roundRect">
+            <a:avLst>
+              <a:gd name="adj" fmla="val 50000"/>
+            </a:avLst>
+          </a:prstGeom>
+          <a:solidFill>
+            <a:srgbClr val="D8542A"/>
+          </a:solidFill>
+          <a:ln>
+            <a:noFill/>
+          </a:ln>
+          <a:effectLst/>
+        </p:spPr>
+        <p:style>
+          <a:lnRef idx="1">
+            <a:schemeClr val="accent1"/>
+          </a:lnRef>
+          <a:fillRef idx="3">
+            <a:schemeClr val="accent1"/>
+          </a:fillRef>
+          <a:effectRef idx="2">
+            <a:schemeClr val="accent1"/>
+          </a:effectRef>
+          <a:fontRef idx="minor">
+            <a:schemeClr val="lt1"/>
+          </a:fontRef>
+        </p:style>
+        <p:txBody>
+          <a:bodyPr rtlCol="0" anchor="ctr"/>
+          <a:lstStyle/>
+          <a:p>
+            <a:pPr algn="ctr"/>
+          </a:p>
+        </p:txBody>
+      </p:sp>
+      <p:sp>
+        <p:nvSpPr>
+          <p:cNvPr id="13" name="TextBox 12"/>
+          <p:cNvSpPr txBox="1"/>
+          <p:nvPr/>
+        </p:nvSpPr>
+        <p:spPr>
+          <a:xfrm>
+            <a:off x="3656737" y="2770632"/>
+            <a:ext cx="777240" cy="182880"/>
+          </a:xfrm>
+          <a:prstGeom prst="rect">
+            <a:avLst/>
+          </a:prstGeom>
+          <a:noFill/>
+          <a:ln/>
+        </p:spPr>
+        <p:txBody>
+          <a:bodyPr wrap="square" anchor="ctr" lIns="25400" rIns="25400" tIns="25400" bIns="25400">
+            <a:spAutoFit/>
+          </a:bodyPr>
+          <a:lstStyle/>
+          <a:p>
+            <a:pPr algn="l">
+              <a:lnSpc>
+                <a:spcPct val="100000"/>
+              </a:lnSpc>
+              <a:spcBef>
+                <a:spcPts val="0"/>
+              </a:spcBef>
+              <a:spcAft>
+                <a:spcPts val="0"/>
+              </a:spcAft>
+            </a:pPr>
+            <a:r>
+              <a:rPr sz="1450" b="1" i="0">
+                <a:solidFill>
+                  <a:srgbClr val="20242A"/>
+                </a:solidFill>
+                <a:latin typeface="Helvetica Neue"/>
+                <a:ea typeface="Hiragino Sans GB"/>
+              </a:rPr>
+              <a:t>122</a:t>
+            </a:r>
+          </a:p>
+        </p:txBody>
+      </p:sp>
+      <p:sp>
+        <p:nvSpPr>
+          <p:cNvPr id="14" name="TextBox 13"/>
+          <p:cNvSpPr txBox="1"/>
+          <p:nvPr/>
+        </p:nvSpPr>
+        <p:spPr>
+          <a:xfrm>
+            <a:off x="365760" y="3063240"/>
+            <a:ext cx="3108097" cy="256032"/>
+          </a:xfrm>
+          <a:prstGeom prst="rect">
+            <a:avLst/>
+          </a:prstGeom>
+          <a:noFill/>
+          <a:ln/>
+        </p:spPr>
+        <p:txBody>
+          <a:bodyPr wrap="square" anchor="b" lIns="25400" rIns="25400" tIns="25400" bIns="25400">
+            <a:spAutoFit/>
+          </a:bodyPr>
+          <a:lstStyle/>
+          <a:p>
+            <a:pPr algn="l">
+              <a:lnSpc>
+                <a:spcPct val="100000"/>
+              </a:lnSpc>
+              <a:spcBef>
+                <a:spcPts val="0"/>
+              </a:spcBef>
+              <a:spcAft>
+                <a:spcPts val="0"/>
+              </a:spcAft>
+            </a:pPr>
+            <a:r>
+              <a:rPr sz="1250" b="0" i="0">
+                <a:solidFill>
+                  <a:srgbClr val="8A8478"/>
+                </a:solidFill>
+                <a:latin typeface="Helvetica Neue"/>
+                <a:ea typeface="Hiragino Sans GB"/>
+              </a:rPr>
+              <a:t>Netherlands (avg)</a:t>
+            </a:r>
+          </a:p>
+        </p:txBody>
+      </p:sp>
+      <p:sp>
+        <p:nvSpPr>
+          <p:cNvPr id="15" name="Rounded Rectangle 14"/>
+          <p:cNvSpPr/>
+          <p:nvPr/>
+        </p:nvSpPr>
+        <p:spPr>
+          <a:xfrm>
+            <a:off x="365760" y="3319272"/>
+            <a:ext cx="3108097" cy="182880"/>
+          </a:xfrm>
+          <a:prstGeom prst="roundRect">
+            <a:avLst>
+              <a:gd name="adj" fmla="val 50000"/>
+            </a:avLst>
+          </a:prstGeom>
+          <a:solidFill>
+            <a:srgbClr val="E7DFD1"/>
+          </a:solidFill>
+          <a:ln>
+            <a:noFill/>
+          </a:ln>
+          <a:effectLst/>
+        </p:spPr>
+        <p:style>
+          <a:lnRef idx="1">
+            <a:schemeClr val="accent1"/>
+          </a:lnRef>
+          <a:fillRef idx="3">
+            <a:schemeClr val="accent1"/>
+          </a:fillRef>
+          <a:effectRef idx="2">
+            <a:schemeClr val="accent1"/>
+          </a:effectRef>
+          <a:fontRef idx="minor">
+            <a:schemeClr val="lt1"/>
+          </a:fontRef>
+        </p:style>
+        <p:txBody>
+          <a:bodyPr rtlCol="0" anchor="ctr"/>
+          <a:lstStyle/>
+          <a:p>
+            <a:pPr algn="ctr"/>
+          </a:p>
+        </p:txBody>
+      </p:sp>
+      <p:sp>
+        <p:nvSpPr>
+          <p:cNvPr id="16" name="Rounded Rectangle 15"/>
+          <p:cNvSpPr/>
+          <p:nvPr/>
+        </p:nvSpPr>
+        <p:spPr>
+          <a:xfrm>
+            <a:off x="365760" y="3319272"/>
+            <a:ext cx="1950599" cy="182880"/>
+          </a:xfrm>
+          <a:prstGeom prst="roundRect">
+            <a:avLst>
+              <a:gd name="adj" fmla="val 50000"/>
+            </a:avLst>
           </a:prstGeom>
           <a:solidFill>
             <a:srgbClr val="0E5C63"/>
@@ -5705,23 +6087,23 @@
       </p:sp>
       <p:sp>
         <p:nvSpPr>
-          <p:cNvPr id="6" name="TextBox 5"/>
-          <p:cNvSpPr txBox="1"/>
-          <p:nvPr/>
-        </p:nvSpPr>
-        <p:spPr>
-          <a:xfrm>
-            <a:off x="365760" y="1508760"/>
-            <a:ext cx="4251097" cy="274320"/>
-          </a:xfrm>
-          <a:prstGeom prst="rect">
-            <a:avLst/>
-          </a:prstGeom>
-          <a:noFill/>
-          <a:ln/>
-        </p:spPr>
-        <p:txBody>
-          <a:bodyPr wrap="square" anchor="t" lIns="25400" rIns="25400" tIns="25400" bIns="25400">
+          <p:cNvPr id="17" name="TextBox 16"/>
+          <p:cNvSpPr txBox="1"/>
+          <p:nvPr/>
+        </p:nvSpPr>
+        <p:spPr>
+          <a:xfrm>
+            <a:off x="3656737" y="3319272"/>
+            <a:ext cx="777240" cy="182880"/>
+          </a:xfrm>
+          <a:prstGeom prst="rect">
+            <a:avLst/>
+          </a:prstGeom>
+          <a:noFill/>
+          <a:ln/>
+        </p:spPr>
+        <p:txBody>
+          <a:bodyPr wrap="square" anchor="ctr" lIns="25400" rIns="25400" tIns="25400" bIns="25400">
             <a:spAutoFit/>
           </a:bodyPr>
           <a:lstStyle/>
@@ -5738,74 +6120,74 @@
               </a:spcAft>
             </a:pPr>
             <a:r>
-              <a:rPr sz="950" b="1" i="0">
+              <a:rPr sz="1450" b="1" i="0">
+                <a:solidFill>
+                  <a:srgbClr val="20242A"/>
+                </a:solidFill>
+                <a:latin typeface="Helvetica Neue"/>
+                <a:ea typeface="Hiragino Sans GB"/>
+              </a:rPr>
+              <a:t>91</a:t>
+            </a:r>
+          </a:p>
+        </p:txBody>
+      </p:sp>
+      <p:sp>
+        <p:nvSpPr>
+          <p:cNvPr id="18" name="TextBox 17"/>
+          <p:cNvSpPr txBox="1"/>
+          <p:nvPr/>
+        </p:nvSpPr>
+        <p:spPr>
+          <a:xfrm>
+            <a:off x="365760" y="3611880"/>
+            <a:ext cx="3108097" cy="256032"/>
+          </a:xfrm>
+          <a:prstGeom prst="rect">
+            <a:avLst/>
+          </a:prstGeom>
+          <a:noFill/>
+          <a:ln/>
+        </p:spPr>
+        <p:txBody>
+          <a:bodyPr wrap="square" anchor="b" lIns="25400" rIns="25400" tIns="25400" bIns="25400">
+            <a:spAutoFit/>
+          </a:bodyPr>
+          <a:lstStyle/>
+          <a:p>
+            <a:pPr algn="l">
+              <a:lnSpc>
+                <a:spcPct val="100000"/>
+              </a:lnSpc>
+              <a:spcBef>
+                <a:spcPts val="0"/>
+              </a:spcBef>
+              <a:spcAft>
+                <a:spcPts val="0"/>
+              </a:spcAft>
+            </a:pPr>
+            <a:r>
+              <a:rPr sz="1250" b="0" i="0">
                 <a:solidFill>
                   <a:srgbClr val="8A8478"/>
                 </a:solidFill>
-                <a:latin typeface="Courier New"/>
-                <a:ea typeface="Hiragino Sans GB"/>
-              </a:rPr>
-              <a:t>VACANCIES PER 100 UNEMPLOYED</a:t>
-            </a:r>
-          </a:p>
-        </p:txBody>
-      </p:sp>
-      <p:sp>
-        <p:nvSpPr>
-          <p:cNvPr id="7" name="TextBox 6"/>
-          <p:cNvSpPr txBox="1"/>
-          <p:nvPr/>
-        </p:nvSpPr>
-        <p:spPr>
-          <a:xfrm>
-            <a:off x="365760" y="1965960"/>
-            <a:ext cx="3108097" cy="256032"/>
-          </a:xfrm>
-          <a:prstGeom prst="rect">
-            <a:avLst/>
-          </a:prstGeom>
-          <a:noFill/>
-          <a:ln/>
-        </p:spPr>
-        <p:txBody>
-          <a:bodyPr wrap="square" anchor="b" lIns="25400" rIns="25400" tIns="25400" bIns="25400">
-            <a:spAutoFit/>
-          </a:bodyPr>
-          <a:lstStyle/>
-          <a:p>
-            <a:pPr algn="l">
-              <a:lnSpc>
-                <a:spcPct val="100000"/>
-              </a:lnSpc>
-              <a:spcBef>
-                <a:spcPts val="0"/>
-              </a:spcBef>
-              <a:spcAft>
-                <a:spcPts val="0"/>
-              </a:spcAft>
-            </a:pPr>
-            <a:r>
-              <a:rPr sz="1250" b="0" i="0">
-                <a:solidFill>
-                  <a:srgbClr val="8A8478"/>
-                </a:solidFill>
                 <a:latin typeface="Helvetica Neue"/>
                 <a:ea typeface="Hiragino Sans GB"/>
               </a:rPr>
-              <a:t>Utrecht</a:t>
-            </a:r>
-          </a:p>
-        </p:txBody>
-      </p:sp>
-      <p:sp>
-        <p:nvSpPr>
-          <p:cNvPr id="8" name="Rounded Rectangle 7"/>
+              <a:t>Groningen (recovering)</a:t>
+            </a:r>
+          </a:p>
+        </p:txBody>
+      </p:sp>
+      <p:sp>
+        <p:nvSpPr>
+          <p:cNvPr id="19" name="Rounded Rectangle 18"/>
           <p:cNvSpPr/>
           <p:nvPr/>
         </p:nvSpPr>
         <p:spPr>
           <a:xfrm>
-            <a:off x="365760" y="2221991"/>
+            <a:off x="365760" y="3867912"/>
             <a:ext cx="3108097" cy="182880"/>
           </a:xfrm>
           <a:prstGeom prst="roundRect">
@@ -5845,19 +6227,260 @@
       </p:sp>
       <p:sp>
         <p:nvSpPr>
-          <p:cNvPr id="9" name="Rounded Rectangle 8"/>
+          <p:cNvPr id="20" name="Rounded Rectangle 19"/>
           <p:cNvSpPr/>
           <p:nvPr/>
         </p:nvSpPr>
         <p:spPr>
           <a:xfrm>
-            <a:off x="365760" y="2221991"/>
-            <a:ext cx="2615088" cy="182880"/>
+            <a:off x="365760" y="3867912"/>
+            <a:ext cx="1671942" cy="182880"/>
           </a:xfrm>
           <a:prstGeom prst="roundRect">
             <a:avLst>
               <a:gd name="adj" fmla="val 50000"/>
             </a:avLst>
+          </a:prstGeom>
+          <a:solidFill>
+            <a:srgbClr val="2E8A8C"/>
+          </a:solidFill>
+          <a:ln>
+            <a:noFill/>
+          </a:ln>
+          <a:effectLst/>
+        </p:spPr>
+        <p:style>
+          <a:lnRef idx="1">
+            <a:schemeClr val="accent1"/>
+          </a:lnRef>
+          <a:fillRef idx="3">
+            <a:schemeClr val="accent1"/>
+          </a:fillRef>
+          <a:effectRef idx="2">
+            <a:schemeClr val="accent1"/>
+          </a:effectRef>
+          <a:fontRef idx="minor">
+            <a:schemeClr val="lt1"/>
+          </a:fontRef>
+        </p:style>
+        <p:txBody>
+          <a:bodyPr rtlCol="0" anchor="ctr"/>
+          <a:lstStyle/>
+          <a:p>
+            <a:pPr algn="ctr"/>
+          </a:p>
+        </p:txBody>
+      </p:sp>
+      <p:sp>
+        <p:nvSpPr>
+          <p:cNvPr id="21" name="TextBox 20"/>
+          <p:cNvSpPr txBox="1"/>
+          <p:nvPr/>
+        </p:nvSpPr>
+        <p:spPr>
+          <a:xfrm>
+            <a:off x="3656737" y="3867912"/>
+            <a:ext cx="777240" cy="182880"/>
+          </a:xfrm>
+          <a:prstGeom prst="rect">
+            <a:avLst/>
+          </a:prstGeom>
+          <a:noFill/>
+          <a:ln/>
+        </p:spPr>
+        <p:txBody>
+          <a:bodyPr wrap="square" anchor="ctr" lIns="25400" rIns="25400" tIns="25400" bIns="25400">
+            <a:spAutoFit/>
+          </a:bodyPr>
+          <a:lstStyle/>
+          <a:p>
+            <a:pPr algn="l">
+              <a:lnSpc>
+                <a:spcPct val="100000"/>
+              </a:lnSpc>
+              <a:spcBef>
+                <a:spcPts val="0"/>
+              </a:spcBef>
+              <a:spcAft>
+                <a:spcPts val="0"/>
+              </a:spcAft>
+            </a:pPr>
+            <a:r>
+              <a:rPr sz="1450" b="1" i="0">
+                <a:solidFill>
+                  <a:srgbClr val="20242A"/>
+                </a:solidFill>
+                <a:latin typeface="Helvetica Neue"/>
+                <a:ea typeface="Hiragino Sans GB"/>
+              </a:rPr>
+              <a:t>78</a:t>
+            </a:r>
+          </a:p>
+        </p:txBody>
+      </p:sp>
+      <p:sp>
+        <p:nvSpPr>
+          <p:cNvPr id="22" name="Rounded Rectangle 21"/>
+          <p:cNvSpPr/>
+          <p:nvPr/>
+        </p:nvSpPr>
+        <p:spPr>
+          <a:xfrm>
+            <a:off x="4982617" y="1554480"/>
+            <a:ext cx="3795622" cy="1133856"/>
+          </a:xfrm>
+          <a:prstGeom prst="roundRect">
+            <a:avLst>
+              <a:gd name="adj" fmla="val 8870"/>
+            </a:avLst>
+          </a:prstGeom>
+          <a:solidFill>
+            <a:srgbClr val="16223A"/>
+          </a:solidFill>
+          <a:ln>
+            <a:noFill/>
+          </a:ln>
+          <a:effectLst/>
+        </p:spPr>
+        <p:style>
+          <a:lnRef idx="1">
+            <a:schemeClr val="accent1"/>
+          </a:lnRef>
+          <a:fillRef idx="3">
+            <a:schemeClr val="accent1"/>
+          </a:fillRef>
+          <a:effectRef idx="2">
+            <a:schemeClr val="accent1"/>
+          </a:effectRef>
+          <a:fontRef idx="minor">
+            <a:schemeClr val="lt1"/>
+          </a:fontRef>
+        </p:style>
+        <p:txBody>
+          <a:bodyPr rtlCol="0" anchor="ctr"/>
+          <a:lstStyle/>
+          <a:p>
+            <a:pPr algn="ctr"/>
+          </a:p>
+        </p:txBody>
+      </p:sp>
+      <p:sp>
+        <p:nvSpPr>
+          <p:cNvPr id="23" name="TextBox 22"/>
+          <p:cNvSpPr txBox="1"/>
+          <p:nvPr/>
+        </p:nvSpPr>
+        <p:spPr>
+          <a:xfrm>
+            <a:off x="5238649" y="1755648"/>
+            <a:ext cx="3338422" cy="457200"/>
+          </a:xfrm>
+          <a:prstGeom prst="rect">
+            <a:avLst/>
+          </a:prstGeom>
+          <a:noFill/>
+          <a:ln/>
+        </p:spPr>
+        <p:txBody>
+          <a:bodyPr wrap="none" anchor="t" lIns="25400" rIns="25400" tIns="25400" bIns="25400">
+            <a:spAutoFit/>
+          </a:bodyPr>
+          <a:lstStyle/>
+          <a:p>
+            <a:pPr algn="l">
+              <a:lnSpc>
+                <a:spcPct val="100000"/>
+              </a:lnSpc>
+              <a:spcBef>
+                <a:spcPts val="0"/>
+              </a:spcBef>
+              <a:spcAft>
+                <a:spcPts val="0"/>
+              </a:spcAft>
+            </a:pPr>
+            <a:r>
+              <a:rPr sz="2900" b="1" i="0">
+                <a:solidFill>
+                  <a:srgbClr val="D8542A"/>
+                </a:solidFill>
+                <a:latin typeface="Helvetica Neue"/>
+                <a:ea typeface="Hiragino Sans GB"/>
+              </a:rPr>
+              <a:t>13 of 35</a:t>
+            </a:r>
+            <a:r>
+              <a:rPr sz="1300" b="0" i="0">
+                <a:solidFill>
+                  <a:srgbClr val="C9D2DE"/>
+                </a:solidFill>
+                <a:latin typeface="Helvetica Neue"/>
+                <a:ea typeface="Hiragino Sans GB"/>
+              </a:rPr>
+              <a:t>  regions</a:t>
+            </a:r>
+          </a:p>
+        </p:txBody>
+      </p:sp>
+      <p:sp>
+        <p:nvSpPr>
+          <p:cNvPr id="24" name="TextBox 23"/>
+          <p:cNvSpPr txBox="1"/>
+          <p:nvPr/>
+        </p:nvSpPr>
+        <p:spPr>
+          <a:xfrm>
+            <a:off x="5238649" y="2249424"/>
+            <a:ext cx="3320134" cy="365760"/>
+          </a:xfrm>
+          <a:prstGeom prst="rect">
+            <a:avLst/>
+          </a:prstGeom>
+          <a:noFill/>
+          <a:ln/>
+        </p:spPr>
+        <p:txBody>
+          <a:bodyPr wrap="square" anchor="t" lIns="25400" rIns="25400" tIns="25400" bIns="25400">
+            <a:spAutoFit/>
+          </a:bodyPr>
+          <a:lstStyle/>
+          <a:p>
+            <a:pPr algn="l">
+              <a:lnSpc>
+                <a:spcPct val="116000"/>
+              </a:lnSpc>
+              <a:spcBef>
+                <a:spcPts val="0"/>
+              </a:spcBef>
+              <a:spcAft>
+                <a:spcPts val="0"/>
+              </a:spcAft>
+            </a:pPr>
+            <a:r>
+              <a:rPr sz="1050" b="0" i="0">
+                <a:solidFill>
+                  <a:srgbClr val="9BA6B4"/>
+                </a:solidFill>
+                <a:latin typeface="Helvetica Neue"/>
+                <a:ea typeface="Hiragino Sans GB"/>
+              </a:rPr>
+              <a:t>classed “extremely tight” (5+ vacancies per jobseeker).</a:t>
+            </a:r>
+          </a:p>
+        </p:txBody>
+      </p:sp>
+      <p:sp>
+        <p:nvSpPr>
+          <p:cNvPr id="25" name="Rectangle 24"/>
+          <p:cNvSpPr/>
+          <p:nvPr/>
+        </p:nvSpPr>
+        <p:spPr>
+          <a:xfrm>
+            <a:off x="4982617" y="2871215"/>
+            <a:ext cx="64008" cy="603504"/>
+          </a:xfrm>
+          <a:prstGeom prst="rect">
+            <a:avLst/>
           </a:prstGeom>
           <a:solidFill>
             <a:srgbClr val="D8542A"/>
@@ -5891,23 +6514,23 @@
       </p:sp>
       <p:sp>
         <p:nvSpPr>
-          <p:cNvPr id="10" name="TextBox 9"/>
-          <p:cNvSpPr txBox="1"/>
-          <p:nvPr/>
-        </p:nvSpPr>
-        <p:spPr>
-          <a:xfrm>
-            <a:off x="3656737" y="2221991"/>
-            <a:ext cx="777240" cy="182880"/>
-          </a:xfrm>
-          <a:prstGeom prst="rect">
-            <a:avLst/>
-          </a:prstGeom>
-          <a:noFill/>
-          <a:ln/>
-        </p:spPr>
-        <p:txBody>
-          <a:bodyPr wrap="square" anchor="ctr" lIns="25400" rIns="25400" tIns="25400" bIns="25400">
+          <p:cNvPr id="26" name="TextBox 25"/>
+          <p:cNvSpPr txBox="1"/>
+          <p:nvPr/>
+        </p:nvSpPr>
+        <p:spPr>
+          <a:xfrm>
+            <a:off x="5183785" y="2871215"/>
+            <a:ext cx="3521302" cy="274320"/>
+          </a:xfrm>
+          <a:prstGeom prst="rect">
+            <a:avLst/>
+          </a:prstGeom>
+          <a:noFill/>
+          <a:ln/>
+        </p:spPr>
+        <p:txBody>
+          <a:bodyPr wrap="square" anchor="t" lIns="25400" rIns="25400" tIns="25400" bIns="25400">
             <a:spAutoFit/>
           </a:bodyPr>
           <a:lstStyle/>
@@ -5924,312 +6547,78 @@
               </a:spcAft>
             </a:pPr>
             <a:r>
-              <a:rPr sz="1450" b="1" i="0">
+              <a:rPr sz="1250" b="1" i="0">
                 <a:solidFill>
                   <a:srgbClr val="20242A"/>
                 </a:solidFill>
                 <a:latin typeface="Helvetica Neue"/>
                 <a:ea typeface="Hiragino Sans GB"/>
               </a:rPr>
-              <a:t>122</a:t>
-            </a:r>
-          </a:p>
-        </p:txBody>
-      </p:sp>
-      <p:sp>
-        <p:nvSpPr>
-          <p:cNvPr id="11" name="TextBox 10"/>
-          <p:cNvSpPr txBox="1"/>
-          <p:nvPr/>
-        </p:nvSpPr>
-        <p:spPr>
-          <a:xfrm>
-            <a:off x="365760" y="2514600"/>
-            <a:ext cx="3108097" cy="256032"/>
-          </a:xfrm>
-          <a:prstGeom prst="rect">
-            <a:avLst/>
-          </a:prstGeom>
-          <a:noFill/>
-          <a:ln/>
-        </p:spPr>
-        <p:txBody>
-          <a:bodyPr wrap="square" anchor="b" lIns="25400" rIns="25400" tIns="25400" bIns="25400">
+              <a:t>Randstad core runs hottest</a:t>
+            </a:r>
+          </a:p>
+        </p:txBody>
+      </p:sp>
+      <p:sp>
+        <p:nvSpPr>
+          <p:cNvPr id="27" name="TextBox 26"/>
+          <p:cNvSpPr txBox="1"/>
+          <p:nvPr/>
+        </p:nvSpPr>
+        <p:spPr>
+          <a:xfrm>
+            <a:off x="5183785" y="3145535"/>
+            <a:ext cx="3521302" cy="365760"/>
+          </a:xfrm>
+          <a:prstGeom prst="rect">
+            <a:avLst/>
+          </a:prstGeom>
+          <a:noFill/>
+          <a:ln/>
+        </p:spPr>
+        <p:txBody>
+          <a:bodyPr wrap="square" anchor="t" lIns="25400" rIns="25400" tIns="25400" bIns="25400">
             <a:spAutoFit/>
           </a:bodyPr>
           <a:lstStyle/>
           <a:p>
             <a:pPr algn="l">
               <a:lnSpc>
-                <a:spcPct val="100000"/>
-              </a:lnSpc>
-              <a:spcBef>
-                <a:spcPts val="0"/>
-              </a:spcBef>
-              <a:spcAft>
-                <a:spcPts val="0"/>
-              </a:spcAft>
-            </a:pPr>
-            <a:r>
-              <a:rPr sz="1250" b="0" i="0">
-                <a:solidFill>
-                  <a:srgbClr val="8A8478"/>
+                <a:spcPct val="112000"/>
+              </a:lnSpc>
+              <a:spcBef>
+                <a:spcPts val="0"/>
+              </a:spcBef>
+              <a:spcAft>
+                <a:spcPts val="0"/>
+              </a:spcAft>
+            </a:pPr>
+            <a:r>
+              <a:rPr sz="1050" b="0" i="0">
+                <a:solidFill>
+                  <a:srgbClr val="4A4E56"/>
                 </a:solidFill>
                 <a:latin typeface="Helvetica Neue"/>
                 <a:ea typeface="Hiragino Sans GB"/>
               </a:rPr>
-              <a:t>Zeeland</a:t>
-            </a:r>
-          </a:p>
-        </p:txBody>
-      </p:sp>
-      <p:sp>
-        <p:nvSpPr>
-          <p:cNvPr id="12" name="Rounded Rectangle 11"/>
+              <a:t>Utrecht and the central belt lead the country for tension.</a:t>
+            </a:r>
+          </a:p>
+        </p:txBody>
+      </p:sp>
+      <p:sp>
+        <p:nvSpPr>
+          <p:cNvPr id="28" name="Rectangle 27"/>
           <p:cNvSpPr/>
           <p:nvPr/>
         </p:nvSpPr>
         <p:spPr>
           <a:xfrm>
-            <a:off x="365760" y="2770632"/>
-            <a:ext cx="3108097" cy="182880"/>
-          </a:xfrm>
-          <a:prstGeom prst="roundRect">
-            <a:avLst>
-              <a:gd name="adj" fmla="val 50000"/>
-            </a:avLst>
-          </a:prstGeom>
-          <a:solidFill>
-            <a:srgbClr val="E7DFD1"/>
-          </a:solidFill>
-          <a:ln>
-            <a:noFill/>
-          </a:ln>
-          <a:effectLst/>
-        </p:spPr>
-        <p:style>
-          <a:lnRef idx="1">
-            <a:schemeClr val="accent1"/>
-          </a:lnRef>
-          <a:fillRef idx="3">
-            <a:schemeClr val="accent1"/>
-          </a:fillRef>
-          <a:effectRef idx="2">
-            <a:schemeClr val="accent1"/>
-          </a:effectRef>
-          <a:fontRef idx="minor">
-            <a:schemeClr val="lt1"/>
-          </a:fontRef>
-        </p:style>
-        <p:txBody>
-          <a:bodyPr rtlCol="0" anchor="ctr"/>
-          <a:lstStyle/>
-          <a:p>
-            <a:pPr algn="ctr"/>
-          </a:p>
-        </p:txBody>
-      </p:sp>
-      <p:sp>
-        <p:nvSpPr>
-          <p:cNvPr id="13" name="Rounded Rectangle 12"/>
-          <p:cNvSpPr/>
-          <p:nvPr/>
-        </p:nvSpPr>
-        <p:spPr>
-          <a:xfrm>
-            <a:off x="365760" y="2770632"/>
-            <a:ext cx="2615088" cy="182880"/>
-          </a:xfrm>
-          <a:prstGeom prst="roundRect">
-            <a:avLst>
-              <a:gd name="adj" fmla="val 50000"/>
-            </a:avLst>
-          </a:prstGeom>
-          <a:solidFill>
-            <a:srgbClr val="D8542A"/>
-          </a:solidFill>
-          <a:ln>
-            <a:noFill/>
-          </a:ln>
-          <a:effectLst/>
-        </p:spPr>
-        <p:style>
-          <a:lnRef idx="1">
-            <a:schemeClr val="accent1"/>
-          </a:lnRef>
-          <a:fillRef idx="3">
-            <a:schemeClr val="accent1"/>
-          </a:fillRef>
-          <a:effectRef idx="2">
-            <a:schemeClr val="accent1"/>
-          </a:effectRef>
-          <a:fontRef idx="minor">
-            <a:schemeClr val="lt1"/>
-          </a:fontRef>
-        </p:style>
-        <p:txBody>
-          <a:bodyPr rtlCol="0" anchor="ctr"/>
-          <a:lstStyle/>
-          <a:p>
-            <a:pPr algn="ctr"/>
-          </a:p>
-        </p:txBody>
-      </p:sp>
-      <p:sp>
-        <p:nvSpPr>
-          <p:cNvPr id="14" name="TextBox 13"/>
-          <p:cNvSpPr txBox="1"/>
-          <p:nvPr/>
-        </p:nvSpPr>
-        <p:spPr>
-          <a:xfrm>
-            <a:off x="3656737" y="2770632"/>
-            <a:ext cx="777240" cy="182880"/>
-          </a:xfrm>
-          <a:prstGeom prst="rect">
-            <a:avLst/>
-          </a:prstGeom>
-          <a:noFill/>
-          <a:ln/>
-        </p:spPr>
-        <p:txBody>
-          <a:bodyPr wrap="square" anchor="ctr" lIns="25400" rIns="25400" tIns="25400" bIns="25400">
-            <a:spAutoFit/>
-          </a:bodyPr>
-          <a:lstStyle/>
-          <a:p>
-            <a:pPr algn="l">
-              <a:lnSpc>
-                <a:spcPct val="100000"/>
-              </a:lnSpc>
-              <a:spcBef>
-                <a:spcPts val="0"/>
-              </a:spcBef>
-              <a:spcAft>
-                <a:spcPts val="0"/>
-              </a:spcAft>
-            </a:pPr>
-            <a:r>
-              <a:rPr sz="1450" b="1" i="0">
-                <a:solidFill>
-                  <a:srgbClr val="20242A"/>
-                </a:solidFill>
-                <a:latin typeface="Helvetica Neue"/>
-                <a:ea typeface="Hiragino Sans GB"/>
-              </a:rPr>
-              <a:t>122</a:t>
-            </a:r>
-          </a:p>
-        </p:txBody>
-      </p:sp>
-      <p:sp>
-        <p:nvSpPr>
-          <p:cNvPr id="15" name="TextBox 14"/>
-          <p:cNvSpPr txBox="1"/>
-          <p:nvPr/>
-        </p:nvSpPr>
-        <p:spPr>
-          <a:xfrm>
-            <a:off x="365760" y="3063240"/>
-            <a:ext cx="3108097" cy="256032"/>
-          </a:xfrm>
-          <a:prstGeom prst="rect">
-            <a:avLst/>
-          </a:prstGeom>
-          <a:noFill/>
-          <a:ln/>
-        </p:spPr>
-        <p:txBody>
-          <a:bodyPr wrap="square" anchor="b" lIns="25400" rIns="25400" tIns="25400" bIns="25400">
-            <a:spAutoFit/>
-          </a:bodyPr>
-          <a:lstStyle/>
-          <a:p>
-            <a:pPr algn="l">
-              <a:lnSpc>
-                <a:spcPct val="100000"/>
-              </a:lnSpc>
-              <a:spcBef>
-                <a:spcPts val="0"/>
-              </a:spcBef>
-              <a:spcAft>
-                <a:spcPts val="0"/>
-              </a:spcAft>
-            </a:pPr>
-            <a:r>
-              <a:rPr sz="1250" b="0" i="0">
-                <a:solidFill>
-                  <a:srgbClr val="8A8478"/>
-                </a:solidFill>
-                <a:latin typeface="Helvetica Neue"/>
-                <a:ea typeface="Hiragino Sans GB"/>
-              </a:rPr>
-              <a:t>Netherlands (avg)</a:t>
-            </a:r>
-          </a:p>
-        </p:txBody>
-      </p:sp>
-      <p:sp>
-        <p:nvSpPr>
-          <p:cNvPr id="16" name="Rounded Rectangle 15"/>
-          <p:cNvSpPr/>
-          <p:nvPr/>
-        </p:nvSpPr>
-        <p:spPr>
-          <a:xfrm>
-            <a:off x="365760" y="3319272"/>
-            <a:ext cx="3108097" cy="182880"/>
-          </a:xfrm>
-          <a:prstGeom prst="roundRect">
-            <a:avLst>
-              <a:gd name="adj" fmla="val 50000"/>
-            </a:avLst>
-          </a:prstGeom>
-          <a:solidFill>
-            <a:srgbClr val="E7DFD1"/>
-          </a:solidFill>
-          <a:ln>
-            <a:noFill/>
-          </a:ln>
-          <a:effectLst/>
-        </p:spPr>
-        <p:style>
-          <a:lnRef idx="1">
-            <a:schemeClr val="accent1"/>
-          </a:lnRef>
-          <a:fillRef idx="3">
-            <a:schemeClr val="accent1"/>
-          </a:fillRef>
-          <a:effectRef idx="2">
-            <a:schemeClr val="accent1"/>
-          </a:effectRef>
-          <a:fontRef idx="minor">
-            <a:schemeClr val="lt1"/>
-          </a:fontRef>
-        </p:style>
-        <p:txBody>
-          <a:bodyPr rtlCol="0" anchor="ctr"/>
-          <a:lstStyle/>
-          <a:p>
-            <a:pPr algn="ctr"/>
-          </a:p>
-        </p:txBody>
-      </p:sp>
-      <p:sp>
-        <p:nvSpPr>
-          <p:cNvPr id="17" name="Rounded Rectangle 16"/>
-          <p:cNvSpPr/>
-          <p:nvPr/>
-        </p:nvSpPr>
-        <p:spPr>
-          <a:xfrm>
-            <a:off x="365760" y="3319272"/>
-            <a:ext cx="1950599" cy="182880"/>
-          </a:xfrm>
-          <a:prstGeom prst="roundRect">
-            <a:avLst>
-              <a:gd name="adj" fmla="val 50000"/>
-            </a:avLst>
+            <a:off x="4982617" y="3529583"/>
+            <a:ext cx="64008" cy="603504"/>
+          </a:xfrm>
+          <a:prstGeom prst="rect">
+            <a:avLst/>
           </a:prstGeom>
           <a:solidFill>
             <a:srgbClr val="0E5C63"/>
@@ -6263,572 +6652,7 @@
       </p:sp>
       <p:sp>
         <p:nvSpPr>
-          <p:cNvPr id="18" name="TextBox 17"/>
-          <p:cNvSpPr txBox="1"/>
-          <p:nvPr/>
-        </p:nvSpPr>
-        <p:spPr>
-          <a:xfrm>
-            <a:off x="3656737" y="3319272"/>
-            <a:ext cx="777240" cy="182880"/>
-          </a:xfrm>
-          <a:prstGeom prst="rect">
-            <a:avLst/>
-          </a:prstGeom>
-          <a:noFill/>
-          <a:ln/>
-        </p:spPr>
-        <p:txBody>
-          <a:bodyPr wrap="square" anchor="ctr" lIns="25400" rIns="25400" tIns="25400" bIns="25400">
-            <a:spAutoFit/>
-          </a:bodyPr>
-          <a:lstStyle/>
-          <a:p>
-            <a:pPr algn="l">
-              <a:lnSpc>
-                <a:spcPct val="100000"/>
-              </a:lnSpc>
-              <a:spcBef>
-                <a:spcPts val="0"/>
-              </a:spcBef>
-              <a:spcAft>
-                <a:spcPts val="0"/>
-              </a:spcAft>
-            </a:pPr>
-            <a:r>
-              <a:rPr sz="1450" b="1" i="0">
-                <a:solidFill>
-                  <a:srgbClr val="20242A"/>
-                </a:solidFill>
-                <a:latin typeface="Helvetica Neue"/>
-                <a:ea typeface="Hiragino Sans GB"/>
-              </a:rPr>
-              <a:t>91</a:t>
-            </a:r>
-          </a:p>
-        </p:txBody>
-      </p:sp>
-      <p:sp>
-        <p:nvSpPr>
-          <p:cNvPr id="19" name="TextBox 18"/>
-          <p:cNvSpPr txBox="1"/>
-          <p:nvPr/>
-        </p:nvSpPr>
-        <p:spPr>
-          <a:xfrm>
-            <a:off x="365760" y="3611880"/>
-            <a:ext cx="3108097" cy="256032"/>
-          </a:xfrm>
-          <a:prstGeom prst="rect">
-            <a:avLst/>
-          </a:prstGeom>
-          <a:noFill/>
-          <a:ln/>
-        </p:spPr>
-        <p:txBody>
-          <a:bodyPr wrap="square" anchor="b" lIns="25400" rIns="25400" tIns="25400" bIns="25400">
-            <a:spAutoFit/>
-          </a:bodyPr>
-          <a:lstStyle/>
-          <a:p>
-            <a:pPr algn="l">
-              <a:lnSpc>
-                <a:spcPct val="100000"/>
-              </a:lnSpc>
-              <a:spcBef>
-                <a:spcPts val="0"/>
-              </a:spcBef>
-              <a:spcAft>
-                <a:spcPts val="0"/>
-              </a:spcAft>
-            </a:pPr>
-            <a:r>
-              <a:rPr sz="1250" b="0" i="0">
-                <a:solidFill>
-                  <a:srgbClr val="8A8478"/>
-                </a:solidFill>
-                <a:latin typeface="Helvetica Neue"/>
-                <a:ea typeface="Hiragino Sans GB"/>
-              </a:rPr>
-              <a:t>Groningen (recovering)</a:t>
-            </a:r>
-          </a:p>
-        </p:txBody>
-      </p:sp>
-      <p:sp>
-        <p:nvSpPr>
-          <p:cNvPr id="20" name="Rounded Rectangle 19"/>
-          <p:cNvSpPr/>
-          <p:nvPr/>
-        </p:nvSpPr>
-        <p:spPr>
-          <a:xfrm>
-            <a:off x="365760" y="3867912"/>
-            <a:ext cx="3108097" cy="182880"/>
-          </a:xfrm>
-          <a:prstGeom prst="roundRect">
-            <a:avLst>
-              <a:gd name="adj" fmla="val 50000"/>
-            </a:avLst>
-          </a:prstGeom>
-          <a:solidFill>
-            <a:srgbClr val="E7DFD1"/>
-          </a:solidFill>
-          <a:ln>
-            <a:noFill/>
-          </a:ln>
-          <a:effectLst/>
-        </p:spPr>
-        <p:style>
-          <a:lnRef idx="1">
-            <a:schemeClr val="accent1"/>
-          </a:lnRef>
-          <a:fillRef idx="3">
-            <a:schemeClr val="accent1"/>
-          </a:fillRef>
-          <a:effectRef idx="2">
-            <a:schemeClr val="accent1"/>
-          </a:effectRef>
-          <a:fontRef idx="minor">
-            <a:schemeClr val="lt1"/>
-          </a:fontRef>
-        </p:style>
-        <p:txBody>
-          <a:bodyPr rtlCol="0" anchor="ctr"/>
-          <a:lstStyle/>
-          <a:p>
-            <a:pPr algn="ctr"/>
-          </a:p>
-        </p:txBody>
-      </p:sp>
-      <p:sp>
-        <p:nvSpPr>
-          <p:cNvPr id="21" name="Rounded Rectangle 20"/>
-          <p:cNvSpPr/>
-          <p:nvPr/>
-        </p:nvSpPr>
-        <p:spPr>
-          <a:xfrm>
-            <a:off x="365760" y="3867912"/>
-            <a:ext cx="1671942" cy="182880"/>
-          </a:xfrm>
-          <a:prstGeom prst="roundRect">
-            <a:avLst>
-              <a:gd name="adj" fmla="val 50000"/>
-            </a:avLst>
-          </a:prstGeom>
-          <a:solidFill>
-            <a:srgbClr val="2E8A8C"/>
-          </a:solidFill>
-          <a:ln>
-            <a:noFill/>
-          </a:ln>
-          <a:effectLst/>
-        </p:spPr>
-        <p:style>
-          <a:lnRef idx="1">
-            <a:schemeClr val="accent1"/>
-          </a:lnRef>
-          <a:fillRef idx="3">
-            <a:schemeClr val="accent1"/>
-          </a:fillRef>
-          <a:effectRef idx="2">
-            <a:schemeClr val="accent1"/>
-          </a:effectRef>
-          <a:fontRef idx="minor">
-            <a:schemeClr val="lt1"/>
-          </a:fontRef>
-        </p:style>
-        <p:txBody>
-          <a:bodyPr rtlCol="0" anchor="ctr"/>
-          <a:lstStyle/>
-          <a:p>
-            <a:pPr algn="ctr"/>
-          </a:p>
-        </p:txBody>
-      </p:sp>
-      <p:sp>
-        <p:nvSpPr>
-          <p:cNvPr id="22" name="TextBox 21"/>
-          <p:cNvSpPr txBox="1"/>
-          <p:nvPr/>
-        </p:nvSpPr>
-        <p:spPr>
-          <a:xfrm>
-            <a:off x="3656737" y="3867912"/>
-            <a:ext cx="777240" cy="182880"/>
-          </a:xfrm>
-          <a:prstGeom prst="rect">
-            <a:avLst/>
-          </a:prstGeom>
-          <a:noFill/>
-          <a:ln/>
-        </p:spPr>
-        <p:txBody>
-          <a:bodyPr wrap="square" anchor="ctr" lIns="25400" rIns="25400" tIns="25400" bIns="25400">
-            <a:spAutoFit/>
-          </a:bodyPr>
-          <a:lstStyle/>
-          <a:p>
-            <a:pPr algn="l">
-              <a:lnSpc>
-                <a:spcPct val="100000"/>
-              </a:lnSpc>
-              <a:spcBef>
-                <a:spcPts val="0"/>
-              </a:spcBef>
-              <a:spcAft>
-                <a:spcPts val="0"/>
-              </a:spcAft>
-            </a:pPr>
-            <a:r>
-              <a:rPr sz="1450" b="1" i="0">
-                <a:solidFill>
-                  <a:srgbClr val="20242A"/>
-                </a:solidFill>
-                <a:latin typeface="Helvetica Neue"/>
-                <a:ea typeface="Hiragino Sans GB"/>
-              </a:rPr>
-              <a:t>78</a:t>
-            </a:r>
-          </a:p>
-        </p:txBody>
-      </p:sp>
-      <p:sp>
-        <p:nvSpPr>
-          <p:cNvPr id="23" name="Rounded Rectangle 22"/>
-          <p:cNvSpPr/>
-          <p:nvPr/>
-        </p:nvSpPr>
-        <p:spPr>
-          <a:xfrm>
-            <a:off x="4982617" y="1554480"/>
-            <a:ext cx="3795622" cy="1133856"/>
-          </a:xfrm>
-          <a:prstGeom prst="roundRect">
-            <a:avLst>
-              <a:gd name="adj" fmla="val 8870"/>
-            </a:avLst>
-          </a:prstGeom>
-          <a:solidFill>
-            <a:srgbClr val="16223A"/>
-          </a:solidFill>
-          <a:ln>
-            <a:noFill/>
-          </a:ln>
-          <a:effectLst/>
-        </p:spPr>
-        <p:style>
-          <a:lnRef idx="1">
-            <a:schemeClr val="accent1"/>
-          </a:lnRef>
-          <a:fillRef idx="3">
-            <a:schemeClr val="accent1"/>
-          </a:fillRef>
-          <a:effectRef idx="2">
-            <a:schemeClr val="accent1"/>
-          </a:effectRef>
-          <a:fontRef idx="minor">
-            <a:schemeClr val="lt1"/>
-          </a:fontRef>
-        </p:style>
-        <p:txBody>
-          <a:bodyPr rtlCol="0" anchor="ctr"/>
-          <a:lstStyle/>
-          <a:p>
-            <a:pPr algn="ctr"/>
-          </a:p>
-        </p:txBody>
-      </p:sp>
-      <p:sp>
-        <p:nvSpPr>
-          <p:cNvPr id="24" name="TextBox 23"/>
-          <p:cNvSpPr txBox="1"/>
-          <p:nvPr/>
-        </p:nvSpPr>
-        <p:spPr>
-          <a:xfrm>
-            <a:off x="5238649" y="1755648"/>
-            <a:ext cx="3338422" cy="457200"/>
-          </a:xfrm>
-          <a:prstGeom prst="rect">
-            <a:avLst/>
-          </a:prstGeom>
-          <a:noFill/>
-          <a:ln/>
-        </p:spPr>
-        <p:txBody>
-          <a:bodyPr wrap="none" anchor="t" lIns="25400" rIns="25400" tIns="25400" bIns="25400">
-            <a:spAutoFit/>
-          </a:bodyPr>
-          <a:lstStyle/>
-          <a:p>
-            <a:pPr algn="l">
-              <a:lnSpc>
-                <a:spcPct val="100000"/>
-              </a:lnSpc>
-              <a:spcBef>
-                <a:spcPts val="0"/>
-              </a:spcBef>
-              <a:spcAft>
-                <a:spcPts val="0"/>
-              </a:spcAft>
-            </a:pPr>
-            <a:r>
-              <a:rPr sz="2900" b="1" i="0">
-                <a:solidFill>
-                  <a:srgbClr val="D8542A"/>
-                </a:solidFill>
-                <a:latin typeface="Helvetica Neue"/>
-                <a:ea typeface="Hiragino Sans GB"/>
-              </a:rPr>
-              <a:t>13 of 35</a:t>
-            </a:r>
-            <a:r>
-              <a:rPr sz="1300" b="0" i="0">
-                <a:solidFill>
-                  <a:srgbClr val="C9D2DE"/>
-                </a:solidFill>
-                <a:latin typeface="Helvetica Neue"/>
-                <a:ea typeface="Hiragino Sans GB"/>
-              </a:rPr>
-              <a:t>  regions</a:t>
-            </a:r>
-          </a:p>
-        </p:txBody>
-      </p:sp>
-      <p:sp>
-        <p:nvSpPr>
-          <p:cNvPr id="25" name="TextBox 24"/>
-          <p:cNvSpPr txBox="1"/>
-          <p:nvPr/>
-        </p:nvSpPr>
-        <p:spPr>
-          <a:xfrm>
-            <a:off x="5238649" y="2249424"/>
-            <a:ext cx="3320134" cy="365760"/>
-          </a:xfrm>
-          <a:prstGeom prst="rect">
-            <a:avLst/>
-          </a:prstGeom>
-          <a:noFill/>
-          <a:ln/>
-        </p:spPr>
-        <p:txBody>
-          <a:bodyPr wrap="square" anchor="t" lIns="25400" rIns="25400" tIns="25400" bIns="25400">
-            <a:spAutoFit/>
-          </a:bodyPr>
-          <a:lstStyle/>
-          <a:p>
-            <a:pPr algn="l">
-              <a:lnSpc>
-                <a:spcPct val="116000"/>
-              </a:lnSpc>
-              <a:spcBef>
-                <a:spcPts val="0"/>
-              </a:spcBef>
-              <a:spcAft>
-                <a:spcPts val="0"/>
-              </a:spcAft>
-            </a:pPr>
-            <a:r>
-              <a:rPr sz="1050" b="0" i="0">
-                <a:solidFill>
-                  <a:srgbClr val="9BA6B4"/>
-                </a:solidFill>
-                <a:latin typeface="Helvetica Neue"/>
-                <a:ea typeface="Hiragino Sans GB"/>
-              </a:rPr>
-              <a:t>classed “extremely tight” (5+ vacancies per jobseeker).</a:t>
-            </a:r>
-          </a:p>
-        </p:txBody>
-      </p:sp>
-      <p:sp>
-        <p:nvSpPr>
-          <p:cNvPr id="26" name="Rectangle 25"/>
-          <p:cNvSpPr/>
-          <p:nvPr/>
-        </p:nvSpPr>
-        <p:spPr>
-          <a:xfrm>
-            <a:off x="4982617" y="2871215"/>
-            <a:ext cx="64008" cy="603504"/>
-          </a:xfrm>
-          <a:prstGeom prst="rect">
-            <a:avLst/>
-          </a:prstGeom>
-          <a:solidFill>
-            <a:srgbClr val="D8542A"/>
-          </a:solidFill>
-          <a:ln>
-            <a:noFill/>
-          </a:ln>
-          <a:effectLst/>
-        </p:spPr>
-        <p:style>
-          <a:lnRef idx="1">
-            <a:schemeClr val="accent1"/>
-          </a:lnRef>
-          <a:fillRef idx="3">
-            <a:schemeClr val="accent1"/>
-          </a:fillRef>
-          <a:effectRef idx="2">
-            <a:schemeClr val="accent1"/>
-          </a:effectRef>
-          <a:fontRef idx="minor">
-            <a:schemeClr val="lt1"/>
-          </a:fontRef>
-        </p:style>
-        <p:txBody>
-          <a:bodyPr rtlCol="0" anchor="ctr"/>
-          <a:lstStyle/>
-          <a:p>
-            <a:pPr algn="ctr"/>
-          </a:p>
-        </p:txBody>
-      </p:sp>
-      <p:sp>
-        <p:nvSpPr>
-          <p:cNvPr id="27" name="TextBox 26"/>
-          <p:cNvSpPr txBox="1"/>
-          <p:nvPr/>
-        </p:nvSpPr>
-        <p:spPr>
-          <a:xfrm>
-            <a:off x="5183785" y="2871215"/>
-            <a:ext cx="3521302" cy="274320"/>
-          </a:xfrm>
-          <a:prstGeom prst="rect">
-            <a:avLst/>
-          </a:prstGeom>
-          <a:noFill/>
-          <a:ln/>
-        </p:spPr>
-        <p:txBody>
-          <a:bodyPr wrap="square" anchor="t" lIns="25400" rIns="25400" tIns="25400" bIns="25400">
-            <a:spAutoFit/>
-          </a:bodyPr>
-          <a:lstStyle/>
-          <a:p>
-            <a:pPr algn="l">
-              <a:lnSpc>
-                <a:spcPct val="100000"/>
-              </a:lnSpc>
-              <a:spcBef>
-                <a:spcPts val="0"/>
-              </a:spcBef>
-              <a:spcAft>
-                <a:spcPts val="0"/>
-              </a:spcAft>
-            </a:pPr>
-            <a:r>
-              <a:rPr sz="1250" b="1" i="0">
-                <a:solidFill>
-                  <a:srgbClr val="20242A"/>
-                </a:solidFill>
-                <a:latin typeface="Helvetica Neue"/>
-                <a:ea typeface="Hiragino Sans GB"/>
-              </a:rPr>
-              <a:t>Randstad core runs hottest</a:t>
-            </a:r>
-          </a:p>
-        </p:txBody>
-      </p:sp>
-      <p:sp>
-        <p:nvSpPr>
-          <p:cNvPr id="28" name="TextBox 27"/>
-          <p:cNvSpPr txBox="1"/>
-          <p:nvPr/>
-        </p:nvSpPr>
-        <p:spPr>
-          <a:xfrm>
-            <a:off x="5183785" y="3145535"/>
-            <a:ext cx="3521302" cy="365760"/>
-          </a:xfrm>
-          <a:prstGeom prst="rect">
-            <a:avLst/>
-          </a:prstGeom>
-          <a:noFill/>
-          <a:ln/>
-        </p:spPr>
-        <p:txBody>
-          <a:bodyPr wrap="square" anchor="t" lIns="25400" rIns="25400" tIns="25400" bIns="25400">
-            <a:spAutoFit/>
-          </a:bodyPr>
-          <a:lstStyle/>
-          <a:p>
-            <a:pPr algn="l">
-              <a:lnSpc>
-                <a:spcPct val="112000"/>
-              </a:lnSpc>
-              <a:spcBef>
-                <a:spcPts val="0"/>
-              </a:spcBef>
-              <a:spcAft>
-                <a:spcPts val="0"/>
-              </a:spcAft>
-            </a:pPr>
-            <a:r>
-              <a:rPr sz="1050" b="0" i="0">
-                <a:solidFill>
-                  <a:srgbClr val="4A4E56"/>
-                </a:solidFill>
-                <a:latin typeface="Helvetica Neue"/>
-                <a:ea typeface="Hiragino Sans GB"/>
-              </a:rPr>
-              <a:t>Utrecht and the central belt lead the country for tension.</a:t>
-            </a:r>
-          </a:p>
-        </p:txBody>
-      </p:sp>
-      <p:sp>
-        <p:nvSpPr>
-          <p:cNvPr id="29" name="Rectangle 28"/>
-          <p:cNvSpPr/>
-          <p:nvPr/>
-        </p:nvSpPr>
-        <p:spPr>
-          <a:xfrm>
-            <a:off x="4982617" y="3529583"/>
-            <a:ext cx="64008" cy="603504"/>
-          </a:xfrm>
-          <a:prstGeom prst="rect">
-            <a:avLst/>
-          </a:prstGeom>
-          <a:solidFill>
-            <a:srgbClr val="0E5C63"/>
-          </a:solidFill>
-          <a:ln>
-            <a:noFill/>
-          </a:ln>
-          <a:effectLst/>
-        </p:spPr>
-        <p:style>
-          <a:lnRef idx="1">
-            <a:schemeClr val="accent1"/>
-          </a:lnRef>
-          <a:fillRef idx="3">
-            <a:schemeClr val="accent1"/>
-          </a:fillRef>
-          <a:effectRef idx="2">
-            <a:schemeClr val="accent1"/>
-          </a:effectRef>
-          <a:fontRef idx="minor">
-            <a:schemeClr val="lt1"/>
-          </a:fontRef>
-        </p:style>
-        <p:txBody>
-          <a:bodyPr rtlCol="0" anchor="ctr"/>
-          <a:lstStyle/>
-          <a:p>
-            <a:pPr algn="ctr"/>
-          </a:p>
-        </p:txBody>
-      </p:sp>
-      <p:sp>
-        <p:nvSpPr>
-          <p:cNvPr id="30" name="TextBox 29"/>
+          <p:cNvPr id="29" name="TextBox 28"/>
           <p:cNvSpPr txBox="1"/>
           <p:nvPr/>
         </p:nvSpPr>
@@ -6875,7 +6699,7 @@
       </p:sp>
       <p:sp>
         <p:nvSpPr>
-          <p:cNvPr id="31" name="TextBox 30"/>
+          <p:cNvPr id="30" name="TextBox 29"/>
           <p:cNvSpPr txBox="1"/>
           <p:nvPr/>
         </p:nvSpPr>
@@ -6922,7 +6746,7 @@
       </p:sp>
       <p:sp>
         <p:nvSpPr>
-          <p:cNvPr id="32" name="TextBox 31"/>
+          <p:cNvPr id="31" name="TextBox 30"/>
           <p:cNvSpPr txBox="1"/>
           <p:nvPr/>
         </p:nvSpPr>
@@ -6979,7 +6803,7 @@
       </p:sp>
       <p:sp>
         <p:nvSpPr>
-          <p:cNvPr id="33" name="TextBox 32"/>
+          <p:cNvPr id="32" name="TextBox 31"/>
           <p:cNvSpPr txBox="1"/>
           <p:nvPr/>
         </p:nvSpPr>
@@ -7026,7 +6850,7 @@
       </p:sp>
       <p:sp>
         <p:nvSpPr>
-          <p:cNvPr id="34" name="TextBox 33"/>
+          <p:cNvPr id="33" name="TextBox 32"/>
           <p:cNvSpPr txBox="1"/>
           <p:nvPr/>
         </p:nvSpPr>
@@ -7182,51 +7006,7 @@
       </p:sp>
       <p:sp>
         <p:nvSpPr>
-          <p:cNvPr id="4" name="Rectangle 3"/>
-          <p:cNvSpPr/>
-          <p:nvPr/>
-        </p:nvSpPr>
-        <p:spPr>
-          <a:xfrm>
-            <a:off x="566928" y="841248"/>
-            <a:ext cx="1188720" cy="50292"/>
-          </a:xfrm>
-          <a:prstGeom prst="rect">
-            <a:avLst/>
-          </a:prstGeom>
-          <a:solidFill>
-            <a:srgbClr val="D8542A"/>
-          </a:solidFill>
-          <a:ln>
-            <a:noFill/>
-          </a:ln>
-          <a:effectLst/>
-        </p:spPr>
-        <p:style>
-          <a:lnRef idx="1">
-            <a:schemeClr val="accent1"/>
-          </a:lnRef>
-          <a:fillRef idx="3">
-            <a:schemeClr val="accent1"/>
-          </a:fillRef>
-          <a:effectRef idx="2">
-            <a:schemeClr val="accent1"/>
-          </a:effectRef>
-          <a:fontRef idx="minor">
-            <a:schemeClr val="lt1"/>
-          </a:fontRef>
-        </p:style>
-        <p:txBody>
-          <a:bodyPr rtlCol="0" anchor="ctr"/>
-          <a:lstStyle/>
-          <a:p>
-            <a:pPr algn="ctr"/>
-          </a:p>
-        </p:txBody>
-      </p:sp>
-      <p:sp>
-        <p:nvSpPr>
-          <p:cNvPr id="5" name="TextBox 4"/>
+          <p:cNvPr id="4" name="TextBox 3"/>
           <p:cNvSpPr txBox="1"/>
           <p:nvPr/>
         </p:nvSpPr>
@@ -7273,7 +7053,7 @@
       </p:sp>
       <p:sp>
         <p:nvSpPr>
-          <p:cNvPr id="6" name="Rounded Rectangle 5"/>
+          <p:cNvPr id="5" name="Rounded Rectangle 4"/>
           <p:cNvSpPr/>
           <p:nvPr/>
         </p:nvSpPr>
@@ -7319,7 +7099,7 @@
       </p:sp>
       <p:sp>
         <p:nvSpPr>
-          <p:cNvPr id="7" name="Rounded Rectangle 6"/>
+          <p:cNvPr id="6" name="Rounded Rectangle 5"/>
           <p:cNvSpPr/>
           <p:nvPr/>
         </p:nvSpPr>
@@ -7365,7 +7145,7 @@
       </p:sp>
       <p:pic>
         <p:nvPicPr>
-          <p:cNvPr id="8" name="Picture 7" descr="trending-up_0E5C63.png"/>
+          <p:cNvPr id="7" name="Picture 6" descr="trending-up_0E5C63.png"/>
           <p:cNvPicPr>
             <a:picLocks noChangeAspect="1"/>
           </p:cNvPicPr>
@@ -7389,7 +7169,7 @@
       </p:pic>
       <p:sp>
         <p:nvSpPr>
-          <p:cNvPr id="9" name="TextBox 8"/>
+          <p:cNvPr id="8" name="TextBox 7"/>
           <p:cNvSpPr txBox="1"/>
           <p:nvPr/>
         </p:nvSpPr>
@@ -7436,7 +7216,7 @@
       </p:sp>
       <p:sp>
         <p:nvSpPr>
-          <p:cNvPr id="10" name="TextBox 9"/>
+          <p:cNvPr id="9" name="TextBox 8"/>
           <p:cNvSpPr txBox="1"/>
           <p:nvPr/>
         </p:nvSpPr>
@@ -7483,7 +7263,7 @@
       </p:sp>
       <p:sp>
         <p:nvSpPr>
-          <p:cNvPr id="11" name="Rounded Rectangle 10"/>
+          <p:cNvPr id="10" name="Rounded Rectangle 9"/>
           <p:cNvSpPr/>
           <p:nvPr/>
         </p:nvSpPr>
@@ -7529,7 +7309,7 @@
       </p:sp>
       <p:sp>
         <p:nvSpPr>
-          <p:cNvPr id="12" name="Rounded Rectangle 11"/>
+          <p:cNvPr id="11" name="Rounded Rectangle 10"/>
           <p:cNvSpPr/>
           <p:nvPr/>
         </p:nvSpPr>
@@ -7575,7 +7355,7 @@
       </p:sp>
       <p:pic>
         <p:nvPicPr>
-          <p:cNvPr id="13" name="Picture 12" descr="chart-line_2E8A8C.png"/>
+          <p:cNvPr id="12" name="Picture 11" descr="chart-line_2E8A8C.png"/>
           <p:cNvPicPr>
             <a:picLocks noChangeAspect="1"/>
           </p:cNvPicPr>
@@ -7599,7 +7379,7 @@
       </p:pic>
       <p:sp>
         <p:nvSpPr>
-          <p:cNvPr id="14" name="TextBox 13"/>
+          <p:cNvPr id="13" name="TextBox 12"/>
           <p:cNvSpPr txBox="1"/>
           <p:nvPr/>
         </p:nvSpPr>
@@ -7646,7 +7426,7 @@
       </p:sp>
       <p:sp>
         <p:nvSpPr>
-          <p:cNvPr id="15" name="TextBox 14"/>
+          <p:cNvPr id="14" name="TextBox 13"/>
           <p:cNvSpPr txBox="1"/>
           <p:nvPr/>
         </p:nvSpPr>
@@ -7693,7 +7473,7 @@
       </p:sp>
       <p:sp>
         <p:nvSpPr>
-          <p:cNvPr id="16" name="Rounded Rectangle 15"/>
+          <p:cNvPr id="15" name="Rounded Rectangle 14"/>
           <p:cNvSpPr/>
           <p:nvPr/>
         </p:nvSpPr>
@@ -7739,7 +7519,7 @@
       </p:sp>
       <p:sp>
         <p:nvSpPr>
-          <p:cNvPr id="17" name="Rounded Rectangle 16"/>
+          <p:cNvPr id="16" name="Rounded Rectangle 15"/>
           <p:cNvSpPr/>
           <p:nvPr/>
         </p:nvSpPr>
@@ -7785,7 +7565,7 @@
       </p:sp>
       <p:pic>
         <p:nvPicPr>
-          <p:cNvPr id="18" name="Picture 17" descr="users_D8542A.png"/>
+          <p:cNvPr id="17" name="Picture 16" descr="users_D8542A.png"/>
           <p:cNvPicPr>
             <a:picLocks noChangeAspect="1"/>
           </p:cNvPicPr>
@@ -7809,7 +7589,7 @@
       </p:pic>
       <p:sp>
         <p:nvSpPr>
-          <p:cNvPr id="19" name="TextBox 18"/>
+          <p:cNvPr id="18" name="TextBox 17"/>
           <p:cNvSpPr txBox="1"/>
           <p:nvPr/>
         </p:nvSpPr>
@@ -7856,7 +7636,7 @@
       </p:sp>
       <p:sp>
         <p:nvSpPr>
-          <p:cNvPr id="20" name="TextBox 19"/>
+          <p:cNvPr id="19" name="TextBox 18"/>
           <p:cNvSpPr txBox="1"/>
           <p:nvPr/>
         </p:nvSpPr>
@@ -7903,7 +7683,7 @@
       </p:sp>
       <p:sp>
         <p:nvSpPr>
-          <p:cNvPr id="21" name="TextBox 20"/>
+          <p:cNvPr id="20" name="TextBox 19"/>
           <p:cNvSpPr txBox="1"/>
           <p:nvPr/>
         </p:nvSpPr>
@@ -7960,7 +7740,7 @@
       </p:sp>
       <p:sp>
         <p:nvSpPr>
-          <p:cNvPr id="22" name="TextBox 21"/>
+          <p:cNvPr id="21" name="TextBox 20"/>
           <p:cNvSpPr txBox="1"/>
           <p:nvPr/>
         </p:nvSpPr>
@@ -8007,7 +7787,7 @@
       </p:sp>
       <p:sp>
         <p:nvSpPr>
-          <p:cNvPr id="23" name="TextBox 22"/>
+          <p:cNvPr id="22" name="TextBox 21"/>
           <p:cNvSpPr txBox="1"/>
           <p:nvPr/>
         </p:nvSpPr>
@@ -8163,51 +7943,7 @@
       </p:sp>
       <p:sp>
         <p:nvSpPr>
-          <p:cNvPr id="4" name="Rectangle 3"/>
-          <p:cNvSpPr/>
-          <p:nvPr/>
-        </p:nvSpPr>
-        <p:spPr>
-          <a:xfrm>
-            <a:off x="566928" y="841248"/>
-            <a:ext cx="1188720" cy="50292"/>
-          </a:xfrm>
-          <a:prstGeom prst="rect">
-            <a:avLst/>
-          </a:prstGeom>
-          <a:solidFill>
-            <a:srgbClr val="D8542A"/>
-          </a:solidFill>
-          <a:ln>
-            <a:noFill/>
-          </a:ln>
-          <a:effectLst/>
-        </p:spPr>
-        <p:style>
-          <a:lnRef idx="1">
-            <a:schemeClr val="accent1"/>
-          </a:lnRef>
-          <a:fillRef idx="3">
-            <a:schemeClr val="accent1"/>
-          </a:fillRef>
-          <a:effectRef idx="2">
-            <a:schemeClr val="accent1"/>
-          </a:effectRef>
-          <a:fontRef idx="minor">
-            <a:schemeClr val="lt1"/>
-          </a:fontRef>
-        </p:style>
-        <p:txBody>
-          <a:bodyPr rtlCol="0" anchor="ctr"/>
-          <a:lstStyle/>
-          <a:p>
-            <a:pPr algn="ctr"/>
-          </a:p>
-        </p:txBody>
-      </p:sp>
-      <p:sp>
-        <p:nvSpPr>
-          <p:cNvPr id="5" name="TextBox 4"/>
+          <p:cNvPr id="4" name="TextBox 3"/>
           <p:cNvSpPr txBox="1"/>
           <p:nvPr/>
         </p:nvSpPr>
@@ -8254,7 +7990,7 @@
       </p:sp>
       <p:sp>
         <p:nvSpPr>
-          <p:cNvPr id="6" name="TextBox 5"/>
+          <p:cNvPr id="5" name="TextBox 4"/>
           <p:cNvSpPr txBox="1"/>
           <p:nvPr/>
         </p:nvSpPr>
@@ -8301,7 +8037,7 @@
       </p:sp>
       <p:sp>
         <p:nvSpPr>
-          <p:cNvPr id="7" name="TextBox 6"/>
+          <p:cNvPr id="6" name="TextBox 5"/>
           <p:cNvSpPr txBox="1"/>
           <p:nvPr/>
         </p:nvSpPr>
@@ -8348,7 +8084,7 @@
       </p:sp>
       <p:sp>
         <p:nvSpPr>
-          <p:cNvPr id="8" name="TextBox 7"/>
+          <p:cNvPr id="7" name="TextBox 6"/>
           <p:cNvSpPr txBox="1"/>
           <p:nvPr/>
         </p:nvSpPr>
@@ -8395,7 +8131,7 @@
       </p:sp>
       <p:sp>
         <p:nvSpPr>
-          <p:cNvPr id="9" name="Rectangle 8"/>
+          <p:cNvPr id="8" name="Rectangle 7"/>
           <p:cNvSpPr/>
           <p:nvPr/>
         </p:nvSpPr>
@@ -8439,7 +8175,7 @@
       </p:sp>
       <p:sp>
         <p:nvSpPr>
-          <p:cNvPr id="10" name="TextBox 9"/>
+          <p:cNvPr id="9" name="TextBox 8"/>
           <p:cNvSpPr txBox="1"/>
           <p:nvPr/>
         </p:nvSpPr>
@@ -8486,7 +8222,7 @@
       </p:sp>
       <p:sp>
         <p:nvSpPr>
-          <p:cNvPr id="11" name="TextBox 10"/>
+          <p:cNvPr id="10" name="TextBox 9"/>
           <p:cNvSpPr txBox="1"/>
           <p:nvPr/>
         </p:nvSpPr>
@@ -8533,7 +8269,7 @@
       </p:sp>
       <p:sp>
         <p:nvSpPr>
-          <p:cNvPr id="12" name="TextBox 11"/>
+          <p:cNvPr id="11" name="TextBox 10"/>
           <p:cNvSpPr txBox="1"/>
           <p:nvPr/>
         </p:nvSpPr>
@@ -8580,7 +8316,7 @@
       </p:sp>
       <p:sp>
         <p:nvSpPr>
-          <p:cNvPr id="13" name="Rectangle 12"/>
+          <p:cNvPr id="12" name="Rectangle 11"/>
           <p:cNvSpPr/>
           <p:nvPr/>
         </p:nvSpPr>
@@ -8624,7 +8360,7 @@
       </p:sp>
       <p:sp>
         <p:nvSpPr>
-          <p:cNvPr id="14" name="TextBox 13"/>
+          <p:cNvPr id="13" name="TextBox 12"/>
           <p:cNvSpPr txBox="1"/>
           <p:nvPr/>
         </p:nvSpPr>
@@ -8671,7 +8407,7 @@
       </p:sp>
       <p:sp>
         <p:nvSpPr>
-          <p:cNvPr id="15" name="TextBox 14"/>
+          <p:cNvPr id="14" name="TextBox 13"/>
           <p:cNvSpPr txBox="1"/>
           <p:nvPr/>
         </p:nvSpPr>
@@ -8718,7 +8454,7 @@
       </p:sp>
       <p:sp>
         <p:nvSpPr>
-          <p:cNvPr id="16" name="TextBox 15"/>
+          <p:cNvPr id="15" name="TextBox 14"/>
           <p:cNvSpPr txBox="1"/>
           <p:nvPr/>
         </p:nvSpPr>
@@ -8765,7 +8501,7 @@
       </p:sp>
       <p:sp>
         <p:nvSpPr>
-          <p:cNvPr id="17" name="Rectangle 16"/>
+          <p:cNvPr id="16" name="Rectangle 15"/>
           <p:cNvSpPr/>
           <p:nvPr/>
         </p:nvSpPr>
@@ -8809,7 +8545,7 @@
       </p:sp>
       <p:sp>
         <p:nvSpPr>
-          <p:cNvPr id="18" name="TextBox 17"/>
+          <p:cNvPr id="17" name="TextBox 16"/>
           <p:cNvSpPr txBox="1"/>
           <p:nvPr/>
         </p:nvSpPr>
@@ -8856,7 +8592,7 @@
       </p:sp>
       <p:sp>
         <p:nvSpPr>
-          <p:cNvPr id="19" name="TextBox 18"/>
+          <p:cNvPr id="18" name="TextBox 17"/>
           <p:cNvSpPr txBox="1"/>
           <p:nvPr/>
         </p:nvSpPr>
@@ -8903,7 +8639,7 @@
       </p:sp>
       <p:sp>
         <p:nvSpPr>
-          <p:cNvPr id="20" name="TextBox 19"/>
+          <p:cNvPr id="19" name="TextBox 18"/>
           <p:cNvSpPr txBox="1"/>
           <p:nvPr/>
         </p:nvSpPr>
@@ -8950,7 +8686,7 @@
       </p:sp>
       <p:sp>
         <p:nvSpPr>
-          <p:cNvPr id="21" name="Rectangle 20"/>
+          <p:cNvPr id="20" name="Rectangle 19"/>
           <p:cNvSpPr/>
           <p:nvPr/>
         </p:nvSpPr>
@@ -8994,7 +8730,7 @@
       </p:sp>
       <p:sp>
         <p:nvSpPr>
-          <p:cNvPr id="22" name="TextBox 21"/>
+          <p:cNvPr id="21" name="TextBox 20"/>
           <p:cNvSpPr txBox="1"/>
           <p:nvPr/>
         </p:nvSpPr>
@@ -9041,7 +8777,7 @@
       </p:sp>
       <p:sp>
         <p:nvSpPr>
-          <p:cNvPr id="23" name="TextBox 22"/>
+          <p:cNvPr id="22" name="TextBox 21"/>
           <p:cNvSpPr txBox="1"/>
           <p:nvPr/>
         </p:nvSpPr>
@@ -9088,7 +8824,7 @@
       </p:sp>
       <p:sp>
         <p:nvSpPr>
-          <p:cNvPr id="24" name="TextBox 23"/>
+          <p:cNvPr id="23" name="TextBox 22"/>
           <p:cNvSpPr txBox="1"/>
           <p:nvPr/>
         </p:nvSpPr>
@@ -9135,7 +8871,7 @@
       </p:sp>
       <p:sp>
         <p:nvSpPr>
-          <p:cNvPr id="25" name="TextBox 24"/>
+          <p:cNvPr id="24" name="TextBox 23"/>
           <p:cNvSpPr txBox="1"/>
           <p:nvPr/>
         </p:nvSpPr>
@@ -9182,7 +8918,7 @@
       </p:sp>
       <p:sp>
         <p:nvSpPr>
-          <p:cNvPr id="26" name="TextBox 25"/>
+          <p:cNvPr id="25" name="TextBox 24"/>
           <p:cNvSpPr txBox="1"/>
           <p:nvPr/>
         </p:nvSpPr>
@@ -10246,51 +9982,7 @@
       </p:sp>
       <p:sp>
         <p:nvSpPr>
-          <p:cNvPr id="5" name="Rectangle 4"/>
-          <p:cNvSpPr/>
-          <p:nvPr/>
-        </p:nvSpPr>
-        <p:spPr>
-          <a:xfrm>
-            <a:off x="566928" y="1191006"/>
-            <a:ext cx="1097280" cy="45720"/>
-          </a:xfrm>
-          <a:prstGeom prst="rect">
-            <a:avLst/>
-          </a:prstGeom>
-          <a:solidFill>
-            <a:srgbClr val="D8542A"/>
-          </a:solidFill>
-          <a:ln>
-            <a:noFill/>
-          </a:ln>
-          <a:effectLst/>
-        </p:spPr>
-        <p:style>
-          <a:lnRef idx="1">
-            <a:schemeClr val="accent1"/>
-          </a:lnRef>
-          <a:fillRef idx="3">
-            <a:schemeClr val="accent1"/>
-          </a:fillRef>
-          <a:effectRef idx="2">
-            <a:schemeClr val="accent1"/>
-          </a:effectRef>
-          <a:fontRef idx="minor">
-            <a:schemeClr val="lt1"/>
-          </a:fontRef>
-        </p:style>
-        <p:txBody>
-          <a:bodyPr rtlCol="0" anchor="ctr"/>
-          <a:lstStyle/>
-          <a:p>
-            <a:pPr algn="ctr"/>
-          </a:p>
-        </p:txBody>
-      </p:sp>
-      <p:sp>
-        <p:nvSpPr>
-          <p:cNvPr id="6" name="TextBox 5"/>
+          <p:cNvPr id="5" name="TextBox 4"/>
           <p:cNvSpPr txBox="1"/>
           <p:nvPr/>
         </p:nvSpPr>
@@ -10337,7 +10029,7 @@
       </p:sp>
       <p:sp>
         <p:nvSpPr>
-          <p:cNvPr id="7" name="Rounded Rectangle 6"/>
+          <p:cNvPr id="6" name="Rounded Rectangle 5"/>
           <p:cNvSpPr/>
           <p:nvPr/>
         </p:nvSpPr>
@@ -10385,7 +10077,7 @@
       </p:sp>
       <p:sp>
         <p:nvSpPr>
-          <p:cNvPr id="8" name="Round Same Side Corner Rectangle 7"/>
+          <p:cNvPr id="7" name="Round Same Side Corner Rectangle 6"/>
           <p:cNvSpPr/>
           <p:nvPr/>
         </p:nvSpPr>
@@ -10432,7 +10124,7 @@
       </p:sp>
       <p:sp>
         <p:nvSpPr>
-          <p:cNvPr id="9" name="TextBox 8"/>
+          <p:cNvPr id="8" name="TextBox 7"/>
           <p:cNvSpPr txBox="1"/>
           <p:nvPr/>
         </p:nvSpPr>
@@ -10479,7 +10171,7 @@
       </p:sp>
       <p:sp>
         <p:nvSpPr>
-          <p:cNvPr id="10" name="TextBox 9"/>
+          <p:cNvPr id="9" name="TextBox 8"/>
           <p:cNvSpPr txBox="1"/>
           <p:nvPr/>
         </p:nvSpPr>
@@ -10526,7 +10218,7 @@
       </p:sp>
       <p:sp>
         <p:nvSpPr>
-          <p:cNvPr id="11" name="TextBox 10"/>
+          <p:cNvPr id="10" name="TextBox 9"/>
           <p:cNvSpPr txBox="1"/>
           <p:nvPr/>
         </p:nvSpPr>
@@ -10573,7 +10265,7 @@
       </p:sp>
       <p:sp>
         <p:nvSpPr>
-          <p:cNvPr id="12" name="Rounded Rectangle 11"/>
+          <p:cNvPr id="11" name="Rounded Rectangle 10"/>
           <p:cNvSpPr/>
           <p:nvPr/>
         </p:nvSpPr>
@@ -10621,7 +10313,7 @@
       </p:sp>
       <p:sp>
         <p:nvSpPr>
-          <p:cNvPr id="13" name="Round Same Side Corner Rectangle 12"/>
+          <p:cNvPr id="12" name="Round Same Side Corner Rectangle 11"/>
           <p:cNvSpPr/>
           <p:nvPr/>
         </p:nvSpPr>
@@ -10668,7 +10360,7 @@
       </p:sp>
       <p:sp>
         <p:nvSpPr>
-          <p:cNvPr id="14" name="TextBox 13"/>
+          <p:cNvPr id="13" name="TextBox 12"/>
           <p:cNvSpPr txBox="1"/>
           <p:nvPr/>
         </p:nvSpPr>
@@ -10715,7 +10407,7 @@
       </p:sp>
       <p:sp>
         <p:nvSpPr>
-          <p:cNvPr id="15" name="TextBox 14"/>
+          <p:cNvPr id="14" name="TextBox 13"/>
           <p:cNvSpPr txBox="1"/>
           <p:nvPr/>
         </p:nvSpPr>
@@ -10762,7 +10454,7 @@
       </p:sp>
       <p:sp>
         <p:nvSpPr>
-          <p:cNvPr id="16" name="TextBox 15"/>
+          <p:cNvPr id="15" name="TextBox 14"/>
           <p:cNvSpPr txBox="1"/>
           <p:nvPr/>
         </p:nvSpPr>
@@ -10809,7 +10501,7 @@
       </p:sp>
       <p:sp>
         <p:nvSpPr>
-          <p:cNvPr id="17" name="Rounded Rectangle 16"/>
+          <p:cNvPr id="16" name="Rounded Rectangle 15"/>
           <p:cNvSpPr/>
           <p:nvPr/>
         </p:nvSpPr>
@@ -10857,7 +10549,7 @@
       </p:sp>
       <p:sp>
         <p:nvSpPr>
-          <p:cNvPr id="18" name="Round Same Side Corner Rectangle 17"/>
+          <p:cNvPr id="17" name="Round Same Side Corner Rectangle 16"/>
           <p:cNvSpPr/>
           <p:nvPr/>
         </p:nvSpPr>
@@ -10904,7 +10596,7 @@
       </p:sp>
       <p:sp>
         <p:nvSpPr>
-          <p:cNvPr id="19" name="TextBox 18"/>
+          <p:cNvPr id="18" name="TextBox 17"/>
           <p:cNvSpPr txBox="1"/>
           <p:nvPr/>
         </p:nvSpPr>
@@ -10951,7 +10643,7 @@
       </p:sp>
       <p:sp>
         <p:nvSpPr>
-          <p:cNvPr id="20" name="TextBox 19"/>
+          <p:cNvPr id="19" name="TextBox 18"/>
           <p:cNvSpPr txBox="1"/>
           <p:nvPr/>
         </p:nvSpPr>
@@ -10998,7 +10690,7 @@
       </p:sp>
       <p:sp>
         <p:nvSpPr>
-          <p:cNvPr id="21" name="TextBox 20"/>
+          <p:cNvPr id="20" name="TextBox 19"/>
           <p:cNvSpPr txBox="1"/>
           <p:nvPr/>
         </p:nvSpPr>
@@ -11045,7 +10737,7 @@
       </p:sp>
       <p:sp>
         <p:nvSpPr>
-          <p:cNvPr id="22" name="Rounded Rectangle 21"/>
+          <p:cNvPr id="21" name="Rounded Rectangle 20"/>
           <p:cNvSpPr/>
           <p:nvPr/>
         </p:nvSpPr>
@@ -11093,7 +10785,7 @@
       </p:sp>
       <p:sp>
         <p:nvSpPr>
-          <p:cNvPr id="23" name="Round Same Side Corner Rectangle 22"/>
+          <p:cNvPr id="22" name="Round Same Side Corner Rectangle 21"/>
           <p:cNvSpPr/>
           <p:nvPr/>
         </p:nvSpPr>
@@ -11140,7 +10832,7 @@
       </p:sp>
       <p:sp>
         <p:nvSpPr>
-          <p:cNvPr id="24" name="TextBox 23"/>
+          <p:cNvPr id="23" name="TextBox 22"/>
           <p:cNvSpPr txBox="1"/>
           <p:nvPr/>
         </p:nvSpPr>
@@ -11187,7 +10879,7 @@
       </p:sp>
       <p:sp>
         <p:nvSpPr>
-          <p:cNvPr id="25" name="TextBox 24"/>
+          <p:cNvPr id="24" name="TextBox 23"/>
           <p:cNvSpPr txBox="1"/>
           <p:nvPr/>
         </p:nvSpPr>
@@ -11234,7 +10926,7 @@
       </p:sp>
       <p:sp>
         <p:nvSpPr>
-          <p:cNvPr id="26" name="TextBox 25"/>
+          <p:cNvPr id="25" name="TextBox 24"/>
           <p:cNvSpPr txBox="1"/>
           <p:nvPr/>
         </p:nvSpPr>
@@ -11281,7 +10973,7 @@
       </p:sp>
       <p:sp>
         <p:nvSpPr>
-          <p:cNvPr id="27" name="TextBox 26"/>
+          <p:cNvPr id="26" name="TextBox 25"/>
           <p:cNvSpPr txBox="1"/>
           <p:nvPr/>
         </p:nvSpPr>
@@ -11338,7 +11030,7 @@
       </p:sp>
       <p:sp>
         <p:nvSpPr>
-          <p:cNvPr id="28" name="TextBox 27"/>
+          <p:cNvPr id="27" name="TextBox 26"/>
           <p:cNvSpPr txBox="1"/>
           <p:nvPr/>
         </p:nvSpPr>
@@ -11385,7 +11077,7 @@
       </p:sp>
       <p:sp>
         <p:nvSpPr>
-          <p:cNvPr id="29" name="TextBox 28"/>
+          <p:cNvPr id="28" name="TextBox 27"/>
           <p:cNvSpPr txBox="1"/>
           <p:nvPr/>
         </p:nvSpPr>
@@ -11588,51 +11280,7 @@
       </p:sp>
       <p:sp>
         <p:nvSpPr>
-          <p:cNvPr id="5" name="Rectangle 4"/>
-          <p:cNvSpPr/>
-          <p:nvPr/>
-        </p:nvSpPr>
-        <p:spPr>
-          <a:xfrm>
-            <a:off x="566928" y="1191006"/>
-            <a:ext cx="1097280" cy="45720"/>
-          </a:xfrm>
-          <a:prstGeom prst="rect">
-            <a:avLst/>
-          </a:prstGeom>
-          <a:solidFill>
-            <a:srgbClr val="D8542A"/>
-          </a:solidFill>
-          <a:ln>
-            <a:noFill/>
-          </a:ln>
-          <a:effectLst/>
-        </p:spPr>
-        <p:style>
-          <a:lnRef idx="1">
-            <a:schemeClr val="accent1"/>
-          </a:lnRef>
-          <a:fillRef idx="3">
-            <a:schemeClr val="accent1"/>
-          </a:fillRef>
-          <a:effectRef idx="2">
-            <a:schemeClr val="accent1"/>
-          </a:effectRef>
-          <a:fontRef idx="minor">
-            <a:schemeClr val="lt1"/>
-          </a:fontRef>
-        </p:style>
-        <p:txBody>
-          <a:bodyPr rtlCol="0" anchor="ctr"/>
-          <a:lstStyle/>
-          <a:p>
-            <a:pPr algn="ctr"/>
-          </a:p>
-        </p:txBody>
-      </p:sp>
-      <p:sp>
-        <p:nvSpPr>
-          <p:cNvPr id="6" name="TextBox 5"/>
+          <p:cNvPr id="5" name="TextBox 4"/>
           <p:cNvSpPr txBox="1"/>
           <p:nvPr/>
         </p:nvSpPr>
@@ -11679,7 +11327,7 @@
       </p:sp>
       <p:graphicFrame>
         <p:nvGraphicFramePr>
-          <p:cNvPr id="7" name="Chart 6"/>
+          <p:cNvPr id="6" name="Chart 5"/>
           <p:cNvGraphicFramePr>
             <a:graphicFrameLocks noGrp="1"/>
           </p:cNvGraphicFramePr>
@@ -11697,7 +11345,7 @@
       </p:graphicFrame>
       <p:sp>
         <p:nvSpPr>
-          <p:cNvPr id="8" name="TextBox 7"/>
+          <p:cNvPr id="7" name="TextBox 6"/>
           <p:cNvSpPr txBox="1"/>
           <p:nvPr/>
         </p:nvSpPr>
@@ -11744,7 +11392,7 @@
       </p:sp>
       <p:sp>
         <p:nvSpPr>
-          <p:cNvPr id="9" name="TextBox 8"/>
+          <p:cNvPr id="8" name="TextBox 7"/>
           <p:cNvSpPr txBox="1"/>
           <p:nvPr/>
         </p:nvSpPr>
@@ -11791,7 +11439,7 @@
       </p:sp>
       <p:sp>
         <p:nvSpPr>
-          <p:cNvPr id="10" name="TextBox 9"/>
+          <p:cNvPr id="9" name="TextBox 8"/>
           <p:cNvSpPr txBox="1"/>
           <p:nvPr/>
         </p:nvSpPr>
@@ -11838,7 +11486,7 @@
       </p:sp>
       <p:sp>
         <p:nvSpPr>
-          <p:cNvPr id="11" name="Rectangle 10"/>
+          <p:cNvPr id="10" name="Rectangle 9"/>
           <p:cNvSpPr/>
           <p:nvPr/>
         </p:nvSpPr>
@@ -11882,7 +11530,7 @@
       </p:sp>
       <p:sp>
         <p:nvSpPr>
-          <p:cNvPr id="12" name="TextBox 11"/>
+          <p:cNvPr id="11" name="TextBox 10"/>
           <p:cNvSpPr txBox="1"/>
           <p:nvPr/>
         </p:nvSpPr>
@@ -11939,7 +11587,7 @@
       </p:sp>
       <p:sp>
         <p:nvSpPr>
-          <p:cNvPr id="13" name="TextBox 12"/>
+          <p:cNvPr id="12" name="TextBox 11"/>
           <p:cNvSpPr txBox="1"/>
           <p:nvPr/>
         </p:nvSpPr>
@@ -11986,7 +11634,7 @@
       </p:sp>
       <p:sp>
         <p:nvSpPr>
-          <p:cNvPr id="14" name="TextBox 13"/>
+          <p:cNvPr id="13" name="TextBox 12"/>
           <p:cNvSpPr txBox="1"/>
           <p:nvPr/>
         </p:nvSpPr>
@@ -12043,7 +11691,7 @@
       </p:sp>
       <p:sp>
         <p:nvSpPr>
-          <p:cNvPr id="15" name="TextBox 14"/>
+          <p:cNvPr id="14" name="TextBox 13"/>
           <p:cNvSpPr txBox="1"/>
           <p:nvPr/>
         </p:nvSpPr>
@@ -12090,7 +11738,7 @@
       </p:sp>
       <p:sp>
         <p:nvSpPr>
-          <p:cNvPr id="16" name="TextBox 15"/>
+          <p:cNvPr id="15" name="TextBox 14"/>
           <p:cNvSpPr txBox="1"/>
           <p:nvPr/>
         </p:nvSpPr>
@@ -12293,51 +11941,7 @@
       </p:sp>
       <p:sp>
         <p:nvSpPr>
-          <p:cNvPr id="5" name="Rectangle 4"/>
-          <p:cNvSpPr/>
-          <p:nvPr/>
-        </p:nvSpPr>
-        <p:spPr>
-          <a:xfrm>
-            <a:off x="566928" y="1191006"/>
-            <a:ext cx="1097280" cy="45720"/>
-          </a:xfrm>
-          <a:prstGeom prst="rect">
-            <a:avLst/>
-          </a:prstGeom>
-          <a:solidFill>
-            <a:srgbClr val="D8542A"/>
-          </a:solidFill>
-          <a:ln>
-            <a:noFill/>
-          </a:ln>
-          <a:effectLst/>
-        </p:spPr>
-        <p:style>
-          <a:lnRef idx="1">
-            <a:schemeClr val="accent1"/>
-          </a:lnRef>
-          <a:fillRef idx="3">
-            <a:schemeClr val="accent1"/>
-          </a:fillRef>
-          <a:effectRef idx="2">
-            <a:schemeClr val="accent1"/>
-          </a:effectRef>
-          <a:fontRef idx="minor">
-            <a:schemeClr val="lt1"/>
-          </a:fontRef>
-        </p:style>
-        <p:txBody>
-          <a:bodyPr rtlCol="0" anchor="ctr"/>
-          <a:lstStyle/>
-          <a:p>
-            <a:pPr algn="ctr"/>
-          </a:p>
-        </p:txBody>
-      </p:sp>
-      <p:sp>
-        <p:nvSpPr>
-          <p:cNvPr id="6" name="TextBox 5"/>
+          <p:cNvPr id="5" name="TextBox 4"/>
           <p:cNvSpPr txBox="1"/>
           <p:nvPr/>
         </p:nvSpPr>
@@ -12384,7 +11988,7 @@
       </p:sp>
       <p:graphicFrame>
         <p:nvGraphicFramePr>
-          <p:cNvPr id="7" name="Chart 6"/>
+          <p:cNvPr id="6" name="Chart 5"/>
           <p:cNvGraphicFramePr>
             <a:graphicFrameLocks noGrp="1"/>
           </p:cNvGraphicFramePr>
@@ -12402,7 +12006,7 @@
       </p:graphicFrame>
       <p:sp>
         <p:nvSpPr>
-          <p:cNvPr id="8" name="TextBox 7"/>
+          <p:cNvPr id="7" name="TextBox 6"/>
           <p:cNvSpPr txBox="1"/>
           <p:nvPr/>
         </p:nvSpPr>
@@ -12449,7 +12053,7 @@
       </p:sp>
       <p:sp>
         <p:nvSpPr>
-          <p:cNvPr id="9" name="TextBox 8"/>
+          <p:cNvPr id="8" name="TextBox 7"/>
           <p:cNvSpPr txBox="1"/>
           <p:nvPr/>
         </p:nvSpPr>
@@ -12495,7 +12099,7 @@
       </p:sp>
       <p:sp>
         <p:nvSpPr>
-          <p:cNvPr id="10" name="TextBox 9"/>
+          <p:cNvPr id="9" name="TextBox 8"/>
           <p:cNvSpPr txBox="1"/>
           <p:nvPr/>
         </p:nvSpPr>
@@ -12562,7 +12166,7 @@
       </p:sp>
       <p:sp>
         <p:nvSpPr>
-          <p:cNvPr id="11" name="Rounded Rectangle 10"/>
+          <p:cNvPr id="10" name="Rounded Rectangle 9"/>
           <p:cNvSpPr/>
           <p:nvPr/>
         </p:nvSpPr>
@@ -12608,7 +12212,7 @@
       </p:sp>
       <p:sp>
         <p:nvSpPr>
-          <p:cNvPr id="12" name="Rectangle 11"/>
+          <p:cNvPr id="11" name="Rectangle 10"/>
           <p:cNvSpPr/>
           <p:nvPr/>
         </p:nvSpPr>
@@ -12652,7 +12256,7 @@
       </p:sp>
       <p:sp>
         <p:nvSpPr>
-          <p:cNvPr id="13" name="TextBox 12"/>
+          <p:cNvPr id="12" name="TextBox 11"/>
           <p:cNvSpPr txBox="1"/>
           <p:nvPr/>
         </p:nvSpPr>
@@ -12709,7 +12313,7 @@
       </p:sp>
       <p:sp>
         <p:nvSpPr>
-          <p:cNvPr id="14" name="TextBox 13"/>
+          <p:cNvPr id="13" name="TextBox 12"/>
           <p:cNvSpPr txBox="1"/>
           <p:nvPr/>
         </p:nvSpPr>
@@ -12766,7 +12370,7 @@
       </p:sp>
       <p:sp>
         <p:nvSpPr>
-          <p:cNvPr id="15" name="TextBox 14"/>
+          <p:cNvPr id="14" name="TextBox 13"/>
           <p:cNvSpPr txBox="1"/>
           <p:nvPr/>
         </p:nvSpPr>
@@ -12813,7 +12417,7 @@
       </p:sp>
       <p:sp>
         <p:nvSpPr>
-          <p:cNvPr id="16" name="TextBox 15"/>
+          <p:cNvPr id="15" name="TextBox 14"/>
           <p:cNvSpPr txBox="1"/>
           <p:nvPr/>
         </p:nvSpPr>
@@ -13016,51 +12620,7 @@
       </p:sp>
       <p:sp>
         <p:nvSpPr>
-          <p:cNvPr id="5" name="Rectangle 4"/>
-          <p:cNvSpPr/>
-          <p:nvPr/>
-        </p:nvSpPr>
-        <p:spPr>
-          <a:xfrm>
-            <a:off x="566928" y="1191006"/>
-            <a:ext cx="1097280" cy="45720"/>
-          </a:xfrm>
-          <a:prstGeom prst="rect">
-            <a:avLst/>
-          </a:prstGeom>
-          <a:solidFill>
-            <a:srgbClr val="0E5C63"/>
-          </a:solidFill>
-          <a:ln>
-            <a:noFill/>
-          </a:ln>
-          <a:effectLst/>
-        </p:spPr>
-        <p:style>
-          <a:lnRef idx="1">
-            <a:schemeClr val="accent1"/>
-          </a:lnRef>
-          <a:fillRef idx="3">
-            <a:schemeClr val="accent1"/>
-          </a:fillRef>
-          <a:effectRef idx="2">
-            <a:schemeClr val="accent1"/>
-          </a:effectRef>
-          <a:fontRef idx="minor">
-            <a:schemeClr val="lt1"/>
-          </a:fontRef>
-        </p:style>
-        <p:txBody>
-          <a:bodyPr rtlCol="0" anchor="ctr"/>
-          <a:lstStyle/>
-          <a:p>
-            <a:pPr algn="ctr"/>
-          </a:p>
-        </p:txBody>
-      </p:sp>
-      <p:sp>
-        <p:nvSpPr>
-          <p:cNvPr id="6" name="Rounded Rectangle 5"/>
+          <p:cNvPr id="5" name="Rounded Rectangle 4"/>
           <p:cNvSpPr/>
           <p:nvPr/>
         </p:nvSpPr>
@@ -13108,7 +12668,7 @@
       </p:sp>
       <p:sp>
         <p:nvSpPr>
-          <p:cNvPr id="7" name="TextBox 6"/>
+          <p:cNvPr id="6" name="TextBox 5"/>
           <p:cNvSpPr txBox="1"/>
           <p:nvPr/>
         </p:nvSpPr>
@@ -13155,7 +12715,7 @@
       </p:sp>
       <p:sp>
         <p:nvSpPr>
-          <p:cNvPr id="8" name="TextBox 7"/>
+          <p:cNvPr id="7" name="TextBox 6"/>
           <p:cNvSpPr txBox="1"/>
           <p:nvPr/>
         </p:nvSpPr>
@@ -13225,7 +12785,7 @@
       </p:sp>
       <p:sp>
         <p:nvSpPr>
-          <p:cNvPr id="9" name="TextBox 8"/>
+          <p:cNvPr id="8" name="TextBox 7"/>
           <p:cNvSpPr txBox="1"/>
           <p:nvPr/>
         </p:nvSpPr>
@@ -13272,7 +12832,7 @@
       </p:sp>
       <p:sp>
         <p:nvSpPr>
-          <p:cNvPr id="10" name="Rounded Rectangle 9"/>
+          <p:cNvPr id="9" name="Rounded Rectangle 8"/>
           <p:cNvSpPr/>
           <p:nvPr/>
         </p:nvSpPr>
@@ -13318,7 +12878,7 @@
       </p:sp>
       <p:sp>
         <p:nvSpPr>
-          <p:cNvPr id="11" name="Rounded Rectangle 10"/>
+          <p:cNvPr id="10" name="Rounded Rectangle 9"/>
           <p:cNvSpPr/>
           <p:nvPr/>
         </p:nvSpPr>
@@ -13364,7 +12924,7 @@
       </p:sp>
       <p:sp>
         <p:nvSpPr>
-          <p:cNvPr id="12" name="TextBox 11"/>
+          <p:cNvPr id="11" name="TextBox 10"/>
           <p:cNvSpPr txBox="1"/>
           <p:nvPr/>
         </p:nvSpPr>
@@ -13411,7 +12971,7 @@
       </p:sp>
       <p:sp>
         <p:nvSpPr>
-          <p:cNvPr id="13" name="TextBox 12"/>
+          <p:cNvPr id="12" name="TextBox 11"/>
           <p:cNvSpPr txBox="1"/>
           <p:nvPr/>
         </p:nvSpPr>
@@ -13468,7 +13028,7 @@
       </p:sp>
       <p:sp>
         <p:nvSpPr>
-          <p:cNvPr id="14" name="Rounded Rectangle 13"/>
+          <p:cNvPr id="13" name="Rounded Rectangle 12"/>
           <p:cNvSpPr/>
           <p:nvPr/>
         </p:nvSpPr>
@@ -13514,7 +13074,7 @@
       </p:sp>
       <p:sp>
         <p:nvSpPr>
-          <p:cNvPr id="15" name="TextBox 14"/>
+          <p:cNvPr id="14" name="TextBox 13"/>
           <p:cNvSpPr txBox="1"/>
           <p:nvPr/>
         </p:nvSpPr>
@@ -13561,7 +13121,7 @@
       </p:sp>
       <p:sp>
         <p:nvSpPr>
-          <p:cNvPr id="16" name="TextBox 15"/>
+          <p:cNvPr id="15" name="TextBox 14"/>
           <p:cNvSpPr txBox="1"/>
           <p:nvPr/>
         </p:nvSpPr>
@@ -13608,7 +13168,7 @@
       </p:sp>
       <p:sp>
         <p:nvSpPr>
-          <p:cNvPr id="17" name="TextBox 16"/>
+          <p:cNvPr id="16" name="TextBox 15"/>
           <p:cNvSpPr txBox="1"/>
           <p:nvPr/>
         </p:nvSpPr>
@@ -13655,7 +13215,7 @@
       </p:sp>
       <p:sp>
         <p:nvSpPr>
-          <p:cNvPr id="18" name="TextBox 17"/>
+          <p:cNvPr id="17" name="TextBox 16"/>
           <p:cNvSpPr txBox="1"/>
           <p:nvPr/>
         </p:nvSpPr>
@@ -13702,7 +13262,7 @@
       </p:sp>
       <p:sp>
         <p:nvSpPr>
-          <p:cNvPr id="19" name="TextBox 18"/>
+          <p:cNvPr id="18" name="TextBox 17"/>
           <p:cNvSpPr txBox="1"/>
           <p:nvPr/>
         </p:nvSpPr>
@@ -13759,7 +13319,7 @@
       </p:sp>
       <p:sp>
         <p:nvSpPr>
-          <p:cNvPr id="20" name="TextBox 19"/>
+          <p:cNvPr id="19" name="TextBox 18"/>
           <p:cNvSpPr txBox="1"/>
           <p:nvPr/>
         </p:nvSpPr>
@@ -13806,7 +13366,7 @@
       </p:sp>
       <p:sp>
         <p:nvSpPr>
-          <p:cNvPr id="21" name="TextBox 20"/>
+          <p:cNvPr id="20" name="TextBox 19"/>
           <p:cNvSpPr txBox="1"/>
           <p:nvPr/>
         </p:nvSpPr>
@@ -14009,51 +13569,7 @@
       </p:sp>
       <p:sp>
         <p:nvSpPr>
-          <p:cNvPr id="5" name="Rectangle 4"/>
-          <p:cNvSpPr/>
-          <p:nvPr/>
-        </p:nvSpPr>
-        <p:spPr>
-          <a:xfrm>
-            <a:off x="566928" y="1191006"/>
-            <a:ext cx="1097280" cy="45720"/>
-          </a:xfrm>
-          <a:prstGeom prst="rect">
-            <a:avLst/>
-          </a:prstGeom>
-          <a:solidFill>
-            <a:srgbClr val="D8542A"/>
-          </a:solidFill>
-          <a:ln>
-            <a:noFill/>
-          </a:ln>
-          <a:effectLst/>
-        </p:spPr>
-        <p:style>
-          <a:lnRef idx="1">
-            <a:schemeClr val="accent1"/>
-          </a:lnRef>
-          <a:fillRef idx="3">
-            <a:schemeClr val="accent1"/>
-          </a:fillRef>
-          <a:effectRef idx="2">
-            <a:schemeClr val="accent1"/>
-          </a:effectRef>
-          <a:fontRef idx="minor">
-            <a:schemeClr val="lt1"/>
-          </a:fontRef>
-        </p:style>
-        <p:txBody>
-          <a:bodyPr rtlCol="0" anchor="ctr"/>
-          <a:lstStyle/>
-          <a:p>
-            <a:pPr algn="ctr"/>
-          </a:p>
-        </p:txBody>
-      </p:sp>
-      <p:sp>
-        <p:nvSpPr>
-          <p:cNvPr id="6" name="TextBox 5"/>
+          <p:cNvPr id="5" name="TextBox 4"/>
           <p:cNvSpPr txBox="1"/>
           <p:nvPr/>
         </p:nvSpPr>
@@ -14100,7 +13616,7 @@
       </p:sp>
       <p:sp>
         <p:nvSpPr>
-          <p:cNvPr id="7" name="Rounded Rectangle 6"/>
+          <p:cNvPr id="6" name="Rounded Rectangle 5"/>
           <p:cNvSpPr/>
           <p:nvPr/>
         </p:nvSpPr>
@@ -14148,7 +13664,7 @@
       </p:sp>
       <p:sp>
         <p:nvSpPr>
-          <p:cNvPr id="8" name="Rectangle 7"/>
+          <p:cNvPr id="7" name="Rectangle 6"/>
           <p:cNvSpPr/>
           <p:nvPr/>
         </p:nvSpPr>
@@ -14192,7 +13708,7 @@
       </p:sp>
       <p:sp>
         <p:nvSpPr>
-          <p:cNvPr id="9" name="Oval 8"/>
+          <p:cNvPr id="8" name="Oval 7"/>
           <p:cNvSpPr/>
           <p:nvPr/>
         </p:nvSpPr>
@@ -14236,7 +13752,7 @@
       </p:sp>
       <p:pic>
         <p:nvPicPr>
-          <p:cNvPr id="10" name="Picture 9" descr="heartbeat_D8542A.png"/>
+          <p:cNvPr id="9" name="Picture 8" descr="heartbeat_D8542A.png"/>
           <p:cNvPicPr>
             <a:picLocks noChangeAspect="1"/>
           </p:cNvPicPr>
@@ -14260,7 +13776,7 @@
       </p:pic>
       <p:sp>
         <p:nvSpPr>
-          <p:cNvPr id="11" name="TextBox 10"/>
+          <p:cNvPr id="10" name="TextBox 9"/>
           <p:cNvSpPr txBox="1"/>
           <p:nvPr/>
         </p:nvSpPr>
@@ -14307,7 +13823,7 @@
       </p:sp>
       <p:sp>
         <p:nvSpPr>
-          <p:cNvPr id="12" name="TextBox 11"/>
+          <p:cNvPr id="11" name="TextBox 10"/>
           <p:cNvSpPr txBox="1"/>
           <p:nvPr/>
         </p:nvSpPr>
@@ -14354,7 +13870,7 @@
       </p:sp>
       <p:sp>
         <p:nvSpPr>
-          <p:cNvPr id="13" name="Rounded Rectangle 12"/>
+          <p:cNvPr id="12" name="Rounded Rectangle 11"/>
           <p:cNvSpPr/>
           <p:nvPr/>
         </p:nvSpPr>
@@ -14402,7 +13918,7 @@
       </p:sp>
       <p:sp>
         <p:nvSpPr>
-          <p:cNvPr id="14" name="Rectangle 13"/>
+          <p:cNvPr id="13" name="Rectangle 12"/>
           <p:cNvSpPr/>
           <p:nvPr/>
         </p:nvSpPr>
@@ -14446,7 +13962,7 @@
       </p:sp>
       <p:sp>
         <p:nvSpPr>
-          <p:cNvPr id="15" name="Oval 14"/>
+          <p:cNvPr id="14" name="Oval 13"/>
           <p:cNvSpPr/>
           <p:nvPr/>
         </p:nvSpPr>
@@ -14490,7 +14006,7 @@
       </p:sp>
       <p:pic>
         <p:nvPicPr>
-          <p:cNvPr id="16" name="Picture 15" descr="cpu_0E5C63.png"/>
+          <p:cNvPr id="15" name="Picture 14" descr="cpu_0E5C63.png"/>
           <p:cNvPicPr>
             <a:picLocks noChangeAspect="1"/>
           </p:cNvPicPr>
@@ -14514,7 +14030,7 @@
       </p:pic>
       <p:sp>
         <p:nvSpPr>
-          <p:cNvPr id="17" name="TextBox 16"/>
+          <p:cNvPr id="16" name="TextBox 15"/>
           <p:cNvSpPr txBox="1"/>
           <p:nvPr/>
         </p:nvSpPr>
@@ -14561,7 +14077,7 @@
       </p:sp>
       <p:sp>
         <p:nvSpPr>
-          <p:cNvPr id="18" name="TextBox 17"/>
+          <p:cNvPr id="17" name="TextBox 16"/>
           <p:cNvSpPr txBox="1"/>
           <p:nvPr/>
         </p:nvSpPr>
@@ -14608,7 +14124,7 @@
       </p:sp>
       <p:sp>
         <p:nvSpPr>
-          <p:cNvPr id="19" name="Rounded Rectangle 18"/>
+          <p:cNvPr id="18" name="Rounded Rectangle 17"/>
           <p:cNvSpPr/>
           <p:nvPr/>
         </p:nvSpPr>
@@ -14656,7 +14172,7 @@
       </p:sp>
       <p:sp>
         <p:nvSpPr>
-          <p:cNvPr id="20" name="Rectangle 19"/>
+          <p:cNvPr id="19" name="Rectangle 18"/>
           <p:cNvSpPr/>
           <p:nvPr/>
         </p:nvSpPr>
@@ -14700,7 +14216,7 @@
       </p:sp>
       <p:sp>
         <p:nvSpPr>
-          <p:cNvPr id="21" name="Oval 20"/>
+          <p:cNvPr id="20" name="Oval 19"/>
           <p:cNvSpPr/>
           <p:nvPr/>
         </p:nvSpPr>
@@ -14744,7 +14260,7 @@
       </p:sp>
       <p:pic>
         <p:nvPicPr>
-          <p:cNvPr id="22" name="Picture 21" descr="tools_C08A2E.png"/>
+          <p:cNvPr id="21" name="Picture 20" descr="tools_C08A2E.png"/>
           <p:cNvPicPr>
             <a:picLocks noChangeAspect="1"/>
           </p:cNvPicPr>
@@ -14768,7 +14284,7 @@
       </p:pic>
       <p:sp>
         <p:nvSpPr>
-          <p:cNvPr id="23" name="TextBox 22"/>
+          <p:cNvPr id="22" name="TextBox 21"/>
           <p:cNvSpPr txBox="1"/>
           <p:nvPr/>
         </p:nvSpPr>
@@ -14815,7 +14331,7 @@
       </p:sp>
       <p:sp>
         <p:nvSpPr>
-          <p:cNvPr id="24" name="TextBox 23"/>
+          <p:cNvPr id="23" name="TextBox 22"/>
           <p:cNvSpPr txBox="1"/>
           <p:nvPr/>
         </p:nvSpPr>
@@ -14862,7 +14378,7 @@
       </p:sp>
       <p:sp>
         <p:nvSpPr>
-          <p:cNvPr id="25" name="Rounded Rectangle 24"/>
+          <p:cNvPr id="24" name="Rounded Rectangle 23"/>
           <p:cNvSpPr/>
           <p:nvPr/>
         </p:nvSpPr>
@@ -14910,7 +14426,7 @@
       </p:sp>
       <p:sp>
         <p:nvSpPr>
-          <p:cNvPr id="26" name="Rectangle 25"/>
+          <p:cNvPr id="25" name="Rectangle 24"/>
           <p:cNvSpPr/>
           <p:nvPr/>
         </p:nvSpPr>
@@ -14954,7 +14470,7 @@
       </p:sp>
       <p:sp>
         <p:nvSpPr>
-          <p:cNvPr id="27" name="Oval 26"/>
+          <p:cNvPr id="26" name="Oval 25"/>
           <p:cNvSpPr/>
           <p:nvPr/>
         </p:nvSpPr>
@@ -14998,7 +14514,7 @@
       </p:sp>
       <p:pic>
         <p:nvPicPr>
-          <p:cNvPr id="28" name="Picture 27" descr="school_3E6B57.png"/>
+          <p:cNvPr id="27" name="Picture 26" descr="school_3E6B57.png"/>
           <p:cNvPicPr>
             <a:picLocks noChangeAspect="1"/>
           </p:cNvPicPr>
@@ -15022,7 +14538,7 @@
       </p:pic>
       <p:sp>
         <p:nvSpPr>
-          <p:cNvPr id="29" name="TextBox 28"/>
+          <p:cNvPr id="28" name="TextBox 27"/>
           <p:cNvSpPr txBox="1"/>
           <p:nvPr/>
         </p:nvSpPr>
@@ -15069,7 +14585,7 @@
       </p:sp>
       <p:sp>
         <p:nvSpPr>
-          <p:cNvPr id="30" name="TextBox 29"/>
+          <p:cNvPr id="29" name="TextBox 28"/>
           <p:cNvSpPr txBox="1"/>
           <p:nvPr/>
         </p:nvSpPr>
@@ -15116,7 +14632,7 @@
       </p:sp>
       <p:sp>
         <p:nvSpPr>
-          <p:cNvPr id="31" name="Rounded Rectangle 30"/>
+          <p:cNvPr id="30" name="Rounded Rectangle 29"/>
           <p:cNvSpPr/>
           <p:nvPr/>
         </p:nvSpPr>
@@ -15164,7 +14680,7 @@
       </p:sp>
       <p:sp>
         <p:nvSpPr>
-          <p:cNvPr id="32" name="Rectangle 31"/>
+          <p:cNvPr id="31" name="Rectangle 30"/>
           <p:cNvSpPr/>
           <p:nvPr/>
         </p:nvSpPr>
@@ -15208,7 +14724,7 @@
       </p:sp>
       <p:sp>
         <p:nvSpPr>
-          <p:cNvPr id="33" name="Oval 32"/>
+          <p:cNvPr id="32" name="Oval 31"/>
           <p:cNvSpPr/>
           <p:nvPr/>
         </p:nvSpPr>
@@ -15252,7 +14768,7 @@
       </p:sp>
       <p:pic>
         <p:nvPicPr>
-          <p:cNvPr id="34" name="Picture 33" descr="truck-delivery_9C4722.png"/>
+          <p:cNvPr id="33" name="Picture 32" descr="truck-delivery_9C4722.png"/>
           <p:cNvPicPr>
             <a:picLocks noChangeAspect="1"/>
           </p:cNvPicPr>
@@ -15276,7 +14792,7 @@
       </p:pic>
       <p:sp>
         <p:nvSpPr>
-          <p:cNvPr id="35" name="TextBox 34"/>
+          <p:cNvPr id="34" name="TextBox 33"/>
           <p:cNvSpPr txBox="1"/>
           <p:nvPr/>
         </p:nvSpPr>
@@ -15323,7 +14839,7 @@
       </p:sp>
       <p:sp>
         <p:nvSpPr>
-          <p:cNvPr id="36" name="TextBox 35"/>
+          <p:cNvPr id="35" name="TextBox 34"/>
           <p:cNvSpPr txBox="1"/>
           <p:nvPr/>
         </p:nvSpPr>
@@ -15370,7 +14886,7 @@
       </p:sp>
       <p:sp>
         <p:nvSpPr>
-          <p:cNvPr id="37" name="TextBox 36"/>
+          <p:cNvPr id="36" name="TextBox 35"/>
           <p:cNvSpPr txBox="1"/>
           <p:nvPr/>
         </p:nvSpPr>
@@ -15427,7 +14943,7 @@
       </p:sp>
       <p:sp>
         <p:nvSpPr>
-          <p:cNvPr id="38" name="TextBox 37"/>
+          <p:cNvPr id="37" name="TextBox 36"/>
           <p:cNvSpPr txBox="1"/>
           <p:nvPr/>
         </p:nvSpPr>
@@ -15474,7 +14990,7 @@
       </p:sp>
       <p:sp>
         <p:nvSpPr>
-          <p:cNvPr id="39" name="TextBox 38"/>
+          <p:cNvPr id="38" name="TextBox 37"/>
           <p:cNvSpPr txBox="1"/>
           <p:nvPr/>
         </p:nvSpPr>
@@ -15677,51 +15193,7 @@
       </p:sp>
       <p:sp>
         <p:nvSpPr>
-          <p:cNvPr id="5" name="Rectangle 4"/>
-          <p:cNvSpPr/>
-          <p:nvPr/>
-        </p:nvSpPr>
-        <p:spPr>
-          <a:xfrm>
-            <a:off x="566928" y="1191006"/>
-            <a:ext cx="1097280" cy="45720"/>
-          </a:xfrm>
-          <a:prstGeom prst="rect">
-            <a:avLst/>
-          </a:prstGeom>
-          <a:solidFill>
-            <a:srgbClr val="0E5C63"/>
-          </a:solidFill>
-          <a:ln>
-            <a:noFill/>
-          </a:ln>
-          <a:effectLst/>
-        </p:spPr>
-        <p:style>
-          <a:lnRef idx="1">
-            <a:schemeClr val="accent1"/>
-          </a:lnRef>
-          <a:fillRef idx="3">
-            <a:schemeClr val="accent1"/>
-          </a:fillRef>
-          <a:effectRef idx="2">
-            <a:schemeClr val="accent1"/>
-          </a:effectRef>
-          <a:fontRef idx="minor">
-            <a:schemeClr val="lt1"/>
-          </a:fontRef>
-        </p:style>
-        <p:txBody>
-          <a:bodyPr rtlCol="0" anchor="ctr"/>
-          <a:lstStyle/>
-          <a:p>
-            <a:pPr algn="ctr"/>
-          </a:p>
-        </p:txBody>
-      </p:sp>
-      <p:sp>
-        <p:nvSpPr>
-          <p:cNvPr id="6" name="TextBox 5"/>
+          <p:cNvPr id="5" name="TextBox 4"/>
           <p:cNvSpPr txBox="1"/>
           <p:nvPr/>
         </p:nvSpPr>
@@ -15768,7 +15240,7 @@
       </p:sp>
       <p:graphicFrame>
         <p:nvGraphicFramePr>
-          <p:cNvPr id="7" name="Chart 6"/>
+          <p:cNvPr id="6" name="Chart 5"/>
           <p:cNvGraphicFramePr>
             <a:graphicFrameLocks noGrp="1"/>
           </p:cNvGraphicFramePr>
@@ -15786,7 +15258,7 @@
       </p:graphicFrame>
       <p:sp>
         <p:nvSpPr>
-          <p:cNvPr id="8" name="TextBox 7"/>
+          <p:cNvPr id="7" name="TextBox 6"/>
           <p:cNvSpPr txBox="1"/>
           <p:nvPr/>
         </p:nvSpPr>
@@ -15833,7 +15305,7 @@
       </p:sp>
       <p:sp>
         <p:nvSpPr>
-          <p:cNvPr id="9" name="TextBox 8"/>
+          <p:cNvPr id="8" name="TextBox 7"/>
           <p:cNvSpPr txBox="1"/>
           <p:nvPr/>
         </p:nvSpPr>
@@ -15880,7 +15352,7 @@
       </p:sp>
       <p:sp>
         <p:nvSpPr>
-          <p:cNvPr id="10" name="TextBox 9"/>
+          <p:cNvPr id="9" name="TextBox 8"/>
           <p:cNvSpPr txBox="1"/>
           <p:nvPr/>
         </p:nvSpPr>
@@ -15927,7 +15399,7 @@
       </p:sp>
       <p:sp>
         <p:nvSpPr>
-          <p:cNvPr id="11" name="Rectangle 10"/>
+          <p:cNvPr id="10" name="Rectangle 9"/>
           <p:cNvSpPr/>
           <p:nvPr/>
         </p:nvSpPr>
@@ -15971,7 +15443,7 @@
       </p:sp>
       <p:sp>
         <p:nvSpPr>
-          <p:cNvPr id="12" name="TextBox 11"/>
+          <p:cNvPr id="11" name="TextBox 10"/>
           <p:cNvSpPr txBox="1"/>
           <p:nvPr/>
         </p:nvSpPr>
@@ -16028,7 +15500,7 @@
       </p:sp>
       <p:sp>
         <p:nvSpPr>
-          <p:cNvPr id="13" name="TextBox 12"/>
+          <p:cNvPr id="12" name="TextBox 11"/>
           <p:cNvSpPr txBox="1"/>
           <p:nvPr/>
         </p:nvSpPr>
@@ -16075,7 +15547,7 @@
       </p:sp>
       <p:sp>
         <p:nvSpPr>
-          <p:cNvPr id="14" name="TextBox 13"/>
+          <p:cNvPr id="13" name="TextBox 12"/>
           <p:cNvSpPr txBox="1"/>
           <p:nvPr/>
         </p:nvSpPr>
@@ -16132,7 +15604,7 @@
       </p:sp>
       <p:sp>
         <p:nvSpPr>
-          <p:cNvPr id="15" name="TextBox 14"/>
+          <p:cNvPr id="14" name="TextBox 13"/>
           <p:cNvSpPr txBox="1"/>
           <p:nvPr/>
         </p:nvSpPr>
@@ -16179,7 +15651,7 @@
       </p:sp>
       <p:sp>
         <p:nvSpPr>
-          <p:cNvPr id="16" name="TextBox 15"/>
+          <p:cNvPr id="15" name="TextBox 14"/>
           <p:cNvSpPr txBox="1"/>
           <p:nvPr/>
         </p:nvSpPr>
@@ -16382,17 +15854,717 @@
       </p:sp>
       <p:sp>
         <p:nvSpPr>
-          <p:cNvPr id="5" name="Rectangle 4"/>
+          <p:cNvPr id="5" name="TextBox 4"/>
+          <p:cNvSpPr txBox="1"/>
+          <p:nvPr/>
+        </p:nvSpPr>
+        <p:spPr>
+          <a:xfrm>
+            <a:off x="365760" y="1508760"/>
+            <a:ext cx="5088367" cy="274320"/>
+          </a:xfrm>
+          <a:prstGeom prst="rect">
+            <a:avLst/>
+          </a:prstGeom>
+          <a:noFill/>
+          <a:ln/>
+        </p:spPr>
+        <p:txBody>
+          <a:bodyPr wrap="square" anchor="t" lIns="25400" rIns="25400" tIns="25400" bIns="25400">
+            <a:spAutoFit/>
+          </a:bodyPr>
+          <a:lstStyle/>
+          <a:p>
+            <a:pPr algn="l">
+              <a:lnSpc>
+                <a:spcPct val="100000"/>
+              </a:lnSpc>
+              <a:spcBef>
+                <a:spcPts val="0"/>
+              </a:spcBef>
+              <a:spcAft>
+                <a:spcPts val="0"/>
+              </a:spcAft>
+            </a:pPr>
+            <a:r>
+              <a:rPr sz="950" b="1" i="0">
+                <a:solidFill>
+                  <a:srgbClr val="8A8478"/>
+                </a:solidFill>
+                <a:latin typeface="Courier New"/>
+                <a:ea typeface="Hiragino Sans GB"/>
+              </a:rPr>
+              <a:t>INDICATIVE GROSS SALARY, € PER YEAR</a:t>
+            </a:r>
+          </a:p>
+        </p:txBody>
+      </p:sp>
+      <p:sp>
+        <p:nvSpPr>
+          <p:cNvPr id="6" name="TextBox 5"/>
+          <p:cNvSpPr txBox="1"/>
+          <p:nvPr/>
+        </p:nvSpPr>
+        <p:spPr>
+          <a:xfrm>
+            <a:off x="365760" y="1883664"/>
+            <a:ext cx="3808207" cy="256032"/>
+          </a:xfrm>
+          <a:prstGeom prst="rect">
+            <a:avLst/>
+          </a:prstGeom>
+          <a:noFill/>
+          <a:ln/>
+        </p:spPr>
+        <p:txBody>
+          <a:bodyPr wrap="square" anchor="b" lIns="25400" rIns="25400" tIns="25400" bIns="25400">
+            <a:spAutoFit/>
+          </a:bodyPr>
+          <a:lstStyle/>
+          <a:p>
+            <a:pPr algn="l">
+              <a:lnSpc>
+                <a:spcPct val="100000"/>
+              </a:lnSpc>
+              <a:spcBef>
+                <a:spcPts val="0"/>
+              </a:spcBef>
+              <a:spcAft>
+                <a:spcPts val="0"/>
+              </a:spcAft>
+            </a:pPr>
+            <a:r>
+              <a:rPr sz="1100" b="0" i="0">
+                <a:solidFill>
+                  <a:srgbClr val="8A8478"/>
+                </a:solidFill>
+                <a:latin typeface="Helvetica Neue"/>
+                <a:ea typeface="Hiragino Sans GB"/>
+              </a:rPr>
+              <a:t>ICT &amp; technology (mid-level)</a:t>
+            </a:r>
+          </a:p>
+        </p:txBody>
+      </p:sp>
+      <p:sp>
+        <p:nvSpPr>
+          <p:cNvPr id="7" name="Rounded Rectangle 6"/>
           <p:cNvSpPr/>
           <p:nvPr/>
         </p:nvSpPr>
         <p:spPr>
           <a:xfrm>
-            <a:off x="566928" y="1191006"/>
-            <a:ext cx="1097280" cy="45720"/>
-          </a:xfrm>
-          <a:prstGeom prst="rect">
-            <a:avLst/>
+            <a:off x="365760" y="2139696"/>
+            <a:ext cx="3808207" cy="164592"/>
+          </a:xfrm>
+          <a:prstGeom prst="roundRect">
+            <a:avLst>
+              <a:gd name="adj" fmla="val 50000"/>
+            </a:avLst>
+          </a:prstGeom>
+          <a:solidFill>
+            <a:srgbClr val="E7DFD1"/>
+          </a:solidFill>
+          <a:ln>
+            <a:noFill/>
+          </a:ln>
+          <a:effectLst/>
+        </p:spPr>
+        <p:style>
+          <a:lnRef idx="1">
+            <a:schemeClr val="accent1"/>
+          </a:lnRef>
+          <a:fillRef idx="3">
+            <a:schemeClr val="accent1"/>
+          </a:fillRef>
+          <a:effectRef idx="2">
+            <a:schemeClr val="accent1"/>
+          </a:effectRef>
+          <a:fontRef idx="minor">
+            <a:schemeClr val="lt1"/>
+          </a:fontRef>
+        </p:style>
+        <p:txBody>
+          <a:bodyPr rtlCol="0" anchor="ctr"/>
+          <a:lstStyle/>
+          <a:p>
+            <a:pPr algn="ctr"/>
+          </a:p>
+        </p:txBody>
+      </p:sp>
+      <p:sp>
+        <p:nvSpPr>
+          <p:cNvPr id="8" name="Rounded Rectangle 7"/>
+          <p:cNvSpPr/>
+          <p:nvPr/>
+        </p:nvSpPr>
+        <p:spPr>
+          <a:xfrm>
+            <a:off x="365760" y="2139696"/>
+            <a:ext cx="3427386" cy="164592"/>
+          </a:xfrm>
+          <a:prstGeom prst="roundRect">
+            <a:avLst>
+              <a:gd name="adj" fmla="val 50000"/>
+            </a:avLst>
+          </a:prstGeom>
+          <a:solidFill>
+            <a:srgbClr val="0E5C63"/>
+          </a:solidFill>
+          <a:ln>
+            <a:noFill/>
+          </a:ln>
+          <a:effectLst/>
+        </p:spPr>
+        <p:style>
+          <a:lnRef idx="1">
+            <a:schemeClr val="accent1"/>
+          </a:lnRef>
+          <a:fillRef idx="3">
+            <a:schemeClr val="accent1"/>
+          </a:fillRef>
+          <a:effectRef idx="2">
+            <a:schemeClr val="accent1"/>
+          </a:effectRef>
+          <a:fontRef idx="minor">
+            <a:schemeClr val="lt1"/>
+          </a:fontRef>
+        </p:style>
+        <p:txBody>
+          <a:bodyPr rtlCol="0" anchor="ctr"/>
+          <a:lstStyle/>
+          <a:p>
+            <a:pPr algn="ctr"/>
+          </a:p>
+        </p:txBody>
+      </p:sp>
+      <p:sp>
+        <p:nvSpPr>
+          <p:cNvPr id="9" name="TextBox 8"/>
+          <p:cNvSpPr txBox="1"/>
+          <p:nvPr/>
+        </p:nvSpPr>
+        <p:spPr>
+          <a:xfrm>
+            <a:off x="4356847" y="2139696"/>
+            <a:ext cx="1005840" cy="164592"/>
+          </a:xfrm>
+          <a:prstGeom prst="rect">
+            <a:avLst/>
+          </a:prstGeom>
+          <a:noFill/>
+          <a:ln/>
+        </p:spPr>
+        <p:txBody>
+          <a:bodyPr wrap="square" anchor="ctr" lIns="25400" rIns="25400" tIns="25400" bIns="25400">
+            <a:spAutoFit/>
+          </a:bodyPr>
+          <a:lstStyle/>
+          <a:p>
+            <a:pPr algn="l">
+              <a:lnSpc>
+                <a:spcPct val="100000"/>
+              </a:lnSpc>
+              <a:spcBef>
+                <a:spcPts val="0"/>
+              </a:spcBef>
+              <a:spcAft>
+                <a:spcPts val="0"/>
+              </a:spcAft>
+            </a:pPr>
+            <a:r>
+              <a:rPr sz="1350" b="1" i="0">
+                <a:solidFill>
+                  <a:srgbClr val="20242A"/>
+                </a:solidFill>
+                <a:latin typeface="Helvetica Neue"/>
+                <a:ea typeface="Hiragino Sans GB"/>
+              </a:rPr>
+              <a:t>€72k</a:t>
+            </a:r>
+          </a:p>
+        </p:txBody>
+      </p:sp>
+      <p:sp>
+        <p:nvSpPr>
+          <p:cNvPr id="10" name="TextBox 9"/>
+          <p:cNvSpPr txBox="1"/>
+          <p:nvPr/>
+        </p:nvSpPr>
+        <p:spPr>
+          <a:xfrm>
+            <a:off x="365760" y="2257806"/>
+            <a:ext cx="3808207" cy="256032"/>
+          </a:xfrm>
+          <a:prstGeom prst="rect">
+            <a:avLst/>
+          </a:prstGeom>
+          <a:noFill/>
+          <a:ln/>
+        </p:spPr>
+        <p:txBody>
+          <a:bodyPr wrap="square" anchor="b" lIns="25400" rIns="25400" tIns="25400" bIns="25400">
+            <a:spAutoFit/>
+          </a:bodyPr>
+          <a:lstStyle/>
+          <a:p>
+            <a:pPr algn="l">
+              <a:lnSpc>
+                <a:spcPct val="100000"/>
+              </a:lnSpc>
+              <a:spcBef>
+                <a:spcPts val="0"/>
+              </a:spcBef>
+              <a:spcAft>
+                <a:spcPts val="0"/>
+              </a:spcAft>
+            </a:pPr>
+            <a:r>
+              <a:rPr sz="1100" b="0" i="0">
+                <a:solidFill>
+                  <a:srgbClr val="8A8478"/>
+                </a:solidFill>
+                <a:latin typeface="Helvetica Neue"/>
+                <a:ea typeface="Hiragino Sans GB"/>
+              </a:rPr>
+              <a:t>Engineering</a:t>
+            </a:r>
+          </a:p>
+        </p:txBody>
+      </p:sp>
+      <p:sp>
+        <p:nvSpPr>
+          <p:cNvPr id="11" name="Rounded Rectangle 10"/>
+          <p:cNvSpPr/>
+          <p:nvPr/>
+        </p:nvSpPr>
+        <p:spPr>
+          <a:xfrm>
+            <a:off x="365760" y="2513838"/>
+            <a:ext cx="3808207" cy="164592"/>
+          </a:xfrm>
+          <a:prstGeom prst="roundRect">
+            <a:avLst>
+              <a:gd name="adj" fmla="val 50000"/>
+            </a:avLst>
+          </a:prstGeom>
+          <a:solidFill>
+            <a:srgbClr val="E7DFD1"/>
+          </a:solidFill>
+          <a:ln>
+            <a:noFill/>
+          </a:ln>
+          <a:effectLst/>
+        </p:spPr>
+        <p:style>
+          <a:lnRef idx="1">
+            <a:schemeClr val="accent1"/>
+          </a:lnRef>
+          <a:fillRef idx="3">
+            <a:schemeClr val="accent1"/>
+          </a:fillRef>
+          <a:effectRef idx="2">
+            <a:schemeClr val="accent1"/>
+          </a:effectRef>
+          <a:fontRef idx="minor">
+            <a:schemeClr val="lt1"/>
+          </a:fontRef>
+        </p:style>
+        <p:txBody>
+          <a:bodyPr rtlCol="0" anchor="ctr"/>
+          <a:lstStyle/>
+          <a:p>
+            <a:pPr algn="ctr"/>
+          </a:p>
+        </p:txBody>
+      </p:sp>
+      <p:sp>
+        <p:nvSpPr>
+          <p:cNvPr id="12" name="Rounded Rectangle 11"/>
+          <p:cNvSpPr/>
+          <p:nvPr/>
+        </p:nvSpPr>
+        <p:spPr>
+          <a:xfrm>
+            <a:off x="365760" y="2513838"/>
+            <a:ext cx="3236975" cy="164592"/>
+          </a:xfrm>
+          <a:prstGeom prst="roundRect">
+            <a:avLst>
+              <a:gd name="adj" fmla="val 50000"/>
+            </a:avLst>
+          </a:prstGeom>
+          <a:solidFill>
+            <a:srgbClr val="0E5C63"/>
+          </a:solidFill>
+          <a:ln>
+            <a:noFill/>
+          </a:ln>
+          <a:effectLst/>
+        </p:spPr>
+        <p:style>
+          <a:lnRef idx="1">
+            <a:schemeClr val="accent1"/>
+          </a:lnRef>
+          <a:fillRef idx="3">
+            <a:schemeClr val="accent1"/>
+          </a:fillRef>
+          <a:effectRef idx="2">
+            <a:schemeClr val="accent1"/>
+          </a:effectRef>
+          <a:fontRef idx="minor">
+            <a:schemeClr val="lt1"/>
+          </a:fontRef>
+        </p:style>
+        <p:txBody>
+          <a:bodyPr rtlCol="0" anchor="ctr"/>
+          <a:lstStyle/>
+          <a:p>
+            <a:pPr algn="ctr"/>
+          </a:p>
+        </p:txBody>
+      </p:sp>
+      <p:sp>
+        <p:nvSpPr>
+          <p:cNvPr id="13" name="TextBox 12"/>
+          <p:cNvSpPr txBox="1"/>
+          <p:nvPr/>
+        </p:nvSpPr>
+        <p:spPr>
+          <a:xfrm>
+            <a:off x="4356847" y="2513838"/>
+            <a:ext cx="1005840" cy="164592"/>
+          </a:xfrm>
+          <a:prstGeom prst="rect">
+            <a:avLst/>
+          </a:prstGeom>
+          <a:noFill/>
+          <a:ln/>
+        </p:spPr>
+        <p:txBody>
+          <a:bodyPr wrap="square" anchor="ctr" lIns="25400" rIns="25400" tIns="25400" bIns="25400">
+            <a:spAutoFit/>
+          </a:bodyPr>
+          <a:lstStyle/>
+          <a:p>
+            <a:pPr algn="l">
+              <a:lnSpc>
+                <a:spcPct val="100000"/>
+              </a:lnSpc>
+              <a:spcBef>
+                <a:spcPts val="0"/>
+              </a:spcBef>
+              <a:spcAft>
+                <a:spcPts val="0"/>
+              </a:spcAft>
+            </a:pPr>
+            <a:r>
+              <a:rPr sz="1350" b="1" i="0">
+                <a:solidFill>
+                  <a:srgbClr val="20242A"/>
+                </a:solidFill>
+                <a:latin typeface="Helvetica Neue"/>
+                <a:ea typeface="Hiragino Sans GB"/>
+              </a:rPr>
+              <a:t>€68k</a:t>
+            </a:r>
+          </a:p>
+        </p:txBody>
+      </p:sp>
+      <p:sp>
+        <p:nvSpPr>
+          <p:cNvPr id="14" name="TextBox 13"/>
+          <p:cNvSpPr txBox="1"/>
+          <p:nvPr/>
+        </p:nvSpPr>
+        <p:spPr>
+          <a:xfrm>
+            <a:off x="365760" y="2631948"/>
+            <a:ext cx="3808207" cy="256032"/>
+          </a:xfrm>
+          <a:prstGeom prst="rect">
+            <a:avLst/>
+          </a:prstGeom>
+          <a:noFill/>
+          <a:ln/>
+        </p:spPr>
+        <p:txBody>
+          <a:bodyPr wrap="square" anchor="b" lIns="25400" rIns="25400" tIns="25400" bIns="25400">
+            <a:spAutoFit/>
+          </a:bodyPr>
+          <a:lstStyle/>
+          <a:p>
+            <a:pPr algn="l">
+              <a:lnSpc>
+                <a:spcPct val="100000"/>
+              </a:lnSpc>
+              <a:spcBef>
+                <a:spcPts val="0"/>
+              </a:spcBef>
+              <a:spcAft>
+                <a:spcPts val="0"/>
+              </a:spcAft>
+            </a:pPr>
+            <a:r>
+              <a:rPr sz="1100" b="0" i="0">
+                <a:solidFill>
+                  <a:srgbClr val="8A8478"/>
+                </a:solidFill>
+                <a:latin typeface="Helvetica Neue"/>
+                <a:ea typeface="Hiragino Sans GB"/>
+              </a:rPr>
+              <a:t>Finance &amp; business services</a:t>
+            </a:r>
+          </a:p>
+        </p:txBody>
+      </p:sp>
+      <p:sp>
+        <p:nvSpPr>
+          <p:cNvPr id="15" name="Rounded Rectangle 14"/>
+          <p:cNvSpPr/>
+          <p:nvPr/>
+        </p:nvSpPr>
+        <p:spPr>
+          <a:xfrm>
+            <a:off x="365760" y="2887980"/>
+            <a:ext cx="3808207" cy="164592"/>
+          </a:xfrm>
+          <a:prstGeom prst="roundRect">
+            <a:avLst>
+              <a:gd name="adj" fmla="val 50000"/>
+            </a:avLst>
+          </a:prstGeom>
+          <a:solidFill>
+            <a:srgbClr val="E7DFD1"/>
+          </a:solidFill>
+          <a:ln>
+            <a:noFill/>
+          </a:ln>
+          <a:effectLst/>
+        </p:spPr>
+        <p:style>
+          <a:lnRef idx="1">
+            <a:schemeClr val="accent1"/>
+          </a:lnRef>
+          <a:fillRef idx="3">
+            <a:schemeClr val="accent1"/>
+          </a:fillRef>
+          <a:effectRef idx="2">
+            <a:schemeClr val="accent1"/>
+          </a:effectRef>
+          <a:fontRef idx="minor">
+            <a:schemeClr val="lt1"/>
+          </a:fontRef>
+        </p:style>
+        <p:txBody>
+          <a:bodyPr rtlCol="0" anchor="ctr"/>
+          <a:lstStyle/>
+          <a:p>
+            <a:pPr algn="ctr"/>
+          </a:p>
+        </p:txBody>
+      </p:sp>
+      <p:sp>
+        <p:nvSpPr>
+          <p:cNvPr id="16" name="Rounded Rectangle 15"/>
+          <p:cNvSpPr/>
+          <p:nvPr/>
+        </p:nvSpPr>
+        <p:spPr>
+          <a:xfrm>
+            <a:off x="365760" y="2887980"/>
+            <a:ext cx="3094168" cy="164592"/>
+          </a:xfrm>
+          <a:prstGeom prst="roundRect">
+            <a:avLst>
+              <a:gd name="adj" fmla="val 50000"/>
+            </a:avLst>
+          </a:prstGeom>
+          <a:solidFill>
+            <a:srgbClr val="0E5C63"/>
+          </a:solidFill>
+          <a:ln>
+            <a:noFill/>
+          </a:ln>
+          <a:effectLst/>
+        </p:spPr>
+        <p:style>
+          <a:lnRef idx="1">
+            <a:schemeClr val="accent1"/>
+          </a:lnRef>
+          <a:fillRef idx="3">
+            <a:schemeClr val="accent1"/>
+          </a:fillRef>
+          <a:effectRef idx="2">
+            <a:schemeClr val="accent1"/>
+          </a:effectRef>
+          <a:fontRef idx="minor">
+            <a:schemeClr val="lt1"/>
+          </a:fontRef>
+        </p:style>
+        <p:txBody>
+          <a:bodyPr rtlCol="0" anchor="ctr"/>
+          <a:lstStyle/>
+          <a:p>
+            <a:pPr algn="ctr"/>
+          </a:p>
+        </p:txBody>
+      </p:sp>
+      <p:sp>
+        <p:nvSpPr>
+          <p:cNvPr id="17" name="TextBox 16"/>
+          <p:cNvSpPr txBox="1"/>
+          <p:nvPr/>
+        </p:nvSpPr>
+        <p:spPr>
+          <a:xfrm>
+            <a:off x="4356847" y="2887980"/>
+            <a:ext cx="1005840" cy="164592"/>
+          </a:xfrm>
+          <a:prstGeom prst="rect">
+            <a:avLst/>
+          </a:prstGeom>
+          <a:noFill/>
+          <a:ln/>
+        </p:spPr>
+        <p:txBody>
+          <a:bodyPr wrap="square" anchor="ctr" lIns="25400" rIns="25400" tIns="25400" bIns="25400">
+            <a:spAutoFit/>
+          </a:bodyPr>
+          <a:lstStyle/>
+          <a:p>
+            <a:pPr algn="l">
+              <a:lnSpc>
+                <a:spcPct val="100000"/>
+              </a:lnSpc>
+              <a:spcBef>
+                <a:spcPts val="0"/>
+              </a:spcBef>
+              <a:spcAft>
+                <a:spcPts val="0"/>
+              </a:spcAft>
+            </a:pPr>
+            <a:r>
+              <a:rPr sz="1350" b="1" i="0">
+                <a:solidFill>
+                  <a:srgbClr val="20242A"/>
+                </a:solidFill>
+                <a:latin typeface="Helvetica Neue"/>
+                <a:ea typeface="Hiragino Sans GB"/>
+              </a:rPr>
+              <a:t>€65k</a:t>
+            </a:r>
+          </a:p>
+        </p:txBody>
+      </p:sp>
+      <p:sp>
+        <p:nvSpPr>
+          <p:cNvPr id="18" name="TextBox 17"/>
+          <p:cNvSpPr txBox="1"/>
+          <p:nvPr/>
+        </p:nvSpPr>
+        <p:spPr>
+          <a:xfrm>
+            <a:off x="365760" y="3006090"/>
+            <a:ext cx="3808207" cy="256032"/>
+          </a:xfrm>
+          <a:prstGeom prst="rect">
+            <a:avLst/>
+          </a:prstGeom>
+          <a:noFill/>
+          <a:ln/>
+        </p:spPr>
+        <p:txBody>
+          <a:bodyPr wrap="square" anchor="b" lIns="25400" rIns="25400" tIns="25400" bIns="25400">
+            <a:spAutoFit/>
+          </a:bodyPr>
+          <a:lstStyle/>
+          <a:p>
+            <a:pPr algn="l">
+              <a:lnSpc>
+                <a:spcPct val="100000"/>
+              </a:lnSpc>
+              <a:spcBef>
+                <a:spcPts val="0"/>
+              </a:spcBef>
+              <a:spcAft>
+                <a:spcPts val="0"/>
+              </a:spcAft>
+            </a:pPr>
+            <a:r>
+              <a:rPr sz="1100" b="0" i="0">
+                <a:solidFill>
+                  <a:srgbClr val="8A8478"/>
+                </a:solidFill>
+                <a:latin typeface="Helvetica Neue"/>
+                <a:ea typeface="Hiragino Sans GB"/>
+              </a:rPr>
+              <a:t>National average (CBS)</a:t>
+            </a:r>
+          </a:p>
+        </p:txBody>
+      </p:sp>
+      <p:sp>
+        <p:nvSpPr>
+          <p:cNvPr id="19" name="Rounded Rectangle 18"/>
+          <p:cNvSpPr/>
+          <p:nvPr/>
+        </p:nvSpPr>
+        <p:spPr>
+          <a:xfrm>
+            <a:off x="365760" y="3262122"/>
+            <a:ext cx="3808207" cy="164592"/>
+          </a:xfrm>
+          <a:prstGeom prst="roundRect">
+            <a:avLst>
+              <a:gd name="adj" fmla="val 50000"/>
+            </a:avLst>
+          </a:prstGeom>
+          <a:solidFill>
+            <a:srgbClr val="E7DFD1"/>
+          </a:solidFill>
+          <a:ln>
+            <a:noFill/>
+          </a:ln>
+          <a:effectLst/>
+        </p:spPr>
+        <p:style>
+          <a:lnRef idx="1">
+            <a:schemeClr val="accent1"/>
+          </a:lnRef>
+          <a:fillRef idx="3">
+            <a:schemeClr val="accent1"/>
+          </a:fillRef>
+          <a:effectRef idx="2">
+            <a:schemeClr val="accent1"/>
+          </a:effectRef>
+          <a:fontRef idx="minor">
+            <a:schemeClr val="lt1"/>
+          </a:fontRef>
+        </p:style>
+        <p:txBody>
+          <a:bodyPr rtlCol="0" anchor="ctr"/>
+          <a:lstStyle/>
+          <a:p>
+            <a:pPr algn="ctr"/>
+          </a:p>
+        </p:txBody>
+      </p:sp>
+      <p:sp>
+        <p:nvSpPr>
+          <p:cNvPr id="20" name="Rounded Rectangle 19"/>
+          <p:cNvSpPr/>
+          <p:nvPr/>
+        </p:nvSpPr>
+        <p:spPr>
+          <a:xfrm>
+            <a:off x="365760" y="3262122"/>
+            <a:ext cx="2543691" cy="164592"/>
+          </a:xfrm>
+          <a:prstGeom prst="roundRect">
+            <a:avLst>
+              <a:gd name="adj" fmla="val 50000"/>
+            </a:avLst>
           </a:prstGeom>
           <a:solidFill>
             <a:srgbClr val="D8542A"/>
@@ -16426,23 +16598,23 @@
       </p:sp>
       <p:sp>
         <p:nvSpPr>
-          <p:cNvPr id="6" name="TextBox 5"/>
-          <p:cNvSpPr txBox="1"/>
-          <p:nvPr/>
-        </p:nvSpPr>
-        <p:spPr>
-          <a:xfrm>
-            <a:off x="365760" y="1508760"/>
-            <a:ext cx="5088367" cy="274320"/>
-          </a:xfrm>
-          <a:prstGeom prst="rect">
-            <a:avLst/>
-          </a:prstGeom>
-          <a:noFill/>
-          <a:ln/>
-        </p:spPr>
-        <p:txBody>
-          <a:bodyPr wrap="square" anchor="t" lIns="25400" rIns="25400" tIns="25400" bIns="25400">
+          <p:cNvPr id="21" name="TextBox 20"/>
+          <p:cNvSpPr txBox="1"/>
+          <p:nvPr/>
+        </p:nvSpPr>
+        <p:spPr>
+          <a:xfrm>
+            <a:off x="4356847" y="3262122"/>
+            <a:ext cx="1005840" cy="164592"/>
+          </a:xfrm>
+          <a:prstGeom prst="rect">
+            <a:avLst/>
+          </a:prstGeom>
+          <a:noFill/>
+          <a:ln/>
+        </p:spPr>
+        <p:txBody>
+          <a:bodyPr wrap="square" anchor="ctr" lIns="25400" rIns="25400" tIns="25400" bIns="25400">
             <a:spAutoFit/>
           </a:bodyPr>
           <a:lstStyle/>
@@ -16459,74 +16631,74 @@
               </a:spcAft>
             </a:pPr>
             <a:r>
-              <a:rPr sz="950" b="1" i="0">
+              <a:rPr sz="1350" b="1" i="0">
+                <a:solidFill>
+                  <a:srgbClr val="20242A"/>
+                </a:solidFill>
+                <a:latin typeface="Helvetica Neue"/>
+                <a:ea typeface="Hiragino Sans GB"/>
+              </a:rPr>
+              <a:t>€53k</a:t>
+            </a:r>
+          </a:p>
+        </p:txBody>
+      </p:sp>
+      <p:sp>
+        <p:nvSpPr>
+          <p:cNvPr id="22" name="TextBox 21"/>
+          <p:cNvSpPr txBox="1"/>
+          <p:nvPr/>
+        </p:nvSpPr>
+        <p:spPr>
+          <a:xfrm>
+            <a:off x="365760" y="3380232"/>
+            <a:ext cx="3808207" cy="256032"/>
+          </a:xfrm>
+          <a:prstGeom prst="rect">
+            <a:avLst/>
+          </a:prstGeom>
+          <a:noFill/>
+          <a:ln/>
+        </p:spPr>
+        <p:txBody>
+          <a:bodyPr wrap="square" anchor="b" lIns="25400" rIns="25400" tIns="25400" bIns="25400">
+            <a:spAutoFit/>
+          </a:bodyPr>
+          <a:lstStyle/>
+          <a:p>
+            <a:pPr algn="l">
+              <a:lnSpc>
+                <a:spcPct val="100000"/>
+              </a:lnSpc>
+              <a:spcBef>
+                <a:spcPts val="0"/>
+              </a:spcBef>
+              <a:spcAft>
+                <a:spcPts val="0"/>
+              </a:spcAft>
+            </a:pPr>
+            <a:r>
+              <a:rPr sz="1100" b="0" i="0">
                 <a:solidFill>
                   <a:srgbClr val="8A8478"/>
                 </a:solidFill>
-                <a:latin typeface="Courier New"/>
-                <a:ea typeface="Hiragino Sans GB"/>
-              </a:rPr>
-              <a:t>INDICATIVE GROSS SALARY, € PER YEAR</a:t>
-            </a:r>
-          </a:p>
-        </p:txBody>
-      </p:sp>
-      <p:sp>
-        <p:nvSpPr>
-          <p:cNvPr id="7" name="TextBox 6"/>
-          <p:cNvSpPr txBox="1"/>
-          <p:nvPr/>
-        </p:nvSpPr>
-        <p:spPr>
-          <a:xfrm>
-            <a:off x="365760" y="1883664"/>
-            <a:ext cx="3808207" cy="256032"/>
-          </a:xfrm>
-          <a:prstGeom prst="rect">
-            <a:avLst/>
-          </a:prstGeom>
-          <a:noFill/>
-          <a:ln/>
-        </p:spPr>
-        <p:txBody>
-          <a:bodyPr wrap="square" anchor="b" lIns="25400" rIns="25400" tIns="25400" bIns="25400">
-            <a:spAutoFit/>
-          </a:bodyPr>
-          <a:lstStyle/>
-          <a:p>
-            <a:pPr algn="l">
-              <a:lnSpc>
-                <a:spcPct val="100000"/>
-              </a:lnSpc>
-              <a:spcBef>
-                <a:spcPts val="0"/>
-              </a:spcBef>
-              <a:spcAft>
-                <a:spcPts val="0"/>
-              </a:spcAft>
-            </a:pPr>
-            <a:r>
-              <a:rPr sz="1100" b="0" i="0">
-                <a:solidFill>
-                  <a:srgbClr val="8A8478"/>
-                </a:solidFill>
                 <a:latin typeface="Helvetica Neue"/>
                 <a:ea typeface="Hiragino Sans GB"/>
               </a:rPr>
-              <a:t>ICT &amp; technology (mid-level)</a:t>
-            </a:r>
-          </a:p>
-        </p:txBody>
-      </p:sp>
-      <p:sp>
-        <p:nvSpPr>
-          <p:cNvPr id="8" name="Rounded Rectangle 7"/>
+              <a:t>Healthcare (registered nurse)</a:t>
+            </a:r>
+          </a:p>
+        </p:txBody>
+      </p:sp>
+      <p:sp>
+        <p:nvSpPr>
+          <p:cNvPr id="23" name="Rounded Rectangle 22"/>
           <p:cNvSpPr/>
           <p:nvPr/>
         </p:nvSpPr>
         <p:spPr>
           <a:xfrm>
-            <a:off x="365760" y="2139696"/>
+            <a:off x="365760" y="3636264"/>
             <a:ext cx="3808207" cy="164592"/>
           </a:xfrm>
           <a:prstGeom prst="roundRect">
@@ -16566,14 +16738,14 @@
       </p:sp>
       <p:sp>
         <p:nvSpPr>
-          <p:cNvPr id="9" name="Rounded Rectangle 8"/>
+          <p:cNvPr id="24" name="Rounded Rectangle 23"/>
           <p:cNvSpPr/>
           <p:nvPr/>
         </p:nvSpPr>
         <p:spPr>
           <a:xfrm>
-            <a:off x="365760" y="2139696"/>
-            <a:ext cx="3427386" cy="164592"/>
+            <a:off x="365760" y="3636264"/>
+            <a:ext cx="2142116" cy="164592"/>
           </a:xfrm>
           <a:prstGeom prst="roundRect">
             <a:avLst>
@@ -16612,13 +16784,13 @@
       </p:sp>
       <p:sp>
         <p:nvSpPr>
-          <p:cNvPr id="10" name="TextBox 9"/>
-          <p:cNvSpPr txBox="1"/>
-          <p:nvPr/>
-        </p:nvSpPr>
-        <p:spPr>
-          <a:xfrm>
-            <a:off x="4356847" y="2139696"/>
+          <p:cNvPr id="25" name="TextBox 24"/>
+          <p:cNvSpPr txBox="1"/>
+          <p:nvPr/>
+        </p:nvSpPr>
+        <p:spPr>
+          <a:xfrm>
+            <a:off x="4356847" y="3636264"/>
             <a:ext cx="1005840" cy="164592"/>
           </a:xfrm>
           <a:prstGeom prst="rect">
@@ -16652,20 +16824,20 @@
                 <a:latin typeface="Helvetica Neue"/>
                 <a:ea typeface="Hiragino Sans GB"/>
               </a:rPr>
-              <a:t>€72k</a:t>
-            </a:r>
-          </a:p>
-        </p:txBody>
-      </p:sp>
-      <p:sp>
-        <p:nvSpPr>
-          <p:cNvPr id="11" name="TextBox 10"/>
-          <p:cNvSpPr txBox="1"/>
-          <p:nvPr/>
-        </p:nvSpPr>
-        <p:spPr>
-          <a:xfrm>
-            <a:off x="365760" y="2257806"/>
+              <a:t>€45k</a:t>
+            </a:r>
+          </a:p>
+        </p:txBody>
+      </p:sp>
+      <p:sp>
+        <p:nvSpPr>
+          <p:cNvPr id="26" name="TextBox 25"/>
+          <p:cNvSpPr txBox="1"/>
+          <p:nvPr/>
+        </p:nvSpPr>
+        <p:spPr>
+          <a:xfrm>
+            <a:off x="365760" y="3754373"/>
             <a:ext cx="3808207" cy="256032"/>
           </a:xfrm>
           <a:prstGeom prst="rect">
@@ -16699,20 +16871,20 @@
                 <a:latin typeface="Helvetica Neue"/>
                 <a:ea typeface="Hiragino Sans GB"/>
               </a:rPr>
-              <a:t>Engineering</a:t>
-            </a:r>
-          </a:p>
-        </p:txBody>
-      </p:sp>
-      <p:sp>
-        <p:nvSpPr>
-          <p:cNvPr id="12" name="Rounded Rectangle 11"/>
+              <a:t>Hospitality &amp; retail</a:t>
+            </a:r>
+          </a:p>
+        </p:txBody>
+      </p:sp>
+      <p:sp>
+        <p:nvSpPr>
+          <p:cNvPr id="27" name="Rounded Rectangle 26"/>
           <p:cNvSpPr/>
           <p:nvPr/>
         </p:nvSpPr>
         <p:spPr>
           <a:xfrm>
-            <a:off x="365760" y="2513838"/>
+            <a:off x="365760" y="4010406"/>
             <a:ext cx="3808207" cy="164592"/>
           </a:xfrm>
           <a:prstGeom prst="roundRect">
@@ -16752,14 +16924,14 @@
       </p:sp>
       <p:sp>
         <p:nvSpPr>
-          <p:cNvPr id="13" name="Rounded Rectangle 12"/>
+          <p:cNvPr id="28" name="Rounded Rectangle 27"/>
           <p:cNvSpPr/>
           <p:nvPr/>
         </p:nvSpPr>
         <p:spPr>
           <a:xfrm>
-            <a:off x="365760" y="2513838"/>
-            <a:ext cx="3236975" cy="164592"/>
+            <a:off x="365760" y="4010406"/>
+            <a:ext cx="1570885" cy="164592"/>
           </a:xfrm>
           <a:prstGeom prst="roundRect">
             <a:avLst>
@@ -16798,751 +16970,7 @@
       </p:sp>
       <p:sp>
         <p:nvSpPr>
-          <p:cNvPr id="14" name="TextBox 13"/>
-          <p:cNvSpPr txBox="1"/>
-          <p:nvPr/>
-        </p:nvSpPr>
-        <p:spPr>
-          <a:xfrm>
-            <a:off x="4356847" y="2513838"/>
-            <a:ext cx="1005840" cy="164592"/>
-          </a:xfrm>
-          <a:prstGeom prst="rect">
-            <a:avLst/>
-          </a:prstGeom>
-          <a:noFill/>
-          <a:ln/>
-        </p:spPr>
-        <p:txBody>
-          <a:bodyPr wrap="square" anchor="ctr" lIns="25400" rIns="25400" tIns="25400" bIns="25400">
-            <a:spAutoFit/>
-          </a:bodyPr>
-          <a:lstStyle/>
-          <a:p>
-            <a:pPr algn="l">
-              <a:lnSpc>
-                <a:spcPct val="100000"/>
-              </a:lnSpc>
-              <a:spcBef>
-                <a:spcPts val="0"/>
-              </a:spcBef>
-              <a:spcAft>
-                <a:spcPts val="0"/>
-              </a:spcAft>
-            </a:pPr>
-            <a:r>
-              <a:rPr sz="1350" b="1" i="0">
-                <a:solidFill>
-                  <a:srgbClr val="20242A"/>
-                </a:solidFill>
-                <a:latin typeface="Helvetica Neue"/>
-                <a:ea typeface="Hiragino Sans GB"/>
-              </a:rPr>
-              <a:t>€68k</a:t>
-            </a:r>
-          </a:p>
-        </p:txBody>
-      </p:sp>
-      <p:sp>
-        <p:nvSpPr>
-          <p:cNvPr id="15" name="TextBox 14"/>
-          <p:cNvSpPr txBox="1"/>
-          <p:nvPr/>
-        </p:nvSpPr>
-        <p:spPr>
-          <a:xfrm>
-            <a:off x="365760" y="2631948"/>
-            <a:ext cx="3808207" cy="256032"/>
-          </a:xfrm>
-          <a:prstGeom prst="rect">
-            <a:avLst/>
-          </a:prstGeom>
-          <a:noFill/>
-          <a:ln/>
-        </p:spPr>
-        <p:txBody>
-          <a:bodyPr wrap="square" anchor="b" lIns="25400" rIns="25400" tIns="25400" bIns="25400">
-            <a:spAutoFit/>
-          </a:bodyPr>
-          <a:lstStyle/>
-          <a:p>
-            <a:pPr algn="l">
-              <a:lnSpc>
-                <a:spcPct val="100000"/>
-              </a:lnSpc>
-              <a:spcBef>
-                <a:spcPts val="0"/>
-              </a:spcBef>
-              <a:spcAft>
-                <a:spcPts val="0"/>
-              </a:spcAft>
-            </a:pPr>
-            <a:r>
-              <a:rPr sz="1100" b="0" i="0">
-                <a:solidFill>
-                  <a:srgbClr val="8A8478"/>
-                </a:solidFill>
-                <a:latin typeface="Helvetica Neue"/>
-                <a:ea typeface="Hiragino Sans GB"/>
-              </a:rPr>
-              <a:t>Finance &amp; business services</a:t>
-            </a:r>
-          </a:p>
-        </p:txBody>
-      </p:sp>
-      <p:sp>
-        <p:nvSpPr>
-          <p:cNvPr id="16" name="Rounded Rectangle 15"/>
-          <p:cNvSpPr/>
-          <p:nvPr/>
-        </p:nvSpPr>
-        <p:spPr>
-          <a:xfrm>
-            <a:off x="365760" y="2887980"/>
-            <a:ext cx="3808207" cy="164592"/>
-          </a:xfrm>
-          <a:prstGeom prst="roundRect">
-            <a:avLst>
-              <a:gd name="adj" fmla="val 50000"/>
-            </a:avLst>
-          </a:prstGeom>
-          <a:solidFill>
-            <a:srgbClr val="E7DFD1"/>
-          </a:solidFill>
-          <a:ln>
-            <a:noFill/>
-          </a:ln>
-          <a:effectLst/>
-        </p:spPr>
-        <p:style>
-          <a:lnRef idx="1">
-            <a:schemeClr val="accent1"/>
-          </a:lnRef>
-          <a:fillRef idx="3">
-            <a:schemeClr val="accent1"/>
-          </a:fillRef>
-          <a:effectRef idx="2">
-            <a:schemeClr val="accent1"/>
-          </a:effectRef>
-          <a:fontRef idx="minor">
-            <a:schemeClr val="lt1"/>
-          </a:fontRef>
-        </p:style>
-        <p:txBody>
-          <a:bodyPr rtlCol="0" anchor="ctr"/>
-          <a:lstStyle/>
-          <a:p>
-            <a:pPr algn="ctr"/>
-          </a:p>
-        </p:txBody>
-      </p:sp>
-      <p:sp>
-        <p:nvSpPr>
-          <p:cNvPr id="17" name="Rounded Rectangle 16"/>
-          <p:cNvSpPr/>
-          <p:nvPr/>
-        </p:nvSpPr>
-        <p:spPr>
-          <a:xfrm>
-            <a:off x="365760" y="2887980"/>
-            <a:ext cx="3094168" cy="164592"/>
-          </a:xfrm>
-          <a:prstGeom prst="roundRect">
-            <a:avLst>
-              <a:gd name="adj" fmla="val 50000"/>
-            </a:avLst>
-          </a:prstGeom>
-          <a:solidFill>
-            <a:srgbClr val="0E5C63"/>
-          </a:solidFill>
-          <a:ln>
-            <a:noFill/>
-          </a:ln>
-          <a:effectLst/>
-        </p:spPr>
-        <p:style>
-          <a:lnRef idx="1">
-            <a:schemeClr val="accent1"/>
-          </a:lnRef>
-          <a:fillRef idx="3">
-            <a:schemeClr val="accent1"/>
-          </a:fillRef>
-          <a:effectRef idx="2">
-            <a:schemeClr val="accent1"/>
-          </a:effectRef>
-          <a:fontRef idx="minor">
-            <a:schemeClr val="lt1"/>
-          </a:fontRef>
-        </p:style>
-        <p:txBody>
-          <a:bodyPr rtlCol="0" anchor="ctr"/>
-          <a:lstStyle/>
-          <a:p>
-            <a:pPr algn="ctr"/>
-          </a:p>
-        </p:txBody>
-      </p:sp>
-      <p:sp>
-        <p:nvSpPr>
-          <p:cNvPr id="18" name="TextBox 17"/>
-          <p:cNvSpPr txBox="1"/>
-          <p:nvPr/>
-        </p:nvSpPr>
-        <p:spPr>
-          <a:xfrm>
-            <a:off x="4356847" y="2887980"/>
-            <a:ext cx="1005840" cy="164592"/>
-          </a:xfrm>
-          <a:prstGeom prst="rect">
-            <a:avLst/>
-          </a:prstGeom>
-          <a:noFill/>
-          <a:ln/>
-        </p:spPr>
-        <p:txBody>
-          <a:bodyPr wrap="square" anchor="ctr" lIns="25400" rIns="25400" tIns="25400" bIns="25400">
-            <a:spAutoFit/>
-          </a:bodyPr>
-          <a:lstStyle/>
-          <a:p>
-            <a:pPr algn="l">
-              <a:lnSpc>
-                <a:spcPct val="100000"/>
-              </a:lnSpc>
-              <a:spcBef>
-                <a:spcPts val="0"/>
-              </a:spcBef>
-              <a:spcAft>
-                <a:spcPts val="0"/>
-              </a:spcAft>
-            </a:pPr>
-            <a:r>
-              <a:rPr sz="1350" b="1" i="0">
-                <a:solidFill>
-                  <a:srgbClr val="20242A"/>
-                </a:solidFill>
-                <a:latin typeface="Helvetica Neue"/>
-                <a:ea typeface="Hiragino Sans GB"/>
-              </a:rPr>
-              <a:t>€65k</a:t>
-            </a:r>
-          </a:p>
-        </p:txBody>
-      </p:sp>
-      <p:sp>
-        <p:nvSpPr>
-          <p:cNvPr id="19" name="TextBox 18"/>
-          <p:cNvSpPr txBox="1"/>
-          <p:nvPr/>
-        </p:nvSpPr>
-        <p:spPr>
-          <a:xfrm>
-            <a:off x="365760" y="3006090"/>
-            <a:ext cx="3808207" cy="256032"/>
-          </a:xfrm>
-          <a:prstGeom prst="rect">
-            <a:avLst/>
-          </a:prstGeom>
-          <a:noFill/>
-          <a:ln/>
-        </p:spPr>
-        <p:txBody>
-          <a:bodyPr wrap="square" anchor="b" lIns="25400" rIns="25400" tIns="25400" bIns="25400">
-            <a:spAutoFit/>
-          </a:bodyPr>
-          <a:lstStyle/>
-          <a:p>
-            <a:pPr algn="l">
-              <a:lnSpc>
-                <a:spcPct val="100000"/>
-              </a:lnSpc>
-              <a:spcBef>
-                <a:spcPts val="0"/>
-              </a:spcBef>
-              <a:spcAft>
-                <a:spcPts val="0"/>
-              </a:spcAft>
-            </a:pPr>
-            <a:r>
-              <a:rPr sz="1100" b="0" i="0">
-                <a:solidFill>
-                  <a:srgbClr val="8A8478"/>
-                </a:solidFill>
-                <a:latin typeface="Helvetica Neue"/>
-                <a:ea typeface="Hiragino Sans GB"/>
-              </a:rPr>
-              <a:t>National average (CBS)</a:t>
-            </a:r>
-          </a:p>
-        </p:txBody>
-      </p:sp>
-      <p:sp>
-        <p:nvSpPr>
-          <p:cNvPr id="20" name="Rounded Rectangle 19"/>
-          <p:cNvSpPr/>
-          <p:nvPr/>
-        </p:nvSpPr>
-        <p:spPr>
-          <a:xfrm>
-            <a:off x="365760" y="3262122"/>
-            <a:ext cx="3808207" cy="164592"/>
-          </a:xfrm>
-          <a:prstGeom prst="roundRect">
-            <a:avLst>
-              <a:gd name="adj" fmla="val 50000"/>
-            </a:avLst>
-          </a:prstGeom>
-          <a:solidFill>
-            <a:srgbClr val="E7DFD1"/>
-          </a:solidFill>
-          <a:ln>
-            <a:noFill/>
-          </a:ln>
-          <a:effectLst/>
-        </p:spPr>
-        <p:style>
-          <a:lnRef idx="1">
-            <a:schemeClr val="accent1"/>
-          </a:lnRef>
-          <a:fillRef idx="3">
-            <a:schemeClr val="accent1"/>
-          </a:fillRef>
-          <a:effectRef idx="2">
-            <a:schemeClr val="accent1"/>
-          </a:effectRef>
-          <a:fontRef idx="minor">
-            <a:schemeClr val="lt1"/>
-          </a:fontRef>
-        </p:style>
-        <p:txBody>
-          <a:bodyPr rtlCol="0" anchor="ctr"/>
-          <a:lstStyle/>
-          <a:p>
-            <a:pPr algn="ctr"/>
-          </a:p>
-        </p:txBody>
-      </p:sp>
-      <p:sp>
-        <p:nvSpPr>
-          <p:cNvPr id="21" name="Rounded Rectangle 20"/>
-          <p:cNvSpPr/>
-          <p:nvPr/>
-        </p:nvSpPr>
-        <p:spPr>
-          <a:xfrm>
-            <a:off x="365760" y="3262122"/>
-            <a:ext cx="2543691" cy="164592"/>
-          </a:xfrm>
-          <a:prstGeom prst="roundRect">
-            <a:avLst>
-              <a:gd name="adj" fmla="val 50000"/>
-            </a:avLst>
-          </a:prstGeom>
-          <a:solidFill>
-            <a:srgbClr val="D8542A"/>
-          </a:solidFill>
-          <a:ln>
-            <a:noFill/>
-          </a:ln>
-          <a:effectLst/>
-        </p:spPr>
-        <p:style>
-          <a:lnRef idx="1">
-            <a:schemeClr val="accent1"/>
-          </a:lnRef>
-          <a:fillRef idx="3">
-            <a:schemeClr val="accent1"/>
-          </a:fillRef>
-          <a:effectRef idx="2">
-            <a:schemeClr val="accent1"/>
-          </a:effectRef>
-          <a:fontRef idx="minor">
-            <a:schemeClr val="lt1"/>
-          </a:fontRef>
-        </p:style>
-        <p:txBody>
-          <a:bodyPr rtlCol="0" anchor="ctr"/>
-          <a:lstStyle/>
-          <a:p>
-            <a:pPr algn="ctr"/>
-          </a:p>
-        </p:txBody>
-      </p:sp>
-      <p:sp>
-        <p:nvSpPr>
-          <p:cNvPr id="22" name="TextBox 21"/>
-          <p:cNvSpPr txBox="1"/>
-          <p:nvPr/>
-        </p:nvSpPr>
-        <p:spPr>
-          <a:xfrm>
-            <a:off x="4356847" y="3262122"/>
-            <a:ext cx="1005840" cy="164592"/>
-          </a:xfrm>
-          <a:prstGeom prst="rect">
-            <a:avLst/>
-          </a:prstGeom>
-          <a:noFill/>
-          <a:ln/>
-        </p:spPr>
-        <p:txBody>
-          <a:bodyPr wrap="square" anchor="ctr" lIns="25400" rIns="25400" tIns="25400" bIns="25400">
-            <a:spAutoFit/>
-          </a:bodyPr>
-          <a:lstStyle/>
-          <a:p>
-            <a:pPr algn="l">
-              <a:lnSpc>
-                <a:spcPct val="100000"/>
-              </a:lnSpc>
-              <a:spcBef>
-                <a:spcPts val="0"/>
-              </a:spcBef>
-              <a:spcAft>
-                <a:spcPts val="0"/>
-              </a:spcAft>
-            </a:pPr>
-            <a:r>
-              <a:rPr sz="1350" b="1" i="0">
-                <a:solidFill>
-                  <a:srgbClr val="20242A"/>
-                </a:solidFill>
-                <a:latin typeface="Helvetica Neue"/>
-                <a:ea typeface="Hiragino Sans GB"/>
-              </a:rPr>
-              <a:t>€53k</a:t>
-            </a:r>
-          </a:p>
-        </p:txBody>
-      </p:sp>
-      <p:sp>
-        <p:nvSpPr>
-          <p:cNvPr id="23" name="TextBox 22"/>
-          <p:cNvSpPr txBox="1"/>
-          <p:nvPr/>
-        </p:nvSpPr>
-        <p:spPr>
-          <a:xfrm>
-            <a:off x="365760" y="3380232"/>
-            <a:ext cx="3808207" cy="256032"/>
-          </a:xfrm>
-          <a:prstGeom prst="rect">
-            <a:avLst/>
-          </a:prstGeom>
-          <a:noFill/>
-          <a:ln/>
-        </p:spPr>
-        <p:txBody>
-          <a:bodyPr wrap="square" anchor="b" lIns="25400" rIns="25400" tIns="25400" bIns="25400">
-            <a:spAutoFit/>
-          </a:bodyPr>
-          <a:lstStyle/>
-          <a:p>
-            <a:pPr algn="l">
-              <a:lnSpc>
-                <a:spcPct val="100000"/>
-              </a:lnSpc>
-              <a:spcBef>
-                <a:spcPts val="0"/>
-              </a:spcBef>
-              <a:spcAft>
-                <a:spcPts val="0"/>
-              </a:spcAft>
-            </a:pPr>
-            <a:r>
-              <a:rPr sz="1100" b="0" i="0">
-                <a:solidFill>
-                  <a:srgbClr val="8A8478"/>
-                </a:solidFill>
-                <a:latin typeface="Helvetica Neue"/>
-                <a:ea typeface="Hiragino Sans GB"/>
-              </a:rPr>
-              <a:t>Healthcare (registered nurse)</a:t>
-            </a:r>
-          </a:p>
-        </p:txBody>
-      </p:sp>
-      <p:sp>
-        <p:nvSpPr>
-          <p:cNvPr id="24" name="Rounded Rectangle 23"/>
-          <p:cNvSpPr/>
-          <p:nvPr/>
-        </p:nvSpPr>
-        <p:spPr>
-          <a:xfrm>
-            <a:off x="365760" y="3636264"/>
-            <a:ext cx="3808207" cy="164592"/>
-          </a:xfrm>
-          <a:prstGeom prst="roundRect">
-            <a:avLst>
-              <a:gd name="adj" fmla="val 50000"/>
-            </a:avLst>
-          </a:prstGeom>
-          <a:solidFill>
-            <a:srgbClr val="E7DFD1"/>
-          </a:solidFill>
-          <a:ln>
-            <a:noFill/>
-          </a:ln>
-          <a:effectLst/>
-        </p:spPr>
-        <p:style>
-          <a:lnRef idx="1">
-            <a:schemeClr val="accent1"/>
-          </a:lnRef>
-          <a:fillRef idx="3">
-            <a:schemeClr val="accent1"/>
-          </a:fillRef>
-          <a:effectRef idx="2">
-            <a:schemeClr val="accent1"/>
-          </a:effectRef>
-          <a:fontRef idx="minor">
-            <a:schemeClr val="lt1"/>
-          </a:fontRef>
-        </p:style>
-        <p:txBody>
-          <a:bodyPr rtlCol="0" anchor="ctr"/>
-          <a:lstStyle/>
-          <a:p>
-            <a:pPr algn="ctr"/>
-          </a:p>
-        </p:txBody>
-      </p:sp>
-      <p:sp>
-        <p:nvSpPr>
-          <p:cNvPr id="25" name="Rounded Rectangle 24"/>
-          <p:cNvSpPr/>
-          <p:nvPr/>
-        </p:nvSpPr>
-        <p:spPr>
-          <a:xfrm>
-            <a:off x="365760" y="3636264"/>
-            <a:ext cx="2142116" cy="164592"/>
-          </a:xfrm>
-          <a:prstGeom prst="roundRect">
-            <a:avLst>
-              <a:gd name="adj" fmla="val 50000"/>
-            </a:avLst>
-          </a:prstGeom>
-          <a:solidFill>
-            <a:srgbClr val="0E5C63"/>
-          </a:solidFill>
-          <a:ln>
-            <a:noFill/>
-          </a:ln>
-          <a:effectLst/>
-        </p:spPr>
-        <p:style>
-          <a:lnRef idx="1">
-            <a:schemeClr val="accent1"/>
-          </a:lnRef>
-          <a:fillRef idx="3">
-            <a:schemeClr val="accent1"/>
-          </a:fillRef>
-          <a:effectRef idx="2">
-            <a:schemeClr val="accent1"/>
-          </a:effectRef>
-          <a:fontRef idx="minor">
-            <a:schemeClr val="lt1"/>
-          </a:fontRef>
-        </p:style>
-        <p:txBody>
-          <a:bodyPr rtlCol="0" anchor="ctr"/>
-          <a:lstStyle/>
-          <a:p>
-            <a:pPr algn="ctr"/>
-          </a:p>
-        </p:txBody>
-      </p:sp>
-      <p:sp>
-        <p:nvSpPr>
-          <p:cNvPr id="26" name="TextBox 25"/>
-          <p:cNvSpPr txBox="1"/>
-          <p:nvPr/>
-        </p:nvSpPr>
-        <p:spPr>
-          <a:xfrm>
-            <a:off x="4356847" y="3636264"/>
-            <a:ext cx="1005840" cy="164592"/>
-          </a:xfrm>
-          <a:prstGeom prst="rect">
-            <a:avLst/>
-          </a:prstGeom>
-          <a:noFill/>
-          <a:ln/>
-        </p:spPr>
-        <p:txBody>
-          <a:bodyPr wrap="square" anchor="ctr" lIns="25400" rIns="25400" tIns="25400" bIns="25400">
-            <a:spAutoFit/>
-          </a:bodyPr>
-          <a:lstStyle/>
-          <a:p>
-            <a:pPr algn="l">
-              <a:lnSpc>
-                <a:spcPct val="100000"/>
-              </a:lnSpc>
-              <a:spcBef>
-                <a:spcPts val="0"/>
-              </a:spcBef>
-              <a:spcAft>
-                <a:spcPts val="0"/>
-              </a:spcAft>
-            </a:pPr>
-            <a:r>
-              <a:rPr sz="1350" b="1" i="0">
-                <a:solidFill>
-                  <a:srgbClr val="20242A"/>
-                </a:solidFill>
-                <a:latin typeface="Helvetica Neue"/>
-                <a:ea typeface="Hiragino Sans GB"/>
-              </a:rPr>
-              <a:t>€45k</a:t>
-            </a:r>
-          </a:p>
-        </p:txBody>
-      </p:sp>
-      <p:sp>
-        <p:nvSpPr>
-          <p:cNvPr id="27" name="TextBox 26"/>
-          <p:cNvSpPr txBox="1"/>
-          <p:nvPr/>
-        </p:nvSpPr>
-        <p:spPr>
-          <a:xfrm>
-            <a:off x="365760" y="3754373"/>
-            <a:ext cx="3808207" cy="256032"/>
-          </a:xfrm>
-          <a:prstGeom prst="rect">
-            <a:avLst/>
-          </a:prstGeom>
-          <a:noFill/>
-          <a:ln/>
-        </p:spPr>
-        <p:txBody>
-          <a:bodyPr wrap="square" anchor="b" lIns="25400" rIns="25400" tIns="25400" bIns="25400">
-            <a:spAutoFit/>
-          </a:bodyPr>
-          <a:lstStyle/>
-          <a:p>
-            <a:pPr algn="l">
-              <a:lnSpc>
-                <a:spcPct val="100000"/>
-              </a:lnSpc>
-              <a:spcBef>
-                <a:spcPts val="0"/>
-              </a:spcBef>
-              <a:spcAft>
-                <a:spcPts val="0"/>
-              </a:spcAft>
-            </a:pPr>
-            <a:r>
-              <a:rPr sz="1100" b="0" i="0">
-                <a:solidFill>
-                  <a:srgbClr val="8A8478"/>
-                </a:solidFill>
-                <a:latin typeface="Helvetica Neue"/>
-                <a:ea typeface="Hiragino Sans GB"/>
-              </a:rPr>
-              <a:t>Hospitality &amp; retail</a:t>
-            </a:r>
-          </a:p>
-        </p:txBody>
-      </p:sp>
-      <p:sp>
-        <p:nvSpPr>
-          <p:cNvPr id="28" name="Rounded Rectangle 27"/>
-          <p:cNvSpPr/>
-          <p:nvPr/>
-        </p:nvSpPr>
-        <p:spPr>
-          <a:xfrm>
-            <a:off x="365760" y="4010406"/>
-            <a:ext cx="3808207" cy="164592"/>
-          </a:xfrm>
-          <a:prstGeom prst="roundRect">
-            <a:avLst>
-              <a:gd name="adj" fmla="val 50000"/>
-            </a:avLst>
-          </a:prstGeom>
-          <a:solidFill>
-            <a:srgbClr val="E7DFD1"/>
-          </a:solidFill>
-          <a:ln>
-            <a:noFill/>
-          </a:ln>
-          <a:effectLst/>
-        </p:spPr>
-        <p:style>
-          <a:lnRef idx="1">
-            <a:schemeClr val="accent1"/>
-          </a:lnRef>
-          <a:fillRef idx="3">
-            <a:schemeClr val="accent1"/>
-          </a:fillRef>
-          <a:effectRef idx="2">
-            <a:schemeClr val="accent1"/>
-          </a:effectRef>
-          <a:fontRef idx="minor">
-            <a:schemeClr val="lt1"/>
-          </a:fontRef>
-        </p:style>
-        <p:txBody>
-          <a:bodyPr rtlCol="0" anchor="ctr"/>
-          <a:lstStyle/>
-          <a:p>
-            <a:pPr algn="ctr"/>
-          </a:p>
-        </p:txBody>
-      </p:sp>
-      <p:sp>
-        <p:nvSpPr>
-          <p:cNvPr id="29" name="Rounded Rectangle 28"/>
-          <p:cNvSpPr/>
-          <p:nvPr/>
-        </p:nvSpPr>
-        <p:spPr>
-          <a:xfrm>
-            <a:off x="365760" y="4010406"/>
-            <a:ext cx="1570885" cy="164592"/>
-          </a:xfrm>
-          <a:prstGeom prst="roundRect">
-            <a:avLst>
-              <a:gd name="adj" fmla="val 50000"/>
-            </a:avLst>
-          </a:prstGeom>
-          <a:solidFill>
-            <a:srgbClr val="0E5C63"/>
-          </a:solidFill>
-          <a:ln>
-            <a:noFill/>
-          </a:ln>
-          <a:effectLst/>
-        </p:spPr>
-        <p:style>
-          <a:lnRef idx="1">
-            <a:schemeClr val="accent1"/>
-          </a:lnRef>
-          <a:fillRef idx="3">
-            <a:schemeClr val="accent1"/>
-          </a:fillRef>
-          <a:effectRef idx="2">
-            <a:schemeClr val="accent1"/>
-          </a:effectRef>
-          <a:fontRef idx="minor">
-            <a:schemeClr val="lt1"/>
-          </a:fontRef>
-        </p:style>
-        <p:txBody>
-          <a:bodyPr rtlCol="0" anchor="ctr"/>
-          <a:lstStyle/>
-          <a:p>
-            <a:pPr algn="ctr"/>
-          </a:p>
-        </p:txBody>
-      </p:sp>
-      <p:sp>
-        <p:nvSpPr>
-          <p:cNvPr id="30" name="TextBox 29"/>
+          <p:cNvPr id="29" name="TextBox 28"/>
           <p:cNvSpPr txBox="1"/>
           <p:nvPr/>
         </p:nvSpPr>
@@ -17589,7 +17017,7 @@
       </p:sp>
       <p:sp>
         <p:nvSpPr>
-          <p:cNvPr id="31" name="TextBox 30"/>
+          <p:cNvPr id="30" name="TextBox 29"/>
           <p:cNvSpPr txBox="1"/>
           <p:nvPr/>
         </p:nvSpPr>
@@ -17636,7 +17064,7 @@
       </p:sp>
       <p:sp>
         <p:nvSpPr>
-          <p:cNvPr id="32" name="TextBox 31"/>
+          <p:cNvPr id="31" name="TextBox 30"/>
           <p:cNvSpPr txBox="1"/>
           <p:nvPr/>
         </p:nvSpPr>
@@ -17703,7 +17131,7 @@
       </p:sp>
       <p:sp>
         <p:nvSpPr>
-          <p:cNvPr id="33" name="Rounded Rectangle 32"/>
+          <p:cNvPr id="32" name="Rounded Rectangle 31"/>
           <p:cNvSpPr/>
           <p:nvPr/>
         </p:nvSpPr>
@@ -17751,7 +17179,7 @@
       </p:sp>
       <p:sp>
         <p:nvSpPr>
-          <p:cNvPr id="34" name="TextBox 33"/>
+          <p:cNvPr id="33" name="TextBox 32"/>
           <p:cNvSpPr txBox="1"/>
           <p:nvPr/>
         </p:nvSpPr>
@@ -17798,7 +17226,7 @@
       </p:sp>
       <p:sp>
         <p:nvSpPr>
-          <p:cNvPr id="35" name="TextBox 34"/>
+          <p:cNvPr id="34" name="TextBox 33"/>
           <p:cNvSpPr txBox="1"/>
           <p:nvPr/>
         </p:nvSpPr>
@@ -17855,7 +17283,7 @@
       </p:sp>
       <p:sp>
         <p:nvSpPr>
-          <p:cNvPr id="36" name="TextBox 35"/>
+          <p:cNvPr id="35" name="TextBox 34"/>
           <p:cNvSpPr txBox="1"/>
           <p:nvPr/>
         </p:nvSpPr>
@@ -17902,7 +17330,7 @@
       </p:sp>
       <p:sp>
         <p:nvSpPr>
-          <p:cNvPr id="37" name="TextBox 36"/>
+          <p:cNvPr id="36" name="TextBox 35"/>
           <p:cNvSpPr txBox="1"/>
           <p:nvPr/>
         </p:nvSpPr>
@@ -18105,51 +17533,7 @@
       </p:sp>
       <p:sp>
         <p:nvSpPr>
-          <p:cNvPr id="5" name="Rectangle 4"/>
-          <p:cNvSpPr/>
-          <p:nvPr/>
-        </p:nvSpPr>
-        <p:spPr>
-          <a:xfrm>
-            <a:off x="566928" y="1191006"/>
-            <a:ext cx="1097280" cy="45720"/>
-          </a:xfrm>
-          <a:prstGeom prst="rect">
-            <a:avLst/>
-          </a:prstGeom>
-          <a:solidFill>
-            <a:srgbClr val="0E5C63"/>
-          </a:solidFill>
-          <a:ln>
-            <a:noFill/>
-          </a:ln>
-          <a:effectLst/>
-        </p:spPr>
-        <p:style>
-          <a:lnRef idx="1">
-            <a:schemeClr val="accent1"/>
-          </a:lnRef>
-          <a:fillRef idx="3">
-            <a:schemeClr val="accent1"/>
-          </a:fillRef>
-          <a:effectRef idx="2">
-            <a:schemeClr val="accent1"/>
-          </a:effectRef>
-          <a:fontRef idx="minor">
-            <a:schemeClr val="lt1"/>
-          </a:fontRef>
-        </p:style>
-        <p:txBody>
-          <a:bodyPr rtlCol="0" anchor="ctr"/>
-          <a:lstStyle/>
-          <a:p>
-            <a:pPr algn="ctr"/>
-          </a:p>
-        </p:txBody>
-      </p:sp>
-      <p:sp>
-        <p:nvSpPr>
-          <p:cNvPr id="6" name="TextBox 5"/>
+          <p:cNvPr id="5" name="TextBox 4"/>
           <p:cNvSpPr txBox="1"/>
           <p:nvPr/>
         </p:nvSpPr>
@@ -18196,7 +17580,7 @@
       </p:sp>
       <p:sp>
         <p:nvSpPr>
-          <p:cNvPr id="7" name="Rounded Rectangle 6"/>
+          <p:cNvPr id="6" name="Rounded Rectangle 5"/>
           <p:cNvSpPr/>
           <p:nvPr/>
         </p:nvSpPr>
@@ -18244,7 +17628,7 @@
       </p:sp>
       <p:sp>
         <p:nvSpPr>
-          <p:cNvPr id="8" name="Round Same Side Corner Rectangle 7"/>
+          <p:cNvPr id="7" name="Round Same Side Corner Rectangle 6"/>
           <p:cNvSpPr/>
           <p:nvPr/>
         </p:nvSpPr>
@@ -18291,7 +17675,7 @@
       </p:sp>
       <p:sp>
         <p:nvSpPr>
-          <p:cNvPr id="9" name="TextBox 8"/>
+          <p:cNvPr id="8" name="TextBox 7"/>
           <p:cNvSpPr txBox="1"/>
           <p:nvPr/>
         </p:nvSpPr>
@@ -18338,7 +17722,7 @@
       </p:sp>
       <p:sp>
         <p:nvSpPr>
-          <p:cNvPr id="10" name="TextBox 9"/>
+          <p:cNvPr id="9" name="TextBox 8"/>
           <p:cNvSpPr txBox="1"/>
           <p:nvPr/>
         </p:nvSpPr>
@@ -18385,7 +17769,7 @@
       </p:sp>
       <p:sp>
         <p:nvSpPr>
-          <p:cNvPr id="11" name="TextBox 10"/>
+          <p:cNvPr id="10" name="TextBox 9"/>
           <p:cNvSpPr txBox="1"/>
           <p:nvPr/>
         </p:nvSpPr>
@@ -18432,7 +17816,7 @@
       </p:sp>
       <p:sp>
         <p:nvSpPr>
-          <p:cNvPr id="12" name="Rectangle 11"/>
+          <p:cNvPr id="11" name="Rectangle 10"/>
           <p:cNvSpPr/>
           <p:nvPr/>
         </p:nvSpPr>
@@ -18476,7 +17860,7 @@
       </p:sp>
       <p:sp>
         <p:nvSpPr>
-          <p:cNvPr id="13" name="TextBox 12"/>
+          <p:cNvPr id="12" name="TextBox 11"/>
           <p:cNvSpPr txBox="1"/>
           <p:nvPr/>
         </p:nvSpPr>
@@ -18523,7 +17907,7 @@
       </p:sp>
       <p:sp>
         <p:nvSpPr>
-          <p:cNvPr id="14" name="Rounded Rectangle 13"/>
+          <p:cNvPr id="13" name="Rounded Rectangle 12"/>
           <p:cNvSpPr/>
           <p:nvPr/>
         </p:nvSpPr>
@@ -18571,7 +17955,7 @@
       </p:sp>
       <p:sp>
         <p:nvSpPr>
-          <p:cNvPr id="15" name="Round Same Side Corner Rectangle 14"/>
+          <p:cNvPr id="14" name="Round Same Side Corner Rectangle 13"/>
           <p:cNvSpPr/>
           <p:nvPr/>
         </p:nvSpPr>
@@ -18618,7 +18002,7 @@
       </p:sp>
       <p:sp>
         <p:nvSpPr>
-          <p:cNvPr id="16" name="TextBox 15"/>
+          <p:cNvPr id="15" name="TextBox 14"/>
           <p:cNvSpPr txBox="1"/>
           <p:nvPr/>
         </p:nvSpPr>
@@ -18665,7 +18049,7 @@
       </p:sp>
       <p:sp>
         <p:nvSpPr>
-          <p:cNvPr id="17" name="TextBox 16"/>
+          <p:cNvPr id="16" name="TextBox 15"/>
           <p:cNvSpPr txBox="1"/>
           <p:nvPr/>
         </p:nvSpPr>
@@ -18712,7 +18096,7 @@
       </p:sp>
       <p:sp>
         <p:nvSpPr>
-          <p:cNvPr id="18" name="TextBox 17"/>
+          <p:cNvPr id="17" name="TextBox 16"/>
           <p:cNvSpPr txBox="1"/>
           <p:nvPr/>
         </p:nvSpPr>
@@ -18759,7 +18143,7 @@
       </p:sp>
       <p:sp>
         <p:nvSpPr>
-          <p:cNvPr id="19" name="Rectangle 18"/>
+          <p:cNvPr id="18" name="Rectangle 17"/>
           <p:cNvSpPr/>
           <p:nvPr/>
         </p:nvSpPr>
@@ -18803,7 +18187,7 @@
       </p:sp>
       <p:sp>
         <p:nvSpPr>
-          <p:cNvPr id="20" name="TextBox 19"/>
+          <p:cNvPr id="19" name="TextBox 18"/>
           <p:cNvSpPr txBox="1"/>
           <p:nvPr/>
         </p:nvSpPr>
@@ -18850,7 +18234,7 @@
       </p:sp>
       <p:sp>
         <p:nvSpPr>
-          <p:cNvPr id="21" name="Rounded Rectangle 20"/>
+          <p:cNvPr id="20" name="Rounded Rectangle 19"/>
           <p:cNvSpPr/>
           <p:nvPr/>
         </p:nvSpPr>
@@ -18898,7 +18282,7 @@
       </p:sp>
       <p:sp>
         <p:nvSpPr>
-          <p:cNvPr id="22" name="Round Same Side Corner Rectangle 21"/>
+          <p:cNvPr id="21" name="Round Same Side Corner Rectangle 20"/>
           <p:cNvSpPr/>
           <p:nvPr/>
         </p:nvSpPr>
@@ -18945,7 +18329,7 @@
       </p:sp>
       <p:sp>
         <p:nvSpPr>
-          <p:cNvPr id="23" name="TextBox 22"/>
+          <p:cNvPr id="22" name="TextBox 21"/>
           <p:cNvSpPr txBox="1"/>
           <p:nvPr/>
         </p:nvSpPr>
@@ -18992,7 +18376,7 @@
       </p:sp>
       <p:sp>
         <p:nvSpPr>
-          <p:cNvPr id="24" name="TextBox 23"/>
+          <p:cNvPr id="23" name="TextBox 22"/>
           <p:cNvSpPr txBox="1"/>
           <p:nvPr/>
         </p:nvSpPr>
@@ -19039,7 +18423,7 @@
       </p:sp>
       <p:sp>
         <p:nvSpPr>
-          <p:cNvPr id="25" name="TextBox 24"/>
+          <p:cNvPr id="24" name="TextBox 23"/>
           <p:cNvSpPr txBox="1"/>
           <p:nvPr/>
         </p:nvSpPr>
@@ -19086,7 +18470,7 @@
       </p:sp>
       <p:sp>
         <p:nvSpPr>
-          <p:cNvPr id="26" name="Rectangle 25"/>
+          <p:cNvPr id="25" name="Rectangle 24"/>
           <p:cNvSpPr/>
           <p:nvPr/>
         </p:nvSpPr>
@@ -19130,7 +18514,7 @@
       </p:sp>
       <p:sp>
         <p:nvSpPr>
-          <p:cNvPr id="27" name="TextBox 26"/>
+          <p:cNvPr id="26" name="TextBox 25"/>
           <p:cNvSpPr txBox="1"/>
           <p:nvPr/>
         </p:nvSpPr>
@@ -19177,7 +18561,7 @@
       </p:sp>
       <p:sp>
         <p:nvSpPr>
-          <p:cNvPr id="28" name="Rounded Rectangle 27"/>
+          <p:cNvPr id="27" name="Rounded Rectangle 26"/>
           <p:cNvSpPr/>
           <p:nvPr/>
         </p:nvSpPr>
@@ -19225,7 +18609,7 @@
       </p:sp>
       <p:sp>
         <p:nvSpPr>
-          <p:cNvPr id="29" name="Round Same Side Corner Rectangle 28"/>
+          <p:cNvPr id="28" name="Round Same Side Corner Rectangle 27"/>
           <p:cNvSpPr/>
           <p:nvPr/>
         </p:nvSpPr>
@@ -19272,7 +18656,7 @@
       </p:sp>
       <p:sp>
         <p:nvSpPr>
-          <p:cNvPr id="30" name="TextBox 29"/>
+          <p:cNvPr id="29" name="TextBox 28"/>
           <p:cNvSpPr txBox="1"/>
           <p:nvPr/>
         </p:nvSpPr>
@@ -19319,7 +18703,7 @@
       </p:sp>
       <p:sp>
         <p:nvSpPr>
-          <p:cNvPr id="31" name="TextBox 30"/>
+          <p:cNvPr id="30" name="TextBox 29"/>
           <p:cNvSpPr txBox="1"/>
           <p:nvPr/>
         </p:nvSpPr>
@@ -19366,7 +18750,7 @@
       </p:sp>
       <p:sp>
         <p:nvSpPr>
-          <p:cNvPr id="32" name="TextBox 31"/>
+          <p:cNvPr id="31" name="TextBox 30"/>
           <p:cNvSpPr txBox="1"/>
           <p:nvPr/>
         </p:nvSpPr>
@@ -19413,7 +18797,7 @@
       </p:sp>
       <p:sp>
         <p:nvSpPr>
-          <p:cNvPr id="33" name="Rectangle 32"/>
+          <p:cNvPr id="32" name="Rectangle 31"/>
           <p:cNvSpPr/>
           <p:nvPr/>
         </p:nvSpPr>
@@ -19457,7 +18841,7 @@
       </p:sp>
       <p:sp>
         <p:nvSpPr>
-          <p:cNvPr id="34" name="TextBox 33"/>
+          <p:cNvPr id="33" name="TextBox 32"/>
           <p:cNvSpPr txBox="1"/>
           <p:nvPr/>
         </p:nvSpPr>
@@ -19504,7 +18888,7 @@
       </p:sp>
       <p:sp>
         <p:nvSpPr>
-          <p:cNvPr id="35" name="TextBox 34"/>
+          <p:cNvPr id="34" name="TextBox 33"/>
           <p:cNvSpPr txBox="1"/>
           <p:nvPr/>
         </p:nvSpPr>
@@ -19581,7 +18965,7 @@
       </p:sp>
       <p:sp>
         <p:nvSpPr>
-          <p:cNvPr id="36" name="TextBox 35"/>
+          <p:cNvPr id="35" name="TextBox 34"/>
           <p:cNvSpPr txBox="1"/>
           <p:nvPr/>
         </p:nvSpPr>
@@ -19638,7 +19022,7 @@
       </p:sp>
       <p:sp>
         <p:nvSpPr>
-          <p:cNvPr id="37" name="TextBox 36"/>
+          <p:cNvPr id="36" name="TextBox 35"/>
           <p:cNvSpPr txBox="1"/>
           <p:nvPr/>
         </p:nvSpPr>
@@ -19685,7 +19069,7 @@
       </p:sp>
       <p:sp>
         <p:nvSpPr>
-          <p:cNvPr id="38" name="TextBox 37"/>
+          <p:cNvPr id="37" name="TextBox 36"/>
           <p:cNvSpPr txBox="1"/>
           <p:nvPr/>
         </p:nvSpPr>

--- a/templates/decks/en/nl-job-market-2026/template.pptx
+++ b/templates/decks/en/nl-job-market-2026/template.pptx
@@ -9074,51 +9074,7 @@
       </p:sp>
       <p:sp>
         <p:nvSpPr>
-          <p:cNvPr id="4" name="Rectangle 3"/>
-          <p:cNvSpPr/>
-          <p:nvPr/>
-        </p:nvSpPr>
-        <p:spPr>
-          <a:xfrm>
-            <a:off x="640080" y="932688"/>
-            <a:ext cx="1097280" cy="45720"/>
-          </a:xfrm>
-          <a:prstGeom prst="rect">
-            <a:avLst/>
-          </a:prstGeom>
-          <a:solidFill>
-            <a:srgbClr val="D8542A"/>
-          </a:solidFill>
-          <a:ln>
-            <a:noFill/>
-          </a:ln>
-          <a:effectLst/>
-        </p:spPr>
-        <p:style>
-          <a:lnRef idx="1">
-            <a:schemeClr val="accent1"/>
-          </a:lnRef>
-          <a:fillRef idx="3">
-            <a:schemeClr val="accent1"/>
-          </a:fillRef>
-          <a:effectRef idx="2">
-            <a:schemeClr val="accent1"/>
-          </a:effectRef>
-          <a:fontRef idx="minor">
-            <a:schemeClr val="lt1"/>
-          </a:fontRef>
-        </p:style>
-        <p:txBody>
-          <a:bodyPr rtlCol="0" anchor="ctr"/>
-          <a:lstStyle/>
-          <a:p>
-            <a:pPr algn="ctr"/>
-          </a:p>
-        </p:txBody>
-      </p:sp>
-      <p:sp>
-        <p:nvSpPr>
-          <p:cNvPr id="5" name="TextBox 4"/>
+          <p:cNvPr id="4" name="TextBox 3"/>
           <p:cNvSpPr txBox="1"/>
           <p:nvPr/>
         </p:nvSpPr>
@@ -9175,7 +9131,7 @@
       </p:sp>
       <p:sp>
         <p:nvSpPr>
-          <p:cNvPr id="6" name="TextBox 5"/>
+          <p:cNvPr id="5" name="TextBox 4"/>
           <p:cNvSpPr txBox="1"/>
           <p:nvPr/>
         </p:nvSpPr>
@@ -9232,7 +9188,7 @@
       </p:sp>
       <p:sp>
         <p:nvSpPr>
-          <p:cNvPr id="7" name="TextBox 6"/>
+          <p:cNvPr id="6" name="TextBox 5"/>
           <p:cNvSpPr txBox="1"/>
           <p:nvPr/>
         </p:nvSpPr>
@@ -9289,7 +9245,7 @@
       </p:sp>
       <p:sp>
         <p:nvSpPr>
-          <p:cNvPr id="8" name="TextBox 7"/>
+          <p:cNvPr id="7" name="TextBox 6"/>
           <p:cNvSpPr txBox="1"/>
           <p:nvPr/>
         </p:nvSpPr>
@@ -9346,7 +9302,7 @@
       </p:sp>
       <p:sp>
         <p:nvSpPr>
-          <p:cNvPr id="9" name="TextBox 8"/>
+          <p:cNvPr id="8" name="TextBox 7"/>
           <p:cNvSpPr txBox="1"/>
           <p:nvPr/>
         </p:nvSpPr>
@@ -9403,7 +9359,7 @@
       </p:sp>
       <p:sp>
         <p:nvSpPr>
-          <p:cNvPr id="10" name="TextBox 9"/>
+          <p:cNvPr id="9" name="TextBox 8"/>
           <p:cNvSpPr txBox="1"/>
           <p:nvPr/>
         </p:nvSpPr>
@@ -9460,7 +9416,7 @@
       </p:sp>
       <p:sp>
         <p:nvSpPr>
-          <p:cNvPr id="11" name="TextBox 10"/>
+          <p:cNvPr id="10" name="TextBox 9"/>
           <p:cNvSpPr txBox="1"/>
           <p:nvPr/>
         </p:nvSpPr>
@@ -9517,7 +9473,7 @@
       </p:sp>
       <p:sp>
         <p:nvSpPr>
-          <p:cNvPr id="12" name="TextBox 11"/>
+          <p:cNvPr id="11" name="TextBox 10"/>
           <p:cNvSpPr txBox="1"/>
           <p:nvPr/>
         </p:nvSpPr>
@@ -9574,7 +9530,7 @@
       </p:sp>
       <p:sp>
         <p:nvSpPr>
-          <p:cNvPr id="13" name="TextBox 12"/>
+          <p:cNvPr id="12" name="TextBox 11"/>
           <p:cNvSpPr txBox="1"/>
           <p:nvPr/>
         </p:nvSpPr>
@@ -9631,7 +9587,7 @@
       </p:sp>
       <p:sp>
         <p:nvSpPr>
-          <p:cNvPr id="14" name="Rectangle 13"/>
+          <p:cNvPr id="13" name="Rectangle 12"/>
           <p:cNvSpPr/>
           <p:nvPr/>
         </p:nvSpPr>
@@ -9675,7 +9631,7 @@
       </p:sp>
       <p:sp>
         <p:nvSpPr>
-          <p:cNvPr id="15" name="TextBox 14"/>
+          <p:cNvPr id="14" name="TextBox 13"/>
           <p:cNvSpPr txBox="1"/>
           <p:nvPr/>
         </p:nvSpPr>
@@ -9732,7 +9688,7 @@
       </p:sp>
       <p:sp>
         <p:nvSpPr>
-          <p:cNvPr id="16" name="TextBox 15"/>
+          <p:cNvPr id="15" name="TextBox 14"/>
           <p:cNvSpPr txBox="1"/>
           <p:nvPr/>
         </p:nvSpPr>
@@ -9779,7 +9735,7 @@
       </p:sp>
       <p:sp>
         <p:nvSpPr>
-          <p:cNvPr id="17" name="TextBox 16"/>
+          <p:cNvPr id="16" name="TextBox 15"/>
           <p:cNvSpPr txBox="1"/>
           <p:nvPr/>
         </p:nvSpPr>
